--- a/new-app/docs/Application-Flowchart.pptx
+++ b/new-app/docs/Application-Flowchart.pptx
@@ -8,6 +8,7 @@
     <p:sldId id="256" r:id="rId7"/>
     <p:sldId id="257" r:id="rId8"/>
     <p:sldId id="258" r:id="rId9"/>
+    <p:sldId id="259" r:id="rId10"/>
   </p:sldIdLst>
   <p:sldSz cx="12191695" cy="6858000" type="screen4x3"/>
   <p:notesSz cx="6858000" cy="9144000"/>
@@ -3190,7 +3191,7 @@
                 </a:solidFill>
                 <a:latin typeface="Calibri"/>
               </a:rPr>
-              <a:t>Page 1 of 3   ·   You prepare the files</a:t>
+              <a:t>Page 1 of 4   ·   You prepare the files</a:t>
             </a:r>
           </a:p>
         </p:txBody>
@@ -3234,7 +3235,7 @@
           </a:fontRef>
         </p:style>
         <p:txBody>
-          <a:bodyPr rtlCol="0" anchor="ctr" wrap="square" lIns="73152" rIns="73152"/>
+          <a:bodyPr rtlCol="0" anchor="ctr" wrap="square" lIns="73152" rIns="73152" tIns="36576" bIns="36576"/>
           <a:lstStyle/>
           <a:p>
             <a:pPr algn="ctr"/>
@@ -3258,7 +3259,7 @@
           <a:noFill/>
         </p:spPr>
         <p:txBody>
-          <a:bodyPr wrap="none" lIns="18288" rIns="0" tIns="0" bIns="0">
+          <a:bodyPr wrap="none" lIns="18288" tIns="0" bIns="0">
             <a:spAutoFit/>
           </a:bodyPr>
           <a:lstStyle/>
@@ -3322,7 +3323,7 @@
           </a:fontRef>
         </p:style>
         <p:txBody>
-          <a:bodyPr rtlCol="0" anchor="ctr" wrap="square" lIns="73152" rIns="73152"/>
+          <a:bodyPr rtlCol="0" anchor="ctr" wrap="square" lIns="73152" rIns="73152" tIns="36576" bIns="36576"/>
           <a:lstStyle/>
           <a:p>
             <a:pPr algn="ctr"/>
@@ -3346,7 +3347,7 @@
           <a:noFill/>
         </p:spPr>
         <p:txBody>
-          <a:bodyPr wrap="none" lIns="18288" rIns="0" tIns="0" bIns="0">
+          <a:bodyPr wrap="none" lIns="18288" tIns="0" bIns="0">
             <a:spAutoFit/>
           </a:bodyPr>
           <a:lstStyle/>
@@ -3410,7 +3411,7 @@
           </a:fontRef>
         </p:style>
         <p:txBody>
-          <a:bodyPr rtlCol="0" anchor="ctr" wrap="square" lIns="73152" rIns="73152"/>
+          <a:bodyPr rtlCol="0" anchor="ctr" wrap="square" lIns="73152" rIns="73152" tIns="36576" bIns="36576"/>
           <a:lstStyle/>
           <a:p>
             <a:pPr algn="ctr"/>
@@ -3434,7 +3435,7 @@
           <a:noFill/>
         </p:spPr>
         <p:txBody>
-          <a:bodyPr wrap="none" lIns="18288" rIns="0" tIns="0" bIns="0">
+          <a:bodyPr wrap="none" lIns="18288" tIns="0" bIns="0">
             <a:spAutoFit/>
           </a:bodyPr>
           <a:lstStyle/>
@@ -3498,7 +3499,7 @@
           </a:fontRef>
         </p:style>
         <p:txBody>
-          <a:bodyPr rtlCol="0" anchor="ctr" wrap="square" lIns="73152" rIns="73152"/>
+          <a:bodyPr rtlCol="0" anchor="ctr" wrap="square" lIns="73152" rIns="73152" tIns="36576" bIns="36576"/>
           <a:lstStyle/>
           <a:p>
             <a:pPr algn="ctr"/>
@@ -3522,7 +3523,7 @@
           <a:noFill/>
         </p:spPr>
         <p:txBody>
-          <a:bodyPr wrap="none" lIns="18288" rIns="0" tIns="0" bIns="0">
+          <a:bodyPr wrap="none" lIns="18288" tIns="0" bIns="0">
             <a:spAutoFit/>
           </a:bodyPr>
           <a:lstStyle/>
@@ -3586,7 +3587,7 @@
           </a:fontRef>
         </p:style>
         <p:txBody>
-          <a:bodyPr rtlCol="0" anchor="ctr" wrap="square" lIns="73152" rIns="73152"/>
+          <a:bodyPr rtlCol="0" anchor="ctr" wrap="square" lIns="73152" rIns="73152" tIns="36576" bIns="36576"/>
           <a:lstStyle/>
           <a:p>
             <a:pPr algn="ctr"/>
@@ -3610,7 +3611,7 @@
           <a:noFill/>
         </p:spPr>
         <p:txBody>
-          <a:bodyPr wrap="none" lIns="18288" rIns="0" tIns="0" bIns="0">
+          <a:bodyPr wrap="none" lIns="18288" tIns="0" bIns="0">
             <a:spAutoFit/>
           </a:bodyPr>
           <a:lstStyle/>
@@ -3674,7 +3675,7 @@
           </a:fontRef>
         </p:style>
         <p:txBody>
-          <a:bodyPr rtlCol="0" anchor="ctr" wrap="square" lIns="73152" rIns="73152"/>
+          <a:bodyPr rtlCol="0" anchor="ctr" wrap="square" lIns="73152" rIns="73152" tIns="36576" bIns="36576"/>
           <a:lstStyle/>
           <a:p>
             <a:pPr algn="ctr">
@@ -3736,7 +3737,7 @@
           </a:fontRef>
         </p:style>
         <p:txBody>
-          <a:bodyPr rtlCol="0" anchor="ctr" wrap="square" lIns="73152" rIns="73152"/>
+          <a:bodyPr rtlCol="0" anchor="ctr" wrap="square" lIns="73152" rIns="73152" tIns="36576" bIns="36576"/>
           <a:lstStyle/>
           <a:p>
             <a:pPr algn="ctr">
@@ -3817,7 +3818,7 @@
           </a:fontRef>
         </p:style>
         <p:txBody>
-          <a:bodyPr rtlCol="0" anchor="ctr" wrap="square" lIns="73152" rIns="73152"/>
+          <a:bodyPr rtlCol="0" anchor="ctr" wrap="square" lIns="73152" rIns="73152" tIns="36576" bIns="36576"/>
           <a:lstStyle/>
           <a:p>
             <a:pPr algn="ctr">
@@ -3970,7 +3971,7 @@
           </a:fontRef>
         </p:style>
         <p:txBody>
-          <a:bodyPr rtlCol="0" anchor="ctr" wrap="square" lIns="73152" rIns="73152"/>
+          <a:bodyPr rtlCol="0" anchor="ctr" wrap="square" lIns="73152" rIns="73152" tIns="36576" bIns="36576"/>
           <a:lstStyle/>
           <a:p>
             <a:pPr algn="ctr">
@@ -4087,7 +4088,7 @@
           </a:fontRef>
         </p:style>
         <p:txBody>
-          <a:bodyPr rtlCol="0" anchor="ctr" wrap="square" lIns="73152" rIns="73152"/>
+          <a:bodyPr rtlCol="0" anchor="ctr" wrap="square" lIns="73152" rIns="73152" tIns="36576" bIns="36576"/>
           <a:lstStyle/>
           <a:p>
             <a:pPr algn="ctr">
@@ -4149,7 +4150,7 @@
           </a:fontRef>
         </p:style>
         <p:txBody>
-          <a:bodyPr rtlCol="0" anchor="ctr" wrap="square" lIns="73152" rIns="73152"/>
+          <a:bodyPr rtlCol="0" anchor="ctr" wrap="square" lIns="73152" rIns="73152" tIns="36576" bIns="36576"/>
           <a:lstStyle/>
           <a:p>
             <a:pPr algn="ctr">
@@ -4230,7 +4231,7 @@
           </a:fontRef>
         </p:style>
         <p:txBody>
-          <a:bodyPr rtlCol="0" anchor="ctr" wrap="square" lIns="73152" rIns="73152"/>
+          <a:bodyPr rtlCol="0" anchor="ctr" wrap="square" lIns="73152" rIns="73152" tIns="36576" bIns="36576"/>
           <a:lstStyle/>
           <a:p>
             <a:pPr algn="ctr">
@@ -4361,7 +4362,7 @@
           <a:noFill/>
         </p:spPr>
         <p:txBody>
-          <a:bodyPr wrap="none" lIns="18288" rIns="0" tIns="0" bIns="0">
+          <a:bodyPr wrap="none" lIns="18288" tIns="0" bIns="0">
             <a:spAutoFit/>
           </a:bodyPr>
           <a:lstStyle/>
@@ -4403,7 +4404,7 @@
           <a:noFill/>
         </p:spPr>
         <p:txBody>
-          <a:bodyPr wrap="none" lIns="18288" rIns="0" tIns="0" bIns="0">
+          <a:bodyPr wrap="none" lIns="18288" tIns="0" bIns="0">
             <a:spAutoFit/>
           </a:bodyPr>
           <a:lstStyle/>
@@ -4503,7 +4504,7 @@
           </a:fontRef>
         </p:style>
         <p:txBody>
-          <a:bodyPr rtlCol="0" anchor="ctr" wrap="square" lIns="73152" rIns="73152"/>
+          <a:bodyPr rtlCol="0" anchor="ctr" wrap="square" lIns="73152" rIns="73152" tIns="36576" bIns="36576"/>
           <a:lstStyle/>
           <a:p>
             <a:pPr algn="ctr">
@@ -4634,7 +4635,7 @@
           <a:noFill/>
         </p:spPr>
         <p:txBody>
-          <a:bodyPr wrap="none" lIns="18288" rIns="0" tIns="0" bIns="0">
+          <a:bodyPr wrap="none" lIns="18288" tIns="0" bIns="0">
             <a:spAutoFit/>
           </a:bodyPr>
           <a:lstStyle/>
@@ -4777,7 +4778,7 @@
                 </a:solidFill>
                 <a:latin typeface="Calibri"/>
               </a:rPr>
-              <a:t>Page 2 of 3   ·   The application builds the package</a:t>
+              <a:t>Page 2 of 4   ·   The application reads the plan before it checks the pages</a:t>
             </a:r>
           </a:p>
         </p:txBody>
@@ -4821,7 +4822,7 @@
           </a:fontRef>
         </p:style>
         <p:txBody>
-          <a:bodyPr rtlCol="0" anchor="ctr" wrap="square" lIns="73152" rIns="73152"/>
+          <a:bodyPr rtlCol="0" anchor="ctr" wrap="square" lIns="73152" rIns="73152" tIns="36576" bIns="36576"/>
           <a:lstStyle/>
           <a:p>
             <a:pPr algn="ctr"/>
@@ -4845,7 +4846,7 @@
           <a:noFill/>
         </p:spPr>
         <p:txBody>
-          <a:bodyPr wrap="none" lIns="18288" rIns="0" tIns="0" bIns="0">
+          <a:bodyPr wrap="none" lIns="18288" tIns="0" bIns="0">
             <a:spAutoFit/>
           </a:bodyPr>
           <a:lstStyle/>
@@ -4909,7 +4910,7 @@
           </a:fontRef>
         </p:style>
         <p:txBody>
-          <a:bodyPr rtlCol="0" anchor="ctr" wrap="square" lIns="73152" rIns="73152"/>
+          <a:bodyPr rtlCol="0" anchor="ctr" wrap="square" lIns="73152" rIns="73152" tIns="36576" bIns="36576"/>
           <a:lstStyle/>
           <a:p>
             <a:pPr algn="ctr"/>
@@ -4933,7 +4934,7 @@
           <a:noFill/>
         </p:spPr>
         <p:txBody>
-          <a:bodyPr wrap="none" lIns="18288" rIns="0" tIns="0" bIns="0">
+          <a:bodyPr wrap="none" lIns="18288" tIns="0" bIns="0">
             <a:spAutoFit/>
           </a:bodyPr>
           <a:lstStyle/>
@@ -4997,7 +4998,7 @@
           </a:fontRef>
         </p:style>
         <p:txBody>
-          <a:bodyPr rtlCol="0" anchor="ctr" wrap="square" lIns="73152" rIns="73152"/>
+          <a:bodyPr rtlCol="0" anchor="ctr" wrap="square" lIns="73152" rIns="73152" tIns="36576" bIns="36576"/>
           <a:lstStyle/>
           <a:p>
             <a:pPr algn="ctr"/>
@@ -5021,7 +5022,7 @@
           <a:noFill/>
         </p:spPr>
         <p:txBody>
-          <a:bodyPr wrap="none" lIns="18288" rIns="0" tIns="0" bIns="0">
+          <a:bodyPr wrap="none" lIns="18288" tIns="0" bIns="0">
             <a:spAutoFit/>
           </a:bodyPr>
           <a:lstStyle/>
@@ -5085,7 +5086,7 @@
           </a:fontRef>
         </p:style>
         <p:txBody>
-          <a:bodyPr rtlCol="0" anchor="ctr" wrap="square" lIns="73152" rIns="73152"/>
+          <a:bodyPr rtlCol="0" anchor="ctr" wrap="square" lIns="73152" rIns="73152" tIns="36576" bIns="36576"/>
           <a:lstStyle/>
           <a:p>
             <a:pPr algn="ctr"/>
@@ -5109,7 +5110,7 @@
           <a:noFill/>
         </p:spPr>
         <p:txBody>
-          <a:bodyPr wrap="none" lIns="18288" rIns="0" tIns="0" bIns="0">
+          <a:bodyPr wrap="none" lIns="18288" tIns="0" bIns="0">
             <a:spAutoFit/>
           </a:bodyPr>
           <a:lstStyle/>
@@ -5173,7 +5174,7 @@
           </a:fontRef>
         </p:style>
         <p:txBody>
-          <a:bodyPr rtlCol="0" anchor="ctr" wrap="square" lIns="73152" rIns="73152"/>
+          <a:bodyPr rtlCol="0" anchor="ctr" wrap="square" lIns="73152" rIns="73152" tIns="36576" bIns="36576"/>
           <a:lstStyle/>
           <a:p>
             <a:pPr algn="ctr"/>
@@ -5197,7 +5198,7 @@
           <a:noFill/>
         </p:spPr>
         <p:txBody>
-          <a:bodyPr wrap="none" lIns="18288" rIns="0" tIns="0" bIns="0">
+          <a:bodyPr wrap="none" lIns="18288" tIns="0" bIns="0">
             <a:spAutoFit/>
           </a:bodyPr>
           <a:lstStyle/>
@@ -5261,7 +5262,7 @@
           </a:fontRef>
         </p:style>
         <p:txBody>
-          <a:bodyPr rtlCol="0" anchor="ctr" wrap="square" lIns="73152" rIns="73152"/>
+          <a:bodyPr rtlCol="0" anchor="ctr" wrap="square" lIns="73152" rIns="73152" tIns="36576" bIns="36576"/>
           <a:lstStyle/>
           <a:p>
             <a:pPr algn="ctr">
@@ -5323,7 +5324,7 @@
           </a:fontRef>
         </p:style>
         <p:txBody>
-          <a:bodyPr rtlCol="0" anchor="ctr" wrap="square" lIns="73152" rIns="73152"/>
+          <a:bodyPr rtlCol="0" anchor="ctr" wrap="square" lIns="73152" rIns="73152" tIns="36576" bIns="36576"/>
           <a:lstStyle/>
           <a:p>
             <a:pPr algn="ctr">
@@ -5404,7 +5405,7 @@
           </a:fontRef>
         </p:style>
         <p:txBody>
-          <a:bodyPr rtlCol="0" anchor="ctr" wrap="square" lIns="73152" rIns="73152"/>
+          <a:bodyPr rtlCol="0" anchor="ctr" wrap="square" lIns="73152" rIns="73152" tIns="36576" bIns="36576"/>
           <a:lstStyle/>
           <a:p>
             <a:pPr algn="ctr">
@@ -5535,7 +5536,7 @@
           <a:noFill/>
         </p:spPr>
         <p:txBody>
-          <a:bodyPr wrap="none" lIns="18288" rIns="0" tIns="0" bIns="0">
+          <a:bodyPr wrap="none" lIns="18288" tIns="0" bIns="0">
             <a:spAutoFit/>
           </a:bodyPr>
           <a:lstStyle/>
@@ -5577,7 +5578,7 @@
           <a:noFill/>
         </p:spPr>
         <p:txBody>
-          <a:bodyPr wrap="none" lIns="18288" rIns="0" tIns="0" bIns="0">
+          <a:bodyPr wrap="none" lIns="18288" tIns="0" bIns="0">
             <a:spAutoFit/>
           </a:bodyPr>
           <a:lstStyle/>
@@ -5641,7 +5642,7 @@
           </a:fontRef>
         </p:style>
         <p:txBody>
-          <a:bodyPr rtlCol="0" anchor="ctr" wrap="square" lIns="73152" rIns="73152"/>
+          <a:bodyPr rtlCol="0" anchor="ctr" wrap="square" lIns="73152" rIns="73152" tIns="36576" bIns="36576"/>
           <a:lstStyle/>
           <a:p>
             <a:pPr algn="ctr">
@@ -5763,8 +5764,8 @@
         </p:nvSpPr>
         <p:spPr>
           <a:xfrm>
-            <a:off x="292608" y="4443984"/>
-            <a:ext cx="2788920" cy="932688"/>
+            <a:off x="320040" y="4480560"/>
+            <a:ext cx="5577840" cy="777240"/>
           </a:xfrm>
           <a:prstGeom prst="flowChartProcess">
             <a:avLst/>
@@ -5794,7 +5795,7 @@
           </a:fontRef>
         </p:style>
         <p:txBody>
-          <a:bodyPr rtlCol="0" anchor="ctr" wrap="square" lIns="73152" rIns="73152"/>
+          <a:bodyPr rtlCol="0" anchor="ctr" wrap="square" lIns="73152" rIns="73152" tIns="36576" bIns="36576"/>
           <a:lstStyle/>
           <a:p>
             <a:pPr algn="ctr">
@@ -5806,7 +5807,7 @@
               </a:spcAft>
             </a:pPr>
             <a:r>
-              <a:rPr sz="1100" b="1">
+              <a:rPr sz="1200" b="1">
                 <a:solidFill>
                   <a:srgbClr val="0F6E6B"/>
                 </a:solidFill>
@@ -5825,13 +5826,13 @@
               </a:spcAft>
             </a:pPr>
             <a:r>
-              <a:rPr sz="1300" b="0">
+              <a:rPr sz="1400" b="0">
                 <a:solidFill>
                   <a:srgbClr val="1C1917"/>
                 </a:solidFill>
                 <a:latin typeface="Calibri"/>
               </a:rPr>
-              <a:t>Merge the pages into one PDF</a:t>
+              <a:t>Merge the selected pages into one PDF</a:t>
             </a:r>
           </a:p>
         </p:txBody>
@@ -5844,8 +5845,8 @@
         </p:nvSpPr>
         <p:spPr>
           <a:xfrm>
-            <a:off x="3246120" y="4443984"/>
-            <a:ext cx="2880360" cy="932688"/>
+            <a:off x="6263640" y="4480560"/>
+            <a:ext cx="5623560" cy="777240"/>
           </a:xfrm>
           <a:prstGeom prst="flowChartProcess">
             <a:avLst/>
@@ -5875,7 +5876,7 @@
           </a:fontRef>
         </p:style>
         <p:txBody>
-          <a:bodyPr rtlCol="0" anchor="ctr" wrap="square" lIns="73152" rIns="73152"/>
+          <a:bodyPr rtlCol="0" anchor="ctr" wrap="square" lIns="73152" rIns="73152" tIns="36576" bIns="36576"/>
           <a:lstStyle/>
           <a:p>
             <a:pPr algn="ctr">
@@ -5887,7 +5888,7 @@
               </a:spcAft>
             </a:pPr>
             <a:r>
-              <a:rPr sz="1100" b="1">
+              <a:rPr sz="1200" b="1">
                 <a:solidFill>
                   <a:srgbClr val="0F6E6B"/>
                 </a:solidFill>
@@ -5912,183 +5913,21 @@
                 </a:solidFill>
                 <a:latin typeface="Calibri"/>
               </a:rPr>
-              <a:t>Read the plan number, year, method, and amounts</a:t>
-            </a:r>
-          </a:p>
-        </p:txBody>
-      </p:sp>
-      <p:sp>
-        <p:nvSpPr>
-          <p:cNvPr id="26" name="Process 25"/>
-          <p:cNvSpPr/>
-          <p:nvPr/>
-        </p:nvSpPr>
-        <p:spPr>
-          <a:xfrm>
-            <a:off x="6291072" y="4443984"/>
-            <a:ext cx="2880360" cy="932688"/>
-          </a:xfrm>
-          <a:prstGeom prst="flowChartProcess">
-            <a:avLst/>
-          </a:prstGeom>
-          <a:solidFill>
-            <a:srgbClr val="E5F6F4"/>
-          </a:solidFill>
-          <a:ln w="22225">
-            <a:solidFill>
-              <a:srgbClr val="0F6E6B"/>
-            </a:solidFill>
-          </a:ln>
-          <a:effectLst/>
-        </p:spPr>
-        <p:style>
-          <a:lnRef idx="1">
-            <a:schemeClr val="accent1"/>
-          </a:lnRef>
-          <a:fillRef idx="3">
-            <a:schemeClr val="accent1"/>
-          </a:fillRef>
-          <a:effectRef idx="2">
-            <a:schemeClr val="accent1"/>
-          </a:effectRef>
-          <a:fontRef idx="minor">
-            <a:schemeClr val="lt1"/>
-          </a:fontRef>
-        </p:style>
-        <p:txBody>
-          <a:bodyPr rtlCol="0" anchor="ctr" wrap="square" lIns="73152" rIns="73152"/>
-          <a:lstStyle/>
-          <a:p>
-            <a:pPr algn="ctr">
-              <a:spcBef>
-                <a:spcPts val="0"/>
-              </a:spcBef>
-              <a:spcAft>
-                <a:spcPts val="0"/>
-              </a:spcAft>
-            </a:pPr>
-            <a:r>
-              <a:rPr sz="1100" b="1">
-                <a:solidFill>
-                  <a:srgbClr val="0F6E6B"/>
-                </a:solidFill>
-                <a:latin typeface="Calibri"/>
-              </a:rPr>
-              <a:t>Application</a:t>
-            </a:r>
-          </a:p>
-          <a:p>
-            <a:pPr algn="ctr">
-              <a:spcBef>
-                <a:spcPts val="0"/>
-              </a:spcBef>
-              <a:spcAft>
-                <a:spcPts val="0"/>
-              </a:spcAft>
-            </a:pPr>
-            <a:r>
-              <a:rPr sz="1200" b="0">
-                <a:solidFill>
-                  <a:srgbClr val="1C1917"/>
-                </a:solidFill>
-                <a:latin typeface="Calibri"/>
-              </a:rPr>
-              <a:t>Keep or remove paragraphs, notices, letters, and bullets</a:t>
-            </a:r>
-          </a:p>
-        </p:txBody>
-      </p:sp>
-      <p:sp>
-        <p:nvSpPr>
-          <p:cNvPr id="27" name="Process 26"/>
-          <p:cNvSpPr/>
-          <p:nvPr/>
-        </p:nvSpPr>
-        <p:spPr>
-          <a:xfrm>
-            <a:off x="9326880" y="4443984"/>
-            <a:ext cx="2560320" cy="932688"/>
-          </a:xfrm>
-          <a:prstGeom prst="flowChartProcess">
-            <a:avLst/>
-          </a:prstGeom>
-          <a:solidFill>
-            <a:srgbClr val="E5F6F4"/>
-          </a:solidFill>
-          <a:ln w="22225">
-            <a:solidFill>
-              <a:srgbClr val="0F6E6B"/>
-            </a:solidFill>
-          </a:ln>
-          <a:effectLst/>
-        </p:spPr>
-        <p:style>
-          <a:lnRef idx="1">
-            <a:schemeClr val="accent1"/>
-          </a:lnRef>
-          <a:fillRef idx="3">
-            <a:schemeClr val="accent1"/>
-          </a:fillRef>
-          <a:effectRef idx="2">
-            <a:schemeClr val="accent1"/>
-          </a:effectRef>
-          <a:fontRef idx="minor">
-            <a:schemeClr val="lt1"/>
-          </a:fontRef>
-        </p:style>
-        <p:txBody>
-          <a:bodyPr rtlCol="0" anchor="ctr" wrap="square" lIns="73152" rIns="73152"/>
-          <a:lstStyle/>
-          <a:p>
-            <a:pPr algn="ctr">
-              <a:spcBef>
-                <a:spcPts val="0"/>
-              </a:spcBef>
-              <a:spcAft>
-                <a:spcPts val="0"/>
-              </a:spcAft>
-            </a:pPr>
-            <a:r>
-              <a:rPr sz="1100" b="1">
-                <a:solidFill>
-                  <a:srgbClr val="0F6E6B"/>
-                </a:solidFill>
-                <a:latin typeface="Calibri"/>
-              </a:rPr>
-              <a:t>Application</a:t>
-            </a:r>
-          </a:p>
-          <a:p>
-            <a:pPr algn="ctr">
-              <a:spcBef>
-                <a:spcPts val="0"/>
-              </a:spcBef>
-              <a:spcAft>
-                <a:spcPts val="0"/>
-              </a:spcAft>
-            </a:pPr>
-            <a:r>
-              <a:rPr sz="1300" b="0">
-                <a:solidFill>
-                  <a:srgbClr val="1C1917"/>
-                </a:solidFill>
-                <a:latin typeface="Calibri"/>
-              </a:rPr>
-              <a:t>Fill QNEC and refund amounts</a:t>
+              <a:t>Read plan number, names, year, CURRENT or PRIOR, pass or fail, and amounts</a:t>
             </a:r>
           </a:p>
         </p:txBody>
       </p:sp>
       <p:cxnSp>
         <p:nvCxnSpPr>
-          <p:cNvPr id="28" name="Connector 27"/>
+          <p:cNvPr id="26" name="Connector 25"/>
           <p:cNvCxnSpPr/>
           <p:nvPr/>
         </p:nvCxnSpPr>
         <p:spPr>
           <a:xfrm>
-            <a:off x="3099815" y="4910328"/>
-            <a:ext cx="128017" cy="0"/>
+            <a:off x="5916167" y="4869180"/>
+            <a:ext cx="329185" cy="0"/>
           </a:xfrm>
           <a:prstGeom prst="line">
             <a:avLst/>
@@ -6098,6 +5937,76 @@
               <a:srgbClr val="3F4A5A"/>
             </a:solidFill>
             <a:tailEnd type="triangle" w="med" len="med"/>
+          </a:ln>
+        </p:spPr>
+        <p:style>
+          <a:lnRef idx="2">
+            <a:schemeClr val="accent1"/>
+          </a:lnRef>
+          <a:fillRef idx="0">
+            <a:schemeClr val="accent1"/>
+          </a:fillRef>
+          <a:effectRef idx="1">
+            <a:schemeClr val="accent1"/>
+          </a:effectRef>
+          <a:fontRef idx="minor">
+            <a:schemeClr val="tx1"/>
+          </a:fontRef>
+        </p:style>
+      </p:cxnSp>
+      <p:cxnSp>
+        <p:nvCxnSpPr>
+          <p:cNvPr id="27" name="Connector 26"/>
+          <p:cNvCxnSpPr/>
+          <p:nvPr/>
+        </p:nvCxnSpPr>
+        <p:spPr>
+          <a:xfrm>
+            <a:off x="6080760" y="4224528"/>
+            <a:ext cx="0" cy="128016"/>
+          </a:xfrm>
+          <a:prstGeom prst="line">
+            <a:avLst/>
+          </a:prstGeom>
+          <a:ln w="22225">
+            <a:solidFill>
+              <a:srgbClr val="3F4A5A"/>
+            </a:solidFill>
+          </a:ln>
+        </p:spPr>
+        <p:style>
+          <a:lnRef idx="2">
+            <a:schemeClr val="accent1"/>
+          </a:lnRef>
+          <a:fillRef idx="0">
+            <a:schemeClr val="accent1"/>
+          </a:fillRef>
+          <a:effectRef idx="1">
+            <a:schemeClr val="accent1"/>
+          </a:effectRef>
+          <a:fontRef idx="minor">
+            <a:schemeClr val="tx1"/>
+          </a:fontRef>
+        </p:style>
+      </p:cxnSp>
+      <p:cxnSp>
+        <p:nvCxnSpPr>
+          <p:cNvPr id="28" name="Connector 27"/>
+          <p:cNvCxnSpPr/>
+          <p:nvPr/>
+        </p:nvCxnSpPr>
+        <p:spPr>
+          <a:xfrm flipH="1">
+            <a:off x="3108960" y="4352544"/>
+            <a:ext cx="2971800" cy="0"/>
+          </a:xfrm>
+          <a:prstGeom prst="line">
+            <a:avLst/>
+          </a:prstGeom>
+          <a:ln w="22225">
+            <a:solidFill>
+              <a:srgbClr val="3F4A5A"/>
+            </a:solidFill>
           </a:ln>
         </p:spPr>
         <p:style>
@@ -6123,8 +6032,8 @@
         </p:nvCxnSpPr>
         <p:spPr>
           <a:xfrm>
-            <a:off x="6144767" y="4910328"/>
-            <a:ext cx="128017" cy="0"/>
+            <a:off x="3108960" y="4352544"/>
+            <a:ext cx="0" cy="128016"/>
           </a:xfrm>
           <a:prstGeom prst="line">
             <a:avLst/>
@@ -6151,168 +6060,26 @@
           </a:fontRef>
         </p:style>
       </p:cxnSp>
-      <p:cxnSp>
-        <p:nvCxnSpPr>
-          <p:cNvPr id="30" name="Connector 29"/>
-          <p:cNvCxnSpPr/>
-          <p:nvPr/>
-        </p:nvCxnSpPr>
-        <p:spPr>
-          <a:xfrm>
-            <a:off x="9189719" y="4910328"/>
-            <a:ext cx="118873" cy="0"/>
-          </a:xfrm>
-          <a:prstGeom prst="line">
-            <a:avLst/>
-          </a:prstGeom>
-          <a:ln w="22225">
-            <a:solidFill>
-              <a:srgbClr val="3F4A5A"/>
-            </a:solidFill>
-            <a:tailEnd type="triangle" w="med" len="med"/>
-          </a:ln>
-        </p:spPr>
-        <p:style>
-          <a:lnRef idx="2">
-            <a:schemeClr val="accent1"/>
-          </a:lnRef>
-          <a:fillRef idx="0">
-            <a:schemeClr val="accent1"/>
-          </a:fillRef>
-          <a:effectRef idx="1">
-            <a:schemeClr val="accent1"/>
-          </a:effectRef>
-          <a:fontRef idx="minor">
-            <a:schemeClr val="tx1"/>
-          </a:fontRef>
-        </p:style>
-      </p:cxnSp>
-      <p:cxnSp>
-        <p:nvCxnSpPr>
-          <p:cNvPr id="31" name="Connector 30"/>
-          <p:cNvCxnSpPr/>
-          <p:nvPr/>
-        </p:nvCxnSpPr>
-        <p:spPr>
-          <a:xfrm>
-            <a:off x="6080760" y="4224528"/>
-            <a:ext cx="0" cy="109728"/>
-          </a:xfrm>
-          <a:prstGeom prst="line">
-            <a:avLst/>
-          </a:prstGeom>
-          <a:ln w="22225">
-            <a:solidFill>
-              <a:srgbClr val="3F4A5A"/>
-            </a:solidFill>
-          </a:ln>
-        </p:spPr>
-        <p:style>
-          <a:lnRef idx="2">
-            <a:schemeClr val="accent1"/>
-          </a:lnRef>
-          <a:fillRef idx="0">
-            <a:schemeClr val="accent1"/>
-          </a:fillRef>
-          <a:effectRef idx="1">
-            <a:schemeClr val="accent1"/>
-          </a:effectRef>
-          <a:fontRef idx="minor">
-            <a:schemeClr val="tx1"/>
-          </a:fontRef>
-        </p:style>
-      </p:cxnSp>
-      <p:cxnSp>
-        <p:nvCxnSpPr>
-          <p:cNvPr id="32" name="Connector 31"/>
-          <p:cNvCxnSpPr/>
-          <p:nvPr/>
-        </p:nvCxnSpPr>
-        <p:spPr>
-          <a:xfrm flipH="1">
-            <a:off x="1687068" y="4334256"/>
-            <a:ext cx="4393692" cy="0"/>
-          </a:xfrm>
-          <a:prstGeom prst="line">
-            <a:avLst/>
-          </a:prstGeom>
-          <a:ln w="22225">
-            <a:solidFill>
-              <a:srgbClr val="3F4A5A"/>
-            </a:solidFill>
-          </a:ln>
-        </p:spPr>
-        <p:style>
-          <a:lnRef idx="2">
-            <a:schemeClr val="accent1"/>
-          </a:lnRef>
-          <a:fillRef idx="0">
-            <a:schemeClr val="accent1"/>
-          </a:fillRef>
-          <a:effectRef idx="1">
-            <a:schemeClr val="accent1"/>
-          </a:effectRef>
-          <a:fontRef idx="minor">
-            <a:schemeClr val="tx1"/>
-          </a:fontRef>
-        </p:style>
-      </p:cxnSp>
-      <p:cxnSp>
-        <p:nvCxnSpPr>
-          <p:cNvPr id="33" name="Connector 32"/>
-          <p:cNvCxnSpPr/>
-          <p:nvPr/>
-        </p:nvCxnSpPr>
-        <p:spPr>
-          <a:xfrm>
-            <a:off x="1687068" y="4334256"/>
-            <a:ext cx="0" cy="109728"/>
-          </a:xfrm>
-          <a:prstGeom prst="line">
-            <a:avLst/>
-          </a:prstGeom>
-          <a:ln w="22225">
-            <a:solidFill>
-              <a:srgbClr val="3F4A5A"/>
-            </a:solidFill>
-            <a:tailEnd type="triangle" w="med" len="med"/>
-          </a:ln>
-        </p:spPr>
-        <p:style>
-          <a:lnRef idx="2">
-            <a:schemeClr val="accent1"/>
-          </a:lnRef>
-          <a:fillRef idx="0">
-            <a:schemeClr val="accent1"/>
-          </a:fillRef>
-          <a:effectRef idx="1">
-            <a:schemeClr val="accent1"/>
-          </a:effectRef>
-          <a:fontRef idx="minor">
-            <a:schemeClr val="tx1"/>
-          </a:fontRef>
-        </p:style>
-      </p:cxnSp>
-      <p:sp>
-        <p:nvSpPr>
-          <p:cNvPr id="34" name="Process 33"/>
+      <p:sp>
+        <p:nvSpPr>
+          <p:cNvPr id="30" name="Rounded Rectangle 29"/>
           <p:cNvSpPr/>
           <p:nvPr/>
         </p:nvSpPr>
         <p:spPr>
           <a:xfrm>
-            <a:off x="292608" y="5532120"/>
-            <a:ext cx="11594592" cy="530352"/>
-          </a:xfrm>
-          <a:prstGeom prst="flowChartProcess">
+            <a:off x="320040" y="5532120"/>
+            <a:ext cx="11521440" cy="1005840"/>
+          </a:xfrm>
+          <a:prstGeom prst="roundRect">
             <a:avLst/>
           </a:prstGeom>
           <a:solidFill>
-            <a:srgbClr val="E5F6F4"/>
+            <a:srgbClr val="FFFBF0"/>
           </a:solidFill>
           <a:ln w="22225">
             <a:solidFill>
-              <a:srgbClr val="0F6E6B"/>
+              <a:srgbClr val="A16207"/>
             </a:solidFill>
           </a:ln>
           <a:effectLst/>
@@ -6332,7 +6099,7 @@
           </a:fontRef>
         </p:style>
         <p:txBody>
-          <a:bodyPr rtlCol="0" anchor="ctr" wrap="square" lIns="73152" rIns="73152"/>
+          <a:bodyPr rtlCol="0" anchor="ctr" wrap="square" lIns="73152" rIns="73152" tIns="36576" bIns="36576"/>
           <a:lstStyle/>
           <a:p>
             <a:pPr algn="ctr">
@@ -6344,13 +6111,13 @@
               </a:spcAft>
             </a:pPr>
             <a:r>
-              <a:rPr sz="1200" b="1">
-                <a:solidFill>
-                  <a:srgbClr val="0F6E6B"/>
+              <a:rPr sz="1600" b="1">
+                <a:solidFill>
+                  <a:srgbClr val="9A3412"/>
                 </a:solidFill>
                 <a:latin typeface="Calibri"/>
               </a:rPr>
-              <a:t>Application</a:t>
+              <a:t>Next page — the checks</a:t>
             </a:r>
           </a:p>
           <a:p>
@@ -6363,144 +6130,27 @@
               </a:spcAft>
             </a:pPr>
             <a:r>
-              <a:rPr sz="1300" b="0">
+              <a:rPr sz="1400" b="0">
                 <a:solidFill>
                   <a:srgbClr val="1C1917"/>
                 </a:solidFill>
                 <a:latin typeface="Calibri"/>
               </a:rPr>
-              <a:t>Add bookmarks for the sections that remain, and flag a page if an SSN pattern is found</a:t>
-            </a:r>
-          </a:p>
-        </p:txBody>
-      </p:sp>
-      <p:sp>
-        <p:nvSpPr>
-          <p:cNvPr id="35" name="Document 34"/>
-          <p:cNvSpPr/>
-          <p:nvPr/>
-        </p:nvSpPr>
-        <p:spPr>
-          <a:xfrm>
-            <a:off x="292608" y="6181344"/>
-            <a:ext cx="11594592" cy="548640"/>
-          </a:xfrm>
-          <a:prstGeom prst="flowChartDocument">
-            <a:avLst/>
-          </a:prstGeom>
-          <a:solidFill>
-            <a:srgbClr val="E5F6F4"/>
-          </a:solidFill>
-          <a:ln w="22225">
-            <a:solidFill>
-              <a:srgbClr val="0F6E6B"/>
-            </a:solidFill>
-          </a:ln>
-          <a:effectLst/>
-        </p:spPr>
-        <p:style>
-          <a:lnRef idx="1">
-            <a:schemeClr val="accent1"/>
-          </a:lnRef>
-          <a:fillRef idx="3">
-            <a:schemeClr val="accent1"/>
-          </a:fillRef>
-          <a:effectRef idx="2">
-            <a:schemeClr val="accent1"/>
-          </a:effectRef>
-          <a:fontRef idx="minor">
-            <a:schemeClr val="lt1"/>
-          </a:fontRef>
-        </p:style>
-        <p:txBody>
-          <a:bodyPr rtlCol="0" anchor="ctr" wrap="square" lIns="73152" rIns="73152"/>
-          <a:lstStyle/>
-          <a:p>
-            <a:pPr algn="ctr">
-              <a:spcBef>
-                <a:spcPts val="0"/>
-              </a:spcBef>
-              <a:spcAft>
-                <a:spcPts val="0"/>
-              </a:spcAft>
-            </a:pPr>
-            <a:r>
-              <a:rPr sz="1200" b="1">
-                <a:solidFill>
-                  <a:srgbClr val="0F6E6B"/>
-                </a:solidFill>
-                <a:latin typeface="Calibri"/>
-              </a:rPr>
-              <a:t>Application</a:t>
-            </a:r>
-          </a:p>
-          <a:p>
-            <a:pPr algn="ctr">
-              <a:spcBef>
-                <a:spcPts val="0"/>
-              </a:spcBef>
-              <a:spcAft>
-                <a:spcPts val="0"/>
-              </a:spcAft>
-            </a:pPr>
-            <a:r>
-              <a:rPr sz="1300" b="0">
-                <a:solidFill>
-                  <a:srgbClr val="1C1917"/>
-                </a:solidFill>
-                <a:latin typeface="Calibri"/>
-              </a:rPr>
-              <a:t>Save PlanNumber_BeginningYear-Valuation.pdf, an Outlook draft, and a log row</a:t>
+              <a:t>Cover letter, Action Required, ADP and ACP, 402(g), 415, Excess Summary, Year End Recap, then bookmarks.</a:t>
             </a:r>
           </a:p>
         </p:txBody>
       </p:sp>
       <p:cxnSp>
         <p:nvCxnSpPr>
-          <p:cNvPr id="36" name="Connector 35"/>
+          <p:cNvPr id="31" name="Connector 30"/>
           <p:cNvCxnSpPr/>
           <p:nvPr/>
         </p:nvCxnSpPr>
         <p:spPr>
           <a:xfrm>
-            <a:off x="10607040" y="5385816"/>
-            <a:ext cx="0" cy="137160"/>
-          </a:xfrm>
-          <a:prstGeom prst="line">
-            <a:avLst/>
-          </a:prstGeom>
-          <a:ln w="22225">
-            <a:solidFill>
-              <a:srgbClr val="3F4A5A"/>
-            </a:solidFill>
-            <a:tailEnd type="triangle" w="med" len="med"/>
-          </a:ln>
-        </p:spPr>
-        <p:style>
-          <a:lnRef idx="2">
-            <a:schemeClr val="accent1"/>
-          </a:lnRef>
-          <a:fillRef idx="0">
-            <a:schemeClr val="accent1"/>
-          </a:fillRef>
-          <a:effectRef idx="1">
-            <a:schemeClr val="accent1"/>
-          </a:effectRef>
-          <a:fontRef idx="minor">
-            <a:schemeClr val="tx1"/>
-          </a:fontRef>
-        </p:style>
-      </p:cxnSp>
-      <p:cxnSp>
-        <p:nvCxnSpPr>
-          <p:cNvPr id="37" name="Connector 36"/>
-          <p:cNvCxnSpPr/>
-          <p:nvPr/>
-        </p:nvCxnSpPr>
-        <p:spPr>
-          <a:xfrm>
-            <a:off x="6089904" y="6071616"/>
-            <a:ext cx="0" cy="100584"/>
+            <a:off x="9075420" y="5266944"/>
+            <a:ext cx="0" cy="256032"/>
           </a:xfrm>
           <a:prstGeom prst="line">
             <a:avLst/>
@@ -6626,7 +6276,7 @@
                 </a:solidFill>
                 <a:latin typeface="Calibri"/>
               </a:rPr>
-              <a:t>Preview, download, and finish</a:t>
+              <a:t>Checks the application runs</a:t>
             </a:r>
           </a:p>
           <a:p>
@@ -6645,7 +6295,7 @@
                 </a:solidFill>
                 <a:latin typeface="Calibri"/>
               </a:rPr>
-              <a:t>Page 3 of 3   ·   Yellow marks stay in the preview only</a:t>
+              <a:t>Page 3 of 4   ·   Each box is a keep, remove, or fill step. It uses the plan facts from page 2.</a:t>
             </a:r>
           </a:p>
         </p:txBody>
@@ -6689,7 +6339,7 @@
           </a:fontRef>
         </p:style>
         <p:txBody>
-          <a:bodyPr rtlCol="0" anchor="ctr" wrap="square" lIns="73152" rIns="73152"/>
+          <a:bodyPr rtlCol="0" anchor="ctr" wrap="square" lIns="73152" rIns="73152" tIns="36576" bIns="36576"/>
           <a:lstStyle/>
           <a:p>
             <a:pPr algn="ctr"/>
@@ -6713,7 +6363,7 @@
           <a:noFill/>
         </p:spPr>
         <p:txBody>
-          <a:bodyPr wrap="none" lIns="18288" rIns="0" tIns="0" bIns="0">
+          <a:bodyPr wrap="none" lIns="18288" tIns="0" bIns="0">
             <a:spAutoFit/>
           </a:bodyPr>
           <a:lstStyle/>
@@ -6777,7 +6427,7 @@
           </a:fontRef>
         </p:style>
         <p:txBody>
-          <a:bodyPr rtlCol="0" anchor="ctr" wrap="square" lIns="73152" rIns="73152"/>
+          <a:bodyPr rtlCol="0" anchor="ctr" wrap="square" lIns="73152" rIns="73152" tIns="36576" bIns="36576"/>
           <a:lstStyle/>
           <a:p>
             <a:pPr algn="ctr"/>
@@ -6801,7 +6451,7 @@
           <a:noFill/>
         </p:spPr>
         <p:txBody>
-          <a:bodyPr wrap="none" lIns="18288" rIns="0" tIns="0" bIns="0">
+          <a:bodyPr wrap="none" lIns="18288" tIns="0" bIns="0">
             <a:spAutoFit/>
           </a:bodyPr>
           <a:lstStyle/>
@@ -6865,7 +6515,7 @@
           </a:fontRef>
         </p:style>
         <p:txBody>
-          <a:bodyPr rtlCol="0" anchor="ctr" wrap="square" lIns="73152" rIns="73152"/>
+          <a:bodyPr rtlCol="0" anchor="ctr" wrap="square" lIns="73152" rIns="73152" tIns="36576" bIns="36576"/>
           <a:lstStyle/>
           <a:p>
             <a:pPr algn="ctr"/>
@@ -6889,7 +6539,7 @@
           <a:noFill/>
         </p:spPr>
         <p:txBody>
-          <a:bodyPr wrap="none" lIns="18288" rIns="0" tIns="0" bIns="0">
+          <a:bodyPr wrap="none" lIns="18288" tIns="0" bIns="0">
             <a:spAutoFit/>
           </a:bodyPr>
           <a:lstStyle/>
@@ -6953,7 +6603,7 @@
           </a:fontRef>
         </p:style>
         <p:txBody>
-          <a:bodyPr rtlCol="0" anchor="ctr" wrap="square" lIns="73152" rIns="73152"/>
+          <a:bodyPr rtlCol="0" anchor="ctr" wrap="square" lIns="73152" rIns="73152" tIns="36576" bIns="36576"/>
           <a:lstStyle/>
           <a:p>
             <a:pPr algn="ctr"/>
@@ -6977,7 +6627,7 @@
           <a:noFill/>
         </p:spPr>
         <p:txBody>
-          <a:bodyPr wrap="none" lIns="18288" rIns="0" tIns="0" bIns="0">
+          <a:bodyPr wrap="none" lIns="18288" tIns="0" bIns="0">
             <a:spAutoFit/>
           </a:bodyPr>
           <a:lstStyle/>
@@ -7041,7 +6691,7 @@
           </a:fontRef>
         </p:style>
         <p:txBody>
-          <a:bodyPr rtlCol="0" anchor="ctr" wrap="square" lIns="73152" rIns="73152"/>
+          <a:bodyPr rtlCol="0" anchor="ctr" wrap="square" lIns="73152" rIns="73152" tIns="36576" bIns="36576"/>
           <a:lstStyle/>
           <a:p>
             <a:pPr algn="ctr"/>
@@ -7065,7 +6715,7 @@
           <a:noFill/>
         </p:spPr>
         <p:txBody>
-          <a:bodyPr wrap="none" lIns="18288" rIns="0" tIns="0" bIns="0">
+          <a:bodyPr wrap="none" lIns="18288" tIns="0" bIns="0">
             <a:spAutoFit/>
           </a:bodyPr>
           <a:lstStyle/>
@@ -7092,14 +6742,1255 @@
       </p:sp>
       <p:sp>
         <p:nvSpPr>
-          <p:cNvPr id="14" name="Decision 13"/>
+          <p:cNvPr id="14" name="Process 13"/>
           <p:cNvSpPr/>
           <p:nvPr/>
         </p:nvSpPr>
         <p:spPr>
           <a:xfrm>
-            <a:off x="4956048" y="1298448"/>
-            <a:ext cx="2286000" cy="1051560"/>
+            <a:off x="292608" y="1325880"/>
+            <a:ext cx="5669280" cy="1097280"/>
+          </a:xfrm>
+          <a:prstGeom prst="flowChartProcess">
+            <a:avLst/>
+          </a:prstGeom>
+          <a:solidFill>
+            <a:srgbClr val="E5F6F4"/>
+          </a:solidFill>
+          <a:ln w="22225">
+            <a:solidFill>
+              <a:srgbClr val="0F6E6B"/>
+            </a:solidFill>
+          </a:ln>
+          <a:effectLst/>
+        </p:spPr>
+        <p:style>
+          <a:lnRef idx="1">
+            <a:schemeClr val="accent1"/>
+          </a:lnRef>
+          <a:fillRef idx="3">
+            <a:schemeClr val="accent1"/>
+          </a:fillRef>
+          <a:effectRef idx="2">
+            <a:schemeClr val="accent1"/>
+          </a:effectRef>
+          <a:fontRef idx="minor">
+            <a:schemeClr val="lt1"/>
+          </a:fontRef>
+        </p:style>
+        <p:txBody>
+          <a:bodyPr rtlCol="0" anchor="ctr" wrap="square" lIns="73152" rIns="73152" tIns="36576" bIns="36576"/>
+          <a:lstStyle/>
+          <a:p>
+            <a:pPr algn="ctr">
+              <a:spcBef>
+                <a:spcPts val="0"/>
+              </a:spcBef>
+              <a:spcAft>
+                <a:spcPts val="0"/>
+              </a:spcAft>
+            </a:pPr>
+            <a:r>
+              <a:rPr sz="1500" b="1">
+                <a:solidFill>
+                  <a:srgbClr val="0F6E6B"/>
+                </a:solidFill>
+                <a:latin typeface="Calibri"/>
+              </a:rPr>
+              <a:t>Cover letter</a:t>
+            </a:r>
+          </a:p>
+          <a:p>
+            <a:pPr algn="ctr">
+              <a:spcBef>
+                <a:spcPts val="0"/>
+              </a:spcBef>
+              <a:spcAft>
+                <a:spcPts val="0"/>
+              </a:spcAft>
+            </a:pPr>
+            <a:r>
+              <a:rPr sz="1300" b="0">
+                <a:solidFill>
+                  <a:srgbClr val="1C1917"/>
+                </a:solidFill>
+                <a:latin typeface="Calibri"/>
+              </a:rPr>
+              <a:t>Read company, address, plan name, and plan year end. Check that the Mutual of America stamp is present.</a:t>
+            </a:r>
+          </a:p>
+        </p:txBody>
+      </p:sp>
+      <p:sp>
+        <p:nvSpPr>
+          <p:cNvPr id="15" name="Process 14"/>
+          <p:cNvSpPr/>
+          <p:nvPr/>
+        </p:nvSpPr>
+        <p:spPr>
+          <a:xfrm>
+            <a:off x="6236208" y="1325880"/>
+            <a:ext cx="5650992" cy="1097280"/>
+          </a:xfrm>
+          <a:prstGeom prst="flowChartProcess">
+            <a:avLst/>
+          </a:prstGeom>
+          <a:solidFill>
+            <a:srgbClr val="E5F6F4"/>
+          </a:solidFill>
+          <a:ln w="22225">
+            <a:solidFill>
+              <a:srgbClr val="0F6E6B"/>
+            </a:solidFill>
+          </a:ln>
+          <a:effectLst/>
+        </p:spPr>
+        <p:style>
+          <a:lnRef idx="1">
+            <a:schemeClr val="accent1"/>
+          </a:lnRef>
+          <a:fillRef idx="3">
+            <a:schemeClr val="accent1"/>
+          </a:fillRef>
+          <a:effectRef idx="2">
+            <a:schemeClr val="accent1"/>
+          </a:effectRef>
+          <a:fontRef idx="minor">
+            <a:schemeClr val="lt1"/>
+          </a:fontRef>
+        </p:style>
+        <p:txBody>
+          <a:bodyPr rtlCol="0" anchor="ctr" wrap="square" lIns="73152" rIns="73152" tIns="36576" bIns="36576"/>
+          <a:lstStyle/>
+          <a:p>
+            <a:pPr algn="ctr">
+              <a:spcBef>
+                <a:spcPts val="0"/>
+              </a:spcBef>
+              <a:spcAft>
+                <a:spcPts val="0"/>
+              </a:spcAft>
+            </a:pPr>
+            <a:r>
+              <a:rPr sz="1500" b="1">
+                <a:solidFill>
+                  <a:srgbClr val="0F6E6B"/>
+                </a:solidFill>
+                <a:latin typeface="Calibri"/>
+              </a:rPr>
+              <a:t>Action Required</a:t>
+            </a:r>
+          </a:p>
+          <a:p>
+            <a:pPr algn="ctr">
+              <a:spcBef>
+                <a:spcPts val="0"/>
+              </a:spcBef>
+              <a:spcAft>
+                <a:spcPts val="0"/>
+              </a:spcAft>
+            </a:pPr>
+            <a:r>
+              <a:rPr sz="1300" b="0">
+                <a:solidFill>
+                  <a:srgbClr val="1C1917"/>
+                </a:solidFill>
+                <a:latin typeface="Calibri"/>
+              </a:rPr>
+              <a:t>Keep or remove each paragraph: compliance failure, PRIOR or CURRENT, after 12 months, top heavy at 60%, variance, and no action.</a:t>
+            </a:r>
+          </a:p>
+        </p:txBody>
+      </p:sp>
+      <p:cxnSp>
+        <p:nvCxnSpPr>
+          <p:cNvPr id="16" name="Connector 15"/>
+          <p:cNvCxnSpPr/>
+          <p:nvPr/>
+        </p:nvCxnSpPr>
+        <p:spPr>
+          <a:xfrm>
+            <a:off x="5980176" y="1874519"/>
+            <a:ext cx="237744" cy="0"/>
+          </a:xfrm>
+          <a:prstGeom prst="line">
+            <a:avLst/>
+          </a:prstGeom>
+          <a:ln w="22225">
+            <a:solidFill>
+              <a:srgbClr val="3F4A5A"/>
+            </a:solidFill>
+            <a:tailEnd type="triangle" w="med" len="med"/>
+          </a:ln>
+        </p:spPr>
+        <p:style>
+          <a:lnRef idx="2">
+            <a:schemeClr val="accent1"/>
+          </a:lnRef>
+          <a:fillRef idx="0">
+            <a:schemeClr val="accent1"/>
+          </a:fillRef>
+          <a:effectRef idx="1">
+            <a:schemeClr val="accent1"/>
+          </a:effectRef>
+          <a:fontRef idx="minor">
+            <a:schemeClr val="tx1"/>
+          </a:fontRef>
+        </p:style>
+      </p:cxnSp>
+      <p:cxnSp>
+        <p:nvCxnSpPr>
+          <p:cNvPr id="17" name="Connector 16"/>
+          <p:cNvCxnSpPr/>
+          <p:nvPr/>
+        </p:nvCxnSpPr>
+        <p:spPr>
+          <a:xfrm>
+            <a:off x="3127248" y="2432303"/>
+            <a:ext cx="0" cy="164593"/>
+          </a:xfrm>
+          <a:prstGeom prst="line">
+            <a:avLst/>
+          </a:prstGeom>
+          <a:ln w="22225">
+            <a:solidFill>
+              <a:srgbClr val="3F4A5A"/>
+            </a:solidFill>
+            <a:tailEnd type="triangle" w="med" len="med"/>
+          </a:ln>
+        </p:spPr>
+        <p:style>
+          <a:lnRef idx="2">
+            <a:schemeClr val="accent1"/>
+          </a:lnRef>
+          <a:fillRef idx="0">
+            <a:schemeClr val="accent1"/>
+          </a:fillRef>
+          <a:effectRef idx="1">
+            <a:schemeClr val="accent1"/>
+          </a:effectRef>
+          <a:fontRef idx="minor">
+            <a:schemeClr val="tx1"/>
+          </a:fontRef>
+        </p:style>
+      </p:cxnSp>
+      <p:sp>
+        <p:nvSpPr>
+          <p:cNvPr id="18" name="Process 17"/>
+          <p:cNvSpPr/>
+          <p:nvPr/>
+        </p:nvSpPr>
+        <p:spPr>
+          <a:xfrm>
+            <a:off x="292608" y="2606040"/>
+            <a:ext cx="5669280" cy="1234440"/>
+          </a:xfrm>
+          <a:prstGeom prst="flowChartProcess">
+            <a:avLst/>
+          </a:prstGeom>
+          <a:solidFill>
+            <a:srgbClr val="E5F6F4"/>
+          </a:solidFill>
+          <a:ln w="22225">
+            <a:solidFill>
+              <a:srgbClr val="0F6E6B"/>
+            </a:solidFill>
+          </a:ln>
+          <a:effectLst/>
+        </p:spPr>
+        <p:style>
+          <a:lnRef idx="1">
+            <a:schemeClr val="accent1"/>
+          </a:lnRef>
+          <a:fillRef idx="3">
+            <a:schemeClr val="accent1"/>
+          </a:fillRef>
+          <a:effectRef idx="2">
+            <a:schemeClr val="accent1"/>
+          </a:effectRef>
+          <a:fontRef idx="minor">
+            <a:schemeClr val="lt1"/>
+          </a:fontRef>
+        </p:style>
+        <p:txBody>
+          <a:bodyPr rtlCol="0" anchor="ctr" wrap="square" lIns="73152" rIns="73152" tIns="36576" bIns="36576"/>
+          <a:lstStyle/>
+          <a:p>
+            <a:pPr algn="ctr">
+              <a:spcBef>
+                <a:spcPts val="0"/>
+              </a:spcBef>
+              <a:spcAft>
+                <a:spcPts val="0"/>
+              </a:spcAft>
+            </a:pPr>
+            <a:r>
+              <a:rPr sz="1500" b="1">
+                <a:solidFill>
+                  <a:srgbClr val="0F6E6B"/>
+                </a:solidFill>
+                <a:latin typeface="Calibri"/>
+              </a:rPr>
+              <a:t>ADP and ACP tests</a:t>
+            </a:r>
+          </a:p>
+          <a:p>
+            <a:pPr algn="ctr">
+              <a:spcBef>
+                <a:spcPts val="0"/>
+              </a:spcBef>
+              <a:spcAft>
+                <a:spcPts val="0"/>
+              </a:spcAft>
+            </a:pPr>
+            <a:r>
+              <a:rPr sz="1300" b="0">
+                <a:solidFill>
+                  <a:srgbClr val="1C1917"/>
+                </a:solidFill>
+                <a:latin typeface="Calibri"/>
+              </a:rPr>
+              <a:t>Keep the notice and each sample letter only if that test failed and returns are required. Fill the QNEC. Drop the unused ADP or ACP line. After 12 months, CURRENT keeps QNEC plus refunds. PRIOR keeps refunds only.</a:t>
+            </a:r>
+          </a:p>
+        </p:txBody>
+      </p:sp>
+      <p:sp>
+        <p:nvSpPr>
+          <p:cNvPr id="19" name="Process 18"/>
+          <p:cNvSpPr/>
+          <p:nvPr/>
+        </p:nvSpPr>
+        <p:spPr>
+          <a:xfrm>
+            <a:off x="6236208" y="2606040"/>
+            <a:ext cx="5650992" cy="1234440"/>
+          </a:xfrm>
+          <a:prstGeom prst="flowChartProcess">
+            <a:avLst/>
+          </a:prstGeom>
+          <a:solidFill>
+            <a:srgbClr val="E5F6F4"/>
+          </a:solidFill>
+          <a:ln w="22225">
+            <a:solidFill>
+              <a:srgbClr val="0F6E6B"/>
+            </a:solidFill>
+          </a:ln>
+          <a:effectLst/>
+        </p:spPr>
+        <p:style>
+          <a:lnRef idx="1">
+            <a:schemeClr val="accent1"/>
+          </a:lnRef>
+          <a:fillRef idx="3">
+            <a:schemeClr val="accent1"/>
+          </a:fillRef>
+          <a:effectRef idx="2">
+            <a:schemeClr val="accent1"/>
+          </a:effectRef>
+          <a:fontRef idx="minor">
+            <a:schemeClr val="lt1"/>
+          </a:fontRef>
+        </p:style>
+        <p:txBody>
+          <a:bodyPr rtlCol="0" anchor="ctr" wrap="square" lIns="73152" rIns="73152" tIns="36576" bIns="36576"/>
+          <a:lstStyle/>
+          <a:p>
+            <a:pPr algn="ctr">
+              <a:spcBef>
+                <a:spcPts val="0"/>
+              </a:spcBef>
+              <a:spcAft>
+                <a:spcPts val="0"/>
+              </a:spcAft>
+            </a:pPr>
+            <a:r>
+              <a:rPr sz="1500" b="1">
+                <a:solidFill>
+                  <a:srgbClr val="0F6E6B"/>
+                </a:solidFill>
+                <a:latin typeface="Calibri"/>
+              </a:rPr>
+              <a:t>402(g) test</a:t>
+            </a:r>
+          </a:p>
+          <a:p>
+            <a:pPr algn="ctr">
+              <a:spcBef>
+                <a:spcPts val="0"/>
+              </a:spcBef>
+              <a:spcAft>
+                <a:spcPts val="0"/>
+              </a:spcAft>
+            </a:pPr>
+            <a:r>
+              <a:rPr sz="1300" b="0">
+                <a:solidFill>
+                  <a:srgbClr val="1C1917"/>
+                </a:solidFill>
+                <a:latin typeface="Calibri"/>
+              </a:rPr>
+              <a:t>Remove the 402(g) letter if there are no returns, or the failure was not processed by 15 April.</a:t>
+            </a:r>
+          </a:p>
+        </p:txBody>
+      </p:sp>
+      <p:cxnSp>
+        <p:nvCxnSpPr>
+          <p:cNvPr id="20" name="Connector 19"/>
+          <p:cNvCxnSpPr/>
+          <p:nvPr/>
+        </p:nvCxnSpPr>
+        <p:spPr>
+          <a:xfrm>
+            <a:off x="5980176" y="3223260"/>
+            <a:ext cx="237744" cy="0"/>
+          </a:xfrm>
+          <a:prstGeom prst="line">
+            <a:avLst/>
+          </a:prstGeom>
+          <a:ln w="22225">
+            <a:solidFill>
+              <a:srgbClr val="3F4A5A"/>
+            </a:solidFill>
+            <a:tailEnd type="triangle" w="med" len="med"/>
+          </a:ln>
+        </p:spPr>
+        <p:style>
+          <a:lnRef idx="2">
+            <a:schemeClr val="accent1"/>
+          </a:lnRef>
+          <a:fillRef idx="0">
+            <a:schemeClr val="accent1"/>
+          </a:fillRef>
+          <a:effectRef idx="1">
+            <a:schemeClr val="accent1"/>
+          </a:effectRef>
+          <a:fontRef idx="minor">
+            <a:schemeClr val="tx1"/>
+          </a:fontRef>
+        </p:style>
+      </p:cxnSp>
+      <p:cxnSp>
+        <p:nvCxnSpPr>
+          <p:cNvPr id="21" name="Connector 20"/>
+          <p:cNvCxnSpPr/>
+          <p:nvPr/>
+        </p:nvCxnSpPr>
+        <p:spPr>
+          <a:xfrm>
+            <a:off x="3127248" y="3849624"/>
+            <a:ext cx="0" cy="164592"/>
+          </a:xfrm>
+          <a:prstGeom prst="line">
+            <a:avLst/>
+          </a:prstGeom>
+          <a:ln w="22225">
+            <a:solidFill>
+              <a:srgbClr val="3F4A5A"/>
+            </a:solidFill>
+            <a:tailEnd type="triangle" w="med" len="med"/>
+          </a:ln>
+        </p:spPr>
+        <p:style>
+          <a:lnRef idx="2">
+            <a:schemeClr val="accent1"/>
+          </a:lnRef>
+          <a:fillRef idx="0">
+            <a:schemeClr val="accent1"/>
+          </a:fillRef>
+          <a:effectRef idx="1">
+            <a:schemeClr val="accent1"/>
+          </a:effectRef>
+          <a:fontRef idx="minor">
+            <a:schemeClr val="tx1"/>
+          </a:fontRef>
+        </p:style>
+      </p:cxnSp>
+      <p:sp>
+        <p:nvSpPr>
+          <p:cNvPr id="22" name="Process 21"/>
+          <p:cNvSpPr/>
+          <p:nvPr/>
+        </p:nvSpPr>
+        <p:spPr>
+          <a:xfrm>
+            <a:off x="292608" y="4023360"/>
+            <a:ext cx="5669280" cy="960120"/>
+          </a:xfrm>
+          <a:prstGeom prst="flowChartProcess">
+            <a:avLst/>
+          </a:prstGeom>
+          <a:solidFill>
+            <a:srgbClr val="E5F6F4"/>
+          </a:solidFill>
+          <a:ln w="22225">
+            <a:solidFill>
+              <a:srgbClr val="0F6E6B"/>
+            </a:solidFill>
+          </a:ln>
+          <a:effectLst/>
+        </p:spPr>
+        <p:style>
+          <a:lnRef idx="1">
+            <a:schemeClr val="accent1"/>
+          </a:lnRef>
+          <a:fillRef idx="3">
+            <a:schemeClr val="accent1"/>
+          </a:fillRef>
+          <a:effectRef idx="2">
+            <a:schemeClr val="accent1"/>
+          </a:effectRef>
+          <a:fontRef idx="minor">
+            <a:schemeClr val="lt1"/>
+          </a:fontRef>
+        </p:style>
+        <p:txBody>
+          <a:bodyPr rtlCol="0" anchor="ctr" wrap="square" lIns="73152" rIns="73152" tIns="36576" bIns="36576"/>
+          <a:lstStyle/>
+          <a:p>
+            <a:pPr algn="ctr">
+              <a:spcBef>
+                <a:spcPts val="0"/>
+              </a:spcBef>
+              <a:spcAft>
+                <a:spcPts val="0"/>
+              </a:spcAft>
+            </a:pPr>
+            <a:r>
+              <a:rPr sz="1500" b="1">
+                <a:solidFill>
+                  <a:srgbClr val="0F6E6B"/>
+                </a:solidFill>
+                <a:latin typeface="Calibri"/>
+              </a:rPr>
+              <a:t>415 limit</a:t>
+            </a:r>
+          </a:p>
+          <a:p>
+            <a:pPr algn="ctr">
+              <a:spcBef>
+                <a:spcPts val="0"/>
+              </a:spcBef>
+              <a:spcAft>
+                <a:spcPts val="0"/>
+              </a:spcAft>
+            </a:pPr>
+            <a:r>
+              <a:rPr sz="1300" b="0">
+                <a:solidFill>
+                  <a:srgbClr val="1C1917"/>
+                </a:solidFill>
+                <a:latin typeface="Calibri"/>
+              </a:rPr>
+              <a:t>Remove the 415 failure information and the 415 letter if the plan did not fail 415.</a:t>
+            </a:r>
+          </a:p>
+        </p:txBody>
+      </p:sp>
+      <p:sp>
+        <p:nvSpPr>
+          <p:cNvPr id="23" name="Process 22"/>
+          <p:cNvSpPr/>
+          <p:nvPr/>
+        </p:nvSpPr>
+        <p:spPr>
+          <a:xfrm>
+            <a:off x="6236208" y="4023360"/>
+            <a:ext cx="5650992" cy="960120"/>
+          </a:xfrm>
+          <a:prstGeom prst="flowChartProcess">
+            <a:avLst/>
+          </a:prstGeom>
+          <a:solidFill>
+            <a:srgbClr val="E5F6F4"/>
+          </a:solidFill>
+          <a:ln w="22225">
+            <a:solidFill>
+              <a:srgbClr val="0F6E6B"/>
+            </a:solidFill>
+          </a:ln>
+          <a:effectLst/>
+        </p:spPr>
+        <p:style>
+          <a:lnRef idx="1">
+            <a:schemeClr val="accent1"/>
+          </a:lnRef>
+          <a:fillRef idx="3">
+            <a:schemeClr val="accent1"/>
+          </a:fillRef>
+          <a:effectRef idx="2">
+            <a:schemeClr val="accent1"/>
+          </a:effectRef>
+          <a:fontRef idx="minor">
+            <a:schemeClr val="lt1"/>
+          </a:fontRef>
+        </p:style>
+        <p:txBody>
+          <a:bodyPr rtlCol="0" anchor="ctr" wrap="square" lIns="73152" rIns="73152" tIns="36576" bIns="36576"/>
+          <a:lstStyle/>
+          <a:p>
+            <a:pPr algn="ctr">
+              <a:spcBef>
+                <a:spcPts val="0"/>
+              </a:spcBef>
+              <a:spcAft>
+                <a:spcPts val="0"/>
+              </a:spcAft>
+            </a:pPr>
+            <a:r>
+              <a:rPr sz="1500" b="1">
+                <a:solidFill>
+                  <a:srgbClr val="0F6E6B"/>
+                </a:solidFill>
+                <a:latin typeface="Calibri"/>
+              </a:rPr>
+              <a:t>Excess Summary</a:t>
+            </a:r>
+          </a:p>
+          <a:p>
+            <a:pPr algn="ctr">
+              <a:spcBef>
+                <a:spcPts val="0"/>
+              </a:spcBef>
+              <a:spcAft>
+                <a:spcPts val="0"/>
+              </a:spcAft>
+            </a:pPr>
+            <a:r>
+              <a:rPr sz="1300" b="0">
+                <a:solidFill>
+                  <a:srgbClr val="1C1917"/>
+                </a:solidFill>
+                <a:latin typeface="Calibri"/>
+              </a:rPr>
+              <a:t>Keep it for a 402(g) or 415 failure, or for ADP/ACP when a participant is partially vested.</a:t>
+            </a:r>
+          </a:p>
+        </p:txBody>
+      </p:sp>
+      <p:cxnSp>
+        <p:nvCxnSpPr>
+          <p:cNvPr id="24" name="Connector 23"/>
+          <p:cNvCxnSpPr/>
+          <p:nvPr/>
+        </p:nvCxnSpPr>
+        <p:spPr>
+          <a:xfrm>
+            <a:off x="5980176" y="4503420"/>
+            <a:ext cx="237744" cy="0"/>
+          </a:xfrm>
+          <a:prstGeom prst="line">
+            <a:avLst/>
+          </a:prstGeom>
+          <a:ln w="22225">
+            <a:solidFill>
+              <a:srgbClr val="3F4A5A"/>
+            </a:solidFill>
+            <a:tailEnd type="triangle" w="med" len="med"/>
+          </a:ln>
+        </p:spPr>
+        <p:style>
+          <a:lnRef idx="2">
+            <a:schemeClr val="accent1"/>
+          </a:lnRef>
+          <a:fillRef idx="0">
+            <a:schemeClr val="accent1"/>
+          </a:fillRef>
+          <a:effectRef idx="1">
+            <a:schemeClr val="accent1"/>
+          </a:effectRef>
+          <a:fontRef idx="minor">
+            <a:schemeClr val="tx1"/>
+          </a:fontRef>
+        </p:style>
+      </p:cxnSp>
+      <p:cxnSp>
+        <p:nvCxnSpPr>
+          <p:cNvPr id="25" name="Connector 24"/>
+          <p:cNvCxnSpPr/>
+          <p:nvPr/>
+        </p:nvCxnSpPr>
+        <p:spPr>
+          <a:xfrm>
+            <a:off x="3127248" y="4992624"/>
+            <a:ext cx="0" cy="164592"/>
+          </a:xfrm>
+          <a:prstGeom prst="line">
+            <a:avLst/>
+          </a:prstGeom>
+          <a:ln w="22225">
+            <a:solidFill>
+              <a:srgbClr val="3F4A5A"/>
+            </a:solidFill>
+            <a:tailEnd type="triangle" w="med" len="med"/>
+          </a:ln>
+        </p:spPr>
+        <p:style>
+          <a:lnRef idx="2">
+            <a:schemeClr val="accent1"/>
+          </a:lnRef>
+          <a:fillRef idx="0">
+            <a:schemeClr val="accent1"/>
+          </a:fillRef>
+          <a:effectRef idx="1">
+            <a:schemeClr val="accent1"/>
+          </a:effectRef>
+          <a:fontRef idx="minor">
+            <a:schemeClr val="tx1"/>
+          </a:fontRef>
+        </p:style>
+      </p:cxnSp>
+      <p:sp>
+        <p:nvSpPr>
+          <p:cNvPr id="26" name="Process 25"/>
+          <p:cNvSpPr/>
+          <p:nvPr/>
+        </p:nvSpPr>
+        <p:spPr>
+          <a:xfrm>
+            <a:off x="292608" y="5166360"/>
+            <a:ext cx="5669280" cy="960120"/>
+          </a:xfrm>
+          <a:prstGeom prst="flowChartProcess">
+            <a:avLst/>
+          </a:prstGeom>
+          <a:solidFill>
+            <a:srgbClr val="E5F6F4"/>
+          </a:solidFill>
+          <a:ln w="22225">
+            <a:solidFill>
+              <a:srgbClr val="0F6E6B"/>
+            </a:solidFill>
+          </a:ln>
+          <a:effectLst/>
+        </p:spPr>
+        <p:style>
+          <a:lnRef idx="1">
+            <a:schemeClr val="accent1"/>
+          </a:lnRef>
+          <a:fillRef idx="3">
+            <a:schemeClr val="accent1"/>
+          </a:fillRef>
+          <a:effectRef idx="2">
+            <a:schemeClr val="accent1"/>
+          </a:effectRef>
+          <a:fontRef idx="minor">
+            <a:schemeClr val="lt1"/>
+          </a:fontRef>
+        </p:style>
+        <p:txBody>
+          <a:bodyPr rtlCol="0" anchor="ctr" wrap="square" lIns="73152" rIns="73152" tIns="36576" bIns="36576"/>
+          <a:lstStyle/>
+          <a:p>
+            <a:pPr algn="ctr">
+              <a:spcBef>
+                <a:spcPts val="0"/>
+              </a:spcBef>
+              <a:spcAft>
+                <a:spcPts val="0"/>
+              </a:spcAft>
+            </a:pPr>
+            <a:r>
+              <a:rPr sz="1500" b="1">
+                <a:solidFill>
+                  <a:srgbClr val="0F6E6B"/>
+                </a:solidFill>
+                <a:latin typeface="Calibri"/>
+              </a:rPr>
+              <a:t>Year End Recap</a:t>
+            </a:r>
+          </a:p>
+          <a:p>
+            <a:pPr algn="ctr">
+              <a:spcBef>
+                <a:spcPts val="0"/>
+              </a:spcBef>
+              <a:spcAft>
+                <a:spcPts val="0"/>
+              </a:spcAft>
+            </a:pPr>
+            <a:r>
+              <a:rPr sz="1300" b="0">
+                <a:solidFill>
+                  <a:srgbClr val="1C1917"/>
+                </a:solidFill>
+                <a:latin typeface="Calibri"/>
+              </a:rPr>
+              <a:t>Keep or remove bullets for HCE, Safe Harbor, top heavy, catch-up, and the match.</a:t>
+            </a:r>
+          </a:p>
+        </p:txBody>
+      </p:sp>
+      <p:sp>
+        <p:nvSpPr>
+          <p:cNvPr id="27" name="Process 26"/>
+          <p:cNvSpPr/>
+          <p:nvPr/>
+        </p:nvSpPr>
+        <p:spPr>
+          <a:xfrm>
+            <a:off x="6236208" y="5166360"/>
+            <a:ext cx="5650992" cy="960120"/>
+          </a:xfrm>
+          <a:prstGeom prst="flowChartProcess">
+            <a:avLst/>
+          </a:prstGeom>
+          <a:solidFill>
+            <a:srgbClr val="E5F6F4"/>
+          </a:solidFill>
+          <a:ln w="22225">
+            <a:solidFill>
+              <a:srgbClr val="0F6E6B"/>
+            </a:solidFill>
+          </a:ln>
+          <a:effectLst/>
+        </p:spPr>
+        <p:style>
+          <a:lnRef idx="1">
+            <a:schemeClr val="accent1"/>
+          </a:lnRef>
+          <a:fillRef idx="3">
+            <a:schemeClr val="accent1"/>
+          </a:fillRef>
+          <a:effectRef idx="2">
+            <a:schemeClr val="accent1"/>
+          </a:effectRef>
+          <a:fontRef idx="minor">
+            <a:schemeClr val="lt1"/>
+          </a:fontRef>
+        </p:style>
+        <p:txBody>
+          <a:bodyPr rtlCol="0" anchor="ctr" wrap="square" lIns="73152" rIns="73152" tIns="36576" bIns="36576"/>
+          <a:lstStyle/>
+          <a:p>
+            <a:pPr algn="ctr">
+              <a:spcBef>
+                <a:spcPts val="0"/>
+              </a:spcBef>
+              <a:spcAft>
+                <a:spcPts val="0"/>
+              </a:spcAft>
+            </a:pPr>
+            <a:r>
+              <a:rPr sz="1500" b="1">
+                <a:solidFill>
+                  <a:srgbClr val="0F6E6B"/>
+                </a:solidFill>
+                <a:latin typeface="Calibri"/>
+              </a:rPr>
+              <a:t>Bookmarks</a:t>
+            </a:r>
+          </a:p>
+          <a:p>
+            <a:pPr algn="ctr">
+              <a:spcBef>
+                <a:spcPts val="0"/>
+              </a:spcBef>
+              <a:spcAft>
+                <a:spcPts val="0"/>
+              </a:spcAft>
+            </a:pPr>
+            <a:r>
+              <a:rPr sz="1300" b="0">
+                <a:solidFill>
+                  <a:srgbClr val="1C1917"/>
+                </a:solidFill>
+                <a:latin typeface="Calibri"/>
+              </a:rPr>
+              <a:t>Add a bookmark for each section that remains, including ADP Test, ACP Test, and HCE on a 403(b).</a:t>
+            </a:r>
+          </a:p>
+        </p:txBody>
+      </p:sp>
+      <p:cxnSp>
+        <p:nvCxnSpPr>
+          <p:cNvPr id="28" name="Connector 27"/>
+          <p:cNvCxnSpPr/>
+          <p:nvPr/>
+        </p:nvCxnSpPr>
+        <p:spPr>
+          <a:xfrm>
+            <a:off x="5980176" y="5646420"/>
+            <a:ext cx="237744" cy="0"/>
+          </a:xfrm>
+          <a:prstGeom prst="line">
+            <a:avLst/>
+          </a:prstGeom>
+          <a:ln w="22225">
+            <a:solidFill>
+              <a:srgbClr val="3F4A5A"/>
+            </a:solidFill>
+            <a:tailEnd type="triangle" w="med" len="med"/>
+          </a:ln>
+        </p:spPr>
+        <p:style>
+          <a:lnRef idx="2">
+            <a:schemeClr val="accent1"/>
+          </a:lnRef>
+          <a:fillRef idx="0">
+            <a:schemeClr val="accent1"/>
+          </a:fillRef>
+          <a:effectRef idx="1">
+            <a:schemeClr val="accent1"/>
+          </a:effectRef>
+          <a:fontRef idx="minor">
+            <a:schemeClr val="tx1"/>
+          </a:fontRef>
+        </p:style>
+      </p:cxnSp>
+      <p:sp>
+        <p:nvSpPr>
+          <p:cNvPr id="29" name="TextBox 28"/>
+          <p:cNvSpPr txBox="1"/>
+          <p:nvPr/>
+        </p:nvSpPr>
+        <p:spPr>
+          <a:xfrm>
+            <a:off x="7772400" y="6263640"/>
+            <a:ext cx="4114800" cy="219456"/>
+          </a:xfrm>
+          <a:prstGeom prst="rect">
+            <a:avLst/>
+          </a:prstGeom>
+          <a:noFill/>
+        </p:spPr>
+        <p:txBody>
+          <a:bodyPr wrap="none" lIns="18288" tIns="0" bIns="0">
+            <a:spAutoFit/>
+          </a:bodyPr>
+          <a:lstStyle/>
+          <a:p>
+            <a:pPr algn="ctr">
+              <a:spcBef>
+                <a:spcPts val="0"/>
+              </a:spcBef>
+              <a:spcAft>
+                <a:spcPts val="0"/>
+              </a:spcAft>
+            </a:pPr>
+            <a:r>
+              <a:rPr sz="1200" b="1">
+                <a:solidFill>
+                  <a:srgbClr val="1E3A5F"/>
+                </a:solidFill>
+                <a:latin typeface="Calibri"/>
+              </a:rPr>
+              <a:t>Continued on page 4  →</a:t>
+            </a:r>
+          </a:p>
+        </p:txBody>
+      </p:sp>
+    </p:spTree>
+  </p:cSld>
+  <p:clrMapOvr>
+    <a:masterClrMapping/>
+  </p:clrMapOvr>
+</p:sld>
+</file>
+
+<file path=ppt/slides/slide4.xml><?xml version="1.0" encoding="utf-8"?>
+<p:sld xmlns:a="http://schemas.openxmlformats.org/drawingml/2006/main" xmlns:p="http://schemas.openxmlformats.org/presentationml/2006/main" xmlns:r="http://schemas.openxmlformats.org/officeDocument/2006/relationships">
+  <p:cSld>
+    <p:spTree>
+      <p:nvGrpSpPr>
+        <p:cNvPr id="1" name=""/>
+        <p:cNvGrpSpPr/>
+        <p:nvPr/>
+      </p:nvGrpSpPr>
+      <p:grpSpPr/>
+      <p:sp>
+        <p:nvSpPr>
+          <p:cNvPr id="2" name="Rectangle 1"/>
+          <p:cNvSpPr/>
+          <p:nvPr/>
+        </p:nvSpPr>
+        <p:spPr>
+          <a:xfrm>
+            <a:off x="0" y="0"/>
+            <a:ext cx="12191695" cy="73152"/>
+          </a:xfrm>
+          <a:prstGeom prst="rect">
+            <a:avLst/>
+          </a:prstGeom>
+          <a:solidFill>
+            <a:srgbClr val="0F6E6B"/>
+          </a:solidFill>
+          <a:ln w="22225">
+            <a:noFill/>
+          </a:ln>
+          <a:effectLst/>
+        </p:spPr>
+        <p:style>
+          <a:lnRef idx="1">
+            <a:schemeClr val="accent1"/>
+          </a:lnRef>
+          <a:fillRef idx="3">
+            <a:schemeClr val="accent1"/>
+          </a:fillRef>
+          <a:effectRef idx="2">
+            <a:schemeClr val="accent1"/>
+          </a:effectRef>
+          <a:fontRef idx="minor">
+            <a:schemeClr val="lt1"/>
+          </a:fontRef>
+        </p:style>
+        <p:txBody>
+          <a:bodyPr rtlCol="0" anchor="ctr"/>
+          <a:lstStyle/>
+          <a:p>
+            <a:pPr algn="ctr"/>
+          </a:p>
+        </p:txBody>
+      </p:sp>
+      <p:sp>
+        <p:nvSpPr>
+          <p:cNvPr id="3" name="TextBox 2"/>
+          <p:cNvSpPr txBox="1"/>
+          <p:nvPr/>
+        </p:nvSpPr>
+        <p:spPr>
+          <a:xfrm>
+            <a:off x="320040" y="146304"/>
+            <a:ext cx="11521440" cy="658368"/>
+          </a:xfrm>
+          <a:prstGeom prst="rect">
+            <a:avLst/>
+          </a:prstGeom>
+          <a:noFill/>
+        </p:spPr>
+        <p:txBody>
+          <a:bodyPr wrap="none">
+            <a:spAutoFit/>
+          </a:bodyPr>
+          <a:lstStyle/>
+          <a:p>
+            <a:pPr algn="l">
+              <a:spcBef>
+                <a:spcPts val="0"/>
+              </a:spcBef>
+              <a:spcAft>
+                <a:spcPts val="0"/>
+              </a:spcAft>
+            </a:pPr>
+            <a:r>
+              <a:rPr sz="2600" b="1">
+                <a:solidFill>
+                  <a:srgbClr val="1E3A5F"/>
+                </a:solidFill>
+                <a:latin typeface="Calibri"/>
+              </a:rPr>
+              <a:t>Save, preview, and finish</a:t>
+            </a:r>
+          </a:p>
+          <a:p>
+            <a:pPr algn="l">
+              <a:spcBef>
+                <a:spcPts val="0"/>
+              </a:spcBef>
+              <a:spcAft>
+                <a:spcPts val="0"/>
+              </a:spcAft>
+            </a:pPr>
+            <a:r>
+              <a:rPr sz="1400" b="0">
+                <a:solidFill>
+                  <a:srgbClr val="3F4A5A"/>
+                </a:solidFill>
+                <a:latin typeface="Calibri"/>
+              </a:rPr>
+              <a:t>Page 4 of 4   ·   Yellow marks stay in the preview only</a:t>
+            </a:r>
+          </a:p>
+        </p:txBody>
+      </p:sp>
+      <p:sp>
+        <p:nvSpPr>
+          <p:cNvPr id="4" name="Terminator 3"/>
+          <p:cNvSpPr/>
+          <p:nvPr/>
+        </p:nvSpPr>
+        <p:spPr>
+          <a:xfrm>
+            <a:off x="320040" y="896112"/>
+            <a:ext cx="292608" cy="237744"/>
+          </a:xfrm>
+          <a:prstGeom prst="flowChartTerminator">
+            <a:avLst/>
+          </a:prstGeom>
+          <a:solidFill>
+            <a:srgbClr val="1B7A4A"/>
+          </a:solidFill>
+          <a:ln w="22225">
+            <a:solidFill>
+              <a:srgbClr val="145C38"/>
+            </a:solidFill>
+          </a:ln>
+          <a:effectLst/>
+        </p:spPr>
+        <p:style>
+          <a:lnRef idx="1">
+            <a:schemeClr val="accent1"/>
+          </a:lnRef>
+          <a:fillRef idx="3">
+            <a:schemeClr val="accent1"/>
+          </a:fillRef>
+          <a:effectRef idx="2">
+            <a:schemeClr val="accent1"/>
+          </a:effectRef>
+          <a:fontRef idx="minor">
+            <a:schemeClr val="lt1"/>
+          </a:fontRef>
+        </p:style>
+        <p:txBody>
+          <a:bodyPr rtlCol="0" anchor="ctr" wrap="square" lIns="73152" rIns="73152" tIns="36576" bIns="36576"/>
+          <a:lstStyle/>
+          <a:p>
+            <a:pPr algn="ctr"/>
+          </a:p>
+        </p:txBody>
+      </p:sp>
+      <p:sp>
+        <p:nvSpPr>
+          <p:cNvPr id="5" name="TextBox 4"/>
+          <p:cNvSpPr txBox="1"/>
+          <p:nvPr/>
+        </p:nvSpPr>
+        <p:spPr>
+          <a:xfrm>
+            <a:off x="649224" y="896112"/>
+            <a:ext cx="2011680" cy="219456"/>
+          </a:xfrm>
+          <a:prstGeom prst="rect">
+            <a:avLst/>
+          </a:prstGeom>
+          <a:noFill/>
+        </p:spPr>
+        <p:txBody>
+          <a:bodyPr wrap="none" lIns="18288" tIns="0" bIns="0">
+            <a:spAutoFit/>
+          </a:bodyPr>
+          <a:lstStyle/>
+          <a:p>
+            <a:pPr algn="ctr">
+              <a:spcBef>
+                <a:spcPts val="0"/>
+              </a:spcBef>
+              <a:spcAft>
+                <a:spcPts val="0"/>
+              </a:spcAft>
+            </a:pPr>
+            <a:r>
+              <a:rPr sz="1200" b="1">
+                <a:solidFill>
+                  <a:srgbClr val="3F4A5A"/>
+                </a:solidFill>
+                <a:latin typeface="Calibri"/>
+              </a:rPr>
+              <a:t>Oval  Start or end</a:t>
+            </a:r>
+          </a:p>
+        </p:txBody>
+      </p:sp>
+      <p:sp>
+        <p:nvSpPr>
+          <p:cNvPr id="6" name="Process 5"/>
+          <p:cNvSpPr/>
+          <p:nvPr/>
+        </p:nvSpPr>
+        <p:spPr>
+          <a:xfrm>
+            <a:off x="2468880" y="896112"/>
+            <a:ext cx="292608" cy="237744"/>
+          </a:xfrm>
+          <a:prstGeom prst="flowChartProcess">
+            <a:avLst/>
+          </a:prstGeom>
+          <a:solidFill>
+            <a:srgbClr val="E7F0FB"/>
+          </a:solidFill>
+          <a:ln w="22225">
+            <a:solidFill>
+              <a:srgbClr val="1D4E89"/>
+            </a:solidFill>
+          </a:ln>
+          <a:effectLst/>
+        </p:spPr>
+        <p:style>
+          <a:lnRef idx="1">
+            <a:schemeClr val="accent1"/>
+          </a:lnRef>
+          <a:fillRef idx="3">
+            <a:schemeClr val="accent1"/>
+          </a:fillRef>
+          <a:effectRef idx="2">
+            <a:schemeClr val="accent1"/>
+          </a:effectRef>
+          <a:fontRef idx="minor">
+            <a:schemeClr val="lt1"/>
+          </a:fontRef>
+        </p:style>
+        <p:txBody>
+          <a:bodyPr rtlCol="0" anchor="ctr" wrap="square" lIns="73152" rIns="73152" tIns="36576" bIns="36576"/>
+          <a:lstStyle/>
+          <a:p>
+            <a:pPr algn="ctr"/>
+          </a:p>
+        </p:txBody>
+      </p:sp>
+      <p:sp>
+        <p:nvSpPr>
+          <p:cNvPr id="7" name="TextBox 6"/>
+          <p:cNvSpPr txBox="1"/>
+          <p:nvPr/>
+        </p:nvSpPr>
+        <p:spPr>
+          <a:xfrm>
+            <a:off x="2798064" y="896112"/>
+            <a:ext cx="2011680" cy="219456"/>
+          </a:xfrm>
+          <a:prstGeom prst="rect">
+            <a:avLst/>
+          </a:prstGeom>
+          <a:noFill/>
+        </p:spPr>
+        <p:txBody>
+          <a:bodyPr wrap="none" lIns="18288" tIns="0" bIns="0">
+            <a:spAutoFit/>
+          </a:bodyPr>
+          <a:lstStyle/>
+          <a:p>
+            <a:pPr algn="ctr">
+              <a:spcBef>
+                <a:spcPts val="0"/>
+              </a:spcBef>
+              <a:spcAft>
+                <a:spcPts val="0"/>
+              </a:spcAft>
+            </a:pPr>
+            <a:r>
+              <a:rPr sz="1200" b="1">
+                <a:solidFill>
+                  <a:srgbClr val="3F4A5A"/>
+                </a:solidFill>
+                <a:latin typeface="Calibri"/>
+              </a:rPr>
+              <a:t>Rectangle  A step</a:t>
+            </a:r>
+          </a:p>
+        </p:txBody>
+      </p:sp>
+      <p:sp>
+        <p:nvSpPr>
+          <p:cNvPr id="8" name="Decision 7"/>
+          <p:cNvSpPr/>
+          <p:nvPr/>
+        </p:nvSpPr>
+        <p:spPr>
+          <a:xfrm>
+            <a:off x="4709160" y="896112"/>
+            <a:ext cx="292608" cy="237744"/>
           </a:xfrm>
           <a:prstGeom prst="flowChartDecision">
             <a:avLst/>
@@ -7129,7 +8020,352 @@
           </a:fontRef>
         </p:style>
         <p:txBody>
-          <a:bodyPr rtlCol="0" anchor="ctr" wrap="square" lIns="73152" rIns="73152"/>
+          <a:bodyPr rtlCol="0" anchor="ctr" wrap="square" lIns="73152" rIns="73152" tIns="36576" bIns="36576"/>
+          <a:lstStyle/>
+          <a:p>
+            <a:pPr algn="ctr"/>
+          </a:p>
+        </p:txBody>
+      </p:sp>
+      <p:sp>
+        <p:nvSpPr>
+          <p:cNvPr id="9" name="TextBox 8"/>
+          <p:cNvSpPr txBox="1"/>
+          <p:nvPr/>
+        </p:nvSpPr>
+        <p:spPr>
+          <a:xfrm>
+            <a:off x="5038344" y="896112"/>
+            <a:ext cx="2011680" cy="219456"/>
+          </a:xfrm>
+          <a:prstGeom prst="rect">
+            <a:avLst/>
+          </a:prstGeom>
+          <a:noFill/>
+        </p:spPr>
+        <p:txBody>
+          <a:bodyPr wrap="none" lIns="18288" tIns="0" bIns="0">
+            <a:spAutoFit/>
+          </a:bodyPr>
+          <a:lstStyle/>
+          <a:p>
+            <a:pPr algn="ctr">
+              <a:spcBef>
+                <a:spcPts val="0"/>
+              </a:spcBef>
+              <a:spcAft>
+                <a:spcPts val="0"/>
+              </a:spcAft>
+            </a:pPr>
+            <a:r>
+              <a:rPr sz="1200" b="1">
+                <a:solidFill>
+                  <a:srgbClr val="3F4A5A"/>
+                </a:solidFill>
+                <a:latin typeface="Calibri"/>
+              </a:rPr>
+              <a:t>Diamond  Yes or no</a:t>
+            </a:r>
+          </a:p>
+        </p:txBody>
+      </p:sp>
+      <p:sp>
+        <p:nvSpPr>
+          <p:cNvPr id="10" name="Data 9"/>
+          <p:cNvSpPr/>
+          <p:nvPr/>
+        </p:nvSpPr>
+        <p:spPr>
+          <a:xfrm>
+            <a:off x="7040880" y="896112"/>
+            <a:ext cx="292608" cy="237744"/>
+          </a:xfrm>
+          <a:prstGeom prst="flowChartInputOutput">
+            <a:avLst/>
+          </a:prstGeom>
+          <a:solidFill>
+            <a:srgbClr val="EEF2FF"/>
+          </a:solidFill>
+          <a:ln w="22225">
+            <a:solidFill>
+              <a:srgbClr val="373AB0"/>
+            </a:solidFill>
+          </a:ln>
+          <a:effectLst/>
+        </p:spPr>
+        <p:style>
+          <a:lnRef idx="1">
+            <a:schemeClr val="accent1"/>
+          </a:lnRef>
+          <a:fillRef idx="3">
+            <a:schemeClr val="accent1"/>
+          </a:fillRef>
+          <a:effectRef idx="2">
+            <a:schemeClr val="accent1"/>
+          </a:effectRef>
+          <a:fontRef idx="minor">
+            <a:schemeClr val="lt1"/>
+          </a:fontRef>
+        </p:style>
+        <p:txBody>
+          <a:bodyPr rtlCol="0" anchor="ctr" wrap="square" lIns="73152" rIns="73152" tIns="36576" bIns="36576"/>
+          <a:lstStyle/>
+          <a:p>
+            <a:pPr algn="ctr"/>
+          </a:p>
+        </p:txBody>
+      </p:sp>
+      <p:sp>
+        <p:nvSpPr>
+          <p:cNvPr id="11" name="TextBox 10"/>
+          <p:cNvSpPr txBox="1"/>
+          <p:nvPr/>
+        </p:nvSpPr>
+        <p:spPr>
+          <a:xfrm>
+            <a:off x="7370064" y="896112"/>
+            <a:ext cx="2011680" cy="219456"/>
+          </a:xfrm>
+          <a:prstGeom prst="rect">
+            <a:avLst/>
+          </a:prstGeom>
+          <a:noFill/>
+        </p:spPr>
+        <p:txBody>
+          <a:bodyPr wrap="none" lIns="18288" tIns="0" bIns="0">
+            <a:spAutoFit/>
+          </a:bodyPr>
+          <a:lstStyle/>
+          <a:p>
+            <a:pPr algn="ctr">
+              <a:spcBef>
+                <a:spcPts val="0"/>
+              </a:spcBef>
+              <a:spcAft>
+                <a:spcPts val="0"/>
+              </a:spcAft>
+            </a:pPr>
+            <a:r>
+              <a:rPr sz="1200" b="1">
+                <a:solidFill>
+                  <a:srgbClr val="3F4A5A"/>
+                </a:solidFill>
+                <a:latin typeface="Calibri"/>
+              </a:rPr>
+              <a:t>Slanted  Files you add</a:t>
+            </a:r>
+          </a:p>
+        </p:txBody>
+      </p:sp>
+      <p:sp>
+        <p:nvSpPr>
+          <p:cNvPr id="12" name="Document 11"/>
+          <p:cNvSpPr/>
+          <p:nvPr/>
+        </p:nvSpPr>
+        <p:spPr>
+          <a:xfrm>
+            <a:off x="9464040" y="896112"/>
+            <a:ext cx="292608" cy="237744"/>
+          </a:xfrm>
+          <a:prstGeom prst="flowChartDocument">
+            <a:avLst/>
+          </a:prstGeom>
+          <a:solidFill>
+            <a:srgbClr val="E5F6F4"/>
+          </a:solidFill>
+          <a:ln w="22225">
+            <a:solidFill>
+              <a:srgbClr val="0F6E6B"/>
+            </a:solidFill>
+          </a:ln>
+          <a:effectLst/>
+        </p:spPr>
+        <p:style>
+          <a:lnRef idx="1">
+            <a:schemeClr val="accent1"/>
+          </a:lnRef>
+          <a:fillRef idx="3">
+            <a:schemeClr val="accent1"/>
+          </a:fillRef>
+          <a:effectRef idx="2">
+            <a:schemeClr val="accent1"/>
+          </a:effectRef>
+          <a:fontRef idx="minor">
+            <a:schemeClr val="lt1"/>
+          </a:fontRef>
+        </p:style>
+        <p:txBody>
+          <a:bodyPr rtlCol="0" anchor="ctr" wrap="square" lIns="73152" rIns="73152" tIns="36576" bIns="36576"/>
+          <a:lstStyle/>
+          <a:p>
+            <a:pPr algn="ctr"/>
+          </a:p>
+        </p:txBody>
+      </p:sp>
+      <p:sp>
+        <p:nvSpPr>
+          <p:cNvPr id="13" name="TextBox 12"/>
+          <p:cNvSpPr txBox="1"/>
+          <p:nvPr/>
+        </p:nvSpPr>
+        <p:spPr>
+          <a:xfrm>
+            <a:off x="9793224" y="896112"/>
+            <a:ext cx="2011680" cy="219456"/>
+          </a:xfrm>
+          <a:prstGeom prst="rect">
+            <a:avLst/>
+          </a:prstGeom>
+          <a:noFill/>
+        </p:spPr>
+        <p:txBody>
+          <a:bodyPr wrap="none" lIns="18288" tIns="0" bIns="0">
+            <a:spAutoFit/>
+          </a:bodyPr>
+          <a:lstStyle/>
+          <a:p>
+            <a:pPr algn="ctr">
+              <a:spcBef>
+                <a:spcPts val="0"/>
+              </a:spcBef>
+              <a:spcAft>
+                <a:spcPts val="0"/>
+              </a:spcAft>
+            </a:pPr>
+            <a:r>
+              <a:rPr sz="1200" b="1">
+                <a:solidFill>
+                  <a:srgbClr val="3F4A5A"/>
+                </a:solidFill>
+                <a:latin typeface="Calibri"/>
+              </a:rPr>
+              <a:t>Document  File produced</a:t>
+            </a:r>
+          </a:p>
+        </p:txBody>
+      </p:sp>
+      <p:sp>
+        <p:nvSpPr>
+          <p:cNvPr id="14" name="Document 13"/>
+          <p:cNvSpPr/>
+          <p:nvPr/>
+        </p:nvSpPr>
+        <p:spPr>
+          <a:xfrm>
+            <a:off x="1645920" y="1298448"/>
+            <a:ext cx="8869680" cy="658368"/>
+          </a:xfrm>
+          <a:prstGeom prst="flowChartDocument">
+            <a:avLst/>
+          </a:prstGeom>
+          <a:solidFill>
+            <a:srgbClr val="E5F6F4"/>
+          </a:solidFill>
+          <a:ln w="22225">
+            <a:solidFill>
+              <a:srgbClr val="0F6E6B"/>
+            </a:solidFill>
+          </a:ln>
+          <a:effectLst/>
+        </p:spPr>
+        <p:style>
+          <a:lnRef idx="1">
+            <a:schemeClr val="accent1"/>
+          </a:lnRef>
+          <a:fillRef idx="3">
+            <a:schemeClr val="accent1"/>
+          </a:fillRef>
+          <a:effectRef idx="2">
+            <a:schemeClr val="accent1"/>
+          </a:effectRef>
+          <a:fontRef idx="minor">
+            <a:schemeClr val="lt1"/>
+          </a:fontRef>
+        </p:style>
+        <p:txBody>
+          <a:bodyPr rtlCol="0" anchor="ctr" wrap="square" lIns="73152" rIns="73152" tIns="36576" bIns="36576"/>
+          <a:lstStyle/>
+          <a:p>
+            <a:pPr algn="ctr">
+              <a:spcBef>
+                <a:spcPts val="0"/>
+              </a:spcBef>
+              <a:spcAft>
+                <a:spcPts val="0"/>
+              </a:spcAft>
+            </a:pPr>
+            <a:r>
+              <a:rPr sz="1200" b="1">
+                <a:solidFill>
+                  <a:srgbClr val="0F6E6B"/>
+                </a:solidFill>
+                <a:latin typeface="Calibri"/>
+              </a:rPr>
+              <a:t>Application</a:t>
+            </a:r>
+          </a:p>
+          <a:p>
+            <a:pPr algn="ctr">
+              <a:spcBef>
+                <a:spcPts val="0"/>
+              </a:spcBef>
+              <a:spcAft>
+                <a:spcPts val="0"/>
+              </a:spcAft>
+            </a:pPr>
+            <a:r>
+              <a:rPr sz="1400" b="0">
+                <a:solidFill>
+                  <a:srgbClr val="1C1917"/>
+                </a:solidFill>
+                <a:latin typeface="Calibri"/>
+              </a:rPr>
+              <a:t>Save PlanNumber_BeginningYear-Valuation.pdf, an Outlook draft, and a log row</a:t>
+            </a:r>
+          </a:p>
+        </p:txBody>
+      </p:sp>
+      <p:sp>
+        <p:nvSpPr>
+          <p:cNvPr id="15" name="Decision 14"/>
+          <p:cNvSpPr/>
+          <p:nvPr/>
+        </p:nvSpPr>
+        <p:spPr>
+          <a:xfrm>
+            <a:off x="4956048" y="2103120"/>
+            <a:ext cx="2286000" cy="1051560"/>
+          </a:xfrm>
+          <a:prstGeom prst="flowChartDecision">
+            <a:avLst/>
+          </a:prstGeom>
+          <a:solidFill>
+            <a:srgbClr val="FFF4D4"/>
+          </a:solidFill>
+          <a:ln w="22225">
+            <a:solidFill>
+              <a:srgbClr val="B45309"/>
+            </a:solidFill>
+          </a:ln>
+          <a:effectLst/>
+        </p:spPr>
+        <p:style>
+          <a:lnRef idx="1">
+            <a:schemeClr val="accent1"/>
+          </a:lnRef>
+          <a:fillRef idx="3">
+            <a:schemeClr val="accent1"/>
+          </a:fillRef>
+          <a:effectRef idx="2">
+            <a:schemeClr val="accent1"/>
+          </a:effectRef>
+          <a:fontRef idx="minor">
+            <a:schemeClr val="lt1"/>
+          </a:fontRef>
+        </p:style>
+        <p:txBody>
+          <a:bodyPr rtlCol="0" anchor="ctr" wrap="square" lIns="73152" rIns="73152" tIns="36576" bIns="36576"/>
           <a:lstStyle/>
           <a:p>
             <a:pPr algn="ctr">
@@ -7154,14 +8390,14 @@
       </p:sp>
       <p:sp>
         <p:nvSpPr>
-          <p:cNvPr id="15" name="Process 14"/>
+          <p:cNvPr id="16" name="Process 15"/>
           <p:cNvSpPr/>
           <p:nvPr/>
         </p:nvSpPr>
         <p:spPr>
           <a:xfrm>
-            <a:off x="292608" y="2505456"/>
-            <a:ext cx="5669280" cy="841248"/>
+            <a:off x="292608" y="3310128"/>
+            <a:ext cx="5669280" cy="713232"/>
           </a:xfrm>
           <a:prstGeom prst="flowChartProcess">
             <a:avLst/>
@@ -7191,7 +8427,7 @@
           </a:fontRef>
         </p:style>
         <p:txBody>
-          <a:bodyPr rtlCol="0" anchor="ctr" wrap="square" lIns="73152" rIns="73152"/>
+          <a:bodyPr rtlCol="0" anchor="ctr" wrap="square" lIns="73152" rIns="73152" tIns="36576" bIns="36576"/>
           <a:lstStyle/>
           <a:p>
             <a:pPr algn="ctr">
@@ -7235,14 +8471,14 @@
       </p:sp>
       <p:sp>
         <p:nvSpPr>
-          <p:cNvPr id="16" name="Process 15"/>
+          <p:cNvPr id="17" name="Process 16"/>
           <p:cNvSpPr/>
           <p:nvPr/>
         </p:nvSpPr>
         <p:spPr>
           <a:xfrm>
-            <a:off x="6236208" y="2505456"/>
-            <a:ext cx="5650992" cy="841248"/>
+            <a:off x="6236208" y="3310128"/>
+            <a:ext cx="5650992" cy="713232"/>
           </a:xfrm>
           <a:prstGeom prst="flowChartProcess">
             <a:avLst/>
@@ -7272,7 +8508,7 @@
           </a:fontRef>
         </p:style>
         <p:txBody>
-          <a:bodyPr rtlCol="0" anchor="ctr" wrap="square" lIns="73152" rIns="73152"/>
+          <a:bodyPr rtlCol="0" anchor="ctr" wrap="square" lIns="73152" rIns="73152" tIns="36576" bIns="36576"/>
           <a:lstStyle/>
           <a:p>
             <a:pPr algn="ctr">
@@ -7316,14 +8552,14 @@
       </p:sp>
       <p:cxnSp>
         <p:nvCxnSpPr>
-          <p:cNvPr id="17" name="Connector 16"/>
+          <p:cNvPr id="18" name="Connector 17"/>
           <p:cNvCxnSpPr/>
           <p:nvPr/>
         </p:nvCxnSpPr>
         <p:spPr>
           <a:xfrm flipH="1">
-            <a:off x="4374489" y="2350008"/>
-            <a:ext cx="1221639" cy="155448"/>
+            <a:off x="4374489" y="3154679"/>
+            <a:ext cx="1221639" cy="155449"/>
           </a:xfrm>
           <a:prstGeom prst="line">
             <a:avLst/>
@@ -7352,14 +8588,14 @@
       </p:cxnSp>
       <p:cxnSp>
         <p:nvCxnSpPr>
-          <p:cNvPr id="18" name="Connector 17"/>
+          <p:cNvPr id="19" name="Connector 18"/>
           <p:cNvCxnSpPr/>
           <p:nvPr/>
         </p:nvCxnSpPr>
         <p:spPr>
           <a:xfrm>
-            <a:off x="6601968" y="2350008"/>
-            <a:ext cx="1216517" cy="155448"/>
+            <a:off x="6601968" y="3154679"/>
+            <a:ext cx="1216517" cy="155449"/>
           </a:xfrm>
           <a:prstGeom prst="line">
             <a:avLst/>
@@ -7388,13 +8624,13 @@
       </p:cxnSp>
       <p:sp>
         <p:nvSpPr>
-          <p:cNvPr id="19" name="TextBox 18"/>
+          <p:cNvPr id="20" name="TextBox 19"/>
           <p:cNvSpPr txBox="1"/>
           <p:nvPr/>
         </p:nvSpPr>
         <p:spPr>
           <a:xfrm>
-            <a:off x="429768" y="2267712"/>
+            <a:off x="429768" y="3072384"/>
             <a:ext cx="457200" cy="219456"/>
           </a:xfrm>
           <a:prstGeom prst="rect">
@@ -7403,7 +8639,7 @@
           <a:noFill/>
         </p:spPr>
         <p:txBody>
-          <a:bodyPr wrap="none" lIns="18288" rIns="0" tIns="0" bIns="0">
+          <a:bodyPr wrap="none" lIns="18288" tIns="0" bIns="0">
             <a:spAutoFit/>
           </a:bodyPr>
           <a:lstStyle/>
@@ -7430,13 +8666,13 @@
       </p:sp>
       <p:sp>
         <p:nvSpPr>
-          <p:cNvPr id="20" name="TextBox 19"/>
+          <p:cNvPr id="21" name="TextBox 20"/>
           <p:cNvSpPr txBox="1"/>
           <p:nvPr/>
         </p:nvSpPr>
         <p:spPr>
           <a:xfrm>
-            <a:off x="11338560" y="2267712"/>
+            <a:off x="11338560" y="3072384"/>
             <a:ext cx="411480" cy="219456"/>
           </a:xfrm>
           <a:prstGeom prst="rect">
@@ -7445,7 +8681,7 @@
           <a:noFill/>
         </p:spPr>
         <p:txBody>
-          <a:bodyPr wrap="none" lIns="18288" rIns="0" tIns="0" bIns="0">
+          <a:bodyPr wrap="none" lIns="18288" tIns="0" bIns="0">
             <a:spAutoFit/>
           </a:bodyPr>
           <a:lstStyle/>
@@ -7470,16 +8706,52 @@
           </a:p>
         </p:txBody>
       </p:sp>
-      <p:sp>
-        <p:nvSpPr>
-          <p:cNvPr id="21" name="Document 20"/>
+      <p:cxnSp>
+        <p:nvCxnSpPr>
+          <p:cNvPr id="22" name="Connector 21"/>
+          <p:cNvCxnSpPr/>
+          <p:nvPr/>
+        </p:nvCxnSpPr>
+        <p:spPr>
+          <a:xfrm>
+            <a:off x="6080759" y="1965959"/>
+            <a:ext cx="18289" cy="128017"/>
+          </a:xfrm>
+          <a:prstGeom prst="line">
+            <a:avLst/>
+          </a:prstGeom>
+          <a:ln w="22225">
+            <a:solidFill>
+              <a:srgbClr val="3F4A5A"/>
+            </a:solidFill>
+            <a:tailEnd type="triangle" w="med" len="med"/>
+          </a:ln>
+        </p:spPr>
+        <p:style>
+          <a:lnRef idx="2">
+            <a:schemeClr val="accent1"/>
+          </a:lnRef>
+          <a:fillRef idx="0">
+            <a:schemeClr val="accent1"/>
+          </a:fillRef>
+          <a:effectRef idx="1">
+            <a:schemeClr val="accent1"/>
+          </a:effectRef>
+          <a:fontRef idx="minor">
+            <a:schemeClr val="tx1"/>
+          </a:fontRef>
+        </p:style>
+      </p:cxnSp>
+      <p:sp>
+        <p:nvSpPr>
+          <p:cNvPr id="23" name="Document 22"/>
           <p:cNvSpPr/>
           <p:nvPr/>
         </p:nvSpPr>
         <p:spPr>
           <a:xfrm>
-            <a:off x="2194560" y="3566160"/>
-            <a:ext cx="7772400" cy="713232"/>
+            <a:off x="2194560" y="4206240"/>
+            <a:ext cx="7772400" cy="621792"/>
           </a:xfrm>
           <a:prstGeom prst="flowChartDocument">
             <a:avLst/>
@@ -7509,7 +8781,7 @@
           </a:fontRef>
         </p:style>
         <p:txBody>
-          <a:bodyPr rtlCol="0" anchor="ctr" wrap="square" lIns="73152" rIns="73152"/>
+          <a:bodyPr rtlCol="0" anchor="ctr" wrap="square" lIns="73152" rIns="73152" tIns="36576" bIns="36576"/>
           <a:lstStyle/>
           <a:p>
             <a:pPr algn="ctr">
@@ -7553,14 +8825,14 @@
       </p:sp>
       <p:cxnSp>
         <p:nvCxnSpPr>
-          <p:cNvPr id="22" name="Connector 21"/>
+          <p:cNvPr id="24" name="Connector 23"/>
           <p:cNvCxnSpPr/>
           <p:nvPr/>
         </p:nvCxnSpPr>
         <p:spPr>
           <a:xfrm>
-            <a:off x="3127248" y="3355848"/>
-            <a:ext cx="0" cy="201168"/>
+            <a:off x="3127248" y="4032504"/>
+            <a:ext cx="0" cy="164592"/>
           </a:xfrm>
           <a:prstGeom prst="line">
             <a:avLst/>
@@ -7589,14 +8861,14 @@
       </p:cxnSp>
       <p:cxnSp>
         <p:nvCxnSpPr>
-          <p:cNvPr id="23" name="Connector 22"/>
+          <p:cNvPr id="25" name="Connector 24"/>
           <p:cNvCxnSpPr/>
           <p:nvPr/>
         </p:nvCxnSpPr>
         <p:spPr>
           <a:xfrm>
-            <a:off x="9061704" y="3355848"/>
-            <a:ext cx="0" cy="201168"/>
+            <a:off x="9061704" y="4032504"/>
+            <a:ext cx="0" cy="164592"/>
           </a:xfrm>
           <a:prstGeom prst="line">
             <a:avLst/>
@@ -7625,14 +8897,14 @@
       </p:cxnSp>
       <p:sp>
         <p:nvSpPr>
-          <p:cNvPr id="24" name="Process 23"/>
+          <p:cNvPr id="26" name="Process 25"/>
           <p:cNvSpPr/>
           <p:nvPr/>
         </p:nvSpPr>
         <p:spPr>
           <a:xfrm>
-            <a:off x="2194560" y="4480560"/>
-            <a:ext cx="7772400" cy="658368"/>
+            <a:off x="2194560" y="4983480"/>
+            <a:ext cx="7772400" cy="566928"/>
           </a:xfrm>
           <a:prstGeom prst="flowChartProcess">
             <a:avLst/>
@@ -7662,7 +8934,7 @@
           </a:fontRef>
         </p:style>
         <p:txBody>
-          <a:bodyPr rtlCol="0" anchor="ctr" wrap="square" lIns="73152" rIns="73152"/>
+          <a:bodyPr rtlCol="0" anchor="ctr" wrap="square" lIns="73152" rIns="73152" tIns="36576" bIns="36576"/>
           <a:lstStyle/>
           <a:p>
             <a:pPr algn="ctr">
@@ -7706,14 +8978,14 @@
       </p:sp>
       <p:cxnSp>
         <p:nvCxnSpPr>
-          <p:cNvPr id="25" name="Connector 24"/>
+          <p:cNvPr id="27" name="Connector 26"/>
           <p:cNvCxnSpPr/>
           <p:nvPr/>
         </p:nvCxnSpPr>
         <p:spPr>
           <a:xfrm>
-            <a:off x="6080760" y="4288536"/>
-            <a:ext cx="0" cy="182880"/>
+            <a:off x="6080760" y="4837175"/>
+            <a:ext cx="0" cy="137161"/>
           </a:xfrm>
           <a:prstGeom prst="line">
             <a:avLst/>
@@ -7742,14 +9014,14 @@
       </p:cxnSp>
       <p:sp>
         <p:nvSpPr>
-          <p:cNvPr id="26" name="Terminator 25"/>
+          <p:cNvPr id="28" name="Terminator 27"/>
           <p:cNvSpPr/>
           <p:nvPr/>
         </p:nvSpPr>
         <p:spPr>
           <a:xfrm>
-            <a:off x="5074920" y="5321808"/>
-            <a:ext cx="2011680" cy="530352"/>
+            <a:off x="5074920" y="5650992"/>
+            <a:ext cx="2011680" cy="438912"/>
           </a:xfrm>
           <a:prstGeom prst="flowChartTerminator">
             <a:avLst/>
@@ -7779,7 +9051,7 @@
           </a:fontRef>
         </p:style>
         <p:txBody>
-          <a:bodyPr rtlCol="0" anchor="ctr" wrap="square" lIns="73152" rIns="73152"/>
+          <a:bodyPr rtlCol="0" anchor="ctr" wrap="square" lIns="73152" rIns="73152" tIns="36576" bIns="36576"/>
           <a:lstStyle/>
           <a:p>
             <a:pPr algn="ctr">
@@ -7804,14 +9076,14 @@
       </p:sp>
       <p:cxnSp>
         <p:nvCxnSpPr>
-          <p:cNvPr id="27" name="Connector 26"/>
+          <p:cNvPr id="29" name="Connector 28"/>
           <p:cNvCxnSpPr/>
           <p:nvPr/>
         </p:nvCxnSpPr>
         <p:spPr>
           <a:xfrm>
-            <a:off x="6080760" y="5148072"/>
-            <a:ext cx="0" cy="164592"/>
+            <a:off x="6080760" y="5559552"/>
+            <a:ext cx="0" cy="82296"/>
           </a:xfrm>
           <a:prstGeom prst="line">
             <a:avLst/>
@@ -7840,14 +9112,14 @@
       </p:cxnSp>
       <p:sp>
         <p:nvSpPr>
-          <p:cNvPr id="28" name="Rounded Rectangle 27"/>
+          <p:cNvPr id="30" name="Rounded Rectangle 29"/>
           <p:cNvSpPr/>
           <p:nvPr/>
         </p:nvSpPr>
         <p:spPr>
           <a:xfrm>
-            <a:off x="320040" y="5989320"/>
-            <a:ext cx="11521440" cy="713232"/>
+            <a:off x="320040" y="6199632"/>
+            <a:ext cx="11521440" cy="502920"/>
           </a:xfrm>
           <a:prstGeom prst="roundRect">
             <a:avLst/>
@@ -7877,7 +9149,7 @@
           </a:fontRef>
         </p:style>
         <p:txBody>
-          <a:bodyPr rtlCol="0" anchor="ctr" wrap="square" lIns="73152" rIns="73152"/>
+          <a:bodyPr rtlCol="0" anchor="ctr" wrap="square" lIns="73152" rIns="73152" tIns="36576" bIns="36576"/>
           <a:lstStyle/>
           <a:p>
             <a:pPr algn="ctr">
@@ -7889,32 +9161,13 @@
               </a:spcAft>
             </a:pPr>
             <a:r>
-              <a:rPr sz="1200" b="1">
-                <a:solidFill>
-                  <a:srgbClr val="9A3412"/>
+              <a:rPr sz="1200" b="0">
+                <a:solidFill>
+                  <a:srgbClr val="1C1917"/>
                 </a:solidFill>
                 <a:latin typeface="Calibri"/>
               </a:rPr>
-              <a:t>Still done by you, outside this flow</a:t>
-            </a:r>
-          </a:p>
-          <a:p>
-            <a:pPr algn="ctr">
-              <a:spcBef>
-                <a:spcPts val="0"/>
-              </a:spcBef>
-              <a:spcAft>
-                <a:spcPts val="0"/>
-              </a:spcAft>
-            </a:pPr>
-            <a:r>
-              <a:rPr sz="1200" b="0">
-                <a:solidFill>
-                  <a:srgbClr val="1C1917"/>
-                </a:solidFill>
-                <a:latin typeface="Calibri"/>
-              </a:rPr>
-              <a:t>Testing Log claim   ·   converting a non-PDF   ·   any company name besides Mutual of America   ·   page order inside a 410(b) report</a:t>
+              <a:t>Still by hand: Testing Log, converting a non-PDF, other company names on the cover, and pages inside a 410(b) report.</a:t>
             </a:r>
           </a:p>
         </p:txBody>

--- a/new-app/docs/Application-Flowchart.pptx
+++ b/new-app/docs/Application-Flowchart.pptx
@@ -9,6 +9,7 @@
     <p:sldId id="257" r:id="rId8"/>
     <p:sldId id="258" r:id="rId9"/>
     <p:sldId id="259" r:id="rId10"/>
+    <p:sldId id="260" r:id="rId11"/>
   </p:sldIdLst>
   <p:sldSz cx="12191695" cy="6858000" type="screen4x3"/>
   <p:notesSz cx="6858000" cy="9144000"/>
@@ -3100,18 +3101,17 @@
         <p:spPr>
           <a:xfrm>
             <a:off x="0" y="0"/>
-            <a:ext cx="12191695" cy="73152"/>
+            <a:ext cx="12191695" cy="6858000"/>
           </a:xfrm>
           <a:prstGeom prst="rect">
             <a:avLst/>
           </a:prstGeom>
           <a:solidFill>
-            <a:srgbClr val="0F6E6B"/>
+            <a:srgbClr val="F7F8F6"/>
           </a:solidFill>
-          <a:ln w="22225">
+          <a:ln>
             <a:noFill/>
           </a:ln>
-          <a:effectLst/>
         </p:spPr>
         <p:style>
           <a:lnRef idx="1">
@@ -3137,88 +3137,24 @@
       </p:sp>
       <p:sp>
         <p:nvSpPr>
-          <p:cNvPr id="3" name="TextBox 2"/>
-          <p:cNvSpPr txBox="1"/>
-          <p:nvPr/>
-        </p:nvSpPr>
-        <p:spPr>
-          <a:xfrm>
-            <a:off x="320040" y="146304"/>
-            <a:ext cx="11521440" cy="658368"/>
+          <p:cNvPr id="3" name="Rectangle 2"/>
+          <p:cNvSpPr/>
+          <p:nvPr/>
+        </p:nvSpPr>
+        <p:spPr>
+          <a:xfrm>
+            <a:off x="0" y="0"/>
+            <a:ext cx="12191695" cy="73152"/>
           </a:xfrm>
           <a:prstGeom prst="rect">
             <a:avLst/>
           </a:prstGeom>
-          <a:noFill/>
-        </p:spPr>
-        <p:txBody>
-          <a:bodyPr wrap="none">
-            <a:spAutoFit/>
-          </a:bodyPr>
-          <a:lstStyle/>
-          <a:p>
-            <a:pPr algn="l">
-              <a:spcBef>
-                <a:spcPts val="0"/>
-              </a:spcBef>
-              <a:spcAft>
-                <a:spcPts val="0"/>
-              </a:spcAft>
-            </a:pPr>
-            <a:r>
-              <a:rPr sz="2600" b="1">
-                <a:solidFill>
-                  <a:srgbClr val="1E3A5F"/>
-                </a:solidFill>
-                <a:latin typeface="Calibri"/>
-              </a:rPr>
-              <a:t>How the application works</a:t>
-            </a:r>
-          </a:p>
-          <a:p>
-            <a:pPr algn="l">
-              <a:spcBef>
-                <a:spcPts val="0"/>
-              </a:spcBef>
-              <a:spcAft>
-                <a:spcPts val="0"/>
-              </a:spcAft>
-            </a:pPr>
-            <a:r>
-              <a:rPr sz="1400" b="0">
-                <a:solidFill>
-                  <a:srgbClr val="3F4A5A"/>
-                </a:solidFill>
-                <a:latin typeface="Calibri"/>
-              </a:rPr>
-              <a:t>Page 1 of 4   ·   You prepare the files</a:t>
-            </a:r>
-          </a:p>
-        </p:txBody>
-      </p:sp>
-      <p:sp>
-        <p:nvSpPr>
-          <p:cNvPr id="4" name="Terminator 3"/>
-          <p:cNvSpPr/>
-          <p:nvPr/>
-        </p:nvSpPr>
-        <p:spPr>
-          <a:xfrm>
-            <a:off x="320040" y="896112"/>
-            <a:ext cx="292608" cy="237744"/>
-          </a:xfrm>
-          <a:prstGeom prst="flowChartTerminator">
-            <a:avLst/>
-          </a:prstGeom>
           <a:solidFill>
-            <a:srgbClr val="1B7A4A"/>
+            <a:srgbClr val="0F6E6B"/>
           </a:solidFill>
-          <a:ln w="22225">
-            <a:solidFill>
-              <a:srgbClr val="145C38"/>
-            </a:solidFill>
+          <a:ln>
+            <a:noFill/>
           </a:ln>
-          <a:effectLst/>
         </p:spPr>
         <p:style>
           <a:lnRef idx="1">
@@ -3235,10 +3171,45 @@
           </a:fontRef>
         </p:style>
         <p:txBody>
-          <a:bodyPr rtlCol="0" anchor="ctr" wrap="square" lIns="73152" rIns="73152" tIns="36576" bIns="36576"/>
+          <a:bodyPr rtlCol="0" anchor="ctr"/>
           <a:lstStyle/>
           <a:p>
             <a:pPr algn="ctr"/>
+          </a:p>
+        </p:txBody>
+      </p:sp>
+      <p:sp>
+        <p:nvSpPr>
+          <p:cNvPr id="4" name="TextBox 3"/>
+          <p:cNvSpPr txBox="1"/>
+          <p:nvPr/>
+        </p:nvSpPr>
+        <p:spPr>
+          <a:xfrm>
+            <a:off x="320040" y="146304"/>
+            <a:ext cx="7772400" cy="329184"/>
+          </a:xfrm>
+          <a:prstGeom prst="rect">
+            <a:avLst/>
+          </a:prstGeom>
+          <a:noFill/>
+        </p:spPr>
+        <p:txBody>
+          <a:bodyPr wrap="square">
+            <a:spAutoFit/>
+          </a:bodyPr>
+          <a:lstStyle/>
+          <a:p>
+            <a:pPr algn="l"/>
+            <a:r>
+              <a:rPr sz="2200" b="1">
+                <a:solidFill>
+                  <a:srgbClr val="1E3A5F"/>
+                </a:solidFill>
+                <a:latin typeface="Calibri"/>
+              </a:rPr>
+              <a:t>How the application works</a:t>
+            </a:r>
           </a:p>
         </p:txBody>
       </p:sp>
@@ -3250,8 +3221,8 @@
         </p:nvSpPr>
         <p:spPr>
           <a:xfrm>
-            <a:off x="649224" y="896112"/>
-            <a:ext cx="2011680" cy="219456"/>
+            <a:off x="7680960" y="201168"/>
+            <a:ext cx="4206240" cy="274320"/>
           </a:xfrm>
           <a:prstGeom prst="rect">
             <a:avLst/>
@@ -3259,54 +3230,46 @@
           <a:noFill/>
         </p:spPr>
         <p:txBody>
-          <a:bodyPr wrap="none" lIns="18288" tIns="0" bIns="0">
+          <a:bodyPr wrap="square">
             <a:spAutoFit/>
           </a:bodyPr>
           <a:lstStyle/>
           <a:p>
-            <a:pPr algn="ctr">
-              <a:spcBef>
-                <a:spcPts val="0"/>
-              </a:spcBef>
-              <a:spcAft>
-                <a:spcPts val="0"/>
-              </a:spcAft>
-            </a:pPr>
-            <a:r>
-              <a:rPr sz="1200" b="1">
+            <a:pPr algn="l"/>
+            <a:r>
+              <a:rPr sz="1200" b="0">
                 <a:solidFill>
                   <a:srgbClr val="3F4A5A"/>
                 </a:solidFill>
                 <a:latin typeface="Calibri"/>
               </a:rPr>
-              <a:t>Oval  Start or end</a:t>
-            </a:r>
-          </a:p>
-        </p:txBody>
-      </p:sp>
-      <p:sp>
-        <p:nvSpPr>
-          <p:cNvPr id="6" name="Process 5"/>
+              <a:t>Page 1 of 5   ·   You prepare the files</a:t>
+            </a:r>
+          </a:p>
+        </p:txBody>
+      </p:sp>
+      <p:sp>
+        <p:nvSpPr>
+          <p:cNvPr id="6" name="Terminator 5"/>
           <p:cNvSpPr/>
           <p:nvPr/>
         </p:nvSpPr>
         <p:spPr>
           <a:xfrm>
-            <a:off x="2468880" y="896112"/>
+            <a:off x="320040" y="621792"/>
             <a:ext cx="292608" cy="237744"/>
           </a:xfrm>
-          <a:prstGeom prst="flowChartProcess">
+          <a:prstGeom prst="flowChartTerminator">
             <a:avLst/>
           </a:prstGeom>
           <a:solidFill>
-            <a:srgbClr val="E7F0FB"/>
+            <a:srgbClr val="FFFFFF"/>
           </a:solidFill>
-          <a:ln w="22225">
+          <a:ln>
             <a:solidFill>
-              <a:srgbClr val="1D4E89"/>
+              <a:srgbClr val="1B7A4A"/>
             </a:solidFill>
           </a:ln>
-          <a:effectLst/>
         </p:spPr>
         <p:style>
           <a:lnRef idx="1">
@@ -3323,7 +3286,7 @@
           </a:fontRef>
         </p:style>
         <p:txBody>
-          <a:bodyPr rtlCol="0" anchor="ctr" wrap="square" lIns="73152" rIns="73152" tIns="36576" bIns="36576"/>
+          <a:bodyPr rtlCol="0" anchor="ctr"/>
           <a:lstStyle/>
           <a:p>
             <a:pPr algn="ctr"/>
@@ -3338,8 +3301,8 @@
         </p:nvSpPr>
         <p:spPr>
           <a:xfrm>
-            <a:off x="2798064" y="896112"/>
-            <a:ext cx="2011680" cy="219456"/>
+            <a:off x="649224" y="603504"/>
+            <a:ext cx="1965960" cy="274320"/>
           </a:xfrm>
           <a:prstGeom prst="rect">
             <a:avLst/>
@@ -3347,54 +3310,46 @@
           <a:noFill/>
         </p:spPr>
         <p:txBody>
-          <a:bodyPr wrap="none" lIns="18288" tIns="0" bIns="0">
+          <a:bodyPr wrap="square">
             <a:spAutoFit/>
           </a:bodyPr>
           <a:lstStyle/>
           <a:p>
-            <a:pPr algn="ctr">
-              <a:spcBef>
-                <a:spcPts val="0"/>
-              </a:spcBef>
-              <a:spcAft>
-                <a:spcPts val="0"/>
-              </a:spcAft>
-            </a:pPr>
-            <a:r>
-              <a:rPr sz="1200" b="1">
+            <a:pPr algn="l"/>
+            <a:r>
+              <a:rPr sz="1100" b="0">
                 <a:solidFill>
                   <a:srgbClr val="3F4A5A"/>
                 </a:solidFill>
                 <a:latin typeface="Calibri"/>
               </a:rPr>
-              <a:t>Rectangle  A step</a:t>
-            </a:r>
-          </a:p>
-        </p:txBody>
-      </p:sp>
-      <p:sp>
-        <p:nvSpPr>
-          <p:cNvPr id="8" name="Decision 7"/>
+              <a:t>Oval   Start or end</a:t>
+            </a:r>
+          </a:p>
+        </p:txBody>
+      </p:sp>
+      <p:sp>
+        <p:nvSpPr>
+          <p:cNvPr id="8" name="Process 7"/>
           <p:cNvSpPr/>
           <p:nvPr/>
         </p:nvSpPr>
         <p:spPr>
           <a:xfrm>
-            <a:off x="4709160" y="896112"/>
+            <a:off x="2651760" y="621792"/>
             <a:ext cx="292608" cy="237744"/>
           </a:xfrm>
-          <a:prstGeom prst="flowChartDecision">
+          <a:prstGeom prst="flowChartProcess">
             <a:avLst/>
           </a:prstGeom>
           <a:solidFill>
-            <a:srgbClr val="FFF4D4"/>
+            <a:srgbClr val="FFFFFF"/>
           </a:solidFill>
-          <a:ln w="22225">
+          <a:ln>
             <a:solidFill>
-              <a:srgbClr val="B45309"/>
+              <a:srgbClr val="1D4E89"/>
             </a:solidFill>
           </a:ln>
-          <a:effectLst/>
         </p:spPr>
         <p:style>
           <a:lnRef idx="1">
@@ -3411,7 +3366,7 @@
           </a:fontRef>
         </p:style>
         <p:txBody>
-          <a:bodyPr rtlCol="0" anchor="ctr" wrap="square" lIns="73152" rIns="73152" tIns="36576" bIns="36576"/>
+          <a:bodyPr rtlCol="0" anchor="ctr"/>
           <a:lstStyle/>
           <a:p>
             <a:pPr algn="ctr"/>
@@ -3426,8 +3381,8 @@
         </p:nvSpPr>
         <p:spPr>
           <a:xfrm>
-            <a:off x="5038344" y="896112"/>
-            <a:ext cx="2011680" cy="219456"/>
+            <a:off x="2980944" y="603504"/>
+            <a:ext cx="1965960" cy="274320"/>
           </a:xfrm>
           <a:prstGeom prst="rect">
             <a:avLst/>
@@ -3435,54 +3390,46 @@
           <a:noFill/>
         </p:spPr>
         <p:txBody>
-          <a:bodyPr wrap="none" lIns="18288" tIns="0" bIns="0">
+          <a:bodyPr wrap="square">
             <a:spAutoFit/>
           </a:bodyPr>
           <a:lstStyle/>
           <a:p>
-            <a:pPr algn="ctr">
-              <a:spcBef>
-                <a:spcPts val="0"/>
-              </a:spcBef>
-              <a:spcAft>
-                <a:spcPts val="0"/>
-              </a:spcAft>
-            </a:pPr>
-            <a:r>
-              <a:rPr sz="1200" b="1">
+            <a:pPr algn="l"/>
+            <a:r>
+              <a:rPr sz="1100" b="0">
                 <a:solidFill>
                   <a:srgbClr val="3F4A5A"/>
                 </a:solidFill>
                 <a:latin typeface="Calibri"/>
               </a:rPr>
-              <a:t>Diamond  Yes or no</a:t>
-            </a:r>
-          </a:p>
-        </p:txBody>
-      </p:sp>
-      <p:sp>
-        <p:nvSpPr>
-          <p:cNvPr id="10" name="Data 9"/>
+              <a:t>Rectangle   A step</a:t>
+            </a:r>
+          </a:p>
+        </p:txBody>
+      </p:sp>
+      <p:sp>
+        <p:nvSpPr>
+          <p:cNvPr id="10" name="Decision 9"/>
           <p:cNvSpPr/>
           <p:nvPr/>
         </p:nvSpPr>
         <p:spPr>
           <a:xfrm>
-            <a:off x="7040880" y="896112"/>
+            <a:off x="4983479" y="621792"/>
             <a:ext cx="292608" cy="237744"/>
           </a:xfrm>
-          <a:prstGeom prst="flowChartInputOutput">
+          <a:prstGeom prst="flowChartDecision">
             <a:avLst/>
           </a:prstGeom>
           <a:solidFill>
-            <a:srgbClr val="EEF2FF"/>
+            <a:srgbClr val="FFFFFF"/>
           </a:solidFill>
-          <a:ln w="22225">
+          <a:ln>
             <a:solidFill>
-              <a:srgbClr val="373AB0"/>
+              <a:srgbClr val="B45309"/>
             </a:solidFill>
           </a:ln>
-          <a:effectLst/>
         </p:spPr>
         <p:style>
           <a:lnRef idx="1">
@@ -3499,7 +3446,7 @@
           </a:fontRef>
         </p:style>
         <p:txBody>
-          <a:bodyPr rtlCol="0" anchor="ctr" wrap="square" lIns="73152" rIns="73152" tIns="36576" bIns="36576"/>
+          <a:bodyPr rtlCol="0" anchor="ctr"/>
           <a:lstStyle/>
           <a:p>
             <a:pPr algn="ctr"/>
@@ -3514,8 +3461,8 @@
         </p:nvSpPr>
         <p:spPr>
           <a:xfrm>
-            <a:off x="7370064" y="896112"/>
-            <a:ext cx="2011680" cy="219456"/>
+            <a:off x="5312664" y="603504"/>
+            <a:ext cx="1965960" cy="274320"/>
           </a:xfrm>
           <a:prstGeom prst="rect">
             <a:avLst/>
@@ -3523,54 +3470,46 @@
           <a:noFill/>
         </p:spPr>
         <p:txBody>
-          <a:bodyPr wrap="none" lIns="18288" tIns="0" bIns="0">
+          <a:bodyPr wrap="square">
             <a:spAutoFit/>
           </a:bodyPr>
           <a:lstStyle/>
           <a:p>
-            <a:pPr algn="ctr">
-              <a:spcBef>
-                <a:spcPts val="0"/>
-              </a:spcBef>
-              <a:spcAft>
-                <a:spcPts val="0"/>
-              </a:spcAft>
-            </a:pPr>
-            <a:r>
-              <a:rPr sz="1200" b="1">
+            <a:pPr algn="l"/>
+            <a:r>
+              <a:rPr sz="1100" b="0">
                 <a:solidFill>
                   <a:srgbClr val="3F4A5A"/>
                 </a:solidFill>
                 <a:latin typeface="Calibri"/>
               </a:rPr>
-              <a:t>Slanted  Files you add</a:t>
-            </a:r>
-          </a:p>
-        </p:txBody>
-      </p:sp>
-      <p:sp>
-        <p:nvSpPr>
-          <p:cNvPr id="12" name="Document 11"/>
+              <a:t>Diamond   Yes or no</a:t>
+            </a:r>
+          </a:p>
+        </p:txBody>
+      </p:sp>
+      <p:sp>
+        <p:nvSpPr>
+          <p:cNvPr id="12" name="Data 11"/>
           <p:cNvSpPr/>
           <p:nvPr/>
         </p:nvSpPr>
         <p:spPr>
           <a:xfrm>
-            <a:off x="9464040" y="896112"/>
+            <a:off x="7315199" y="621792"/>
             <a:ext cx="292608" cy="237744"/>
           </a:xfrm>
-          <a:prstGeom prst="flowChartDocument">
+          <a:prstGeom prst="flowChartInputOutput">
             <a:avLst/>
           </a:prstGeom>
           <a:solidFill>
-            <a:srgbClr val="E5F6F4"/>
+            <a:srgbClr val="FFFFFF"/>
           </a:solidFill>
-          <a:ln w="22225">
+          <a:ln>
             <a:solidFill>
-              <a:srgbClr val="0F6E6B"/>
+              <a:srgbClr val="4338CA"/>
             </a:solidFill>
           </a:ln>
-          <a:effectLst/>
         </p:spPr>
         <p:style>
           <a:lnRef idx="1">
@@ -3587,7 +3526,7 @@
           </a:fontRef>
         </p:style>
         <p:txBody>
-          <a:bodyPr rtlCol="0" anchor="ctr" wrap="square" lIns="73152" rIns="73152" tIns="36576" bIns="36576"/>
+          <a:bodyPr rtlCol="0" anchor="ctr"/>
           <a:lstStyle/>
           <a:p>
             <a:pPr algn="ctr"/>
@@ -3602,8 +3541,8 @@
         </p:nvSpPr>
         <p:spPr>
           <a:xfrm>
-            <a:off x="9793224" y="896112"/>
-            <a:ext cx="2011680" cy="219456"/>
+            <a:off x="7644383" y="603504"/>
+            <a:ext cx="1965960" cy="274320"/>
           </a:xfrm>
           <a:prstGeom prst="rect">
             <a:avLst/>
@@ -3611,54 +3550,46 @@
           <a:noFill/>
         </p:spPr>
         <p:txBody>
-          <a:bodyPr wrap="none" lIns="18288" tIns="0" bIns="0">
+          <a:bodyPr wrap="square">
             <a:spAutoFit/>
           </a:bodyPr>
           <a:lstStyle/>
           <a:p>
-            <a:pPr algn="ctr">
-              <a:spcBef>
-                <a:spcPts val="0"/>
-              </a:spcBef>
-              <a:spcAft>
-                <a:spcPts val="0"/>
-              </a:spcAft>
-            </a:pPr>
-            <a:r>
-              <a:rPr sz="1200" b="1">
+            <a:pPr algn="l"/>
+            <a:r>
+              <a:rPr sz="1100" b="0">
                 <a:solidFill>
                   <a:srgbClr val="3F4A5A"/>
                 </a:solidFill>
                 <a:latin typeface="Calibri"/>
               </a:rPr>
-              <a:t>Document  File produced</a:t>
-            </a:r>
-          </a:p>
-        </p:txBody>
-      </p:sp>
-      <p:sp>
-        <p:nvSpPr>
-          <p:cNvPr id="14" name="Terminator 13"/>
+              <a:t>Slanted   Files you add</a:t>
+            </a:r>
+          </a:p>
+        </p:txBody>
+      </p:sp>
+      <p:sp>
+        <p:nvSpPr>
+          <p:cNvPr id="14" name="Document 13"/>
           <p:cNvSpPr/>
           <p:nvPr/>
         </p:nvSpPr>
         <p:spPr>
           <a:xfrm>
-            <a:off x="320040" y="1371600"/>
-            <a:ext cx="1417320" cy="713232"/>
-          </a:xfrm>
-          <a:prstGeom prst="flowChartTerminator">
+            <a:off x="9646919" y="621792"/>
+            <a:ext cx="292608" cy="237744"/>
+          </a:xfrm>
+          <a:prstGeom prst="flowChartDocument">
             <a:avLst/>
           </a:prstGeom>
           <a:solidFill>
-            <a:srgbClr val="1B7A4A"/>
+            <a:srgbClr val="FFFFFF"/>
           </a:solidFill>
-          <a:ln w="22225">
+          <a:ln>
             <a:solidFill>
-              <a:srgbClr val="145C38"/>
+              <a:srgbClr val="0F6E6B"/>
             </a:solidFill>
           </a:ln>
-          <a:effectLst/>
         </p:spPr>
         <p:style>
           <a:lnRef idx="1">
@@ -3675,52 +3606,70 @@
           </a:fontRef>
         </p:style>
         <p:txBody>
-          <a:bodyPr rtlCol="0" anchor="ctr" wrap="square" lIns="73152" rIns="73152" tIns="36576" bIns="36576"/>
-          <a:lstStyle/>
-          <a:p>
-            <a:pPr algn="ctr">
-              <a:spcBef>
-                <a:spcPts val="0"/>
-              </a:spcBef>
-              <a:spcAft>
-                <a:spcPts val="0"/>
-              </a:spcAft>
-            </a:pPr>
-            <a:r>
-              <a:rPr sz="1800" b="1">
-                <a:solidFill>
-                  <a:srgbClr val="FFFFFF"/>
-                </a:solidFill>
-                <a:latin typeface="Calibri"/>
-              </a:rPr>
-              <a:t>Start</a:t>
-            </a:r>
-          </a:p>
-        </p:txBody>
-      </p:sp>
-      <p:sp>
-        <p:nvSpPr>
-          <p:cNvPr id="15" name="Process 14"/>
+          <a:bodyPr rtlCol="0" anchor="ctr"/>
+          <a:lstStyle/>
+          <a:p>
+            <a:pPr algn="ctr"/>
+          </a:p>
+        </p:txBody>
+      </p:sp>
+      <p:sp>
+        <p:nvSpPr>
+          <p:cNvPr id="15" name="TextBox 14"/>
+          <p:cNvSpPr txBox="1"/>
+          <p:nvPr/>
+        </p:nvSpPr>
+        <p:spPr>
+          <a:xfrm>
+            <a:off x="9976103" y="603504"/>
+            <a:ext cx="1965960" cy="274320"/>
+          </a:xfrm>
+          <a:prstGeom prst="rect">
+            <a:avLst/>
+          </a:prstGeom>
+          <a:noFill/>
+        </p:spPr>
+        <p:txBody>
+          <a:bodyPr wrap="square">
+            <a:spAutoFit/>
+          </a:bodyPr>
+          <a:lstStyle/>
+          <a:p>
+            <a:pPr algn="l"/>
+            <a:r>
+              <a:rPr sz="1100" b="0">
+                <a:solidFill>
+                  <a:srgbClr val="3F4A5A"/>
+                </a:solidFill>
+                <a:latin typeface="Calibri"/>
+              </a:rPr>
+              <a:t>Document   File produced</a:t>
+            </a:r>
+          </a:p>
+        </p:txBody>
+      </p:sp>
+      <p:sp>
+        <p:nvSpPr>
+          <p:cNvPr id="16" name="Terminator 15"/>
           <p:cNvSpPr/>
           <p:nvPr/>
         </p:nvSpPr>
         <p:spPr>
           <a:xfrm>
-            <a:off x="2057400" y="1335024"/>
-            <a:ext cx="4297680" cy="786384"/>
-          </a:xfrm>
-          <a:prstGeom prst="flowChartProcess">
+            <a:off x="320040" y="1051560"/>
+            <a:ext cx="1554480" cy="658368"/>
+          </a:xfrm>
+          <a:prstGeom prst="flowChartTerminator">
             <a:avLst/>
           </a:prstGeom>
           <a:solidFill>
-            <a:srgbClr val="E7F0FB"/>
+            <a:srgbClr val="1B7A4A"/>
           </a:solidFill>
-          <a:ln w="22225">
+          <a:ln w="15875">
             <a:solidFill>
-              <a:srgbClr val="1D4E89"/>
+              <a:srgbClr val="FFFFFF"/>
             </a:solidFill>
           </a:ln>
-          <a:effectLst/>
         </p:spPr>
         <p:style>
           <a:lnRef idx="1">
@@ -3737,71 +3686,48 @@
           </a:fontRef>
         </p:style>
         <p:txBody>
-          <a:bodyPr rtlCol="0" anchor="ctr" wrap="square" lIns="73152" rIns="73152" tIns="36576" bIns="36576"/>
+          <a:bodyPr rtlCol="0" anchor="ctr" wrap="square" lIns="54864" rIns="54864" tIns="54864" bIns="54864"/>
           <a:lstStyle/>
           <a:p>
             <a:pPr algn="ctr">
-              <a:spcBef>
-                <a:spcPts val="0"/>
-              </a:spcBef>
               <a:spcAft>
                 <a:spcPts val="0"/>
               </a:spcAft>
             </a:pPr>
             <a:r>
-              <a:rPr sz="1200" b="1">
-                <a:solidFill>
-                  <a:srgbClr val="1D4E89"/>
-                </a:solidFill>
-                <a:latin typeface="Calibri"/>
-              </a:rPr>
-              <a:t>You</a:t>
-            </a:r>
-          </a:p>
-          <a:p>
-            <a:pPr algn="ctr">
-              <a:spcBef>
-                <a:spcPts val="0"/>
-              </a:spcBef>
-              <a:spcAft>
-                <a:spcPts val="0"/>
-              </a:spcAft>
-            </a:pPr>
-            <a:r>
-              <a:rPr sz="1400" b="0">
-                <a:solidFill>
-                  <a:srgbClr val="1C1917"/>
-                </a:solidFill>
-                <a:latin typeface="Calibri"/>
-              </a:rPr>
-              <a:t>Open the application in the browser</a:t>
-            </a:r>
-          </a:p>
-        </p:txBody>
-      </p:sp>
-      <p:sp>
-        <p:nvSpPr>
-          <p:cNvPr id="16" name="Data 15"/>
+              <a:rPr b="1" sz="1300">
+                <a:solidFill>
+                  <a:srgbClr val="145C38"/>
+                </a:solidFill>
+                <a:latin typeface="Calibri"/>
+              </a:rPr>
+              <a:t>Start</a:t>
+            </a:r>
+          </a:p>
+        </p:txBody>
+      </p:sp>
+      <p:sp>
+        <p:nvSpPr>
+          <p:cNvPr id="17" name="Process 16"/>
           <p:cNvSpPr/>
           <p:nvPr/>
         </p:nvSpPr>
         <p:spPr>
           <a:xfrm>
-            <a:off x="6675120" y="1335024"/>
-            <a:ext cx="5166360" cy="786384"/>
-          </a:xfrm>
-          <a:prstGeom prst="flowChartInputOutput">
+            <a:off x="2194560" y="1024128"/>
+            <a:ext cx="4297680" cy="713232"/>
+          </a:xfrm>
+          <a:prstGeom prst="flowChartProcess">
             <a:avLst/>
           </a:prstGeom>
           <a:solidFill>
-            <a:srgbClr val="EEF2FF"/>
+            <a:srgbClr val="E7F0FB"/>
           </a:solidFill>
-          <a:ln w="22225">
+          <a:ln w="15875">
             <a:solidFill>
-              <a:srgbClr val="373AB0"/>
+              <a:srgbClr val="1D4E89"/>
             </a:solidFill>
           </a:ln>
-          <a:effectLst/>
         </p:spPr>
         <p:style>
           <a:lnRef idx="1">
@@ -3818,21 +3744,18 @@
           </a:fontRef>
         </p:style>
         <p:txBody>
-          <a:bodyPr rtlCol="0" anchor="ctr" wrap="square" lIns="73152" rIns="73152" tIns="36576" bIns="36576"/>
+          <a:bodyPr rtlCol="0" anchor="ctr" wrap="square" lIns="54864" rIns="54864" tIns="54864" bIns="54864"/>
           <a:lstStyle/>
           <a:p>
             <a:pPr algn="ctr">
-              <a:spcBef>
-                <a:spcPts val="0"/>
-              </a:spcBef>
               <a:spcAft>
                 <a:spcPts val="0"/>
               </a:spcAft>
             </a:pPr>
             <a:r>
-              <a:rPr sz="1200" b="1">
-                <a:solidFill>
-                  <a:srgbClr val="373AB0"/>
+              <a:rPr b="1" sz="1300">
+                <a:solidFill>
+                  <a:srgbClr val="1D4E89"/>
                 </a:solidFill>
                 <a:latin typeface="Calibri"/>
               </a:rPr>
@@ -3842,119 +3765,43 @@
           <a:p>
             <a:pPr algn="ctr">
               <a:spcBef>
-                <a:spcPts val="0"/>
+                <a:spcPts val="200"/>
               </a:spcBef>
-              <a:spcAft>
-                <a:spcPts val="0"/>
-              </a:spcAft>
             </a:pPr>
             <a:r>
-              <a:rPr sz="1400" b="0">
+              <a:rPr sz="1200">
                 <a:solidFill>
                   <a:srgbClr val="1C1917"/>
                 </a:solidFill>
                 <a:latin typeface="Calibri"/>
               </a:rPr>
-              <a:t>Upload PDFs and Excel, or paste the folder path</a:t>
-            </a:r>
-          </a:p>
-        </p:txBody>
-      </p:sp>
-      <p:cxnSp>
-        <p:nvCxnSpPr>
-          <p:cNvPr id="17" name="Connector 16"/>
-          <p:cNvCxnSpPr/>
-          <p:nvPr/>
-        </p:nvCxnSpPr>
-        <p:spPr>
-          <a:xfrm>
-            <a:off x="1755648" y="1728216"/>
-            <a:ext cx="283464" cy="0"/>
-          </a:xfrm>
-          <a:prstGeom prst="line">
-            <a:avLst/>
-          </a:prstGeom>
-          <a:ln w="22225">
+              <a:t>Open the application in the browser</a:t>
+            </a:r>
+          </a:p>
+        </p:txBody>
+      </p:sp>
+      <p:sp>
+        <p:nvSpPr>
+          <p:cNvPr id="18" name="Data 17"/>
+          <p:cNvSpPr/>
+          <p:nvPr/>
+        </p:nvSpPr>
+        <p:spPr>
+          <a:xfrm>
+            <a:off x="6812280" y="1005840"/>
+            <a:ext cx="5029200" cy="749808"/>
+          </a:xfrm>
+          <a:prstGeom prst="flowChartInputOutput">
+            <a:avLst/>
+          </a:prstGeom>
+          <a:solidFill>
+            <a:srgbClr val="EEF2FF"/>
+          </a:solidFill>
+          <a:ln w="15875">
             <a:solidFill>
-              <a:srgbClr val="3F4A5A"/>
-            </a:solidFill>
-            <a:tailEnd type="triangle" w="med" len="med"/>
-          </a:ln>
-        </p:spPr>
-        <p:style>
-          <a:lnRef idx="2">
-            <a:schemeClr val="accent1"/>
-          </a:lnRef>
-          <a:fillRef idx="0">
-            <a:schemeClr val="accent1"/>
-          </a:fillRef>
-          <a:effectRef idx="1">
-            <a:schemeClr val="accent1"/>
-          </a:effectRef>
-          <a:fontRef idx="minor">
-            <a:schemeClr val="tx1"/>
-          </a:fontRef>
-        </p:style>
-      </p:cxnSp>
-      <p:cxnSp>
-        <p:nvCxnSpPr>
-          <p:cNvPr id="18" name="Connector 17"/>
-          <p:cNvCxnSpPr/>
-          <p:nvPr/>
-        </p:nvCxnSpPr>
-        <p:spPr>
-          <a:xfrm>
-            <a:off x="6373368" y="1728216"/>
-            <a:ext cx="283464" cy="0"/>
-          </a:xfrm>
-          <a:prstGeom prst="line">
-            <a:avLst/>
-          </a:prstGeom>
-          <a:ln w="22225">
-            <a:solidFill>
-              <a:srgbClr val="3F4A5A"/>
-            </a:solidFill>
-            <a:tailEnd type="triangle" w="med" len="med"/>
-          </a:ln>
-        </p:spPr>
-        <p:style>
-          <a:lnRef idx="2">
-            <a:schemeClr val="accent1"/>
-          </a:lnRef>
-          <a:fillRef idx="0">
-            <a:schemeClr val="accent1"/>
-          </a:fillRef>
-          <a:effectRef idx="1">
-            <a:schemeClr val="accent1"/>
-          </a:effectRef>
-          <a:fontRef idx="minor">
-            <a:schemeClr val="tx1"/>
-          </a:fontRef>
-        </p:style>
-      </p:cxnSp>
-      <p:sp>
-        <p:nvSpPr>
-          <p:cNvPr id="19" name="Process 18"/>
-          <p:cNvSpPr/>
-          <p:nvPr/>
-        </p:nvSpPr>
-        <p:spPr>
-          <a:xfrm>
-            <a:off x="1965960" y="2359152"/>
-            <a:ext cx="8229600" cy="713232"/>
-          </a:xfrm>
-          <a:prstGeom prst="flowChartProcess">
-            <a:avLst/>
-          </a:prstGeom>
-          <a:solidFill>
-            <a:srgbClr val="E5F6F4"/>
-          </a:solidFill>
-          <a:ln w="22225">
-            <a:solidFill>
-              <a:srgbClr val="0F6E6B"/>
+              <a:srgbClr val="4338CA"/>
             </a:solidFill>
           </a:ln>
-          <a:effectLst/>
         </p:spPr>
         <p:style>
           <a:lnRef idx="1">
@@ -3971,48 +3818,64 @@
           </a:fontRef>
         </p:style>
         <p:txBody>
-          <a:bodyPr rtlCol="0" anchor="ctr" wrap="square" lIns="73152" rIns="73152" tIns="36576" bIns="36576"/>
+          <a:bodyPr rtlCol="0" anchor="ctr" wrap="square" lIns="54864" rIns="54864" tIns="54864" bIns="54864"/>
           <a:lstStyle/>
           <a:p>
             <a:pPr algn="ctr">
-              <a:spcBef>
-                <a:spcPts val="0"/>
-              </a:spcBef>
               <a:spcAft>
                 <a:spcPts val="0"/>
               </a:spcAft>
             </a:pPr>
             <a:r>
-              <a:rPr sz="1200" b="1">
-                <a:solidFill>
-                  <a:srgbClr val="0F6E6B"/>
-                </a:solidFill>
-                <a:latin typeface="Calibri"/>
-              </a:rPr>
-              <a:t>Application</a:t>
+              <a:rPr b="1" sz="1300">
+                <a:solidFill>
+                  <a:srgbClr val="4338CA"/>
+                </a:solidFill>
+                <a:latin typeface="Calibri"/>
+              </a:rPr>
+              <a:t>You</a:t>
             </a:r>
           </a:p>
           <a:p>
             <a:pPr algn="ctr">
               <a:spcBef>
-                <a:spcPts val="0"/>
+                <a:spcPts val="200"/>
               </a:spcBef>
-              <a:spcAft>
-                <a:spcPts val="0"/>
-              </a:spcAft>
             </a:pPr>
             <a:r>
-              <a:rPr sz="1400" b="0">
+              <a:rPr sz="1200">
                 <a:solidFill>
                   <a:srgbClr val="1C1917"/>
                 </a:solidFill>
                 <a:latin typeface="Calibri"/>
               </a:rPr>
-              <a:t>List every file. A multi-page cover splits into named pages.</a:t>
-            </a:r>
-          </a:p>
-        </p:txBody>
-      </p:sp>
+              <a:t>Upload PDFs and the valuation log Excel, or paste the folder path</a:t>
+            </a:r>
+          </a:p>
+        </p:txBody>
+      </p:sp>
+      <p:cxnSp>
+        <p:nvCxnSpPr>
+          <p:cNvPr id="19" name="Connector 18"/>
+          <p:cNvCxnSpPr/>
+          <p:nvPr/>
+        </p:nvCxnSpPr>
+        <p:spPr>
+          <a:xfrm>
+            <a:off x="1874519" y="1380744"/>
+            <a:ext cx="320041" cy="0"/>
+          </a:xfrm>
+          <a:prstGeom prst="line">
+            <a:avLst/>
+          </a:prstGeom>
+          <a:ln w="22225">
+            <a:solidFill>
+              <a:srgbClr val="0F6E6B"/>
+            </a:solidFill>
+            <a:tailEnd type="triangle" w="med" len="med"/>
+          </a:ln>
+        </p:spPr>
+      </p:cxnSp>
       <p:cxnSp>
         <p:nvCxnSpPr>
           <p:cNvPr id="20" name="Connector 19"/>
@@ -4021,57 +3884,42 @@
         </p:nvCxnSpPr>
         <p:spPr>
           <a:xfrm>
-            <a:off x="9258300" y="2130551"/>
-            <a:ext cx="0" cy="219457"/>
+            <a:off x="6492240" y="1380744"/>
+            <a:ext cx="320040" cy="0"/>
           </a:xfrm>
           <a:prstGeom prst="line">
             <a:avLst/>
           </a:prstGeom>
           <a:ln w="22225">
             <a:solidFill>
-              <a:srgbClr val="3F4A5A"/>
+              <a:srgbClr val="0F6E6B"/>
             </a:solidFill>
             <a:tailEnd type="triangle" w="med" len="med"/>
           </a:ln>
         </p:spPr>
-        <p:style>
-          <a:lnRef idx="2">
-            <a:schemeClr val="accent1"/>
-          </a:lnRef>
-          <a:fillRef idx="0">
-            <a:schemeClr val="accent1"/>
-          </a:fillRef>
-          <a:effectRef idx="1">
-            <a:schemeClr val="accent1"/>
-          </a:effectRef>
-          <a:fontRef idx="minor">
-            <a:schemeClr val="tx1"/>
-          </a:fontRef>
-        </p:style>
       </p:cxnSp>
       <p:sp>
         <p:nvSpPr>
-          <p:cNvPr id="21" name="Decision 20"/>
+          <p:cNvPr id="21" name="Process 20"/>
           <p:cNvSpPr/>
           <p:nvPr/>
         </p:nvSpPr>
         <p:spPr>
           <a:xfrm>
-            <a:off x="4956048" y="3273552"/>
-            <a:ext cx="2286000" cy="1051560"/>
-          </a:xfrm>
-          <a:prstGeom prst="flowChartDecision">
+            <a:off x="1554480" y="2011680"/>
+            <a:ext cx="9052560" cy="777240"/>
+          </a:xfrm>
+          <a:prstGeom prst="flowChartProcess">
             <a:avLst/>
           </a:prstGeom>
           <a:solidFill>
-            <a:srgbClr val="FFF4D4"/>
+            <a:srgbClr val="E5F6F4"/>
           </a:solidFill>
-          <a:ln w="22225">
+          <a:ln w="15875">
             <a:solidFill>
-              <a:srgbClr val="B45309"/>
+              <a:srgbClr val="0F6E6B"/>
             </a:solidFill>
           </a:ln>
-          <a:effectLst/>
         </p:spPr>
         <p:style>
           <a:lnRef idx="1">
@@ -4088,52 +3936,86 @@
           </a:fontRef>
         </p:style>
         <p:txBody>
-          <a:bodyPr rtlCol="0" anchor="ctr" wrap="square" lIns="73152" rIns="73152" tIns="36576" bIns="36576"/>
+          <a:bodyPr rtlCol="0" anchor="ctr" wrap="square" lIns="54864" rIns="54864" tIns="54864" bIns="54864"/>
           <a:lstStyle/>
           <a:p>
             <a:pPr algn="ctr">
-              <a:spcBef>
-                <a:spcPts val="0"/>
-              </a:spcBef>
               <a:spcAft>
                 <a:spcPts val="0"/>
               </a:spcAft>
             </a:pPr>
             <a:r>
-              <a:rPr sz="1500" b="1">
+              <a:rPr b="1" sz="1300">
+                <a:solidFill>
+                  <a:srgbClr val="0F6E6B"/>
+                </a:solidFill>
+                <a:latin typeface="Calibri"/>
+              </a:rPr>
+              <a:t>Application</a:t>
+            </a:r>
+          </a:p>
+          <a:p>
+            <a:pPr algn="ctr">
+              <a:spcBef>
+                <a:spcPts val="200"/>
+              </a:spcBef>
+            </a:pPr>
+            <a:r>
+              <a:rPr sz="1300">
                 <a:solidFill>
                   <a:srgbClr val="1C1917"/>
                 </a:solidFill>
                 <a:latin typeface="Calibri"/>
               </a:rPr>
-              <a:t>Auto-order?</a:t>
-            </a:r>
-          </a:p>
-        </p:txBody>
-      </p:sp>
-      <p:sp>
-        <p:nvSpPr>
-          <p:cNvPr id="22" name="Process 21"/>
-          <p:cNvSpPr/>
-          <p:nvPr/>
-        </p:nvSpPr>
-        <p:spPr>
-          <a:xfrm>
-            <a:off x="292608" y="4480560"/>
-            <a:ext cx="5669280" cy="841248"/>
-          </a:xfrm>
-          <a:prstGeom prst="flowChartProcess">
-            <a:avLst/>
-          </a:prstGeom>
-          <a:solidFill>
-            <a:srgbClr val="E5F6F4"/>
-          </a:solidFill>
+              <a:t>List every file. A multi-page cover splits into named pages. A BRF report is left out.</a:t>
+            </a:r>
+          </a:p>
+        </p:txBody>
+      </p:sp>
+      <p:cxnSp>
+        <p:nvCxnSpPr>
+          <p:cNvPr id="22" name="Connector 21"/>
+          <p:cNvCxnSpPr/>
+          <p:nvPr/>
+        </p:nvCxnSpPr>
+        <p:spPr>
+          <a:xfrm>
+            <a:off x="6080760" y="1755648"/>
+            <a:ext cx="0" cy="256032"/>
+          </a:xfrm>
+          <a:prstGeom prst="line">
+            <a:avLst/>
+          </a:prstGeom>
           <a:ln w="22225">
             <a:solidFill>
               <a:srgbClr val="0F6E6B"/>
             </a:solidFill>
+            <a:tailEnd type="triangle" w="med" len="med"/>
           </a:ln>
-          <a:effectLst/>
+        </p:spPr>
+      </p:cxnSp>
+      <p:sp>
+        <p:nvSpPr>
+          <p:cNvPr id="23" name="Decision 22"/>
+          <p:cNvSpPr/>
+          <p:nvPr/>
+        </p:nvSpPr>
+        <p:spPr>
+          <a:xfrm>
+            <a:off x="4709160" y="2971800"/>
+            <a:ext cx="2743200" cy="1051560"/>
+          </a:xfrm>
+          <a:prstGeom prst="flowChartDecision">
+            <a:avLst/>
+          </a:prstGeom>
+          <a:solidFill>
+            <a:srgbClr val="FFF4D4"/>
+          </a:solidFill>
+          <a:ln w="15875">
+            <a:solidFill>
+              <a:srgbClr val="B45309"/>
+            </a:solidFill>
+          </a:ln>
         </p:spPr>
         <p:style>
           <a:lnRef idx="1">
@@ -4150,71 +4032,70 @@
           </a:fontRef>
         </p:style>
         <p:txBody>
-          <a:bodyPr rtlCol="0" anchor="ctr" wrap="square" lIns="73152" rIns="73152" tIns="36576" bIns="36576"/>
+          <a:bodyPr rtlCol="0" anchor="ctr" wrap="square" lIns="54864" rIns="54864" tIns="54864" bIns="54864"/>
           <a:lstStyle/>
           <a:p>
             <a:pPr algn="ctr">
-              <a:spcBef>
-                <a:spcPts val="0"/>
-              </a:spcBef>
               <a:spcAft>
                 <a:spcPts val="0"/>
               </a:spcAft>
             </a:pPr>
             <a:r>
-              <a:rPr sz="1200" b="1">
-                <a:solidFill>
-                  <a:srgbClr val="0F6E6B"/>
-                </a:solidFill>
-                <a:latin typeface="Calibri"/>
-              </a:rPr>
-              <a:t>Application</a:t>
-            </a:r>
-          </a:p>
-          <a:p>
-            <a:pPr algn="ctr">
-              <a:spcBef>
-                <a:spcPts val="0"/>
-              </a:spcBef>
-              <a:spcAft>
-                <a:spcPts val="0"/>
-              </a:spcAft>
-            </a:pPr>
-            <a:r>
-              <a:rPr sz="1300" b="0">
-                <a:solidFill>
-                  <a:srgbClr val="1C1917"/>
-                </a:solidFill>
-                <a:latin typeface="Calibri"/>
-              </a:rPr>
-              <a:t>Sort by filename keywords: Cover, Result, ADP, 402, Census, and the others</a:t>
-            </a:r>
-          </a:p>
-        </p:txBody>
-      </p:sp>
-      <p:sp>
-        <p:nvSpPr>
-          <p:cNvPr id="23" name="Process 22"/>
-          <p:cNvSpPr/>
-          <p:nvPr/>
-        </p:nvSpPr>
-        <p:spPr>
-          <a:xfrm>
-            <a:off x="6236208" y="4480560"/>
-            <a:ext cx="5650992" cy="841248"/>
-          </a:xfrm>
-          <a:prstGeom prst="flowChartProcess">
-            <a:avLst/>
-          </a:prstGeom>
-          <a:solidFill>
-            <a:srgbClr val="E7F0FB"/>
-          </a:solidFill>
+              <a:rPr b="1" sz="1300">
+                <a:solidFill>
+                  <a:srgbClr val="B45309"/>
+                </a:solidFill>
+                <a:latin typeface="Calibri"/>
+              </a:rPr>
+              <a:t>Auto-order?</a:t>
+            </a:r>
+          </a:p>
+        </p:txBody>
+      </p:sp>
+      <p:cxnSp>
+        <p:nvCxnSpPr>
+          <p:cNvPr id="24" name="Connector 23"/>
+          <p:cNvCxnSpPr/>
+          <p:nvPr/>
+        </p:nvCxnSpPr>
+        <p:spPr>
+          <a:xfrm>
+            <a:off x="6080760" y="2788920"/>
+            <a:ext cx="0" cy="182880"/>
+          </a:xfrm>
+          <a:prstGeom prst="line">
+            <a:avLst/>
+          </a:prstGeom>
           <a:ln w="22225">
             <a:solidFill>
-              <a:srgbClr val="1D4E89"/>
+              <a:srgbClr val="0F6E6B"/>
+            </a:solidFill>
+            <a:tailEnd type="triangle" w="med" len="med"/>
+          </a:ln>
+        </p:spPr>
+      </p:cxnSp>
+      <p:sp>
+        <p:nvSpPr>
+          <p:cNvPr id="25" name="Process 24"/>
+          <p:cNvSpPr/>
+          <p:nvPr/>
+        </p:nvSpPr>
+        <p:spPr>
+          <a:xfrm>
+            <a:off x="320040" y="4297680"/>
+            <a:ext cx="5669280" cy="868680"/>
+          </a:xfrm>
+          <a:prstGeom prst="flowChartProcess">
+            <a:avLst/>
+          </a:prstGeom>
+          <a:solidFill>
+            <a:srgbClr val="E5F6F4"/>
+          </a:solidFill>
+          <a:ln w="15875">
+            <a:solidFill>
+              <a:srgbClr val="0F6E6B"/>
             </a:solidFill>
           </a:ln>
-          <a:effectLst/>
         </p:spPr>
         <p:style>
           <a:lnRef idx="1">
@@ -4231,250 +4112,52 @@
           </a:fontRef>
         </p:style>
         <p:txBody>
-          <a:bodyPr rtlCol="0" anchor="ctr" wrap="square" lIns="73152" rIns="73152" tIns="36576" bIns="36576"/>
+          <a:bodyPr rtlCol="0" anchor="ctr" wrap="square" lIns="54864" rIns="54864" tIns="54864" bIns="54864"/>
           <a:lstStyle/>
           <a:p>
             <a:pPr algn="ctr">
-              <a:spcBef>
-                <a:spcPts val="0"/>
-              </a:spcBef>
               <a:spcAft>
                 <a:spcPts val="0"/>
               </a:spcAft>
             </a:pPr>
             <a:r>
-              <a:rPr sz="1200" b="1">
-                <a:solidFill>
-                  <a:srgbClr val="1D4E89"/>
-                </a:solidFill>
-                <a:latin typeface="Calibri"/>
-              </a:rPr>
-              <a:t>You</a:t>
+              <a:rPr b="1" sz="1300">
+                <a:solidFill>
+                  <a:srgbClr val="0F6E6B"/>
+                </a:solidFill>
+                <a:latin typeface="Calibri"/>
+              </a:rPr>
+              <a:t>Application</a:t>
             </a:r>
           </a:p>
           <a:p>
             <a:pPr algn="ctr">
               <a:spcBef>
-                <a:spcPts val="0"/>
+                <a:spcPts val="200"/>
               </a:spcBef>
-              <a:spcAft>
-                <a:spcPts val="0"/>
-              </a:spcAft>
             </a:pPr>
             <a:r>
-              <a:rPr sz="1300" b="0">
+              <a:rPr sz="1300">
                 <a:solidFill>
                   <a:srgbClr val="1C1917"/>
                 </a:solidFill>
                 <a:latin typeface="Calibri"/>
               </a:rPr>
-              <a:t>Keep the order you added the files in</a:t>
-            </a:r>
-          </a:p>
-        </p:txBody>
-      </p:sp>
-      <p:cxnSp>
-        <p:nvCxnSpPr>
-          <p:cNvPr id="24" name="Connector 23"/>
-          <p:cNvCxnSpPr/>
-          <p:nvPr/>
-        </p:nvCxnSpPr>
-        <p:spPr>
-          <a:xfrm flipH="1">
-            <a:off x="4374489" y="4325112"/>
-            <a:ext cx="1221639" cy="155448"/>
-          </a:xfrm>
-          <a:prstGeom prst="line">
-            <a:avLst/>
-          </a:prstGeom>
-          <a:ln w="22225">
-            <a:solidFill>
-              <a:srgbClr val="3F4A5A"/>
-            </a:solidFill>
-            <a:tailEnd type="triangle" w="med" len="med"/>
-          </a:ln>
-        </p:spPr>
-        <p:style>
-          <a:lnRef idx="2">
-            <a:schemeClr val="accent1"/>
-          </a:lnRef>
-          <a:fillRef idx="0">
-            <a:schemeClr val="accent1"/>
-          </a:fillRef>
-          <a:effectRef idx="1">
-            <a:schemeClr val="accent1"/>
-          </a:effectRef>
-          <a:fontRef idx="minor">
-            <a:schemeClr val="tx1"/>
-          </a:fontRef>
-        </p:style>
-      </p:cxnSp>
-      <p:cxnSp>
-        <p:nvCxnSpPr>
-          <p:cNvPr id="25" name="Connector 24"/>
-          <p:cNvCxnSpPr/>
-          <p:nvPr/>
-        </p:nvCxnSpPr>
-        <p:spPr>
-          <a:xfrm>
-            <a:off x="6601968" y="4325112"/>
-            <a:ext cx="1216517" cy="155448"/>
-          </a:xfrm>
-          <a:prstGeom prst="line">
-            <a:avLst/>
-          </a:prstGeom>
-          <a:ln w="22225">
-            <a:solidFill>
-              <a:srgbClr val="3F4A5A"/>
-            </a:solidFill>
-            <a:tailEnd type="triangle" w="med" len="med"/>
-          </a:ln>
-        </p:spPr>
-        <p:style>
-          <a:lnRef idx="2">
-            <a:schemeClr val="accent1"/>
-          </a:lnRef>
-          <a:fillRef idx="0">
-            <a:schemeClr val="accent1"/>
-          </a:fillRef>
-          <a:effectRef idx="1">
-            <a:schemeClr val="accent1"/>
-          </a:effectRef>
-          <a:fontRef idx="minor">
-            <a:schemeClr val="tx1"/>
-          </a:fontRef>
-        </p:style>
-      </p:cxnSp>
-      <p:sp>
-        <p:nvSpPr>
-          <p:cNvPr id="26" name="TextBox 25"/>
-          <p:cNvSpPr txBox="1"/>
-          <p:nvPr/>
-        </p:nvSpPr>
-        <p:spPr>
-          <a:xfrm>
-            <a:off x="429768" y="4242816"/>
-            <a:ext cx="457200" cy="219456"/>
-          </a:xfrm>
-          <a:prstGeom prst="rect">
-            <a:avLst/>
-          </a:prstGeom>
-          <a:noFill/>
-        </p:spPr>
-        <p:txBody>
-          <a:bodyPr wrap="none" lIns="18288" tIns="0" bIns="0">
-            <a:spAutoFit/>
-          </a:bodyPr>
-          <a:lstStyle/>
-          <a:p>
-            <a:pPr algn="ctr">
-              <a:spcBef>
-                <a:spcPts val="0"/>
-              </a:spcBef>
-              <a:spcAft>
-                <a:spcPts val="0"/>
-              </a:spcAft>
-            </a:pPr>
-            <a:r>
-              <a:rPr sz="1200" b="1">
-                <a:solidFill>
-                  <a:srgbClr val="145C38"/>
-                </a:solidFill>
-                <a:latin typeface="Calibri"/>
-              </a:rPr>
-              <a:t>Yes</a:t>
-            </a:r>
-          </a:p>
-        </p:txBody>
-      </p:sp>
-      <p:sp>
-        <p:nvSpPr>
-          <p:cNvPr id="27" name="TextBox 26"/>
-          <p:cNvSpPr txBox="1"/>
-          <p:nvPr/>
-        </p:nvSpPr>
-        <p:spPr>
-          <a:xfrm>
-            <a:off x="11338560" y="4242816"/>
-            <a:ext cx="411480" cy="219456"/>
-          </a:xfrm>
-          <a:prstGeom prst="rect">
-            <a:avLst/>
-          </a:prstGeom>
-          <a:noFill/>
-        </p:spPr>
-        <p:txBody>
-          <a:bodyPr wrap="none" lIns="18288" tIns="0" bIns="0">
-            <a:spAutoFit/>
-          </a:bodyPr>
-          <a:lstStyle/>
-          <a:p>
-            <a:pPr algn="ctr">
-              <a:spcBef>
-                <a:spcPts val="0"/>
-              </a:spcBef>
-              <a:spcAft>
-                <a:spcPts val="0"/>
-              </a:spcAft>
-            </a:pPr>
-            <a:r>
-              <a:rPr sz="1200" b="1">
-                <a:solidFill>
-                  <a:srgbClr val="9A3412"/>
-                </a:solidFill>
-                <a:latin typeface="Calibri"/>
-              </a:rPr>
-              <a:t>No</a:t>
-            </a:r>
-          </a:p>
-        </p:txBody>
-      </p:sp>
-      <p:cxnSp>
-        <p:nvCxnSpPr>
-          <p:cNvPr id="28" name="Connector 27"/>
-          <p:cNvCxnSpPr/>
-          <p:nvPr/>
-        </p:nvCxnSpPr>
-        <p:spPr>
-          <a:xfrm>
-            <a:off x="6080760" y="3081528"/>
-            <a:ext cx="18288" cy="182880"/>
-          </a:xfrm>
-          <a:prstGeom prst="line">
-            <a:avLst/>
-          </a:prstGeom>
-          <a:ln w="22225">
-            <a:solidFill>
-              <a:srgbClr val="3F4A5A"/>
-            </a:solidFill>
-            <a:tailEnd type="triangle" w="med" len="med"/>
-          </a:ln>
-        </p:spPr>
-        <p:style>
-          <a:lnRef idx="2">
-            <a:schemeClr val="accent1"/>
-          </a:lnRef>
-          <a:fillRef idx="0">
-            <a:schemeClr val="accent1"/>
-          </a:fillRef>
-          <a:effectRef idx="1">
-            <a:schemeClr val="accent1"/>
-          </a:effectRef>
-          <a:fontRef idx="minor">
-            <a:schemeClr val="tx1"/>
-          </a:fontRef>
-        </p:style>
-      </p:cxnSp>
-      <p:sp>
-        <p:nvSpPr>
-          <p:cNvPr id="29" name="Process 28"/>
+              <a:t>Sort by filename keywords, and keep location files together: Loc 1, then Loc 2.</a:t>
+            </a:r>
+          </a:p>
+        </p:txBody>
+      </p:sp>
+      <p:sp>
+        <p:nvSpPr>
+          <p:cNvPr id="26" name="Process 25"/>
           <p:cNvSpPr/>
           <p:nvPr/>
         </p:nvSpPr>
         <p:spPr>
           <a:xfrm>
-            <a:off x="1965960" y="5532120"/>
-            <a:ext cx="8229600" cy="658368"/>
+            <a:off x="6217920" y="4297680"/>
+            <a:ext cx="5623560" cy="868680"/>
           </a:xfrm>
           <a:prstGeom prst="flowChartProcess">
             <a:avLst/>
@@ -4482,12 +4165,11 @@
           <a:solidFill>
             <a:srgbClr val="E7F0FB"/>
           </a:solidFill>
-          <a:ln w="22225">
+          <a:ln w="15875">
             <a:solidFill>
               <a:srgbClr val="1D4E89"/>
             </a:solidFill>
           </a:ln>
-          <a:effectLst/>
         </p:spPr>
         <p:style>
           <a:lnRef idx="1">
@@ -4504,19 +4186,16 @@
           </a:fontRef>
         </p:style>
         <p:txBody>
-          <a:bodyPr rtlCol="0" anchor="ctr" wrap="square" lIns="73152" rIns="73152" tIns="36576" bIns="36576"/>
+          <a:bodyPr rtlCol="0" anchor="ctr" wrap="square" lIns="54864" rIns="54864" tIns="54864" bIns="54864"/>
           <a:lstStyle/>
           <a:p>
             <a:pPr algn="ctr">
-              <a:spcBef>
-                <a:spcPts val="0"/>
-              </a:spcBef>
               <a:spcAft>
                 <a:spcPts val="0"/>
               </a:spcAft>
             </a:pPr>
             <a:r>
-              <a:rPr sz="1200" b="1">
+              <a:rPr b="1" sz="1300">
                 <a:solidFill>
                   <a:srgbClr val="1D4E89"/>
                 </a:solidFill>
@@ -4528,14 +4207,199 @@
           <a:p>
             <a:pPr algn="ctr">
               <a:spcBef>
-                <a:spcPts val="0"/>
+                <a:spcPts val="200"/>
               </a:spcBef>
+            </a:pPr>
+            <a:r>
+              <a:rPr sz="1300">
+                <a:solidFill>
+                  <a:srgbClr val="1C1917"/>
+                </a:solidFill>
+                <a:latin typeface="Calibri"/>
+              </a:rPr>
+              <a:t>Keep the order you added the files in</a:t>
+            </a:r>
+          </a:p>
+        </p:txBody>
+      </p:sp>
+      <p:sp>
+        <p:nvSpPr>
+          <p:cNvPr id="27" name="TextBox 26"/>
+          <p:cNvSpPr txBox="1"/>
+          <p:nvPr/>
+        </p:nvSpPr>
+        <p:spPr>
+          <a:xfrm>
+            <a:off x="1371600" y="4005072"/>
+            <a:ext cx="548640" cy="256032"/>
+          </a:xfrm>
+          <a:prstGeom prst="rect">
+            <a:avLst/>
+          </a:prstGeom>
+          <a:noFill/>
+        </p:spPr>
+        <p:txBody>
+          <a:bodyPr wrap="square">
+            <a:spAutoFit/>
+          </a:bodyPr>
+          <a:lstStyle/>
+          <a:p>
+            <a:pPr algn="l"/>
+            <a:r>
+              <a:rPr sz="1300" b="1">
+                <a:solidFill>
+                  <a:srgbClr val="145C38"/>
+                </a:solidFill>
+                <a:latin typeface="Calibri"/>
+              </a:rPr>
+              <a:t>Yes</a:t>
+            </a:r>
+          </a:p>
+        </p:txBody>
+      </p:sp>
+      <p:sp>
+        <p:nvSpPr>
+          <p:cNvPr id="28" name="TextBox 27"/>
+          <p:cNvSpPr txBox="1"/>
+          <p:nvPr/>
+        </p:nvSpPr>
+        <p:spPr>
+          <a:xfrm>
+            <a:off x="10881360" y="4005072"/>
+            <a:ext cx="457200" cy="256032"/>
+          </a:xfrm>
+          <a:prstGeom prst="rect">
+            <a:avLst/>
+          </a:prstGeom>
+          <a:noFill/>
+        </p:spPr>
+        <p:txBody>
+          <a:bodyPr wrap="square">
+            <a:spAutoFit/>
+          </a:bodyPr>
+          <a:lstStyle/>
+          <a:p>
+            <a:pPr algn="l"/>
+            <a:r>
+              <a:rPr sz="1300" b="1">
+                <a:solidFill>
+                  <a:srgbClr val="9A3412"/>
+                </a:solidFill>
+                <a:latin typeface="Calibri"/>
+              </a:rPr>
+              <a:t>No</a:t>
+            </a:r>
+          </a:p>
+        </p:txBody>
+      </p:sp>
+      <p:cxnSp>
+        <p:nvCxnSpPr>
+          <p:cNvPr id="29" name="Connector 28"/>
+          <p:cNvCxnSpPr/>
+          <p:nvPr/>
+        </p:nvCxnSpPr>
+        <p:spPr>
+          <a:xfrm flipH="1">
+            <a:off x="3108960" y="4023360"/>
+            <a:ext cx="2103120" cy="274320"/>
+          </a:xfrm>
+          <a:prstGeom prst="line">
+            <a:avLst/>
+          </a:prstGeom>
+          <a:ln w="22225">
+            <a:solidFill>
+              <a:srgbClr val="0F6E6B"/>
+            </a:solidFill>
+            <a:tailEnd type="triangle" w="med" len="med"/>
+          </a:ln>
+        </p:spPr>
+      </p:cxnSp>
+      <p:cxnSp>
+        <p:nvCxnSpPr>
+          <p:cNvPr id="30" name="Connector 29"/>
+          <p:cNvCxnSpPr/>
+          <p:nvPr/>
+        </p:nvCxnSpPr>
+        <p:spPr>
+          <a:xfrm>
+            <a:off x="6949440" y="4023360"/>
+            <a:ext cx="2011680" cy="274320"/>
+          </a:xfrm>
+          <a:prstGeom prst="line">
+            <a:avLst/>
+          </a:prstGeom>
+          <a:ln w="22225">
+            <a:solidFill>
+              <a:srgbClr val="0F6E6B"/>
+            </a:solidFill>
+            <a:tailEnd type="triangle" w="med" len="med"/>
+          </a:ln>
+        </p:spPr>
+      </p:cxnSp>
+      <p:sp>
+        <p:nvSpPr>
+          <p:cNvPr id="31" name="Process 30"/>
+          <p:cNvSpPr/>
+          <p:nvPr/>
+        </p:nvSpPr>
+        <p:spPr>
+          <a:xfrm>
+            <a:off x="1554480" y="5394960"/>
+            <a:ext cx="9052560" cy="685800"/>
+          </a:xfrm>
+          <a:prstGeom prst="flowChartProcess">
+            <a:avLst/>
+          </a:prstGeom>
+          <a:solidFill>
+            <a:srgbClr val="E7F0FB"/>
+          </a:solidFill>
+          <a:ln w="15875">
+            <a:solidFill>
+              <a:srgbClr val="1D4E89"/>
+            </a:solidFill>
+          </a:ln>
+        </p:spPr>
+        <p:style>
+          <a:lnRef idx="1">
+            <a:schemeClr val="accent1"/>
+          </a:lnRef>
+          <a:fillRef idx="3">
+            <a:schemeClr val="accent1"/>
+          </a:fillRef>
+          <a:effectRef idx="2">
+            <a:schemeClr val="accent1"/>
+          </a:effectRef>
+          <a:fontRef idx="minor">
+            <a:schemeClr val="lt1"/>
+          </a:fontRef>
+        </p:style>
+        <p:txBody>
+          <a:bodyPr rtlCol="0" anchor="ctr" wrap="square" lIns="54864" rIns="54864" tIns="54864" bIns="54864"/>
+          <a:lstStyle/>
+          <a:p>
+            <a:pPr algn="ctr">
               <a:spcAft>
                 <a:spcPts val="0"/>
               </a:spcAft>
             </a:pPr>
             <a:r>
-              <a:rPr sz="1400" b="0">
+              <a:rPr b="1" sz="1300">
+                <a:solidFill>
+                  <a:srgbClr val="1D4E89"/>
+                </a:solidFill>
+                <a:latin typeface="Calibri"/>
+              </a:rPr>
+              <a:t>You</a:t>
+            </a:r>
+          </a:p>
+          <a:p>
+            <a:pPr algn="ctr">
+              <a:spcBef>
+                <a:spcPts val="200"/>
+              </a:spcBef>
+            </a:pPr>
+            <a:r>
+              <a:rPr sz="1300">
                 <a:solidFill>
                   <a:srgbClr val="1C1917"/>
                 </a:solidFill>
@@ -4548,86 +4412,58 @@
       </p:sp>
       <p:cxnSp>
         <p:nvCxnSpPr>
-          <p:cNvPr id="30" name="Connector 29"/>
+          <p:cNvPr id="32" name="Connector 31"/>
           <p:cNvCxnSpPr/>
           <p:nvPr/>
         </p:nvCxnSpPr>
         <p:spPr>
           <a:xfrm>
-            <a:off x="3127248" y="5330952"/>
-            <a:ext cx="0" cy="192024"/>
+            <a:off x="3154680" y="5166360"/>
+            <a:ext cx="1783080" cy="228600"/>
           </a:xfrm>
           <a:prstGeom prst="line">
             <a:avLst/>
           </a:prstGeom>
           <a:ln w="22225">
             <a:solidFill>
-              <a:srgbClr val="3F4A5A"/>
+              <a:srgbClr val="0F6E6B"/>
             </a:solidFill>
             <a:tailEnd type="triangle" w="med" len="med"/>
           </a:ln>
         </p:spPr>
-        <p:style>
-          <a:lnRef idx="2">
-            <a:schemeClr val="accent1"/>
-          </a:lnRef>
-          <a:fillRef idx="0">
-            <a:schemeClr val="accent1"/>
-          </a:fillRef>
-          <a:effectRef idx="1">
-            <a:schemeClr val="accent1"/>
-          </a:effectRef>
-          <a:fontRef idx="minor">
-            <a:schemeClr val="tx1"/>
-          </a:fontRef>
-        </p:style>
       </p:cxnSp>
       <p:cxnSp>
         <p:nvCxnSpPr>
-          <p:cNvPr id="31" name="Connector 30"/>
+          <p:cNvPr id="33" name="Connector 32"/>
           <p:cNvCxnSpPr/>
           <p:nvPr/>
         </p:nvCxnSpPr>
         <p:spPr>
-          <a:xfrm>
-            <a:off x="9061704" y="5330952"/>
-            <a:ext cx="0" cy="192024"/>
+          <a:xfrm flipH="1">
+            <a:off x="7223760" y="5166360"/>
+            <a:ext cx="1783080" cy="228600"/>
           </a:xfrm>
           <a:prstGeom prst="line">
             <a:avLst/>
           </a:prstGeom>
           <a:ln w="22225">
             <a:solidFill>
-              <a:srgbClr val="3F4A5A"/>
+              <a:srgbClr val="0F6E6B"/>
             </a:solidFill>
             <a:tailEnd type="triangle" w="med" len="med"/>
           </a:ln>
         </p:spPr>
-        <p:style>
-          <a:lnRef idx="2">
-            <a:schemeClr val="accent1"/>
-          </a:lnRef>
-          <a:fillRef idx="0">
-            <a:schemeClr val="accent1"/>
-          </a:fillRef>
-          <a:effectRef idx="1">
-            <a:schemeClr val="accent1"/>
-          </a:effectRef>
-          <a:fontRef idx="minor">
-            <a:schemeClr val="tx1"/>
-          </a:fontRef>
-        </p:style>
       </p:cxnSp>
       <p:sp>
         <p:nvSpPr>
-          <p:cNvPr id="32" name="TextBox 31"/>
+          <p:cNvPr id="34" name="TextBox 33"/>
           <p:cNvSpPr txBox="1"/>
           <p:nvPr/>
         </p:nvSpPr>
         <p:spPr>
           <a:xfrm>
-            <a:off x="7863840" y="6355080"/>
-            <a:ext cx="4023360" cy="219456"/>
+            <a:off x="7863840" y="6309360"/>
+            <a:ext cx="3931920" cy="292608"/>
           </a:xfrm>
           <a:prstGeom prst="rect">
             <a:avLst/>
@@ -4635,21 +4471,14 @@
           <a:noFill/>
         </p:spPr>
         <p:txBody>
-          <a:bodyPr wrap="none" lIns="18288" tIns="0" bIns="0">
+          <a:bodyPr wrap="square">
             <a:spAutoFit/>
           </a:bodyPr>
           <a:lstStyle/>
           <a:p>
-            <a:pPr algn="ctr">
-              <a:spcBef>
-                <a:spcPts val="0"/>
-              </a:spcBef>
-              <a:spcAft>
-                <a:spcPts val="0"/>
-              </a:spcAft>
-            </a:pPr>
-            <a:r>
-              <a:rPr sz="1200" b="1">
+            <a:pPr algn="l"/>
+            <a:r>
+              <a:rPr sz="1400" b="1">
                 <a:solidFill>
                   <a:srgbClr val="1E3A5F"/>
                 </a:solidFill>
@@ -4687,18 +4516,17 @@
         <p:spPr>
           <a:xfrm>
             <a:off x="0" y="0"/>
-            <a:ext cx="12191695" cy="73152"/>
+            <a:ext cx="12191695" cy="6858000"/>
           </a:xfrm>
           <a:prstGeom prst="rect">
             <a:avLst/>
           </a:prstGeom>
           <a:solidFill>
-            <a:srgbClr val="0F6E6B"/>
+            <a:srgbClr val="F7F8F6"/>
           </a:solidFill>
-          <a:ln w="22225">
+          <a:ln>
             <a:noFill/>
           </a:ln>
-          <a:effectLst/>
         </p:spPr>
         <p:style>
           <a:lnRef idx="1">
@@ -4724,88 +4552,24 @@
       </p:sp>
       <p:sp>
         <p:nvSpPr>
-          <p:cNvPr id="3" name="TextBox 2"/>
-          <p:cNvSpPr txBox="1"/>
-          <p:nvPr/>
-        </p:nvSpPr>
-        <p:spPr>
-          <a:xfrm>
-            <a:off x="320040" y="146304"/>
-            <a:ext cx="11521440" cy="658368"/>
+          <p:cNvPr id="3" name="Rectangle 2"/>
+          <p:cNvSpPr/>
+          <p:nvPr/>
+        </p:nvSpPr>
+        <p:spPr>
+          <a:xfrm>
+            <a:off x="0" y="0"/>
+            <a:ext cx="12191695" cy="73152"/>
           </a:xfrm>
           <a:prstGeom prst="rect">
             <a:avLst/>
           </a:prstGeom>
-          <a:noFill/>
-        </p:spPr>
-        <p:txBody>
-          <a:bodyPr wrap="none">
-            <a:spAutoFit/>
-          </a:bodyPr>
-          <a:lstStyle/>
-          <a:p>
-            <a:pPr algn="l">
-              <a:spcBef>
-                <a:spcPts val="0"/>
-              </a:spcBef>
-              <a:spcAft>
-                <a:spcPts val="0"/>
-              </a:spcAft>
-            </a:pPr>
-            <a:r>
-              <a:rPr sz="2600" b="1">
-                <a:solidFill>
-                  <a:srgbClr val="1E3A5F"/>
-                </a:solidFill>
-                <a:latin typeface="Calibri"/>
-              </a:rPr>
-              <a:t>Choose retype, then Process</a:t>
-            </a:r>
-          </a:p>
-          <a:p>
-            <a:pPr algn="l">
-              <a:spcBef>
-                <a:spcPts val="0"/>
-              </a:spcBef>
-              <a:spcAft>
-                <a:spcPts val="0"/>
-              </a:spcAft>
-            </a:pPr>
-            <a:r>
-              <a:rPr sz="1400" b="0">
-                <a:solidFill>
-                  <a:srgbClr val="3F4A5A"/>
-                </a:solidFill>
-                <a:latin typeface="Calibri"/>
-              </a:rPr>
-              <a:t>Page 2 of 4   ·   The application reads the plan before it checks the pages</a:t>
-            </a:r>
-          </a:p>
-        </p:txBody>
-      </p:sp>
-      <p:sp>
-        <p:nvSpPr>
-          <p:cNvPr id="4" name="Terminator 3"/>
-          <p:cNvSpPr/>
-          <p:nvPr/>
-        </p:nvSpPr>
-        <p:spPr>
-          <a:xfrm>
-            <a:off x="320040" y="896112"/>
-            <a:ext cx="292608" cy="237744"/>
-          </a:xfrm>
-          <a:prstGeom prst="flowChartTerminator">
-            <a:avLst/>
-          </a:prstGeom>
           <a:solidFill>
-            <a:srgbClr val="1B7A4A"/>
+            <a:srgbClr val="0F6E6B"/>
           </a:solidFill>
-          <a:ln w="22225">
-            <a:solidFill>
-              <a:srgbClr val="145C38"/>
-            </a:solidFill>
+          <a:ln>
+            <a:noFill/>
           </a:ln>
-          <a:effectLst/>
         </p:spPr>
         <p:style>
           <a:lnRef idx="1">
@@ -4822,10 +4586,45 @@
           </a:fontRef>
         </p:style>
         <p:txBody>
-          <a:bodyPr rtlCol="0" anchor="ctr" wrap="square" lIns="73152" rIns="73152" tIns="36576" bIns="36576"/>
+          <a:bodyPr rtlCol="0" anchor="ctr"/>
           <a:lstStyle/>
           <a:p>
             <a:pPr algn="ctr"/>
+          </a:p>
+        </p:txBody>
+      </p:sp>
+      <p:sp>
+        <p:nvSpPr>
+          <p:cNvPr id="4" name="TextBox 3"/>
+          <p:cNvSpPr txBox="1"/>
+          <p:nvPr/>
+        </p:nvSpPr>
+        <p:spPr>
+          <a:xfrm>
+            <a:off x="320040" y="146304"/>
+            <a:ext cx="7772400" cy="329184"/>
+          </a:xfrm>
+          <a:prstGeom prst="rect">
+            <a:avLst/>
+          </a:prstGeom>
+          <a:noFill/>
+        </p:spPr>
+        <p:txBody>
+          <a:bodyPr wrap="square">
+            <a:spAutoFit/>
+          </a:bodyPr>
+          <a:lstStyle/>
+          <a:p>
+            <a:pPr algn="l"/>
+            <a:r>
+              <a:rPr sz="2200" b="1">
+                <a:solidFill>
+                  <a:srgbClr val="1E3A5F"/>
+                </a:solidFill>
+                <a:latin typeface="Calibri"/>
+              </a:rPr>
+              <a:t>Choose retype, then Process</a:t>
+            </a:r>
           </a:p>
         </p:txBody>
       </p:sp>
@@ -4837,8 +4636,8 @@
         </p:nvSpPr>
         <p:spPr>
           <a:xfrm>
-            <a:off x="649224" y="896112"/>
-            <a:ext cx="2011680" cy="219456"/>
+            <a:off x="7680960" y="201168"/>
+            <a:ext cx="4206240" cy="274320"/>
           </a:xfrm>
           <a:prstGeom prst="rect">
             <a:avLst/>
@@ -4846,54 +4645,46 @@
           <a:noFill/>
         </p:spPr>
         <p:txBody>
-          <a:bodyPr wrap="none" lIns="18288" tIns="0" bIns="0">
+          <a:bodyPr wrap="square">
             <a:spAutoFit/>
           </a:bodyPr>
           <a:lstStyle/>
           <a:p>
-            <a:pPr algn="ctr">
-              <a:spcBef>
-                <a:spcPts val="0"/>
-              </a:spcBef>
-              <a:spcAft>
-                <a:spcPts val="0"/>
-              </a:spcAft>
-            </a:pPr>
-            <a:r>
-              <a:rPr sz="1200" b="1">
+            <a:pPr algn="l"/>
+            <a:r>
+              <a:rPr sz="1200" b="0">
                 <a:solidFill>
                   <a:srgbClr val="3F4A5A"/>
                 </a:solidFill>
                 <a:latin typeface="Calibri"/>
               </a:rPr>
-              <a:t>Oval  Start or end</a:t>
-            </a:r>
-          </a:p>
-        </p:txBody>
-      </p:sp>
-      <p:sp>
-        <p:nvSpPr>
-          <p:cNvPr id="6" name="Process 5"/>
+              <a:t>Page 2 of 5   ·   Dates stay as printed unless you check the box</a:t>
+            </a:r>
+          </a:p>
+        </p:txBody>
+      </p:sp>
+      <p:sp>
+        <p:nvSpPr>
+          <p:cNvPr id="6" name="Terminator 5"/>
           <p:cNvSpPr/>
           <p:nvPr/>
         </p:nvSpPr>
         <p:spPr>
           <a:xfrm>
-            <a:off x="2468880" y="896112"/>
+            <a:off x="320040" y="621792"/>
             <a:ext cx="292608" cy="237744"/>
           </a:xfrm>
-          <a:prstGeom prst="flowChartProcess">
+          <a:prstGeom prst="flowChartTerminator">
             <a:avLst/>
           </a:prstGeom>
           <a:solidFill>
-            <a:srgbClr val="E7F0FB"/>
+            <a:srgbClr val="FFFFFF"/>
           </a:solidFill>
-          <a:ln w="22225">
+          <a:ln>
             <a:solidFill>
-              <a:srgbClr val="1D4E89"/>
+              <a:srgbClr val="1B7A4A"/>
             </a:solidFill>
           </a:ln>
-          <a:effectLst/>
         </p:spPr>
         <p:style>
           <a:lnRef idx="1">
@@ -4910,7 +4701,7 @@
           </a:fontRef>
         </p:style>
         <p:txBody>
-          <a:bodyPr rtlCol="0" anchor="ctr" wrap="square" lIns="73152" rIns="73152" tIns="36576" bIns="36576"/>
+          <a:bodyPr rtlCol="0" anchor="ctr"/>
           <a:lstStyle/>
           <a:p>
             <a:pPr algn="ctr"/>
@@ -4925,8 +4716,8 @@
         </p:nvSpPr>
         <p:spPr>
           <a:xfrm>
-            <a:off x="2798064" y="896112"/>
-            <a:ext cx="2011680" cy="219456"/>
+            <a:off x="649224" y="603504"/>
+            <a:ext cx="1965960" cy="274320"/>
           </a:xfrm>
           <a:prstGeom prst="rect">
             <a:avLst/>
@@ -4934,54 +4725,46 @@
           <a:noFill/>
         </p:spPr>
         <p:txBody>
-          <a:bodyPr wrap="none" lIns="18288" tIns="0" bIns="0">
+          <a:bodyPr wrap="square">
             <a:spAutoFit/>
           </a:bodyPr>
           <a:lstStyle/>
           <a:p>
-            <a:pPr algn="ctr">
-              <a:spcBef>
-                <a:spcPts val="0"/>
-              </a:spcBef>
-              <a:spcAft>
-                <a:spcPts val="0"/>
-              </a:spcAft>
-            </a:pPr>
-            <a:r>
-              <a:rPr sz="1200" b="1">
+            <a:pPr algn="l"/>
+            <a:r>
+              <a:rPr sz="1100" b="0">
                 <a:solidFill>
                   <a:srgbClr val="3F4A5A"/>
                 </a:solidFill>
                 <a:latin typeface="Calibri"/>
               </a:rPr>
-              <a:t>Rectangle  A step</a:t>
-            </a:r>
-          </a:p>
-        </p:txBody>
-      </p:sp>
-      <p:sp>
-        <p:nvSpPr>
-          <p:cNvPr id="8" name="Decision 7"/>
+              <a:t>Oval   Start or end</a:t>
+            </a:r>
+          </a:p>
+        </p:txBody>
+      </p:sp>
+      <p:sp>
+        <p:nvSpPr>
+          <p:cNvPr id="8" name="Process 7"/>
           <p:cNvSpPr/>
           <p:nvPr/>
         </p:nvSpPr>
         <p:spPr>
           <a:xfrm>
-            <a:off x="4709160" y="896112"/>
+            <a:off x="2651760" y="621792"/>
             <a:ext cx="292608" cy="237744"/>
           </a:xfrm>
-          <a:prstGeom prst="flowChartDecision">
+          <a:prstGeom prst="flowChartProcess">
             <a:avLst/>
           </a:prstGeom>
           <a:solidFill>
-            <a:srgbClr val="FFF4D4"/>
+            <a:srgbClr val="FFFFFF"/>
           </a:solidFill>
-          <a:ln w="22225">
+          <a:ln>
             <a:solidFill>
-              <a:srgbClr val="B45309"/>
+              <a:srgbClr val="1D4E89"/>
             </a:solidFill>
           </a:ln>
-          <a:effectLst/>
         </p:spPr>
         <p:style>
           <a:lnRef idx="1">
@@ -4998,7 +4781,7 @@
           </a:fontRef>
         </p:style>
         <p:txBody>
-          <a:bodyPr rtlCol="0" anchor="ctr" wrap="square" lIns="73152" rIns="73152" tIns="36576" bIns="36576"/>
+          <a:bodyPr rtlCol="0" anchor="ctr"/>
           <a:lstStyle/>
           <a:p>
             <a:pPr algn="ctr"/>
@@ -5013,8 +4796,8 @@
         </p:nvSpPr>
         <p:spPr>
           <a:xfrm>
-            <a:off x="5038344" y="896112"/>
-            <a:ext cx="2011680" cy="219456"/>
+            <a:off x="2980944" y="603504"/>
+            <a:ext cx="1965960" cy="274320"/>
           </a:xfrm>
           <a:prstGeom prst="rect">
             <a:avLst/>
@@ -5022,54 +4805,46 @@
           <a:noFill/>
         </p:spPr>
         <p:txBody>
-          <a:bodyPr wrap="none" lIns="18288" tIns="0" bIns="0">
+          <a:bodyPr wrap="square">
             <a:spAutoFit/>
           </a:bodyPr>
           <a:lstStyle/>
           <a:p>
-            <a:pPr algn="ctr">
-              <a:spcBef>
-                <a:spcPts val="0"/>
-              </a:spcBef>
-              <a:spcAft>
-                <a:spcPts val="0"/>
-              </a:spcAft>
-            </a:pPr>
-            <a:r>
-              <a:rPr sz="1200" b="1">
+            <a:pPr algn="l"/>
+            <a:r>
+              <a:rPr sz="1100" b="0">
                 <a:solidFill>
                   <a:srgbClr val="3F4A5A"/>
                 </a:solidFill>
                 <a:latin typeface="Calibri"/>
               </a:rPr>
-              <a:t>Diamond  Yes or no</a:t>
-            </a:r>
-          </a:p>
-        </p:txBody>
-      </p:sp>
-      <p:sp>
-        <p:nvSpPr>
-          <p:cNvPr id="10" name="Data 9"/>
+              <a:t>Rectangle   A step</a:t>
+            </a:r>
+          </a:p>
+        </p:txBody>
+      </p:sp>
+      <p:sp>
+        <p:nvSpPr>
+          <p:cNvPr id="10" name="Decision 9"/>
           <p:cNvSpPr/>
           <p:nvPr/>
         </p:nvSpPr>
         <p:spPr>
           <a:xfrm>
-            <a:off x="7040880" y="896112"/>
+            <a:off x="4983479" y="621792"/>
             <a:ext cx="292608" cy="237744"/>
           </a:xfrm>
-          <a:prstGeom prst="flowChartInputOutput">
+          <a:prstGeom prst="flowChartDecision">
             <a:avLst/>
           </a:prstGeom>
           <a:solidFill>
-            <a:srgbClr val="EEF2FF"/>
+            <a:srgbClr val="FFFFFF"/>
           </a:solidFill>
-          <a:ln w="22225">
+          <a:ln>
             <a:solidFill>
-              <a:srgbClr val="373AB0"/>
+              <a:srgbClr val="B45309"/>
             </a:solidFill>
           </a:ln>
-          <a:effectLst/>
         </p:spPr>
         <p:style>
           <a:lnRef idx="1">
@@ -5086,7 +4861,7 @@
           </a:fontRef>
         </p:style>
         <p:txBody>
-          <a:bodyPr rtlCol="0" anchor="ctr" wrap="square" lIns="73152" rIns="73152" tIns="36576" bIns="36576"/>
+          <a:bodyPr rtlCol="0" anchor="ctr"/>
           <a:lstStyle/>
           <a:p>
             <a:pPr algn="ctr"/>
@@ -5101,8 +4876,8 @@
         </p:nvSpPr>
         <p:spPr>
           <a:xfrm>
-            <a:off x="7370064" y="896112"/>
-            <a:ext cx="2011680" cy="219456"/>
+            <a:off x="5312664" y="603504"/>
+            <a:ext cx="1965960" cy="274320"/>
           </a:xfrm>
           <a:prstGeom prst="rect">
             <a:avLst/>
@@ -5110,54 +4885,46 @@
           <a:noFill/>
         </p:spPr>
         <p:txBody>
-          <a:bodyPr wrap="none" lIns="18288" tIns="0" bIns="0">
+          <a:bodyPr wrap="square">
             <a:spAutoFit/>
           </a:bodyPr>
           <a:lstStyle/>
           <a:p>
-            <a:pPr algn="ctr">
-              <a:spcBef>
-                <a:spcPts val="0"/>
-              </a:spcBef>
-              <a:spcAft>
-                <a:spcPts val="0"/>
-              </a:spcAft>
-            </a:pPr>
-            <a:r>
-              <a:rPr sz="1200" b="1">
+            <a:pPr algn="l"/>
+            <a:r>
+              <a:rPr sz="1100" b="0">
                 <a:solidFill>
                   <a:srgbClr val="3F4A5A"/>
                 </a:solidFill>
                 <a:latin typeface="Calibri"/>
               </a:rPr>
-              <a:t>Slanted  Files you add</a:t>
-            </a:r>
-          </a:p>
-        </p:txBody>
-      </p:sp>
-      <p:sp>
-        <p:nvSpPr>
-          <p:cNvPr id="12" name="Document 11"/>
+              <a:t>Diamond   Yes or no</a:t>
+            </a:r>
+          </a:p>
+        </p:txBody>
+      </p:sp>
+      <p:sp>
+        <p:nvSpPr>
+          <p:cNvPr id="12" name="Data 11"/>
           <p:cNvSpPr/>
           <p:nvPr/>
         </p:nvSpPr>
         <p:spPr>
           <a:xfrm>
-            <a:off x="9464040" y="896112"/>
+            <a:off x="7315199" y="621792"/>
             <a:ext cx="292608" cy="237744"/>
           </a:xfrm>
-          <a:prstGeom prst="flowChartDocument">
+          <a:prstGeom prst="flowChartInputOutput">
             <a:avLst/>
           </a:prstGeom>
           <a:solidFill>
-            <a:srgbClr val="E5F6F4"/>
+            <a:srgbClr val="FFFFFF"/>
           </a:solidFill>
-          <a:ln w="22225">
+          <a:ln>
             <a:solidFill>
-              <a:srgbClr val="0F6E6B"/>
+              <a:srgbClr val="4338CA"/>
             </a:solidFill>
           </a:ln>
-          <a:effectLst/>
         </p:spPr>
         <p:style>
           <a:lnRef idx="1">
@@ -5174,7 +4941,7 @@
           </a:fontRef>
         </p:style>
         <p:txBody>
-          <a:bodyPr rtlCol="0" anchor="ctr" wrap="square" lIns="73152" rIns="73152" tIns="36576" bIns="36576"/>
+          <a:bodyPr rtlCol="0" anchor="ctr"/>
           <a:lstStyle/>
           <a:p>
             <a:pPr algn="ctr"/>
@@ -5189,8 +4956,8 @@
         </p:nvSpPr>
         <p:spPr>
           <a:xfrm>
-            <a:off x="9793224" y="896112"/>
-            <a:ext cx="2011680" cy="219456"/>
+            <a:off x="7644383" y="603504"/>
+            <a:ext cx="1965960" cy="274320"/>
           </a:xfrm>
           <a:prstGeom prst="rect">
             <a:avLst/>
@@ -5198,54 +4965,46 @@
           <a:noFill/>
         </p:spPr>
         <p:txBody>
-          <a:bodyPr wrap="none" lIns="18288" tIns="0" bIns="0">
+          <a:bodyPr wrap="square">
             <a:spAutoFit/>
           </a:bodyPr>
           <a:lstStyle/>
           <a:p>
-            <a:pPr algn="ctr">
-              <a:spcBef>
-                <a:spcPts val="0"/>
-              </a:spcBef>
-              <a:spcAft>
-                <a:spcPts val="0"/>
-              </a:spcAft>
-            </a:pPr>
-            <a:r>
-              <a:rPr sz="1200" b="1">
+            <a:pPr algn="l"/>
+            <a:r>
+              <a:rPr sz="1100" b="0">
                 <a:solidFill>
                   <a:srgbClr val="3F4A5A"/>
                 </a:solidFill>
                 <a:latin typeface="Calibri"/>
               </a:rPr>
-              <a:t>Document  File produced</a:t>
-            </a:r>
-          </a:p>
-        </p:txBody>
-      </p:sp>
-      <p:sp>
-        <p:nvSpPr>
-          <p:cNvPr id="14" name="Decision 13"/>
+              <a:t>Slanted   Files you add</a:t>
+            </a:r>
+          </a:p>
+        </p:txBody>
+      </p:sp>
+      <p:sp>
+        <p:nvSpPr>
+          <p:cNvPr id="14" name="Document 13"/>
           <p:cNvSpPr/>
           <p:nvPr/>
         </p:nvSpPr>
         <p:spPr>
           <a:xfrm>
-            <a:off x="4956048" y="1298448"/>
-            <a:ext cx="2286000" cy="1051560"/>
-          </a:xfrm>
-          <a:prstGeom prst="flowChartDecision">
+            <a:off x="9646919" y="621792"/>
+            <a:ext cx="292608" cy="237744"/>
+          </a:xfrm>
+          <a:prstGeom prst="flowChartDocument">
             <a:avLst/>
           </a:prstGeom>
           <a:solidFill>
-            <a:srgbClr val="FFF4D4"/>
+            <a:srgbClr val="FFFFFF"/>
           </a:solidFill>
-          <a:ln w="22225">
+          <a:ln>
             <a:solidFill>
-              <a:srgbClr val="B45309"/>
+              <a:srgbClr val="0F6E6B"/>
             </a:solidFill>
           </a:ln>
-          <a:effectLst/>
         </p:spPr>
         <p:style>
           <a:lnRef idx="1">
@@ -5262,52 +5021,70 @@
           </a:fontRef>
         </p:style>
         <p:txBody>
-          <a:bodyPr rtlCol="0" anchor="ctr" wrap="square" lIns="73152" rIns="73152" tIns="36576" bIns="36576"/>
-          <a:lstStyle/>
-          <a:p>
-            <a:pPr algn="ctr">
-              <a:spcBef>
-                <a:spcPts val="0"/>
-              </a:spcBef>
-              <a:spcAft>
-                <a:spcPts val="0"/>
-              </a:spcAft>
-            </a:pPr>
-            <a:r>
-              <a:rPr sz="1500" b="1">
-                <a:solidFill>
-                  <a:srgbClr val="1C1917"/>
-                </a:solidFill>
-                <a:latin typeface="Calibri"/>
-              </a:rPr>
-              <a:t>Retype on?</a:t>
-            </a:r>
-          </a:p>
-        </p:txBody>
-      </p:sp>
-      <p:sp>
-        <p:nvSpPr>
-          <p:cNvPr id="15" name="Process 14"/>
+          <a:bodyPr rtlCol="0" anchor="ctr"/>
+          <a:lstStyle/>
+          <a:p>
+            <a:pPr algn="ctr"/>
+          </a:p>
+        </p:txBody>
+      </p:sp>
+      <p:sp>
+        <p:nvSpPr>
+          <p:cNvPr id="15" name="TextBox 14"/>
+          <p:cNvSpPr txBox="1"/>
+          <p:nvPr/>
+        </p:nvSpPr>
+        <p:spPr>
+          <a:xfrm>
+            <a:off x="9976103" y="603504"/>
+            <a:ext cx="1965960" cy="274320"/>
+          </a:xfrm>
+          <a:prstGeom prst="rect">
+            <a:avLst/>
+          </a:prstGeom>
+          <a:noFill/>
+        </p:spPr>
+        <p:txBody>
+          <a:bodyPr wrap="square">
+            <a:spAutoFit/>
+          </a:bodyPr>
+          <a:lstStyle/>
+          <a:p>
+            <a:pPr algn="l"/>
+            <a:r>
+              <a:rPr sz="1100" b="0">
+                <a:solidFill>
+                  <a:srgbClr val="3F4A5A"/>
+                </a:solidFill>
+                <a:latin typeface="Calibri"/>
+              </a:rPr>
+              <a:t>Document   File produced</a:t>
+            </a:r>
+          </a:p>
+        </p:txBody>
+      </p:sp>
+      <p:sp>
+        <p:nvSpPr>
+          <p:cNvPr id="16" name="Decision 15"/>
           <p:cNvSpPr/>
           <p:nvPr/>
         </p:nvSpPr>
         <p:spPr>
           <a:xfrm>
-            <a:off x="292608" y="2505456"/>
-            <a:ext cx="5669280" cy="914400"/>
-          </a:xfrm>
-          <a:prstGeom prst="flowChartProcess">
+            <a:off x="4709160" y="1024128"/>
+            <a:ext cx="2743200" cy="1005840"/>
+          </a:xfrm>
+          <a:prstGeom prst="flowChartDecision">
             <a:avLst/>
           </a:prstGeom>
           <a:solidFill>
-            <a:srgbClr val="E5F6F4"/>
+            <a:srgbClr val="FFF4D4"/>
           </a:solidFill>
-          <a:ln w="22225">
+          <a:ln w="15875">
             <a:solidFill>
-              <a:srgbClr val="0F6E6B"/>
+              <a:srgbClr val="B45309"/>
             </a:solidFill>
           </a:ln>
-          <a:effectLst/>
         </p:spPr>
         <p:style>
           <a:lnRef idx="1">
@@ -5324,58 +5101,36 @@
           </a:fontRef>
         </p:style>
         <p:txBody>
-          <a:bodyPr rtlCol="0" anchor="ctr" wrap="square" lIns="73152" rIns="73152" tIns="36576" bIns="36576"/>
+          <a:bodyPr rtlCol="0" anchor="ctr" wrap="square" lIns="54864" rIns="54864" tIns="54864" bIns="54864"/>
           <a:lstStyle/>
           <a:p>
             <a:pPr algn="ctr">
-              <a:spcBef>
-                <a:spcPts val="0"/>
-              </a:spcBef>
               <a:spcAft>
                 <a:spcPts val="0"/>
               </a:spcAft>
             </a:pPr>
             <a:r>
-              <a:rPr sz="1200" b="1">
-                <a:solidFill>
-                  <a:srgbClr val="0F6E6B"/>
-                </a:solidFill>
-                <a:latin typeface="Calibri"/>
-              </a:rPr>
-              <a:t>Application</a:t>
-            </a:r>
-          </a:p>
-          <a:p>
-            <a:pPr algn="ctr">
-              <a:spcBef>
-                <a:spcPts val="0"/>
-              </a:spcBef>
-              <a:spcAft>
-                <a:spcPts val="0"/>
-              </a:spcAft>
-            </a:pPr>
-            <a:r>
-              <a:rPr sz="1300" b="0">
-                <a:solidFill>
-                  <a:srgbClr val="1C1917"/>
-                </a:solidFill>
-                <a:latin typeface="Calibri"/>
-              </a:rPr>
-              <a:t>Rewrite the cover day, the HCE %, and off-calendar 402(g) dates where that text is found</a:t>
-            </a:r>
-          </a:p>
-        </p:txBody>
-      </p:sp>
-      <p:sp>
-        <p:nvSpPr>
-          <p:cNvPr id="16" name="Process 15"/>
+              <a:rPr b="1" sz="1300">
+                <a:solidFill>
+                  <a:srgbClr val="B45309"/>
+                </a:solidFill>
+                <a:latin typeface="Calibri"/>
+              </a:rPr>
+              <a:t>Retype on?</a:t>
+            </a:r>
+          </a:p>
+        </p:txBody>
+      </p:sp>
+      <p:sp>
+        <p:nvSpPr>
+          <p:cNvPr id="17" name="Process 16"/>
           <p:cNvSpPr/>
           <p:nvPr/>
         </p:nvSpPr>
         <p:spPr>
           <a:xfrm>
-            <a:off x="6236208" y="2505456"/>
-            <a:ext cx="5650992" cy="914400"/>
+            <a:off x="320040" y="2240280"/>
+            <a:ext cx="5669280" cy="960120"/>
           </a:xfrm>
           <a:prstGeom prst="flowChartProcess">
             <a:avLst/>
@@ -5383,12 +5138,11 @@
           <a:solidFill>
             <a:srgbClr val="E5F6F4"/>
           </a:solidFill>
-          <a:ln w="22225">
+          <a:ln w="15875">
             <a:solidFill>
               <a:srgbClr val="0F6E6B"/>
             </a:solidFill>
           </a:ln>
-          <a:effectLst/>
         </p:spPr>
         <p:style>
           <a:lnRef idx="1">
@@ -5405,19 +5159,16 @@
           </a:fontRef>
         </p:style>
         <p:txBody>
-          <a:bodyPr rtlCol="0" anchor="ctr" wrap="square" lIns="73152" rIns="73152" tIns="36576" bIns="36576"/>
+          <a:bodyPr rtlCol="0" anchor="ctr" wrap="square" lIns="54864" rIns="54864" tIns="54864" bIns="54864"/>
           <a:lstStyle/>
           <a:p>
             <a:pPr algn="ctr">
-              <a:spcBef>
-                <a:spcPts val="0"/>
-              </a:spcBef>
               <a:spcAft>
                 <a:spcPts val="0"/>
               </a:spcAft>
             </a:pPr>
             <a:r>
-              <a:rPr sz="1200" b="1">
+              <a:rPr b="1" sz="1300">
                 <a:solidFill>
                   <a:srgbClr val="0F6E6B"/>
                 </a:solidFill>
@@ -5429,203 +5180,43 @@
           <a:p>
             <a:pPr algn="ctr">
               <a:spcBef>
-                <a:spcPts val="0"/>
+                <a:spcPts val="200"/>
               </a:spcBef>
-              <a:spcAft>
-                <a:spcPts val="0"/>
-              </a:spcAft>
             </a:pPr>
             <a:r>
-              <a:rPr sz="1300" b="0">
+              <a:rPr sz="1200">
                 <a:solidFill>
                   <a:srgbClr val="1C1917"/>
                 </a:solidFill>
                 <a:latin typeface="Calibri"/>
               </a:rPr>
-              <a:t>Leave dates and percentages as printed. This is the default.</a:t>
-            </a:r>
-          </a:p>
-        </p:txBody>
-      </p:sp>
-      <p:cxnSp>
-        <p:nvCxnSpPr>
-          <p:cNvPr id="17" name="Connector 16"/>
-          <p:cNvCxnSpPr/>
-          <p:nvPr/>
-        </p:nvCxnSpPr>
-        <p:spPr>
-          <a:xfrm flipH="1">
-            <a:off x="4374489" y="2350008"/>
-            <a:ext cx="1221639" cy="155448"/>
-          </a:xfrm>
-          <a:prstGeom prst="line">
-            <a:avLst/>
-          </a:prstGeom>
-          <a:ln w="22225">
+              <a:t>Set the cover date to today. Rewrite the HCE % and off-calendar 402(g) dates where that text is found.</a:t>
+            </a:r>
+          </a:p>
+        </p:txBody>
+      </p:sp>
+      <p:sp>
+        <p:nvSpPr>
+          <p:cNvPr id="18" name="Process 17"/>
+          <p:cNvSpPr/>
+          <p:nvPr/>
+        </p:nvSpPr>
+        <p:spPr>
+          <a:xfrm>
+            <a:off x="6217920" y="2240280"/>
+            <a:ext cx="5623560" cy="960120"/>
+          </a:xfrm>
+          <a:prstGeom prst="flowChartProcess">
+            <a:avLst/>
+          </a:prstGeom>
+          <a:solidFill>
+            <a:srgbClr val="E5F6F4"/>
+          </a:solidFill>
+          <a:ln w="15875">
             <a:solidFill>
-              <a:srgbClr val="3F4A5A"/>
-            </a:solidFill>
-            <a:tailEnd type="triangle" w="med" len="med"/>
-          </a:ln>
-        </p:spPr>
-        <p:style>
-          <a:lnRef idx="2">
-            <a:schemeClr val="accent1"/>
-          </a:lnRef>
-          <a:fillRef idx="0">
-            <a:schemeClr val="accent1"/>
-          </a:fillRef>
-          <a:effectRef idx="1">
-            <a:schemeClr val="accent1"/>
-          </a:effectRef>
-          <a:fontRef idx="minor">
-            <a:schemeClr val="tx1"/>
-          </a:fontRef>
-        </p:style>
-      </p:cxnSp>
-      <p:cxnSp>
-        <p:nvCxnSpPr>
-          <p:cNvPr id="18" name="Connector 17"/>
-          <p:cNvCxnSpPr/>
-          <p:nvPr/>
-        </p:nvCxnSpPr>
-        <p:spPr>
-          <a:xfrm>
-            <a:off x="6601968" y="2350008"/>
-            <a:ext cx="1216517" cy="155448"/>
-          </a:xfrm>
-          <a:prstGeom prst="line">
-            <a:avLst/>
-          </a:prstGeom>
-          <a:ln w="22225">
-            <a:solidFill>
-              <a:srgbClr val="3F4A5A"/>
-            </a:solidFill>
-            <a:tailEnd type="triangle" w="med" len="med"/>
-          </a:ln>
-        </p:spPr>
-        <p:style>
-          <a:lnRef idx="2">
-            <a:schemeClr val="accent1"/>
-          </a:lnRef>
-          <a:fillRef idx="0">
-            <a:schemeClr val="accent1"/>
-          </a:fillRef>
-          <a:effectRef idx="1">
-            <a:schemeClr val="accent1"/>
-          </a:effectRef>
-          <a:fontRef idx="minor">
-            <a:schemeClr val="tx1"/>
-          </a:fontRef>
-        </p:style>
-      </p:cxnSp>
-      <p:sp>
-        <p:nvSpPr>
-          <p:cNvPr id="19" name="TextBox 18"/>
-          <p:cNvSpPr txBox="1"/>
-          <p:nvPr/>
-        </p:nvSpPr>
-        <p:spPr>
-          <a:xfrm>
-            <a:off x="429768" y="2267712"/>
-            <a:ext cx="457200" cy="219456"/>
-          </a:xfrm>
-          <a:prstGeom prst="rect">
-            <a:avLst/>
-          </a:prstGeom>
-          <a:noFill/>
-        </p:spPr>
-        <p:txBody>
-          <a:bodyPr wrap="none" lIns="18288" tIns="0" bIns="0">
-            <a:spAutoFit/>
-          </a:bodyPr>
-          <a:lstStyle/>
-          <a:p>
-            <a:pPr algn="ctr">
-              <a:spcBef>
-                <a:spcPts val="0"/>
-              </a:spcBef>
-              <a:spcAft>
-                <a:spcPts val="0"/>
-              </a:spcAft>
-            </a:pPr>
-            <a:r>
-              <a:rPr sz="1200" b="1">
-                <a:solidFill>
-                  <a:srgbClr val="145C38"/>
-                </a:solidFill>
-                <a:latin typeface="Calibri"/>
-              </a:rPr>
-              <a:t>Yes</a:t>
-            </a:r>
-          </a:p>
-        </p:txBody>
-      </p:sp>
-      <p:sp>
-        <p:nvSpPr>
-          <p:cNvPr id="20" name="TextBox 19"/>
-          <p:cNvSpPr txBox="1"/>
-          <p:nvPr/>
-        </p:nvSpPr>
-        <p:spPr>
-          <a:xfrm>
-            <a:off x="11338560" y="2267712"/>
-            <a:ext cx="411480" cy="219456"/>
-          </a:xfrm>
-          <a:prstGeom prst="rect">
-            <a:avLst/>
-          </a:prstGeom>
-          <a:noFill/>
-        </p:spPr>
-        <p:txBody>
-          <a:bodyPr wrap="none" lIns="18288" tIns="0" bIns="0">
-            <a:spAutoFit/>
-          </a:bodyPr>
-          <a:lstStyle/>
-          <a:p>
-            <a:pPr algn="ctr">
-              <a:spcBef>
-                <a:spcPts val="0"/>
-              </a:spcBef>
-              <a:spcAft>
-                <a:spcPts val="0"/>
-              </a:spcAft>
-            </a:pPr>
-            <a:r>
-              <a:rPr sz="1200" b="1">
-                <a:solidFill>
-                  <a:srgbClr val="9A3412"/>
-                </a:solidFill>
-                <a:latin typeface="Calibri"/>
-              </a:rPr>
-              <a:t>No</a:t>
-            </a:r>
-          </a:p>
-        </p:txBody>
-      </p:sp>
-      <p:sp>
-        <p:nvSpPr>
-          <p:cNvPr id="21" name="Process 20"/>
-          <p:cNvSpPr/>
-          <p:nvPr/>
-        </p:nvSpPr>
-        <p:spPr>
-          <a:xfrm>
-            <a:off x="3017520" y="3657600"/>
-            <a:ext cx="6126480" cy="566928"/>
-          </a:xfrm>
-          <a:prstGeom prst="flowChartProcess">
-            <a:avLst/>
-          </a:prstGeom>
-          <a:solidFill>
-            <a:srgbClr val="E7F0FB"/>
-          </a:solidFill>
-          <a:ln w="22225">
-            <a:solidFill>
-              <a:srgbClr val="1D4E89"/>
+              <a:srgbClr val="0F6E6B"/>
             </a:solidFill>
           </a:ln>
-          <a:effectLst/>
         </p:spPr>
         <p:style>
           <a:lnRef idx="1">
@@ -5642,48 +5233,134 @@
           </a:fontRef>
         </p:style>
         <p:txBody>
-          <a:bodyPr rtlCol="0" anchor="ctr" wrap="square" lIns="73152" rIns="73152" tIns="36576" bIns="36576"/>
+          <a:bodyPr rtlCol="0" anchor="ctr" wrap="square" lIns="54864" rIns="54864" tIns="54864" bIns="54864"/>
           <a:lstStyle/>
           <a:p>
             <a:pPr algn="ctr">
-              <a:spcBef>
-                <a:spcPts val="0"/>
-              </a:spcBef>
               <a:spcAft>
                 <a:spcPts val="0"/>
               </a:spcAft>
             </a:pPr>
             <a:r>
-              <a:rPr sz="1200" b="1">
-                <a:solidFill>
-                  <a:srgbClr val="1D4E89"/>
-                </a:solidFill>
-                <a:latin typeface="Calibri"/>
-              </a:rPr>
-              <a:t>You</a:t>
+              <a:rPr b="1" sz="1300">
+                <a:solidFill>
+                  <a:srgbClr val="0F6E6B"/>
+                </a:solidFill>
+                <a:latin typeface="Calibri"/>
+              </a:rPr>
+              <a:t>Application</a:t>
             </a:r>
           </a:p>
           <a:p>
             <a:pPr algn="ctr">
               <a:spcBef>
-                <a:spcPts val="0"/>
+                <a:spcPts val="200"/>
               </a:spcBef>
-              <a:spcAft>
-                <a:spcPts val="0"/>
-              </a:spcAft>
             </a:pPr>
             <a:r>
-              <a:rPr sz="1600" b="1">
+              <a:rPr sz="1200">
                 <a:solidFill>
                   <a:srgbClr val="1C1917"/>
                 </a:solidFill>
                 <a:latin typeface="Calibri"/>
               </a:rPr>
-              <a:t>Click Process package</a:t>
-            </a:r>
-          </a:p>
-        </p:txBody>
-      </p:sp>
+              <a:t>Leave dates and percentages as printed. This is the default. A cover date that is not today is still flagged.</a:t>
+            </a:r>
+          </a:p>
+        </p:txBody>
+      </p:sp>
+      <p:sp>
+        <p:nvSpPr>
+          <p:cNvPr id="19" name="TextBox 18"/>
+          <p:cNvSpPr txBox="1"/>
+          <p:nvPr/>
+        </p:nvSpPr>
+        <p:spPr>
+          <a:xfrm>
+            <a:off x="1417320" y="1965960"/>
+            <a:ext cx="548640" cy="237744"/>
+          </a:xfrm>
+          <a:prstGeom prst="rect">
+            <a:avLst/>
+          </a:prstGeom>
+          <a:noFill/>
+        </p:spPr>
+        <p:txBody>
+          <a:bodyPr wrap="square">
+            <a:spAutoFit/>
+          </a:bodyPr>
+          <a:lstStyle/>
+          <a:p>
+            <a:pPr algn="l"/>
+            <a:r>
+              <a:rPr sz="1300" b="1">
+                <a:solidFill>
+                  <a:srgbClr val="145C38"/>
+                </a:solidFill>
+                <a:latin typeface="Calibri"/>
+              </a:rPr>
+              <a:t>Yes</a:t>
+            </a:r>
+          </a:p>
+        </p:txBody>
+      </p:sp>
+      <p:sp>
+        <p:nvSpPr>
+          <p:cNvPr id="20" name="TextBox 19"/>
+          <p:cNvSpPr txBox="1"/>
+          <p:nvPr/>
+        </p:nvSpPr>
+        <p:spPr>
+          <a:xfrm>
+            <a:off x="10835640" y="1965960"/>
+            <a:ext cx="457200" cy="237744"/>
+          </a:xfrm>
+          <a:prstGeom prst="rect">
+            <a:avLst/>
+          </a:prstGeom>
+          <a:noFill/>
+        </p:spPr>
+        <p:txBody>
+          <a:bodyPr wrap="square">
+            <a:spAutoFit/>
+          </a:bodyPr>
+          <a:lstStyle/>
+          <a:p>
+            <a:pPr algn="l"/>
+            <a:r>
+              <a:rPr sz="1300" b="1">
+                <a:solidFill>
+                  <a:srgbClr val="9A3412"/>
+                </a:solidFill>
+                <a:latin typeface="Calibri"/>
+              </a:rPr>
+              <a:t>No</a:t>
+            </a:r>
+          </a:p>
+        </p:txBody>
+      </p:sp>
+      <p:cxnSp>
+        <p:nvCxnSpPr>
+          <p:cNvPr id="21" name="Connector 20"/>
+          <p:cNvCxnSpPr/>
+          <p:nvPr/>
+        </p:nvCxnSpPr>
+        <p:spPr>
+          <a:xfrm flipH="1">
+            <a:off x="3108960" y="2029968"/>
+            <a:ext cx="2103120" cy="210312"/>
+          </a:xfrm>
+          <a:prstGeom prst="line">
+            <a:avLst/>
+          </a:prstGeom>
+          <a:ln w="22225">
+            <a:solidFill>
+              <a:srgbClr val="0F6E6B"/>
+            </a:solidFill>
+            <a:tailEnd type="triangle" w="med" len="med"/>
+          </a:ln>
+        </p:spPr>
+      </p:cxnSp>
       <p:cxnSp>
         <p:nvCxnSpPr>
           <p:cNvPr id="22" name="Connector 21"/>
@@ -5692,93 +5369,42 @@
         </p:nvCxnSpPr>
         <p:spPr>
           <a:xfrm>
-            <a:off x="3127248" y="3429000"/>
-            <a:ext cx="0" cy="219456"/>
+            <a:off x="6949440" y="2029968"/>
+            <a:ext cx="2011680" cy="210312"/>
           </a:xfrm>
           <a:prstGeom prst="line">
             <a:avLst/>
           </a:prstGeom>
-          <a:ln w="22225">
-            <a:solidFill>
-              <a:srgbClr val="3F4A5A"/>
-            </a:solidFill>
-            <a:tailEnd type="triangle" w="med" len="med"/>
-          </a:ln>
-        </p:spPr>
-        <p:style>
-          <a:lnRef idx="2">
-            <a:schemeClr val="accent1"/>
-          </a:lnRef>
-          <a:fillRef idx="0">
-            <a:schemeClr val="accent1"/>
-          </a:fillRef>
-          <a:effectRef idx="1">
-            <a:schemeClr val="accent1"/>
-          </a:effectRef>
-          <a:fontRef idx="minor">
-            <a:schemeClr val="tx1"/>
-          </a:fontRef>
-        </p:style>
-      </p:cxnSp>
-      <p:cxnSp>
-        <p:nvCxnSpPr>
-          <p:cNvPr id="23" name="Connector 22"/>
-          <p:cNvCxnSpPr/>
-          <p:nvPr/>
-        </p:nvCxnSpPr>
-        <p:spPr>
-          <a:xfrm>
-            <a:off x="9061704" y="3429000"/>
-            <a:ext cx="0" cy="219456"/>
-          </a:xfrm>
-          <a:prstGeom prst="line">
-            <a:avLst/>
-          </a:prstGeom>
-          <a:ln w="22225">
-            <a:solidFill>
-              <a:srgbClr val="3F4A5A"/>
-            </a:solidFill>
-            <a:tailEnd type="triangle" w="med" len="med"/>
-          </a:ln>
-        </p:spPr>
-        <p:style>
-          <a:lnRef idx="2">
-            <a:schemeClr val="accent1"/>
-          </a:lnRef>
-          <a:fillRef idx="0">
-            <a:schemeClr val="accent1"/>
-          </a:fillRef>
-          <a:effectRef idx="1">
-            <a:schemeClr val="accent1"/>
-          </a:effectRef>
-          <a:fontRef idx="minor">
-            <a:schemeClr val="tx1"/>
-          </a:fontRef>
-        </p:style>
-      </p:cxnSp>
-      <p:sp>
-        <p:nvSpPr>
-          <p:cNvPr id="24" name="Process 23"/>
-          <p:cNvSpPr/>
-          <p:nvPr/>
-        </p:nvSpPr>
-        <p:spPr>
-          <a:xfrm>
-            <a:off x="320040" y="4480560"/>
-            <a:ext cx="5577840" cy="777240"/>
-          </a:xfrm>
-          <a:prstGeom prst="flowChartProcess">
-            <a:avLst/>
-          </a:prstGeom>
-          <a:solidFill>
-            <a:srgbClr val="E5F6F4"/>
-          </a:solidFill>
           <a:ln w="22225">
             <a:solidFill>
               <a:srgbClr val="0F6E6B"/>
             </a:solidFill>
+            <a:tailEnd type="triangle" w="med" len="med"/>
           </a:ln>
-          <a:effectLst/>
+        </p:spPr>
+      </p:cxnSp>
+      <p:sp>
+        <p:nvSpPr>
+          <p:cNvPr id="23" name="Process 22"/>
+          <p:cNvSpPr/>
+          <p:nvPr/>
+        </p:nvSpPr>
+        <p:spPr>
+          <a:xfrm>
+            <a:off x="3200400" y="3383280"/>
+            <a:ext cx="5760720" cy="566928"/>
+          </a:xfrm>
+          <a:prstGeom prst="flowChartProcess">
+            <a:avLst/>
+          </a:prstGeom>
+          <a:solidFill>
+            <a:srgbClr val="E7F0FB"/>
+          </a:solidFill>
+          <a:ln w="15875">
+            <a:solidFill>
+              <a:srgbClr val="1D4E89"/>
+            </a:solidFill>
+          </a:ln>
         </p:spPr>
         <p:style>
           <a:lnRef idx="1">
@@ -5795,71 +5421,108 @@
           </a:fontRef>
         </p:style>
         <p:txBody>
-          <a:bodyPr rtlCol="0" anchor="ctr" wrap="square" lIns="73152" rIns="73152" tIns="36576" bIns="36576"/>
+          <a:bodyPr rtlCol="0" anchor="ctr" wrap="square" lIns="54864" rIns="54864" tIns="54864" bIns="54864"/>
           <a:lstStyle/>
           <a:p>
             <a:pPr algn="ctr">
-              <a:spcBef>
-                <a:spcPts val="0"/>
-              </a:spcBef>
               <a:spcAft>
                 <a:spcPts val="0"/>
               </a:spcAft>
             </a:pPr>
             <a:r>
-              <a:rPr sz="1200" b="1">
-                <a:solidFill>
-                  <a:srgbClr val="0F6E6B"/>
-                </a:solidFill>
-                <a:latin typeface="Calibri"/>
-              </a:rPr>
-              <a:t>Application</a:t>
+              <a:rPr b="1" sz="1300">
+                <a:solidFill>
+                  <a:srgbClr val="1D4E89"/>
+                </a:solidFill>
+                <a:latin typeface="Calibri"/>
+              </a:rPr>
+              <a:t>You</a:t>
             </a:r>
           </a:p>
           <a:p>
             <a:pPr algn="ctr">
               <a:spcBef>
-                <a:spcPts val="0"/>
+                <a:spcPts val="200"/>
               </a:spcBef>
-              <a:spcAft>
-                <a:spcPts val="0"/>
-              </a:spcAft>
             </a:pPr>
             <a:r>
-              <a:rPr sz="1400" b="0">
+              <a:rPr sz="1400">
                 <a:solidFill>
                   <a:srgbClr val="1C1917"/>
                 </a:solidFill>
                 <a:latin typeface="Calibri"/>
               </a:rPr>
-              <a:t>Merge the selected pages into one PDF</a:t>
-            </a:r>
-          </a:p>
-        </p:txBody>
-      </p:sp>
-      <p:sp>
-        <p:nvSpPr>
-          <p:cNvPr id="25" name="Process 24"/>
-          <p:cNvSpPr/>
-          <p:nvPr/>
-        </p:nvSpPr>
-        <p:spPr>
-          <a:xfrm>
-            <a:off x="6263640" y="4480560"/>
-            <a:ext cx="5623560" cy="777240"/>
-          </a:xfrm>
-          <a:prstGeom prst="flowChartProcess">
-            <a:avLst/>
-          </a:prstGeom>
-          <a:solidFill>
-            <a:srgbClr val="E5F6F4"/>
-          </a:solidFill>
+              <a:t>Click Process package</a:t>
+            </a:r>
+          </a:p>
+        </p:txBody>
+      </p:sp>
+      <p:cxnSp>
+        <p:nvCxnSpPr>
+          <p:cNvPr id="24" name="Connector 23"/>
+          <p:cNvCxnSpPr/>
+          <p:nvPr/>
+        </p:nvCxnSpPr>
+        <p:spPr>
+          <a:xfrm>
+            <a:off x="3154680" y="3200400"/>
+            <a:ext cx="1874520" cy="182880"/>
+          </a:xfrm>
+          <a:prstGeom prst="line">
+            <a:avLst/>
+          </a:prstGeom>
           <a:ln w="22225">
             <a:solidFill>
               <a:srgbClr val="0F6E6B"/>
             </a:solidFill>
+            <a:tailEnd type="triangle" w="med" len="med"/>
           </a:ln>
-          <a:effectLst/>
+        </p:spPr>
+      </p:cxnSp>
+      <p:cxnSp>
+        <p:nvCxnSpPr>
+          <p:cNvPr id="25" name="Connector 24"/>
+          <p:cNvCxnSpPr/>
+          <p:nvPr/>
+        </p:nvCxnSpPr>
+        <p:spPr>
+          <a:xfrm flipH="1">
+            <a:off x="7132320" y="3200400"/>
+            <a:ext cx="1874520" cy="182880"/>
+          </a:xfrm>
+          <a:prstGeom prst="line">
+            <a:avLst/>
+          </a:prstGeom>
+          <a:ln w="22225">
+            <a:solidFill>
+              <a:srgbClr val="0F6E6B"/>
+            </a:solidFill>
+            <a:tailEnd type="triangle" w="med" len="med"/>
+          </a:ln>
+        </p:spPr>
+      </p:cxnSp>
+      <p:sp>
+        <p:nvSpPr>
+          <p:cNvPr id="26" name="Process 25"/>
+          <p:cNvSpPr/>
+          <p:nvPr/>
+        </p:nvSpPr>
+        <p:spPr>
+          <a:xfrm>
+            <a:off x="1554480" y="4114800"/>
+            <a:ext cx="9052560" cy="530352"/>
+          </a:xfrm>
+          <a:prstGeom prst="flowChartProcess">
+            <a:avLst/>
+          </a:prstGeom>
+          <a:solidFill>
+            <a:srgbClr val="E5F6F4"/>
+          </a:solidFill>
+          <a:ln w="15875">
+            <a:solidFill>
+              <a:srgbClr val="0F6E6B"/>
+            </a:solidFill>
+          </a:ln>
         </p:spPr>
         <p:style>
           <a:lnRef idx="1">
@@ -5876,19 +5539,16 @@
           </a:fontRef>
         </p:style>
         <p:txBody>
-          <a:bodyPr rtlCol="0" anchor="ctr" wrap="square" lIns="73152" rIns="73152" tIns="36576" bIns="36576"/>
+          <a:bodyPr rtlCol="0" anchor="ctr" wrap="square" lIns="54864" rIns="54864" tIns="54864" bIns="54864"/>
           <a:lstStyle/>
           <a:p>
             <a:pPr algn="ctr">
-              <a:spcBef>
-                <a:spcPts val="0"/>
-              </a:spcBef>
               <a:spcAft>
                 <a:spcPts val="0"/>
               </a:spcAft>
             </a:pPr>
             <a:r>
-              <a:rPr sz="1200" b="1">
+              <a:rPr b="1" sz="1300">
                 <a:solidFill>
                   <a:srgbClr val="0F6E6B"/>
                 </a:solidFill>
@@ -5900,60 +5560,21 @@
           <a:p>
             <a:pPr algn="ctr">
               <a:spcBef>
-                <a:spcPts val="0"/>
+                <a:spcPts val="200"/>
               </a:spcBef>
-              <a:spcAft>
-                <a:spcPts val="0"/>
-              </a:spcAft>
             </a:pPr>
             <a:r>
-              <a:rPr sz="1300" b="0">
+              <a:rPr sz="1300">
                 <a:solidFill>
                   <a:srgbClr val="1C1917"/>
                 </a:solidFill>
                 <a:latin typeface="Calibri"/>
               </a:rPr>
-              <a:t>Read plan number, names, year, CURRENT or PRIOR, pass or fail, and amounts</a:t>
-            </a:r>
-          </a:p>
-        </p:txBody>
-      </p:sp>
-      <p:cxnSp>
-        <p:nvCxnSpPr>
-          <p:cNvPr id="26" name="Connector 25"/>
-          <p:cNvCxnSpPr/>
-          <p:nvPr/>
-        </p:nvCxnSpPr>
-        <p:spPr>
-          <a:xfrm>
-            <a:off x="5916167" y="4869180"/>
-            <a:ext cx="329185" cy="0"/>
-          </a:xfrm>
-          <a:prstGeom prst="line">
-            <a:avLst/>
-          </a:prstGeom>
-          <a:ln w="22225">
-            <a:solidFill>
-              <a:srgbClr val="3F4A5A"/>
-            </a:solidFill>
-            <a:tailEnd type="triangle" w="med" len="med"/>
-          </a:ln>
-        </p:spPr>
-        <p:style>
-          <a:lnRef idx="2">
-            <a:schemeClr val="accent1"/>
-          </a:lnRef>
-          <a:fillRef idx="0">
-            <a:schemeClr val="accent1"/>
-          </a:fillRef>
-          <a:effectRef idx="1">
-            <a:schemeClr val="accent1"/>
-          </a:effectRef>
-          <a:fontRef idx="minor">
-            <a:schemeClr val="tx1"/>
-          </a:fontRef>
-        </p:style>
-      </p:cxnSp>
+              <a:t>Merge the selected pages into one PDF</a:t>
+            </a:r>
+          </a:p>
+        </p:txBody>
+      </p:sp>
       <p:cxnSp>
         <p:nvCxnSpPr>
           <p:cNvPr id="27" name="Connector 26"/>
@@ -5962,127 +5583,42 @@
         </p:nvCxnSpPr>
         <p:spPr>
           <a:xfrm>
-            <a:off x="6080760" y="4224528"/>
-            <a:ext cx="0" cy="128016"/>
+            <a:off x="6080760" y="3950208"/>
+            <a:ext cx="0" cy="164592"/>
           </a:xfrm>
           <a:prstGeom prst="line">
             <a:avLst/>
           </a:prstGeom>
           <a:ln w="22225">
             <a:solidFill>
-              <a:srgbClr val="3F4A5A"/>
-            </a:solidFill>
-          </a:ln>
-        </p:spPr>
-        <p:style>
-          <a:lnRef idx="2">
-            <a:schemeClr val="accent1"/>
-          </a:lnRef>
-          <a:fillRef idx="0">
-            <a:schemeClr val="accent1"/>
-          </a:fillRef>
-          <a:effectRef idx="1">
-            <a:schemeClr val="accent1"/>
-          </a:effectRef>
-          <a:fontRef idx="minor">
-            <a:schemeClr val="tx1"/>
-          </a:fontRef>
-        </p:style>
-      </p:cxnSp>
-      <p:cxnSp>
-        <p:nvCxnSpPr>
-          <p:cNvPr id="28" name="Connector 27"/>
-          <p:cNvCxnSpPr/>
-          <p:nvPr/>
-        </p:nvCxnSpPr>
-        <p:spPr>
-          <a:xfrm flipH="1">
-            <a:off x="3108960" y="4352544"/>
-            <a:ext cx="2971800" cy="0"/>
-          </a:xfrm>
-          <a:prstGeom prst="line">
-            <a:avLst/>
-          </a:prstGeom>
-          <a:ln w="22225">
-            <a:solidFill>
-              <a:srgbClr val="3F4A5A"/>
-            </a:solidFill>
-          </a:ln>
-        </p:spPr>
-        <p:style>
-          <a:lnRef idx="2">
-            <a:schemeClr val="accent1"/>
-          </a:lnRef>
-          <a:fillRef idx="0">
-            <a:schemeClr val="accent1"/>
-          </a:fillRef>
-          <a:effectRef idx="1">
-            <a:schemeClr val="accent1"/>
-          </a:effectRef>
-          <a:fontRef idx="minor">
-            <a:schemeClr val="tx1"/>
-          </a:fontRef>
-        </p:style>
-      </p:cxnSp>
-      <p:cxnSp>
-        <p:nvCxnSpPr>
-          <p:cNvPr id="29" name="Connector 28"/>
-          <p:cNvCxnSpPr/>
-          <p:nvPr/>
-        </p:nvCxnSpPr>
-        <p:spPr>
-          <a:xfrm>
-            <a:off x="3108960" y="4352544"/>
-            <a:ext cx="0" cy="128016"/>
-          </a:xfrm>
-          <a:prstGeom prst="line">
-            <a:avLst/>
-          </a:prstGeom>
-          <a:ln w="22225">
-            <a:solidFill>
-              <a:srgbClr val="3F4A5A"/>
+              <a:srgbClr val="0F6E6B"/>
             </a:solidFill>
             <a:tailEnd type="triangle" w="med" len="med"/>
           </a:ln>
         </p:spPr>
-        <p:style>
-          <a:lnRef idx="2">
-            <a:schemeClr val="accent1"/>
-          </a:lnRef>
-          <a:fillRef idx="0">
-            <a:schemeClr val="accent1"/>
-          </a:fillRef>
-          <a:effectRef idx="1">
-            <a:schemeClr val="accent1"/>
-          </a:effectRef>
-          <a:fontRef idx="minor">
-            <a:schemeClr val="tx1"/>
-          </a:fontRef>
-        </p:style>
       </p:cxnSp>
       <p:sp>
         <p:nvSpPr>
-          <p:cNvPr id="30" name="Rounded Rectangle 29"/>
+          <p:cNvPr id="28" name="Process 27"/>
           <p:cNvSpPr/>
           <p:nvPr/>
         </p:nvSpPr>
         <p:spPr>
           <a:xfrm>
-            <a:off x="320040" y="5532120"/>
-            <a:ext cx="11521440" cy="1005840"/>
-          </a:xfrm>
-          <a:prstGeom prst="roundRect">
+            <a:off x="1554480" y="4773168"/>
+            <a:ext cx="9052560" cy="658368"/>
+          </a:xfrm>
+          <a:prstGeom prst="flowChartProcess">
             <a:avLst/>
           </a:prstGeom>
           <a:solidFill>
-            <a:srgbClr val="FFFBF0"/>
+            <a:srgbClr val="E5F6F4"/>
           </a:solidFill>
-          <a:ln w="22225">
+          <a:ln w="15875">
             <a:solidFill>
-              <a:srgbClr val="A16207"/>
+              <a:srgbClr val="0F6E6B"/>
             </a:solidFill>
           </a:ln>
-          <a:effectLst/>
         </p:spPr>
         <p:style>
           <a:lnRef idx="1">
@@ -6099,44 +5635,134 @@
           </a:fontRef>
         </p:style>
         <p:txBody>
-          <a:bodyPr rtlCol="0" anchor="ctr" wrap="square" lIns="73152" rIns="73152" tIns="36576" bIns="36576"/>
+          <a:bodyPr rtlCol="0" anchor="ctr" wrap="square" lIns="54864" rIns="54864" tIns="54864" bIns="54864"/>
           <a:lstStyle/>
           <a:p>
             <a:pPr algn="ctr">
-              <a:spcBef>
-                <a:spcPts val="0"/>
-              </a:spcBef>
               <a:spcAft>
                 <a:spcPts val="0"/>
               </a:spcAft>
             </a:pPr>
             <a:r>
-              <a:rPr sz="1600" b="1">
-                <a:solidFill>
-                  <a:srgbClr val="9A3412"/>
-                </a:solidFill>
-                <a:latin typeface="Calibri"/>
-              </a:rPr>
-              <a:t>Next page — the checks</a:t>
+              <a:rPr b="1" sz="1300">
+                <a:solidFill>
+                  <a:srgbClr val="0F6E6B"/>
+                </a:solidFill>
+                <a:latin typeface="Calibri"/>
+              </a:rPr>
+              <a:t>Application</a:t>
             </a:r>
           </a:p>
           <a:p>
             <a:pPr algn="ctr">
               <a:spcBef>
-                <a:spcPts val="0"/>
+                <a:spcPts val="200"/>
               </a:spcBef>
+            </a:pPr>
+            <a:r>
+              <a:rPr sz="1200">
+                <a:solidFill>
+                  <a:srgbClr val="1C1917"/>
+                </a:solidFill>
+                <a:latin typeface="Calibri"/>
+              </a:rPr>
+              <a:t>Reorder inner pages when the headings match: ADP/ACP, 410(b), and a component benefit test.</a:t>
+            </a:r>
+          </a:p>
+        </p:txBody>
+      </p:sp>
+      <p:cxnSp>
+        <p:nvCxnSpPr>
+          <p:cNvPr id="29" name="Connector 28"/>
+          <p:cNvCxnSpPr/>
+          <p:nvPr/>
+        </p:nvCxnSpPr>
+        <p:spPr>
+          <a:xfrm>
+            <a:off x="6080760" y="4645152"/>
+            <a:ext cx="0" cy="128016"/>
+          </a:xfrm>
+          <a:prstGeom prst="line">
+            <a:avLst/>
+          </a:prstGeom>
+          <a:ln w="22225">
+            <a:solidFill>
+              <a:srgbClr val="0F6E6B"/>
+            </a:solidFill>
+            <a:tailEnd type="triangle" w="med" len="med"/>
+          </a:ln>
+        </p:spPr>
+      </p:cxnSp>
+      <p:sp>
+        <p:nvSpPr>
+          <p:cNvPr id="30" name="Process 29"/>
+          <p:cNvSpPr/>
+          <p:nvPr/>
+        </p:nvSpPr>
+        <p:spPr>
+          <a:xfrm>
+            <a:off x="1554480" y="5559552"/>
+            <a:ext cx="9052560" cy="713232"/>
+          </a:xfrm>
+          <a:prstGeom prst="flowChartProcess">
+            <a:avLst/>
+          </a:prstGeom>
+          <a:solidFill>
+            <a:srgbClr val="E5F6F4"/>
+          </a:solidFill>
+          <a:ln w="15875">
+            <a:solidFill>
+              <a:srgbClr val="0F6E6B"/>
+            </a:solidFill>
+          </a:ln>
+        </p:spPr>
+        <p:style>
+          <a:lnRef idx="1">
+            <a:schemeClr val="accent1"/>
+          </a:lnRef>
+          <a:fillRef idx="3">
+            <a:schemeClr val="accent1"/>
+          </a:fillRef>
+          <a:effectRef idx="2">
+            <a:schemeClr val="accent1"/>
+          </a:effectRef>
+          <a:fontRef idx="minor">
+            <a:schemeClr val="lt1"/>
+          </a:fontRef>
+        </p:style>
+        <p:txBody>
+          <a:bodyPr rtlCol="0" anchor="ctr" wrap="square" lIns="54864" rIns="54864" tIns="54864" bIns="54864"/>
+          <a:lstStyle/>
+          <a:p>
+            <a:pPr algn="ctr">
               <a:spcAft>
                 <a:spcPts val="0"/>
               </a:spcAft>
             </a:pPr>
             <a:r>
-              <a:rPr sz="1400" b="0">
+              <a:rPr b="1" sz="1300">
+                <a:solidFill>
+                  <a:srgbClr val="0F6E6B"/>
+                </a:solidFill>
+                <a:latin typeface="Calibri"/>
+              </a:rPr>
+              <a:t>Application</a:t>
+            </a:r>
+          </a:p>
+          <a:p>
+            <a:pPr algn="ctr">
+              <a:spcBef>
+                <a:spcPts val="200"/>
+              </a:spcBef>
+            </a:pPr>
+            <a:r>
+              <a:rPr sz="1200">
                 <a:solidFill>
                   <a:srgbClr val="1C1917"/>
                 </a:solidFill>
                 <a:latin typeface="Calibri"/>
               </a:rPr>
-              <a:t>Cover letter, Action Required, ADP and ACP, 402(g), 415, Excess Summary, Year End Recap, then bookmarks.</a:t>
+              <a:t>Read plan number, names, year, PRIOR or CURRENT, HCE, allocation, pass or fail, and amounts.</a:t>
             </a:r>
           </a:p>
         </p:txBody>
@@ -6149,34 +5775,55 @@
         </p:nvCxnSpPr>
         <p:spPr>
           <a:xfrm>
-            <a:off x="9075420" y="5266944"/>
-            <a:ext cx="0" cy="256032"/>
+            <a:off x="6080760" y="5431536"/>
+            <a:ext cx="0" cy="128016"/>
           </a:xfrm>
           <a:prstGeom prst="line">
             <a:avLst/>
           </a:prstGeom>
           <a:ln w="22225">
             <a:solidFill>
-              <a:srgbClr val="3F4A5A"/>
+              <a:srgbClr val="0F6E6B"/>
             </a:solidFill>
             <a:tailEnd type="triangle" w="med" len="med"/>
           </a:ln>
         </p:spPr>
-        <p:style>
-          <a:lnRef idx="2">
-            <a:schemeClr val="accent1"/>
-          </a:lnRef>
-          <a:fillRef idx="0">
-            <a:schemeClr val="accent1"/>
-          </a:fillRef>
-          <a:effectRef idx="1">
-            <a:schemeClr val="accent1"/>
-          </a:effectRef>
-          <a:fontRef idx="minor">
-            <a:schemeClr val="tx1"/>
-          </a:fontRef>
-        </p:style>
       </p:cxnSp>
+      <p:sp>
+        <p:nvSpPr>
+          <p:cNvPr id="32" name="TextBox 31"/>
+          <p:cNvSpPr txBox="1"/>
+          <p:nvPr/>
+        </p:nvSpPr>
+        <p:spPr>
+          <a:xfrm>
+            <a:off x="6675120" y="6446520"/>
+            <a:ext cx="5120640" cy="274320"/>
+          </a:xfrm>
+          <a:prstGeom prst="rect">
+            <a:avLst/>
+          </a:prstGeom>
+          <a:noFill/>
+        </p:spPr>
+        <p:txBody>
+          <a:bodyPr wrap="square">
+            <a:spAutoFit/>
+          </a:bodyPr>
+          <a:lstStyle/>
+          <a:p>
+            <a:pPr algn="l"/>
+            <a:r>
+              <a:rPr sz="1300" b="1">
+                <a:solidFill>
+                  <a:srgbClr val="1E3A5F"/>
+                </a:solidFill>
+                <a:latin typeface="Calibri"/>
+              </a:rPr>
+              <a:t>Next page — keep, remove, and fill  →</a:t>
+            </a:r>
+          </a:p>
+        </p:txBody>
+      </p:sp>
     </p:spTree>
   </p:cSld>
   <p:clrMapOvr>
@@ -6204,18 +5851,17 @@
         <p:spPr>
           <a:xfrm>
             <a:off x="0" y="0"/>
-            <a:ext cx="12191695" cy="73152"/>
+            <a:ext cx="12191695" cy="6858000"/>
           </a:xfrm>
           <a:prstGeom prst="rect">
             <a:avLst/>
           </a:prstGeom>
           <a:solidFill>
-            <a:srgbClr val="0F6E6B"/>
+            <a:srgbClr val="F7F8F6"/>
           </a:solidFill>
-          <a:ln w="22225">
+          <a:ln>
             <a:noFill/>
           </a:ln>
-          <a:effectLst/>
         </p:spPr>
         <p:style>
           <a:lnRef idx="1">
@@ -6241,88 +5887,24 @@
       </p:sp>
       <p:sp>
         <p:nvSpPr>
-          <p:cNvPr id="3" name="TextBox 2"/>
-          <p:cNvSpPr txBox="1"/>
-          <p:nvPr/>
-        </p:nvSpPr>
-        <p:spPr>
-          <a:xfrm>
-            <a:off x="320040" y="146304"/>
-            <a:ext cx="11521440" cy="658368"/>
+          <p:cNvPr id="3" name="Rectangle 2"/>
+          <p:cNvSpPr/>
+          <p:nvPr/>
+        </p:nvSpPr>
+        <p:spPr>
+          <a:xfrm>
+            <a:off x="0" y="0"/>
+            <a:ext cx="12191695" cy="73152"/>
           </a:xfrm>
           <a:prstGeom prst="rect">
             <a:avLst/>
           </a:prstGeom>
-          <a:noFill/>
-        </p:spPr>
-        <p:txBody>
-          <a:bodyPr wrap="none">
-            <a:spAutoFit/>
-          </a:bodyPr>
-          <a:lstStyle/>
-          <a:p>
-            <a:pPr algn="l">
-              <a:spcBef>
-                <a:spcPts val="0"/>
-              </a:spcBef>
-              <a:spcAft>
-                <a:spcPts val="0"/>
-              </a:spcAft>
-            </a:pPr>
-            <a:r>
-              <a:rPr sz="2600" b="1">
-                <a:solidFill>
-                  <a:srgbClr val="1E3A5F"/>
-                </a:solidFill>
-                <a:latin typeface="Calibri"/>
-              </a:rPr>
-              <a:t>Checks the application runs</a:t>
-            </a:r>
-          </a:p>
-          <a:p>
-            <a:pPr algn="l">
-              <a:spcBef>
-                <a:spcPts val="0"/>
-              </a:spcBef>
-              <a:spcAft>
-                <a:spcPts val="0"/>
-              </a:spcAft>
-            </a:pPr>
-            <a:r>
-              <a:rPr sz="1400" b="0">
-                <a:solidFill>
-                  <a:srgbClr val="3F4A5A"/>
-                </a:solidFill>
-                <a:latin typeface="Calibri"/>
-              </a:rPr>
-              <a:t>Page 3 of 4   ·   Each box is a keep, remove, or fill step. It uses the plan facts from page 2.</a:t>
-            </a:r>
-          </a:p>
-        </p:txBody>
-      </p:sp>
-      <p:sp>
-        <p:nvSpPr>
-          <p:cNvPr id="4" name="Terminator 3"/>
-          <p:cNvSpPr/>
-          <p:nvPr/>
-        </p:nvSpPr>
-        <p:spPr>
-          <a:xfrm>
-            <a:off x="320040" y="896112"/>
-            <a:ext cx="292608" cy="237744"/>
-          </a:xfrm>
-          <a:prstGeom prst="flowChartTerminator">
-            <a:avLst/>
-          </a:prstGeom>
           <a:solidFill>
-            <a:srgbClr val="1B7A4A"/>
+            <a:srgbClr val="0F6E6B"/>
           </a:solidFill>
-          <a:ln w="22225">
-            <a:solidFill>
-              <a:srgbClr val="145C38"/>
-            </a:solidFill>
+          <a:ln>
+            <a:noFill/>
           </a:ln>
-          <a:effectLst/>
         </p:spPr>
         <p:style>
           <a:lnRef idx="1">
@@ -6339,10 +5921,45 @@
           </a:fontRef>
         </p:style>
         <p:txBody>
-          <a:bodyPr rtlCol="0" anchor="ctr" wrap="square" lIns="73152" rIns="73152" tIns="36576" bIns="36576"/>
+          <a:bodyPr rtlCol="0" anchor="ctr"/>
           <a:lstStyle/>
           <a:p>
             <a:pPr algn="ctr"/>
+          </a:p>
+        </p:txBody>
+      </p:sp>
+      <p:sp>
+        <p:nvSpPr>
+          <p:cNvPr id="4" name="TextBox 3"/>
+          <p:cNvSpPr txBox="1"/>
+          <p:nvPr/>
+        </p:nvSpPr>
+        <p:spPr>
+          <a:xfrm>
+            <a:off x="320040" y="146304"/>
+            <a:ext cx="7772400" cy="329184"/>
+          </a:xfrm>
+          <a:prstGeom prst="rect">
+            <a:avLst/>
+          </a:prstGeom>
+          <a:noFill/>
+        </p:spPr>
+        <p:txBody>
+          <a:bodyPr wrap="square">
+            <a:spAutoFit/>
+          </a:bodyPr>
+          <a:lstStyle/>
+          <a:p>
+            <a:pPr algn="l"/>
+            <a:r>
+              <a:rPr sz="2200" b="1">
+                <a:solidFill>
+                  <a:srgbClr val="1E3A5F"/>
+                </a:solidFill>
+                <a:latin typeface="Calibri"/>
+              </a:rPr>
+              <a:t>Keep, remove, and fill</a:t>
+            </a:r>
           </a:p>
         </p:txBody>
       </p:sp>
@@ -6354,8 +5971,8 @@
         </p:nvSpPr>
         <p:spPr>
           <a:xfrm>
-            <a:off x="649224" y="896112"/>
-            <a:ext cx="2011680" cy="219456"/>
+            <a:off x="7680960" y="201168"/>
+            <a:ext cx="4206240" cy="274320"/>
           </a:xfrm>
           <a:prstGeom prst="rect">
             <a:avLst/>
@@ -6363,54 +5980,46 @@
           <a:noFill/>
         </p:spPr>
         <p:txBody>
-          <a:bodyPr wrap="none" lIns="18288" tIns="0" bIns="0">
+          <a:bodyPr wrap="square">
             <a:spAutoFit/>
           </a:bodyPr>
           <a:lstStyle/>
           <a:p>
-            <a:pPr algn="ctr">
-              <a:spcBef>
-                <a:spcPts val="0"/>
-              </a:spcBef>
-              <a:spcAft>
-                <a:spcPts val="0"/>
-              </a:spcAft>
-            </a:pPr>
-            <a:r>
-              <a:rPr sz="1200" b="1">
+            <a:pPr algn="l"/>
+            <a:r>
+              <a:rPr sz="1200" b="0">
                 <a:solidFill>
                   <a:srgbClr val="3F4A5A"/>
                 </a:solidFill>
                 <a:latin typeface="Calibri"/>
               </a:rPr>
-              <a:t>Oval  Start or end</a:t>
-            </a:r>
-          </a:p>
-        </p:txBody>
-      </p:sp>
-      <p:sp>
-        <p:nvSpPr>
-          <p:cNvPr id="6" name="Process 5"/>
+              <a:t>Page 3 of 5   ·   These use the plan facts from page 2</a:t>
+            </a:r>
+          </a:p>
+        </p:txBody>
+      </p:sp>
+      <p:sp>
+        <p:nvSpPr>
+          <p:cNvPr id="6" name="Terminator 5"/>
           <p:cNvSpPr/>
           <p:nvPr/>
         </p:nvSpPr>
         <p:spPr>
           <a:xfrm>
-            <a:off x="2468880" y="896112"/>
+            <a:off x="320040" y="621792"/>
             <a:ext cx="292608" cy="237744"/>
           </a:xfrm>
-          <a:prstGeom prst="flowChartProcess">
+          <a:prstGeom prst="flowChartTerminator">
             <a:avLst/>
           </a:prstGeom>
           <a:solidFill>
-            <a:srgbClr val="E7F0FB"/>
+            <a:srgbClr val="FFFFFF"/>
           </a:solidFill>
-          <a:ln w="22225">
+          <a:ln>
             <a:solidFill>
-              <a:srgbClr val="1D4E89"/>
+              <a:srgbClr val="1B7A4A"/>
             </a:solidFill>
           </a:ln>
-          <a:effectLst/>
         </p:spPr>
         <p:style>
           <a:lnRef idx="1">
@@ -6427,7 +6036,7 @@
           </a:fontRef>
         </p:style>
         <p:txBody>
-          <a:bodyPr rtlCol="0" anchor="ctr" wrap="square" lIns="73152" rIns="73152" tIns="36576" bIns="36576"/>
+          <a:bodyPr rtlCol="0" anchor="ctr"/>
           <a:lstStyle/>
           <a:p>
             <a:pPr algn="ctr"/>
@@ -6442,8 +6051,8 @@
         </p:nvSpPr>
         <p:spPr>
           <a:xfrm>
-            <a:off x="2798064" y="896112"/>
-            <a:ext cx="2011680" cy="219456"/>
+            <a:off x="649224" y="603504"/>
+            <a:ext cx="1965960" cy="274320"/>
           </a:xfrm>
           <a:prstGeom prst="rect">
             <a:avLst/>
@@ -6451,54 +6060,46 @@
           <a:noFill/>
         </p:spPr>
         <p:txBody>
-          <a:bodyPr wrap="none" lIns="18288" tIns="0" bIns="0">
+          <a:bodyPr wrap="square">
             <a:spAutoFit/>
           </a:bodyPr>
           <a:lstStyle/>
           <a:p>
-            <a:pPr algn="ctr">
-              <a:spcBef>
-                <a:spcPts val="0"/>
-              </a:spcBef>
-              <a:spcAft>
-                <a:spcPts val="0"/>
-              </a:spcAft>
-            </a:pPr>
-            <a:r>
-              <a:rPr sz="1200" b="1">
+            <a:pPr algn="l"/>
+            <a:r>
+              <a:rPr sz="1100" b="0">
                 <a:solidFill>
                   <a:srgbClr val="3F4A5A"/>
                 </a:solidFill>
                 <a:latin typeface="Calibri"/>
               </a:rPr>
-              <a:t>Rectangle  A step</a:t>
-            </a:r>
-          </a:p>
-        </p:txBody>
-      </p:sp>
-      <p:sp>
-        <p:nvSpPr>
-          <p:cNvPr id="8" name="Decision 7"/>
+              <a:t>Oval   Start or end</a:t>
+            </a:r>
+          </a:p>
+        </p:txBody>
+      </p:sp>
+      <p:sp>
+        <p:nvSpPr>
+          <p:cNvPr id="8" name="Process 7"/>
           <p:cNvSpPr/>
           <p:nvPr/>
         </p:nvSpPr>
         <p:spPr>
           <a:xfrm>
-            <a:off x="4709160" y="896112"/>
+            <a:off x="2651760" y="621792"/>
             <a:ext cx="292608" cy="237744"/>
           </a:xfrm>
-          <a:prstGeom prst="flowChartDecision">
+          <a:prstGeom prst="flowChartProcess">
             <a:avLst/>
           </a:prstGeom>
           <a:solidFill>
-            <a:srgbClr val="FFF4D4"/>
+            <a:srgbClr val="FFFFFF"/>
           </a:solidFill>
-          <a:ln w="22225">
+          <a:ln>
             <a:solidFill>
-              <a:srgbClr val="B45309"/>
+              <a:srgbClr val="1D4E89"/>
             </a:solidFill>
           </a:ln>
-          <a:effectLst/>
         </p:spPr>
         <p:style>
           <a:lnRef idx="1">
@@ -6515,7 +6116,7 @@
           </a:fontRef>
         </p:style>
         <p:txBody>
-          <a:bodyPr rtlCol="0" anchor="ctr" wrap="square" lIns="73152" rIns="73152" tIns="36576" bIns="36576"/>
+          <a:bodyPr rtlCol="0" anchor="ctr"/>
           <a:lstStyle/>
           <a:p>
             <a:pPr algn="ctr"/>
@@ -6530,8 +6131,8 @@
         </p:nvSpPr>
         <p:spPr>
           <a:xfrm>
-            <a:off x="5038344" y="896112"/>
-            <a:ext cx="2011680" cy="219456"/>
+            <a:off x="2980944" y="603504"/>
+            <a:ext cx="1965960" cy="274320"/>
           </a:xfrm>
           <a:prstGeom prst="rect">
             <a:avLst/>
@@ -6539,54 +6140,46 @@
           <a:noFill/>
         </p:spPr>
         <p:txBody>
-          <a:bodyPr wrap="none" lIns="18288" tIns="0" bIns="0">
+          <a:bodyPr wrap="square">
             <a:spAutoFit/>
           </a:bodyPr>
           <a:lstStyle/>
           <a:p>
-            <a:pPr algn="ctr">
-              <a:spcBef>
-                <a:spcPts val="0"/>
-              </a:spcBef>
-              <a:spcAft>
-                <a:spcPts val="0"/>
-              </a:spcAft>
-            </a:pPr>
-            <a:r>
-              <a:rPr sz="1200" b="1">
+            <a:pPr algn="l"/>
+            <a:r>
+              <a:rPr sz="1100" b="0">
                 <a:solidFill>
                   <a:srgbClr val="3F4A5A"/>
                 </a:solidFill>
                 <a:latin typeface="Calibri"/>
               </a:rPr>
-              <a:t>Diamond  Yes or no</a:t>
-            </a:r>
-          </a:p>
-        </p:txBody>
-      </p:sp>
-      <p:sp>
-        <p:nvSpPr>
-          <p:cNvPr id="10" name="Data 9"/>
+              <a:t>Rectangle   A step</a:t>
+            </a:r>
+          </a:p>
+        </p:txBody>
+      </p:sp>
+      <p:sp>
+        <p:nvSpPr>
+          <p:cNvPr id="10" name="Decision 9"/>
           <p:cNvSpPr/>
           <p:nvPr/>
         </p:nvSpPr>
         <p:spPr>
           <a:xfrm>
-            <a:off x="7040880" y="896112"/>
+            <a:off x="4983479" y="621792"/>
             <a:ext cx="292608" cy="237744"/>
           </a:xfrm>
-          <a:prstGeom prst="flowChartInputOutput">
+          <a:prstGeom prst="flowChartDecision">
             <a:avLst/>
           </a:prstGeom>
           <a:solidFill>
-            <a:srgbClr val="EEF2FF"/>
+            <a:srgbClr val="FFFFFF"/>
           </a:solidFill>
-          <a:ln w="22225">
+          <a:ln>
             <a:solidFill>
-              <a:srgbClr val="373AB0"/>
+              <a:srgbClr val="B45309"/>
             </a:solidFill>
           </a:ln>
-          <a:effectLst/>
         </p:spPr>
         <p:style>
           <a:lnRef idx="1">
@@ -6603,7 +6196,7 @@
           </a:fontRef>
         </p:style>
         <p:txBody>
-          <a:bodyPr rtlCol="0" anchor="ctr" wrap="square" lIns="73152" rIns="73152" tIns="36576" bIns="36576"/>
+          <a:bodyPr rtlCol="0" anchor="ctr"/>
           <a:lstStyle/>
           <a:p>
             <a:pPr algn="ctr"/>
@@ -6618,8 +6211,8 @@
         </p:nvSpPr>
         <p:spPr>
           <a:xfrm>
-            <a:off x="7370064" y="896112"/>
-            <a:ext cx="2011680" cy="219456"/>
+            <a:off x="5312664" y="603504"/>
+            <a:ext cx="1965960" cy="274320"/>
           </a:xfrm>
           <a:prstGeom prst="rect">
             <a:avLst/>
@@ -6627,54 +6220,46 @@
           <a:noFill/>
         </p:spPr>
         <p:txBody>
-          <a:bodyPr wrap="none" lIns="18288" tIns="0" bIns="0">
+          <a:bodyPr wrap="square">
             <a:spAutoFit/>
           </a:bodyPr>
           <a:lstStyle/>
           <a:p>
-            <a:pPr algn="ctr">
-              <a:spcBef>
-                <a:spcPts val="0"/>
-              </a:spcBef>
-              <a:spcAft>
-                <a:spcPts val="0"/>
-              </a:spcAft>
-            </a:pPr>
-            <a:r>
-              <a:rPr sz="1200" b="1">
+            <a:pPr algn="l"/>
+            <a:r>
+              <a:rPr sz="1100" b="0">
                 <a:solidFill>
                   <a:srgbClr val="3F4A5A"/>
                 </a:solidFill>
                 <a:latin typeface="Calibri"/>
               </a:rPr>
-              <a:t>Slanted  Files you add</a:t>
-            </a:r>
-          </a:p>
-        </p:txBody>
-      </p:sp>
-      <p:sp>
-        <p:nvSpPr>
-          <p:cNvPr id="12" name="Document 11"/>
+              <a:t>Diamond   Yes or no</a:t>
+            </a:r>
+          </a:p>
+        </p:txBody>
+      </p:sp>
+      <p:sp>
+        <p:nvSpPr>
+          <p:cNvPr id="12" name="Data 11"/>
           <p:cNvSpPr/>
           <p:nvPr/>
         </p:nvSpPr>
         <p:spPr>
           <a:xfrm>
-            <a:off x="9464040" y="896112"/>
+            <a:off x="7315199" y="621792"/>
             <a:ext cx="292608" cy="237744"/>
           </a:xfrm>
-          <a:prstGeom prst="flowChartDocument">
+          <a:prstGeom prst="flowChartInputOutput">
             <a:avLst/>
           </a:prstGeom>
           <a:solidFill>
-            <a:srgbClr val="E5F6F4"/>
+            <a:srgbClr val="FFFFFF"/>
           </a:solidFill>
-          <a:ln w="22225">
+          <a:ln>
             <a:solidFill>
-              <a:srgbClr val="0F6E6B"/>
+              <a:srgbClr val="4338CA"/>
             </a:solidFill>
           </a:ln>
-          <a:effectLst/>
         </p:spPr>
         <p:style>
           <a:lnRef idx="1">
@@ -6691,7 +6276,7 @@
           </a:fontRef>
         </p:style>
         <p:txBody>
-          <a:bodyPr rtlCol="0" anchor="ctr" wrap="square" lIns="73152" rIns="73152" tIns="36576" bIns="36576"/>
+          <a:bodyPr rtlCol="0" anchor="ctr"/>
           <a:lstStyle/>
           <a:p>
             <a:pPr algn="ctr"/>
@@ -6706,8 +6291,8 @@
         </p:nvSpPr>
         <p:spPr>
           <a:xfrm>
-            <a:off x="9793224" y="896112"/>
-            <a:ext cx="2011680" cy="219456"/>
+            <a:off x="7644383" y="603504"/>
+            <a:ext cx="1965960" cy="274320"/>
           </a:xfrm>
           <a:prstGeom prst="rect">
             <a:avLst/>
@@ -6715,54 +6300,46 @@
           <a:noFill/>
         </p:spPr>
         <p:txBody>
-          <a:bodyPr wrap="none" lIns="18288" tIns="0" bIns="0">
+          <a:bodyPr wrap="square">
             <a:spAutoFit/>
           </a:bodyPr>
           <a:lstStyle/>
           <a:p>
-            <a:pPr algn="ctr">
-              <a:spcBef>
-                <a:spcPts val="0"/>
-              </a:spcBef>
-              <a:spcAft>
-                <a:spcPts val="0"/>
-              </a:spcAft>
-            </a:pPr>
-            <a:r>
-              <a:rPr sz="1200" b="1">
+            <a:pPr algn="l"/>
+            <a:r>
+              <a:rPr sz="1100" b="0">
                 <a:solidFill>
                   <a:srgbClr val="3F4A5A"/>
                 </a:solidFill>
                 <a:latin typeface="Calibri"/>
               </a:rPr>
-              <a:t>Document  File produced</a:t>
-            </a:r>
-          </a:p>
-        </p:txBody>
-      </p:sp>
-      <p:sp>
-        <p:nvSpPr>
-          <p:cNvPr id="14" name="Process 13"/>
+              <a:t>Slanted   Files you add</a:t>
+            </a:r>
+          </a:p>
+        </p:txBody>
+      </p:sp>
+      <p:sp>
+        <p:nvSpPr>
+          <p:cNvPr id="14" name="Document 13"/>
           <p:cNvSpPr/>
           <p:nvPr/>
         </p:nvSpPr>
         <p:spPr>
           <a:xfrm>
-            <a:off x="292608" y="1325880"/>
-            <a:ext cx="5669280" cy="1097280"/>
-          </a:xfrm>
-          <a:prstGeom prst="flowChartProcess">
+            <a:off x="9646919" y="621792"/>
+            <a:ext cx="292608" cy="237744"/>
+          </a:xfrm>
+          <a:prstGeom prst="flowChartDocument">
             <a:avLst/>
           </a:prstGeom>
           <a:solidFill>
-            <a:srgbClr val="E5F6F4"/>
+            <a:srgbClr val="FFFFFF"/>
           </a:solidFill>
-          <a:ln w="22225">
+          <a:ln>
             <a:solidFill>
               <a:srgbClr val="0F6E6B"/>
             </a:solidFill>
           </a:ln>
-          <a:effectLst/>
         </p:spPr>
         <p:style>
           <a:lnRef idx="1">
@@ -6779,58 +6356,58 @@
           </a:fontRef>
         </p:style>
         <p:txBody>
-          <a:bodyPr rtlCol="0" anchor="ctr" wrap="square" lIns="73152" rIns="73152" tIns="36576" bIns="36576"/>
-          <a:lstStyle/>
-          <a:p>
-            <a:pPr algn="ctr">
-              <a:spcBef>
-                <a:spcPts val="0"/>
-              </a:spcBef>
-              <a:spcAft>
-                <a:spcPts val="0"/>
-              </a:spcAft>
-            </a:pPr>
-            <a:r>
-              <a:rPr sz="1500" b="1">
-                <a:solidFill>
-                  <a:srgbClr val="0F6E6B"/>
-                </a:solidFill>
-                <a:latin typeface="Calibri"/>
-              </a:rPr>
-              <a:t>Cover letter</a:t>
-            </a:r>
-          </a:p>
-          <a:p>
-            <a:pPr algn="ctr">
-              <a:spcBef>
-                <a:spcPts val="0"/>
-              </a:spcBef>
-              <a:spcAft>
-                <a:spcPts val="0"/>
-              </a:spcAft>
-            </a:pPr>
-            <a:r>
-              <a:rPr sz="1300" b="0">
-                <a:solidFill>
-                  <a:srgbClr val="1C1917"/>
-                </a:solidFill>
-                <a:latin typeface="Calibri"/>
-              </a:rPr>
-              <a:t>Read company, address, plan name, and plan year end. Check that the Mutual of America stamp is present.</a:t>
-            </a:r>
-          </a:p>
-        </p:txBody>
-      </p:sp>
-      <p:sp>
-        <p:nvSpPr>
-          <p:cNvPr id="15" name="Process 14"/>
+          <a:bodyPr rtlCol="0" anchor="ctr"/>
+          <a:lstStyle/>
+          <a:p>
+            <a:pPr algn="ctr"/>
+          </a:p>
+        </p:txBody>
+      </p:sp>
+      <p:sp>
+        <p:nvSpPr>
+          <p:cNvPr id="15" name="TextBox 14"/>
+          <p:cNvSpPr txBox="1"/>
+          <p:nvPr/>
+        </p:nvSpPr>
+        <p:spPr>
+          <a:xfrm>
+            <a:off x="9976103" y="603504"/>
+            <a:ext cx="1965960" cy="274320"/>
+          </a:xfrm>
+          <a:prstGeom prst="rect">
+            <a:avLst/>
+          </a:prstGeom>
+          <a:noFill/>
+        </p:spPr>
+        <p:txBody>
+          <a:bodyPr wrap="square">
+            <a:spAutoFit/>
+          </a:bodyPr>
+          <a:lstStyle/>
+          <a:p>
+            <a:pPr algn="l"/>
+            <a:r>
+              <a:rPr sz="1100" b="0">
+                <a:solidFill>
+                  <a:srgbClr val="3F4A5A"/>
+                </a:solidFill>
+                <a:latin typeface="Calibri"/>
+              </a:rPr>
+              <a:t>Document   File produced</a:t>
+            </a:r>
+          </a:p>
+        </p:txBody>
+      </p:sp>
+      <p:sp>
+        <p:nvSpPr>
+          <p:cNvPr id="16" name="Process 15"/>
           <p:cNvSpPr/>
           <p:nvPr/>
         </p:nvSpPr>
         <p:spPr>
           <a:xfrm>
-            <a:off x="6236208" y="1325880"/>
-            <a:ext cx="5650992" cy="1097280"/>
+            <a:off x="320040" y="1051560"/>
+            <a:ext cx="5669280" cy="1115568"/>
           </a:xfrm>
           <a:prstGeom prst="flowChartProcess">
             <a:avLst/>
@@ -6838,12 +6415,11 @@
           <a:solidFill>
             <a:srgbClr val="E5F6F4"/>
           </a:solidFill>
-          <a:ln w="22225">
+          <a:ln w="15875">
             <a:solidFill>
               <a:srgbClr val="0F6E6B"/>
             </a:solidFill>
           </a:ln>
-          <a:effectLst/>
         </p:spPr>
         <p:style>
           <a:lnRef idx="1">
@@ -6860,130 +6436,52 @@
           </a:fontRef>
         </p:style>
         <p:txBody>
-          <a:bodyPr rtlCol="0" anchor="ctr" wrap="square" lIns="73152" rIns="73152" tIns="36576" bIns="36576"/>
+          <a:bodyPr rtlCol="0" anchor="ctr" wrap="square" lIns="54864" rIns="54864" tIns="54864" bIns="54864"/>
           <a:lstStyle/>
           <a:p>
             <a:pPr algn="ctr">
-              <a:spcBef>
-                <a:spcPts val="0"/>
-              </a:spcBef>
               <a:spcAft>
                 <a:spcPts val="0"/>
               </a:spcAft>
             </a:pPr>
             <a:r>
-              <a:rPr sz="1500" b="1">
+              <a:rPr b="1" sz="1300">
                 <a:solidFill>
                   <a:srgbClr val="0F6E6B"/>
                 </a:solidFill>
                 <a:latin typeface="Calibri"/>
               </a:rPr>
-              <a:t>Action Required</a:t>
+              <a:t>Cover letter</a:t>
             </a:r>
           </a:p>
           <a:p>
             <a:pPr algn="ctr">
               <a:spcBef>
-                <a:spcPts val="0"/>
+                <a:spcPts val="200"/>
               </a:spcBef>
-              <a:spcAft>
-                <a:spcPts val="0"/>
-              </a:spcAft>
             </a:pPr>
             <a:r>
-              <a:rPr sz="1300" b="0">
+              <a:rPr sz="1100">
                 <a:solidFill>
                   <a:srgbClr val="1C1917"/>
                 </a:solidFill>
                 <a:latin typeface="Calibri"/>
               </a:rPr>
-              <a:t>Keep or remove each paragraph: compliance failure, PRIOR or CURRENT, after 12 months, top heavy at 60%, variance, and no action.</a:t>
-            </a:r>
-          </a:p>
-        </p:txBody>
-      </p:sp>
-      <p:cxnSp>
-        <p:nvCxnSpPr>
-          <p:cNvPr id="16" name="Connector 15"/>
-          <p:cNvCxnSpPr/>
-          <p:nvPr/>
-        </p:nvCxnSpPr>
-        <p:spPr>
-          <a:xfrm>
-            <a:off x="5980176" y="1874519"/>
-            <a:ext cx="237744" cy="0"/>
-          </a:xfrm>
-          <a:prstGeom prst="line">
-            <a:avLst/>
-          </a:prstGeom>
-          <a:ln w="22225">
-            <a:solidFill>
-              <a:srgbClr val="3F4A5A"/>
-            </a:solidFill>
-            <a:tailEnd type="triangle" w="med" len="med"/>
-          </a:ln>
-        </p:spPr>
-        <p:style>
-          <a:lnRef idx="2">
-            <a:schemeClr val="accent1"/>
-          </a:lnRef>
-          <a:fillRef idx="0">
-            <a:schemeClr val="accent1"/>
-          </a:fillRef>
-          <a:effectRef idx="1">
-            <a:schemeClr val="accent1"/>
-          </a:effectRef>
-          <a:fontRef idx="minor">
-            <a:schemeClr val="tx1"/>
-          </a:fontRef>
-        </p:style>
-      </p:cxnSp>
-      <p:cxnSp>
-        <p:nvCxnSpPr>
-          <p:cNvPr id="17" name="Connector 16"/>
-          <p:cNvCxnSpPr/>
-          <p:nvPr/>
-        </p:nvCxnSpPr>
-        <p:spPr>
-          <a:xfrm>
-            <a:off x="3127248" y="2432303"/>
-            <a:ext cx="0" cy="164593"/>
-          </a:xfrm>
-          <a:prstGeom prst="line">
-            <a:avLst/>
-          </a:prstGeom>
-          <a:ln w="22225">
-            <a:solidFill>
-              <a:srgbClr val="3F4A5A"/>
-            </a:solidFill>
-            <a:tailEnd type="triangle" w="med" len="med"/>
-          </a:ln>
-        </p:spPr>
-        <p:style>
-          <a:lnRef idx="2">
-            <a:schemeClr val="accent1"/>
-          </a:lnRef>
-          <a:fillRef idx="0">
-            <a:schemeClr val="accent1"/>
-          </a:fillRef>
-          <a:effectRef idx="1">
-            <a:schemeClr val="accent1"/>
-          </a:effectRef>
-          <a:fontRef idx="minor">
-            <a:schemeClr val="tx1"/>
-          </a:fontRef>
-        </p:style>
-      </p:cxnSp>
-      <p:sp>
-        <p:nvSpPr>
-          <p:cNvPr id="18" name="Process 17"/>
+              <a:t>Read company, address, plan name, and plan year end. Check the Mutual of America stamp.</a:t>
+            </a:r>
+          </a:p>
+        </p:txBody>
+      </p:sp>
+      <p:sp>
+        <p:nvSpPr>
+          <p:cNvPr id="17" name="Process 16"/>
           <p:cNvSpPr/>
           <p:nvPr/>
         </p:nvSpPr>
         <p:spPr>
           <a:xfrm>
-            <a:off x="292608" y="2606040"/>
-            <a:ext cx="5669280" cy="1234440"/>
+            <a:off x="6263640" y="1051560"/>
+            <a:ext cx="5669280" cy="1115568"/>
           </a:xfrm>
           <a:prstGeom prst="flowChartProcess">
             <a:avLst/>
@@ -6991,12 +6489,11 @@
           <a:solidFill>
             <a:srgbClr val="E5F6F4"/>
           </a:solidFill>
-          <a:ln w="22225">
+          <a:ln w="15875">
             <a:solidFill>
               <a:srgbClr val="0F6E6B"/>
             </a:solidFill>
           </a:ln>
-          <a:effectLst/>
         </p:spPr>
         <p:style>
           <a:lnRef idx="1">
@@ -7013,58 +6510,52 @@
           </a:fontRef>
         </p:style>
         <p:txBody>
-          <a:bodyPr rtlCol="0" anchor="ctr" wrap="square" lIns="73152" rIns="73152" tIns="36576" bIns="36576"/>
+          <a:bodyPr rtlCol="0" anchor="ctr" wrap="square" lIns="54864" rIns="54864" tIns="54864" bIns="54864"/>
           <a:lstStyle/>
           <a:p>
             <a:pPr algn="ctr">
-              <a:spcBef>
-                <a:spcPts val="0"/>
-              </a:spcBef>
               <a:spcAft>
                 <a:spcPts val="0"/>
               </a:spcAft>
             </a:pPr>
             <a:r>
-              <a:rPr sz="1500" b="1">
+              <a:rPr b="1" sz="1300">
                 <a:solidFill>
                   <a:srgbClr val="0F6E6B"/>
                 </a:solidFill>
                 <a:latin typeface="Calibri"/>
               </a:rPr>
-              <a:t>ADP and ACP tests</a:t>
+              <a:t>Action Required</a:t>
             </a:r>
           </a:p>
           <a:p>
             <a:pPr algn="ctr">
               <a:spcBef>
-                <a:spcPts val="0"/>
+                <a:spcPts val="200"/>
               </a:spcBef>
-              <a:spcAft>
-                <a:spcPts val="0"/>
-              </a:spcAft>
             </a:pPr>
             <a:r>
-              <a:rPr sz="1300" b="0">
+              <a:rPr sz="1100">
                 <a:solidFill>
                   <a:srgbClr val="1C1917"/>
                 </a:solidFill>
                 <a:latin typeface="Calibri"/>
               </a:rPr>
-              <a:t>Keep the notice and each sample letter only if that test failed and returns are required. Fill the QNEC. Drop the unused ADP or ACP line. After 12 months, CURRENT keeps QNEC plus refunds. PRIOR keeps refunds only.</a:t>
-            </a:r>
-          </a:p>
-        </p:txBody>
-      </p:sp>
-      <p:sp>
-        <p:nvSpPr>
-          <p:cNvPr id="19" name="Process 18"/>
+              <a:t>Keep or remove each paragraph: compliance failure, PRIOR or CURRENT, after 12 months, top heavy at 60%, variance, and no action.</a:t>
+            </a:r>
+          </a:p>
+        </p:txBody>
+      </p:sp>
+      <p:sp>
+        <p:nvSpPr>
+          <p:cNvPr id="18" name="Process 17"/>
           <p:cNvSpPr/>
           <p:nvPr/>
         </p:nvSpPr>
         <p:spPr>
           <a:xfrm>
-            <a:off x="6236208" y="2606040"/>
-            <a:ext cx="5650992" cy="1234440"/>
+            <a:off x="320040" y="2286000"/>
+            <a:ext cx="5669280" cy="1115568"/>
           </a:xfrm>
           <a:prstGeom prst="flowChartProcess">
             <a:avLst/>
@@ -7072,12 +6563,11 @@
           <a:solidFill>
             <a:srgbClr val="E5F6F4"/>
           </a:solidFill>
-          <a:ln w="22225">
+          <a:ln w="15875">
             <a:solidFill>
               <a:srgbClr val="0F6E6B"/>
             </a:solidFill>
           </a:ln>
-          <a:effectLst/>
         </p:spPr>
         <p:style>
           <a:lnRef idx="1">
@@ -7094,130 +6584,52 @@
           </a:fontRef>
         </p:style>
         <p:txBody>
-          <a:bodyPr rtlCol="0" anchor="ctr" wrap="square" lIns="73152" rIns="73152" tIns="36576" bIns="36576"/>
+          <a:bodyPr rtlCol="0" anchor="ctr" wrap="square" lIns="54864" rIns="54864" tIns="54864" bIns="54864"/>
           <a:lstStyle/>
           <a:p>
             <a:pPr algn="ctr">
-              <a:spcBef>
-                <a:spcPts val="0"/>
-              </a:spcBef>
               <a:spcAft>
                 <a:spcPts val="0"/>
               </a:spcAft>
             </a:pPr>
             <a:r>
-              <a:rPr sz="1500" b="1">
+              <a:rPr b="1" sz="1300">
                 <a:solidFill>
                   <a:srgbClr val="0F6E6B"/>
                 </a:solidFill>
                 <a:latin typeface="Calibri"/>
               </a:rPr>
-              <a:t>402(g) test</a:t>
+              <a:t>ADP and ACP</a:t>
             </a:r>
           </a:p>
           <a:p>
             <a:pPr algn="ctr">
               <a:spcBef>
-                <a:spcPts val="0"/>
+                <a:spcPts val="200"/>
               </a:spcBef>
-              <a:spcAft>
-                <a:spcPts val="0"/>
-              </a:spcAft>
             </a:pPr>
             <a:r>
-              <a:rPr sz="1300" b="0">
+              <a:rPr sz="1100">
                 <a:solidFill>
                   <a:srgbClr val="1C1917"/>
                 </a:solidFill>
                 <a:latin typeface="Calibri"/>
               </a:rPr>
-              <a:t>Remove the 402(g) letter if there are no returns, or the failure was not processed by 15 April.</a:t>
-            </a:r>
-          </a:p>
-        </p:txBody>
-      </p:sp>
-      <p:cxnSp>
-        <p:nvCxnSpPr>
-          <p:cNvPr id="20" name="Connector 19"/>
-          <p:cNvCxnSpPr/>
-          <p:nvPr/>
-        </p:nvCxnSpPr>
-        <p:spPr>
-          <a:xfrm>
-            <a:off x="5980176" y="3223260"/>
-            <a:ext cx="237744" cy="0"/>
-          </a:xfrm>
-          <a:prstGeom prst="line">
-            <a:avLst/>
-          </a:prstGeom>
-          <a:ln w="22225">
-            <a:solidFill>
-              <a:srgbClr val="3F4A5A"/>
-            </a:solidFill>
-            <a:tailEnd type="triangle" w="med" len="med"/>
-          </a:ln>
-        </p:spPr>
-        <p:style>
-          <a:lnRef idx="2">
-            <a:schemeClr val="accent1"/>
-          </a:lnRef>
-          <a:fillRef idx="0">
-            <a:schemeClr val="accent1"/>
-          </a:fillRef>
-          <a:effectRef idx="1">
-            <a:schemeClr val="accent1"/>
-          </a:effectRef>
-          <a:fontRef idx="minor">
-            <a:schemeClr val="tx1"/>
-          </a:fontRef>
-        </p:style>
-      </p:cxnSp>
-      <p:cxnSp>
-        <p:nvCxnSpPr>
-          <p:cNvPr id="21" name="Connector 20"/>
-          <p:cNvCxnSpPr/>
-          <p:nvPr/>
-        </p:nvCxnSpPr>
-        <p:spPr>
-          <a:xfrm>
-            <a:off x="3127248" y="3849624"/>
-            <a:ext cx="0" cy="164592"/>
-          </a:xfrm>
-          <a:prstGeom prst="line">
-            <a:avLst/>
-          </a:prstGeom>
-          <a:ln w="22225">
-            <a:solidFill>
-              <a:srgbClr val="3F4A5A"/>
-            </a:solidFill>
-            <a:tailEnd type="triangle" w="med" len="med"/>
-          </a:ln>
-        </p:spPr>
-        <p:style>
-          <a:lnRef idx="2">
-            <a:schemeClr val="accent1"/>
-          </a:lnRef>
-          <a:fillRef idx="0">
-            <a:schemeClr val="accent1"/>
-          </a:fillRef>
-          <a:effectRef idx="1">
-            <a:schemeClr val="accent1"/>
-          </a:effectRef>
-          <a:fontRef idx="minor">
-            <a:schemeClr val="tx1"/>
-          </a:fontRef>
-        </p:style>
-      </p:cxnSp>
-      <p:sp>
-        <p:nvSpPr>
-          <p:cNvPr id="22" name="Process 21"/>
+              <a:t>Keep the notice and each letter only if that test failed and returns are required. Fill the QNEC. Drop the unused line. After 12 months, CURRENT keeps QNEC plus refunds. PRIOR keeps refunds only.</a:t>
+            </a:r>
+          </a:p>
+        </p:txBody>
+      </p:sp>
+      <p:sp>
+        <p:nvSpPr>
+          <p:cNvPr id="19" name="Process 18"/>
           <p:cNvSpPr/>
           <p:nvPr/>
         </p:nvSpPr>
         <p:spPr>
           <a:xfrm>
-            <a:off x="292608" y="4023360"/>
-            <a:ext cx="5669280" cy="960120"/>
+            <a:off x="6263640" y="2286000"/>
+            <a:ext cx="5669280" cy="1115568"/>
           </a:xfrm>
           <a:prstGeom prst="flowChartProcess">
             <a:avLst/>
@@ -7225,12 +6637,11 @@
           <a:solidFill>
             <a:srgbClr val="E5F6F4"/>
           </a:solidFill>
-          <a:ln w="22225">
+          <a:ln w="15875">
             <a:solidFill>
               <a:srgbClr val="0F6E6B"/>
             </a:solidFill>
           </a:ln>
-          <a:effectLst/>
         </p:spPr>
         <p:style>
           <a:lnRef idx="1">
@@ -7247,58 +6658,52 @@
           </a:fontRef>
         </p:style>
         <p:txBody>
-          <a:bodyPr rtlCol="0" anchor="ctr" wrap="square" lIns="73152" rIns="73152" tIns="36576" bIns="36576"/>
+          <a:bodyPr rtlCol="0" anchor="ctr" wrap="square" lIns="54864" rIns="54864" tIns="54864" bIns="54864"/>
           <a:lstStyle/>
           <a:p>
             <a:pPr algn="ctr">
-              <a:spcBef>
-                <a:spcPts val="0"/>
-              </a:spcBef>
               <a:spcAft>
                 <a:spcPts val="0"/>
               </a:spcAft>
             </a:pPr>
             <a:r>
-              <a:rPr sz="1500" b="1">
+              <a:rPr b="1" sz="1300">
                 <a:solidFill>
                   <a:srgbClr val="0F6E6B"/>
                 </a:solidFill>
                 <a:latin typeface="Calibri"/>
               </a:rPr>
-              <a:t>415 limit</a:t>
+              <a:t>402(g)</a:t>
             </a:r>
           </a:p>
           <a:p>
             <a:pPr algn="ctr">
               <a:spcBef>
-                <a:spcPts val="0"/>
+                <a:spcPts val="200"/>
               </a:spcBef>
-              <a:spcAft>
-                <a:spcPts val="0"/>
-              </a:spcAft>
             </a:pPr>
             <a:r>
-              <a:rPr sz="1300" b="0">
+              <a:rPr sz="1100">
                 <a:solidFill>
                   <a:srgbClr val="1C1917"/>
                 </a:solidFill>
                 <a:latin typeface="Calibri"/>
               </a:rPr>
-              <a:t>Remove the 415 failure information and the 415 letter if the plan did not fail 415.</a:t>
-            </a:r>
-          </a:p>
-        </p:txBody>
-      </p:sp>
-      <p:sp>
-        <p:nvSpPr>
-          <p:cNvPr id="23" name="Process 22"/>
+              <a:t>Remove the 402(g) letter if there are no returns, or the failure was not processed by 15 April.</a:t>
+            </a:r>
+          </a:p>
+        </p:txBody>
+      </p:sp>
+      <p:sp>
+        <p:nvSpPr>
+          <p:cNvPr id="20" name="Process 19"/>
           <p:cNvSpPr/>
           <p:nvPr/>
         </p:nvSpPr>
         <p:spPr>
           <a:xfrm>
-            <a:off x="6236208" y="4023360"/>
-            <a:ext cx="5650992" cy="960120"/>
+            <a:off x="320040" y="3520440"/>
+            <a:ext cx="5669280" cy="1115568"/>
           </a:xfrm>
           <a:prstGeom prst="flowChartProcess">
             <a:avLst/>
@@ -7306,12 +6711,11 @@
           <a:solidFill>
             <a:srgbClr val="E5F6F4"/>
           </a:solidFill>
-          <a:ln w="22225">
+          <a:ln w="15875">
             <a:solidFill>
               <a:srgbClr val="0F6E6B"/>
             </a:solidFill>
           </a:ln>
-          <a:effectLst/>
         </p:spPr>
         <p:style>
           <a:lnRef idx="1">
@@ -7328,130 +6732,52 @@
           </a:fontRef>
         </p:style>
         <p:txBody>
-          <a:bodyPr rtlCol="0" anchor="ctr" wrap="square" lIns="73152" rIns="73152" tIns="36576" bIns="36576"/>
+          <a:bodyPr rtlCol="0" anchor="ctr" wrap="square" lIns="54864" rIns="54864" tIns="54864" bIns="54864"/>
           <a:lstStyle/>
           <a:p>
             <a:pPr algn="ctr">
-              <a:spcBef>
-                <a:spcPts val="0"/>
-              </a:spcBef>
               <a:spcAft>
                 <a:spcPts val="0"/>
               </a:spcAft>
             </a:pPr>
             <a:r>
-              <a:rPr sz="1500" b="1">
+              <a:rPr b="1" sz="1300">
                 <a:solidFill>
                   <a:srgbClr val="0F6E6B"/>
                 </a:solidFill>
                 <a:latin typeface="Calibri"/>
               </a:rPr>
-              <a:t>Excess Summary</a:t>
+              <a:t>415 limit</a:t>
             </a:r>
           </a:p>
           <a:p>
             <a:pPr algn="ctr">
               <a:spcBef>
-                <a:spcPts val="0"/>
+                <a:spcPts val="200"/>
               </a:spcBef>
-              <a:spcAft>
-                <a:spcPts val="0"/>
-              </a:spcAft>
             </a:pPr>
             <a:r>
-              <a:rPr sz="1300" b="0">
+              <a:rPr sz="1100">
                 <a:solidFill>
                   <a:srgbClr val="1C1917"/>
                 </a:solidFill>
                 <a:latin typeface="Calibri"/>
               </a:rPr>
-              <a:t>Keep it for a 402(g) or 415 failure, or for ADP/ACP when a participant is partially vested.</a:t>
-            </a:r>
-          </a:p>
-        </p:txBody>
-      </p:sp>
-      <p:cxnSp>
-        <p:nvCxnSpPr>
-          <p:cNvPr id="24" name="Connector 23"/>
-          <p:cNvCxnSpPr/>
-          <p:nvPr/>
-        </p:nvCxnSpPr>
-        <p:spPr>
-          <a:xfrm>
-            <a:off x="5980176" y="4503420"/>
-            <a:ext cx="237744" cy="0"/>
-          </a:xfrm>
-          <a:prstGeom prst="line">
-            <a:avLst/>
-          </a:prstGeom>
-          <a:ln w="22225">
-            <a:solidFill>
-              <a:srgbClr val="3F4A5A"/>
-            </a:solidFill>
-            <a:tailEnd type="triangle" w="med" len="med"/>
-          </a:ln>
-        </p:spPr>
-        <p:style>
-          <a:lnRef idx="2">
-            <a:schemeClr val="accent1"/>
-          </a:lnRef>
-          <a:fillRef idx="0">
-            <a:schemeClr val="accent1"/>
-          </a:fillRef>
-          <a:effectRef idx="1">
-            <a:schemeClr val="accent1"/>
-          </a:effectRef>
-          <a:fontRef idx="minor">
-            <a:schemeClr val="tx1"/>
-          </a:fontRef>
-        </p:style>
-      </p:cxnSp>
-      <p:cxnSp>
-        <p:nvCxnSpPr>
-          <p:cNvPr id="25" name="Connector 24"/>
-          <p:cNvCxnSpPr/>
-          <p:nvPr/>
-        </p:nvCxnSpPr>
-        <p:spPr>
-          <a:xfrm>
-            <a:off x="3127248" y="4992624"/>
-            <a:ext cx="0" cy="164592"/>
-          </a:xfrm>
-          <a:prstGeom prst="line">
-            <a:avLst/>
-          </a:prstGeom>
-          <a:ln w="22225">
-            <a:solidFill>
-              <a:srgbClr val="3F4A5A"/>
-            </a:solidFill>
-            <a:tailEnd type="triangle" w="med" len="med"/>
-          </a:ln>
-        </p:spPr>
-        <p:style>
-          <a:lnRef idx="2">
-            <a:schemeClr val="accent1"/>
-          </a:lnRef>
-          <a:fillRef idx="0">
-            <a:schemeClr val="accent1"/>
-          </a:fillRef>
-          <a:effectRef idx="1">
-            <a:schemeClr val="accent1"/>
-          </a:effectRef>
-          <a:fontRef idx="minor">
-            <a:schemeClr val="tx1"/>
-          </a:fontRef>
-        </p:style>
-      </p:cxnSp>
-      <p:sp>
-        <p:nvSpPr>
-          <p:cNvPr id="26" name="Process 25"/>
+              <a:t>Remove the 415 failure information and the 415 letter if the plan did not fail 415.</a:t>
+            </a:r>
+          </a:p>
+        </p:txBody>
+      </p:sp>
+      <p:sp>
+        <p:nvSpPr>
+          <p:cNvPr id="21" name="Process 20"/>
           <p:cNvSpPr/>
           <p:nvPr/>
         </p:nvSpPr>
         <p:spPr>
           <a:xfrm>
-            <a:off x="292608" y="5166360"/>
-            <a:ext cx="5669280" cy="960120"/>
+            <a:off x="6263640" y="3520440"/>
+            <a:ext cx="5669280" cy="1115568"/>
           </a:xfrm>
           <a:prstGeom prst="flowChartProcess">
             <a:avLst/>
@@ -7459,12 +6785,11 @@
           <a:solidFill>
             <a:srgbClr val="E5F6F4"/>
           </a:solidFill>
-          <a:ln w="22225">
+          <a:ln w="15875">
             <a:solidFill>
               <a:srgbClr val="0F6E6B"/>
             </a:solidFill>
           </a:ln>
-          <a:effectLst/>
         </p:spPr>
         <p:style>
           <a:lnRef idx="1">
@@ -7481,58 +6806,52 @@
           </a:fontRef>
         </p:style>
         <p:txBody>
-          <a:bodyPr rtlCol="0" anchor="ctr" wrap="square" lIns="73152" rIns="73152" tIns="36576" bIns="36576"/>
+          <a:bodyPr rtlCol="0" anchor="ctr" wrap="square" lIns="54864" rIns="54864" tIns="54864" bIns="54864"/>
           <a:lstStyle/>
           <a:p>
             <a:pPr algn="ctr">
-              <a:spcBef>
-                <a:spcPts val="0"/>
-              </a:spcBef>
               <a:spcAft>
                 <a:spcPts val="0"/>
               </a:spcAft>
             </a:pPr>
             <a:r>
-              <a:rPr sz="1500" b="1">
+              <a:rPr b="1" sz="1300">
                 <a:solidFill>
                   <a:srgbClr val="0F6E6B"/>
                 </a:solidFill>
                 <a:latin typeface="Calibri"/>
               </a:rPr>
-              <a:t>Year End Recap</a:t>
+              <a:t>Excess Summary</a:t>
             </a:r>
           </a:p>
           <a:p>
             <a:pPr algn="ctr">
               <a:spcBef>
-                <a:spcPts val="0"/>
+                <a:spcPts val="200"/>
               </a:spcBef>
-              <a:spcAft>
-                <a:spcPts val="0"/>
-              </a:spcAft>
             </a:pPr>
             <a:r>
-              <a:rPr sz="1300" b="0">
+              <a:rPr sz="1100">
                 <a:solidFill>
                   <a:srgbClr val="1C1917"/>
                 </a:solidFill>
                 <a:latin typeface="Calibri"/>
               </a:rPr>
-              <a:t>Keep or remove bullets for HCE, Safe Harbor, top heavy, catch-up, and the match.</a:t>
-            </a:r>
-          </a:p>
-        </p:txBody>
-      </p:sp>
-      <p:sp>
-        <p:nvSpPr>
-          <p:cNvPr id="27" name="Process 26"/>
+              <a:t>Keep it for a 402(g) or 415 failure, or for ADP/ACP when a participant is partially vested.</a:t>
+            </a:r>
+          </a:p>
+        </p:txBody>
+      </p:sp>
+      <p:sp>
+        <p:nvSpPr>
+          <p:cNvPr id="22" name="Process 21"/>
           <p:cNvSpPr/>
           <p:nvPr/>
         </p:nvSpPr>
         <p:spPr>
           <a:xfrm>
-            <a:off x="6236208" y="5166360"/>
-            <a:ext cx="5650992" cy="960120"/>
+            <a:off x="320040" y="4754880"/>
+            <a:ext cx="5669280" cy="1115568"/>
           </a:xfrm>
           <a:prstGeom prst="flowChartProcess">
             <a:avLst/>
@@ -7540,12 +6859,11 @@
           <a:solidFill>
             <a:srgbClr val="E5F6F4"/>
           </a:solidFill>
-          <a:ln w="22225">
+          <a:ln w="15875">
             <a:solidFill>
               <a:srgbClr val="0F6E6B"/>
             </a:solidFill>
           </a:ln>
-          <a:effectLst/>
         </p:spPr>
         <p:style>
           <a:lnRef idx="1">
@@ -7562,122 +6880,186 @@
           </a:fontRef>
         </p:style>
         <p:txBody>
-          <a:bodyPr rtlCol="0" anchor="ctr" wrap="square" lIns="73152" rIns="73152" tIns="36576" bIns="36576"/>
+          <a:bodyPr rtlCol="0" anchor="ctr" wrap="square" lIns="54864" rIns="54864" tIns="54864" bIns="54864"/>
           <a:lstStyle/>
           <a:p>
             <a:pPr algn="ctr">
-              <a:spcBef>
-                <a:spcPts val="0"/>
-              </a:spcBef>
               <a:spcAft>
                 <a:spcPts val="0"/>
               </a:spcAft>
             </a:pPr>
             <a:r>
-              <a:rPr sz="1500" b="1">
+              <a:rPr b="1" sz="1300">
                 <a:solidFill>
                   <a:srgbClr val="0F6E6B"/>
                 </a:solidFill>
                 <a:latin typeface="Calibri"/>
               </a:rPr>
-              <a:t>Bookmarks</a:t>
+              <a:t>Year End Recap</a:t>
             </a:r>
           </a:p>
           <a:p>
             <a:pPr algn="ctr">
               <a:spcBef>
-                <a:spcPts val="0"/>
+                <a:spcPts val="200"/>
               </a:spcBef>
+            </a:pPr>
+            <a:r>
+              <a:rPr sz="1100">
+                <a:solidFill>
+                  <a:srgbClr val="1C1917"/>
+                </a:solidFill>
+                <a:latin typeface="Calibri"/>
+              </a:rPr>
+              <a:t>Keep or remove bullets for HCE, Safe Harbor, top heavy, catch-up, and the match.</a:t>
+            </a:r>
+          </a:p>
+        </p:txBody>
+      </p:sp>
+      <p:sp>
+        <p:nvSpPr>
+          <p:cNvPr id="23" name="Process 22"/>
+          <p:cNvSpPr/>
+          <p:nvPr/>
+        </p:nvSpPr>
+        <p:spPr>
+          <a:xfrm>
+            <a:off x="6263640" y="4754880"/>
+            <a:ext cx="5669280" cy="1115568"/>
+          </a:xfrm>
+          <a:prstGeom prst="flowChartProcess">
+            <a:avLst/>
+          </a:prstGeom>
+          <a:solidFill>
+            <a:srgbClr val="E5F6F4"/>
+          </a:solidFill>
+          <a:ln w="15875">
+            <a:solidFill>
+              <a:srgbClr val="0F6E6B"/>
+            </a:solidFill>
+          </a:ln>
+        </p:spPr>
+        <p:style>
+          <a:lnRef idx="1">
+            <a:schemeClr val="accent1"/>
+          </a:lnRef>
+          <a:fillRef idx="3">
+            <a:schemeClr val="accent1"/>
+          </a:fillRef>
+          <a:effectRef idx="2">
+            <a:schemeClr val="accent1"/>
+          </a:effectRef>
+          <a:fontRef idx="minor">
+            <a:schemeClr val="lt1"/>
+          </a:fontRef>
+        </p:style>
+        <p:txBody>
+          <a:bodyPr rtlCol="0" anchor="ctr" wrap="square" lIns="54864" rIns="54864" tIns="54864" bIns="54864"/>
+          <a:lstStyle/>
+          <a:p>
+            <a:pPr algn="ctr">
               <a:spcAft>
                 <a:spcPts val="0"/>
               </a:spcAft>
             </a:pPr>
             <a:r>
-              <a:rPr sz="1300" b="0">
+              <a:rPr b="1" sz="1300">
+                <a:solidFill>
+                  <a:srgbClr val="0F6E6B"/>
+                </a:solidFill>
+                <a:latin typeface="Calibri"/>
+              </a:rPr>
+              <a:t>Bookmarks</a:t>
+            </a:r>
+          </a:p>
+          <a:p>
+            <a:pPr algn="ctr">
+              <a:spcBef>
+                <a:spcPts val="200"/>
+              </a:spcBef>
+            </a:pPr>
+            <a:r>
+              <a:rPr sz="1100">
                 <a:solidFill>
                   <a:srgbClr val="1C1917"/>
                 </a:solidFill>
                 <a:latin typeface="Calibri"/>
               </a:rPr>
-              <a:t>Add a bookmark for each section that remains, including ADP Test, ACP Test, and HCE on a 403(b).</a:t>
-            </a:r>
-          </a:p>
-        </p:txBody>
-      </p:sp>
-      <p:cxnSp>
-        <p:nvCxnSpPr>
-          <p:cNvPr id="28" name="Connector 27"/>
-          <p:cNvCxnSpPr/>
-          <p:nvPr/>
-        </p:nvCxnSpPr>
-        <p:spPr>
-          <a:xfrm>
-            <a:off x="5980176" y="5646420"/>
-            <a:ext cx="237744" cy="0"/>
-          </a:xfrm>
-          <a:prstGeom prst="line">
-            <a:avLst/>
-          </a:prstGeom>
-          <a:ln w="22225">
+              <a:t>Add a bookmark for each section that remains, including ADP Test, ACP Test, and HCE on a 403(b). Do not bookmark BRF or variance.</a:t>
+            </a:r>
+          </a:p>
+        </p:txBody>
+      </p:sp>
+      <p:sp>
+        <p:nvSpPr>
+          <p:cNvPr id="24" name="Rounded Rectangle 23"/>
+          <p:cNvSpPr/>
+          <p:nvPr/>
+        </p:nvSpPr>
+        <p:spPr>
+          <a:xfrm>
+            <a:off x="320040" y="6035040"/>
+            <a:ext cx="11521440" cy="566928"/>
+          </a:xfrm>
+          <a:prstGeom prst="roundRect">
+            <a:avLst/>
+          </a:prstGeom>
+          <a:solidFill>
+            <a:srgbClr val="FFFBF0"/>
+          </a:solidFill>
+          <a:ln>
             <a:solidFill>
-              <a:srgbClr val="3F4A5A"/>
+              <a:srgbClr val="A16207"/>
             </a:solidFill>
-            <a:tailEnd type="triangle" w="med" len="med"/>
           </a:ln>
         </p:spPr>
         <p:style>
-          <a:lnRef idx="2">
+          <a:lnRef idx="1">
             <a:schemeClr val="accent1"/>
           </a:lnRef>
-          <a:fillRef idx="0">
+          <a:fillRef idx="3">
             <a:schemeClr val="accent1"/>
           </a:fillRef>
-          <a:effectRef idx="1">
+          <a:effectRef idx="2">
             <a:schemeClr val="accent1"/>
           </a:effectRef>
           <a:fontRef idx="minor">
-            <a:schemeClr val="tx1"/>
+            <a:schemeClr val="lt1"/>
           </a:fontRef>
         </p:style>
-      </p:cxnSp>
-      <p:sp>
-        <p:nvSpPr>
-          <p:cNvPr id="29" name="TextBox 28"/>
-          <p:cNvSpPr txBox="1"/>
-          <p:nvPr/>
-        </p:nvSpPr>
-        <p:spPr>
-          <a:xfrm>
-            <a:off x="7772400" y="6263640"/>
-            <a:ext cx="4114800" cy="219456"/>
-          </a:xfrm>
-          <a:prstGeom prst="rect">
-            <a:avLst/>
-          </a:prstGeom>
-          <a:noFill/>
-        </p:spPr>
-        <p:txBody>
-          <a:bodyPr wrap="none" lIns="18288" tIns="0" bIns="0">
-            <a:spAutoFit/>
-          </a:bodyPr>
+        <p:txBody>
+          <a:bodyPr rtlCol="0" anchor="ctr" wrap="square" lIns="54864" rIns="54864" tIns="54864" bIns="54864"/>
           <a:lstStyle/>
           <a:p>
             <a:pPr algn="ctr">
-              <a:spcBef>
-                <a:spcPts val="0"/>
-              </a:spcBef>
               <a:spcAft>
                 <a:spcPts val="0"/>
               </a:spcAft>
             </a:pPr>
             <a:r>
-              <a:rPr sz="1200" b="1">
-                <a:solidFill>
-                  <a:srgbClr val="1E3A5F"/>
-                </a:solidFill>
-                <a:latin typeface="Calibri"/>
-              </a:rPr>
-              <a:t>Continued on page 4  →</a:t>
+              <a:rPr b="1" sz="1300">
+                <a:solidFill>
+                  <a:srgbClr val="A16207"/>
+                </a:solidFill>
+                <a:latin typeface="Calibri"/>
+              </a:rPr>
+              <a:t>Also removed</a:t>
+            </a:r>
+          </a:p>
+          <a:p>
+            <a:pPr algn="ctr">
+              <a:spcBef>
+                <a:spcPts val="200"/>
+              </a:spcBef>
+            </a:pPr>
+            <a:r>
+              <a:rPr sz="1300">
+                <a:solidFill>
+                  <a:srgbClr val="1C1917"/>
+                </a:solidFill>
+                <a:latin typeface="Calibri"/>
+              </a:rPr>
+              <a:t>Audited wording, Statement of Contribution, 5500 wording, and escalation wording.</a:t>
             </a:r>
           </a:p>
         </p:txBody>
@@ -7709,18 +7091,17 @@
         <p:spPr>
           <a:xfrm>
             <a:off x="0" y="0"/>
-            <a:ext cx="12191695" cy="73152"/>
+            <a:ext cx="12191695" cy="6858000"/>
           </a:xfrm>
           <a:prstGeom prst="rect">
             <a:avLst/>
           </a:prstGeom>
           <a:solidFill>
-            <a:srgbClr val="0F6E6B"/>
+            <a:srgbClr val="F7F8F6"/>
           </a:solidFill>
-          <a:ln w="22225">
+          <a:ln>
             <a:noFill/>
           </a:ln>
-          <a:effectLst/>
         </p:spPr>
         <p:style>
           <a:lnRef idx="1">
@@ -7746,88 +7127,24 @@
       </p:sp>
       <p:sp>
         <p:nvSpPr>
-          <p:cNvPr id="3" name="TextBox 2"/>
-          <p:cNvSpPr txBox="1"/>
-          <p:nvPr/>
-        </p:nvSpPr>
-        <p:spPr>
-          <a:xfrm>
-            <a:off x="320040" y="146304"/>
-            <a:ext cx="11521440" cy="658368"/>
+          <p:cNvPr id="3" name="Rectangle 2"/>
+          <p:cNvSpPr/>
+          <p:nvPr/>
+        </p:nvSpPr>
+        <p:spPr>
+          <a:xfrm>
+            <a:off x="0" y="0"/>
+            <a:ext cx="12191695" cy="73152"/>
           </a:xfrm>
           <a:prstGeom prst="rect">
             <a:avLst/>
           </a:prstGeom>
-          <a:noFill/>
-        </p:spPr>
-        <p:txBody>
-          <a:bodyPr wrap="none">
-            <a:spAutoFit/>
-          </a:bodyPr>
-          <a:lstStyle/>
-          <a:p>
-            <a:pPr algn="l">
-              <a:spcBef>
-                <a:spcPts val="0"/>
-              </a:spcBef>
-              <a:spcAft>
-                <a:spcPts val="0"/>
-              </a:spcAft>
-            </a:pPr>
-            <a:r>
-              <a:rPr sz="2600" b="1">
-                <a:solidFill>
-                  <a:srgbClr val="1E3A5F"/>
-                </a:solidFill>
-                <a:latin typeface="Calibri"/>
-              </a:rPr>
-              <a:t>Save, preview, and finish</a:t>
-            </a:r>
-          </a:p>
-          <a:p>
-            <a:pPr algn="l">
-              <a:spcBef>
-                <a:spcPts val="0"/>
-              </a:spcBef>
-              <a:spcAft>
-                <a:spcPts val="0"/>
-              </a:spcAft>
-            </a:pPr>
-            <a:r>
-              <a:rPr sz="1400" b="0">
-                <a:solidFill>
-                  <a:srgbClr val="3F4A5A"/>
-                </a:solidFill>
-                <a:latin typeface="Calibri"/>
-              </a:rPr>
-              <a:t>Page 4 of 4   ·   Yellow marks stay in the preview only</a:t>
-            </a:r>
-          </a:p>
-        </p:txBody>
-      </p:sp>
-      <p:sp>
-        <p:nvSpPr>
-          <p:cNvPr id="4" name="Terminator 3"/>
-          <p:cNvSpPr/>
-          <p:nvPr/>
-        </p:nvSpPr>
-        <p:spPr>
-          <a:xfrm>
-            <a:off x="320040" y="896112"/>
-            <a:ext cx="292608" cy="237744"/>
-          </a:xfrm>
-          <a:prstGeom prst="flowChartTerminator">
-            <a:avLst/>
-          </a:prstGeom>
           <a:solidFill>
-            <a:srgbClr val="1B7A4A"/>
+            <a:srgbClr val="0F6E6B"/>
           </a:solidFill>
-          <a:ln w="22225">
-            <a:solidFill>
-              <a:srgbClr val="145C38"/>
-            </a:solidFill>
+          <a:ln>
+            <a:noFill/>
           </a:ln>
-          <a:effectLst/>
         </p:spPr>
         <p:style>
           <a:lnRef idx="1">
@@ -7844,10 +7161,45 @@
           </a:fontRef>
         </p:style>
         <p:txBody>
-          <a:bodyPr rtlCol="0" anchor="ctr" wrap="square" lIns="73152" rIns="73152" tIns="36576" bIns="36576"/>
+          <a:bodyPr rtlCol="0" anchor="ctr"/>
           <a:lstStyle/>
           <a:p>
             <a:pPr algn="ctr"/>
+          </a:p>
+        </p:txBody>
+      </p:sp>
+      <p:sp>
+        <p:nvSpPr>
+          <p:cNvPr id="4" name="TextBox 3"/>
+          <p:cNvSpPr txBox="1"/>
+          <p:nvPr/>
+        </p:nvSpPr>
+        <p:spPr>
+          <a:xfrm>
+            <a:off x="320040" y="146304"/>
+            <a:ext cx="7772400" cy="329184"/>
+          </a:xfrm>
+          <a:prstGeom prst="rect">
+            <a:avLst/>
+          </a:prstGeom>
+          <a:noFill/>
+        </p:spPr>
+        <p:txBody>
+          <a:bodyPr wrap="square">
+            <a:spAutoFit/>
+          </a:bodyPr>
+          <a:lstStyle/>
+          <a:p>
+            <a:pPr algn="l"/>
+            <a:r>
+              <a:rPr sz="2200" b="1">
+                <a:solidFill>
+                  <a:srgbClr val="1E3A5F"/>
+                </a:solidFill>
+                <a:latin typeface="Calibri"/>
+              </a:rPr>
+              <a:t>Checks on the finished pages</a:t>
+            </a:r>
           </a:p>
         </p:txBody>
       </p:sp>
@@ -7859,8 +7211,8 @@
         </p:nvSpPr>
         <p:spPr>
           <a:xfrm>
-            <a:off x="649224" y="896112"/>
-            <a:ext cx="2011680" cy="219456"/>
+            <a:off x="7680960" y="201168"/>
+            <a:ext cx="4206240" cy="274320"/>
           </a:xfrm>
           <a:prstGeom prst="rect">
             <a:avLst/>
@@ -7868,54 +7220,46 @@
           <a:noFill/>
         </p:spPr>
         <p:txBody>
-          <a:bodyPr wrap="none" lIns="18288" tIns="0" bIns="0">
+          <a:bodyPr wrap="square">
             <a:spAutoFit/>
           </a:bodyPr>
           <a:lstStyle/>
           <a:p>
-            <a:pPr algn="ctr">
-              <a:spcBef>
-                <a:spcPts val="0"/>
-              </a:spcBef>
-              <a:spcAft>
-                <a:spcPts val="0"/>
-              </a:spcAft>
-            </a:pPr>
-            <a:r>
-              <a:rPr sz="1200" b="1">
+            <a:pPr algn="l"/>
+            <a:r>
+              <a:rPr sz="1200" b="0">
                 <a:solidFill>
                   <a:srgbClr val="3F4A5A"/>
                 </a:solidFill>
                 <a:latin typeface="Calibri"/>
               </a:rPr>
-              <a:t>Oval  Start or end</a:t>
-            </a:r>
-          </a:p>
-        </p:txBody>
-      </p:sp>
-      <p:sp>
-        <p:nvSpPr>
-          <p:cNvPr id="6" name="Process 5"/>
+              <a:t>Page 4 of 5   ·   A failed check is shown. The page is not rebuilt.</a:t>
+            </a:r>
+          </a:p>
+        </p:txBody>
+      </p:sp>
+      <p:sp>
+        <p:nvSpPr>
+          <p:cNvPr id="6" name="Terminator 5"/>
           <p:cNvSpPr/>
           <p:nvPr/>
         </p:nvSpPr>
         <p:spPr>
           <a:xfrm>
-            <a:off x="2468880" y="896112"/>
+            <a:off x="320040" y="621792"/>
             <a:ext cx="292608" cy="237744"/>
           </a:xfrm>
-          <a:prstGeom prst="flowChartProcess">
+          <a:prstGeom prst="flowChartTerminator">
             <a:avLst/>
           </a:prstGeom>
           <a:solidFill>
-            <a:srgbClr val="E7F0FB"/>
+            <a:srgbClr val="FFFFFF"/>
           </a:solidFill>
-          <a:ln w="22225">
+          <a:ln>
             <a:solidFill>
-              <a:srgbClr val="1D4E89"/>
+              <a:srgbClr val="1B7A4A"/>
             </a:solidFill>
           </a:ln>
-          <a:effectLst/>
         </p:spPr>
         <p:style>
           <a:lnRef idx="1">
@@ -7932,7 +7276,7 @@
           </a:fontRef>
         </p:style>
         <p:txBody>
-          <a:bodyPr rtlCol="0" anchor="ctr" wrap="square" lIns="73152" rIns="73152" tIns="36576" bIns="36576"/>
+          <a:bodyPr rtlCol="0" anchor="ctr"/>
           <a:lstStyle/>
           <a:p>
             <a:pPr algn="ctr"/>
@@ -7947,8 +7291,8 @@
         </p:nvSpPr>
         <p:spPr>
           <a:xfrm>
-            <a:off x="2798064" y="896112"/>
-            <a:ext cx="2011680" cy="219456"/>
+            <a:off x="649224" y="603504"/>
+            <a:ext cx="1965960" cy="274320"/>
           </a:xfrm>
           <a:prstGeom prst="rect">
             <a:avLst/>
@@ -7956,54 +7300,46 @@
           <a:noFill/>
         </p:spPr>
         <p:txBody>
-          <a:bodyPr wrap="none" lIns="18288" tIns="0" bIns="0">
+          <a:bodyPr wrap="square">
             <a:spAutoFit/>
           </a:bodyPr>
           <a:lstStyle/>
           <a:p>
-            <a:pPr algn="ctr">
-              <a:spcBef>
-                <a:spcPts val="0"/>
-              </a:spcBef>
-              <a:spcAft>
-                <a:spcPts val="0"/>
-              </a:spcAft>
-            </a:pPr>
-            <a:r>
-              <a:rPr sz="1200" b="1">
+            <a:pPr algn="l"/>
+            <a:r>
+              <a:rPr sz="1100" b="0">
                 <a:solidFill>
                   <a:srgbClr val="3F4A5A"/>
                 </a:solidFill>
                 <a:latin typeface="Calibri"/>
               </a:rPr>
-              <a:t>Rectangle  A step</a:t>
-            </a:r>
-          </a:p>
-        </p:txBody>
-      </p:sp>
-      <p:sp>
-        <p:nvSpPr>
-          <p:cNvPr id="8" name="Decision 7"/>
+              <a:t>Oval   Start or end</a:t>
+            </a:r>
+          </a:p>
+        </p:txBody>
+      </p:sp>
+      <p:sp>
+        <p:nvSpPr>
+          <p:cNvPr id="8" name="Process 7"/>
           <p:cNvSpPr/>
           <p:nvPr/>
         </p:nvSpPr>
         <p:spPr>
           <a:xfrm>
-            <a:off x="4709160" y="896112"/>
+            <a:off x="2651760" y="621792"/>
             <a:ext cx="292608" cy="237744"/>
           </a:xfrm>
-          <a:prstGeom prst="flowChartDecision">
+          <a:prstGeom prst="flowChartProcess">
             <a:avLst/>
           </a:prstGeom>
           <a:solidFill>
-            <a:srgbClr val="FFF4D4"/>
+            <a:srgbClr val="FFFFFF"/>
           </a:solidFill>
-          <a:ln w="22225">
+          <a:ln>
             <a:solidFill>
-              <a:srgbClr val="B45309"/>
+              <a:srgbClr val="1D4E89"/>
             </a:solidFill>
           </a:ln>
-          <a:effectLst/>
         </p:spPr>
         <p:style>
           <a:lnRef idx="1">
@@ -8020,7 +7356,7 @@
           </a:fontRef>
         </p:style>
         <p:txBody>
-          <a:bodyPr rtlCol="0" anchor="ctr" wrap="square" lIns="73152" rIns="73152" tIns="36576" bIns="36576"/>
+          <a:bodyPr rtlCol="0" anchor="ctr"/>
           <a:lstStyle/>
           <a:p>
             <a:pPr algn="ctr"/>
@@ -8035,8 +7371,8 @@
         </p:nvSpPr>
         <p:spPr>
           <a:xfrm>
-            <a:off x="5038344" y="896112"/>
-            <a:ext cx="2011680" cy="219456"/>
+            <a:off x="2980944" y="603504"/>
+            <a:ext cx="1965960" cy="274320"/>
           </a:xfrm>
           <a:prstGeom prst="rect">
             <a:avLst/>
@@ -8044,54 +7380,46 @@
           <a:noFill/>
         </p:spPr>
         <p:txBody>
-          <a:bodyPr wrap="none" lIns="18288" tIns="0" bIns="0">
+          <a:bodyPr wrap="square">
             <a:spAutoFit/>
           </a:bodyPr>
           <a:lstStyle/>
           <a:p>
-            <a:pPr algn="ctr">
-              <a:spcBef>
-                <a:spcPts val="0"/>
-              </a:spcBef>
-              <a:spcAft>
-                <a:spcPts val="0"/>
-              </a:spcAft>
-            </a:pPr>
-            <a:r>
-              <a:rPr sz="1200" b="1">
+            <a:pPr algn="l"/>
+            <a:r>
+              <a:rPr sz="1100" b="0">
                 <a:solidFill>
                   <a:srgbClr val="3F4A5A"/>
                 </a:solidFill>
                 <a:latin typeface="Calibri"/>
               </a:rPr>
-              <a:t>Diamond  Yes or no</a:t>
-            </a:r>
-          </a:p>
-        </p:txBody>
-      </p:sp>
-      <p:sp>
-        <p:nvSpPr>
-          <p:cNvPr id="10" name="Data 9"/>
+              <a:t>Rectangle   A step</a:t>
+            </a:r>
+          </a:p>
+        </p:txBody>
+      </p:sp>
+      <p:sp>
+        <p:nvSpPr>
+          <p:cNvPr id="10" name="Decision 9"/>
           <p:cNvSpPr/>
           <p:nvPr/>
         </p:nvSpPr>
         <p:spPr>
           <a:xfrm>
-            <a:off x="7040880" y="896112"/>
+            <a:off x="4983479" y="621792"/>
             <a:ext cx="292608" cy="237744"/>
           </a:xfrm>
-          <a:prstGeom prst="flowChartInputOutput">
+          <a:prstGeom prst="flowChartDecision">
             <a:avLst/>
           </a:prstGeom>
           <a:solidFill>
-            <a:srgbClr val="EEF2FF"/>
+            <a:srgbClr val="FFFFFF"/>
           </a:solidFill>
-          <a:ln w="22225">
+          <a:ln>
             <a:solidFill>
-              <a:srgbClr val="373AB0"/>
+              <a:srgbClr val="B45309"/>
             </a:solidFill>
           </a:ln>
-          <a:effectLst/>
         </p:spPr>
         <p:style>
           <a:lnRef idx="1">
@@ -8108,7 +7436,7 @@
           </a:fontRef>
         </p:style>
         <p:txBody>
-          <a:bodyPr rtlCol="0" anchor="ctr" wrap="square" lIns="73152" rIns="73152" tIns="36576" bIns="36576"/>
+          <a:bodyPr rtlCol="0" anchor="ctr"/>
           <a:lstStyle/>
           <a:p>
             <a:pPr algn="ctr"/>
@@ -8123,8 +7451,8 @@
         </p:nvSpPr>
         <p:spPr>
           <a:xfrm>
-            <a:off x="7370064" y="896112"/>
-            <a:ext cx="2011680" cy="219456"/>
+            <a:off x="5312664" y="603504"/>
+            <a:ext cx="1965960" cy="274320"/>
           </a:xfrm>
           <a:prstGeom prst="rect">
             <a:avLst/>
@@ -8132,54 +7460,46 @@
           <a:noFill/>
         </p:spPr>
         <p:txBody>
-          <a:bodyPr wrap="none" lIns="18288" tIns="0" bIns="0">
+          <a:bodyPr wrap="square">
             <a:spAutoFit/>
           </a:bodyPr>
           <a:lstStyle/>
           <a:p>
-            <a:pPr algn="ctr">
-              <a:spcBef>
-                <a:spcPts val="0"/>
-              </a:spcBef>
-              <a:spcAft>
-                <a:spcPts val="0"/>
-              </a:spcAft>
-            </a:pPr>
-            <a:r>
-              <a:rPr sz="1200" b="1">
+            <a:pPr algn="l"/>
+            <a:r>
+              <a:rPr sz="1100" b="0">
                 <a:solidFill>
                   <a:srgbClr val="3F4A5A"/>
                 </a:solidFill>
                 <a:latin typeface="Calibri"/>
               </a:rPr>
-              <a:t>Slanted  Files you add</a:t>
-            </a:r>
-          </a:p>
-        </p:txBody>
-      </p:sp>
-      <p:sp>
-        <p:nvSpPr>
-          <p:cNvPr id="12" name="Document 11"/>
+              <a:t>Diamond   Yes or no</a:t>
+            </a:r>
+          </a:p>
+        </p:txBody>
+      </p:sp>
+      <p:sp>
+        <p:nvSpPr>
+          <p:cNvPr id="12" name="Data 11"/>
           <p:cNvSpPr/>
           <p:nvPr/>
         </p:nvSpPr>
         <p:spPr>
           <a:xfrm>
-            <a:off x="9464040" y="896112"/>
+            <a:off x="7315199" y="621792"/>
             <a:ext cx="292608" cy="237744"/>
           </a:xfrm>
-          <a:prstGeom prst="flowChartDocument">
+          <a:prstGeom prst="flowChartInputOutput">
             <a:avLst/>
           </a:prstGeom>
           <a:solidFill>
-            <a:srgbClr val="E5F6F4"/>
+            <a:srgbClr val="FFFFFF"/>
           </a:solidFill>
-          <a:ln w="22225">
+          <a:ln>
             <a:solidFill>
-              <a:srgbClr val="0F6E6B"/>
+              <a:srgbClr val="4338CA"/>
             </a:solidFill>
           </a:ln>
-          <a:effectLst/>
         </p:spPr>
         <p:style>
           <a:lnRef idx="1">
@@ -8196,7 +7516,7 @@
           </a:fontRef>
         </p:style>
         <p:txBody>
-          <a:bodyPr rtlCol="0" anchor="ctr" wrap="square" lIns="73152" rIns="73152" tIns="36576" bIns="36576"/>
+          <a:bodyPr rtlCol="0" anchor="ctr"/>
           <a:lstStyle/>
           <a:p>
             <a:pPr algn="ctr"/>
@@ -8211,8 +7531,8 @@
         </p:nvSpPr>
         <p:spPr>
           <a:xfrm>
-            <a:off x="9793224" y="896112"/>
-            <a:ext cx="2011680" cy="219456"/>
+            <a:off x="7644383" y="603504"/>
+            <a:ext cx="1965960" cy="274320"/>
           </a:xfrm>
           <a:prstGeom prst="rect">
             <a:avLst/>
@@ -8220,27 +7540,20 @@
           <a:noFill/>
         </p:spPr>
         <p:txBody>
-          <a:bodyPr wrap="none" lIns="18288" tIns="0" bIns="0">
+          <a:bodyPr wrap="square">
             <a:spAutoFit/>
           </a:bodyPr>
           <a:lstStyle/>
           <a:p>
-            <a:pPr algn="ctr">
-              <a:spcBef>
-                <a:spcPts val="0"/>
-              </a:spcBef>
-              <a:spcAft>
-                <a:spcPts val="0"/>
-              </a:spcAft>
-            </a:pPr>
-            <a:r>
-              <a:rPr sz="1200" b="1">
+            <a:pPr algn="l"/>
+            <a:r>
+              <a:rPr sz="1100" b="0">
                 <a:solidFill>
                   <a:srgbClr val="3F4A5A"/>
                 </a:solidFill>
                 <a:latin typeface="Calibri"/>
               </a:rPr>
-              <a:t>Document  File produced</a:t>
+              <a:t>Slanted   Files you add</a:t>
             </a:r>
           </a:p>
         </p:txBody>
@@ -8253,21 +7566,20 @@
         </p:nvSpPr>
         <p:spPr>
           <a:xfrm>
-            <a:off x="1645920" y="1298448"/>
-            <a:ext cx="8869680" cy="658368"/>
+            <a:off x="9646919" y="621792"/>
+            <a:ext cx="292608" cy="237744"/>
           </a:xfrm>
           <a:prstGeom prst="flowChartDocument">
             <a:avLst/>
           </a:prstGeom>
           <a:solidFill>
-            <a:srgbClr val="E5F6F4"/>
+            <a:srgbClr val="FFFFFF"/>
           </a:solidFill>
-          <a:ln w="22225">
+          <a:ln>
             <a:solidFill>
               <a:srgbClr val="0F6E6B"/>
             </a:solidFill>
           </a:ln>
-          <a:effectLst/>
         </p:spPr>
         <p:style>
           <a:lnRef idx="1">
@@ -8284,71 +7596,70 @@
           </a:fontRef>
         </p:style>
         <p:txBody>
-          <a:bodyPr rtlCol="0" anchor="ctr" wrap="square" lIns="73152" rIns="73152" tIns="36576" bIns="36576"/>
-          <a:lstStyle/>
-          <a:p>
-            <a:pPr algn="ctr">
-              <a:spcBef>
-                <a:spcPts val="0"/>
-              </a:spcBef>
-              <a:spcAft>
-                <a:spcPts val="0"/>
-              </a:spcAft>
-            </a:pPr>
-            <a:r>
-              <a:rPr sz="1200" b="1">
-                <a:solidFill>
-                  <a:srgbClr val="0F6E6B"/>
-                </a:solidFill>
-                <a:latin typeface="Calibri"/>
-              </a:rPr>
-              <a:t>Application</a:t>
-            </a:r>
-          </a:p>
-          <a:p>
-            <a:pPr algn="ctr">
-              <a:spcBef>
-                <a:spcPts val="0"/>
-              </a:spcBef>
-              <a:spcAft>
-                <a:spcPts val="0"/>
-              </a:spcAft>
-            </a:pPr>
-            <a:r>
-              <a:rPr sz="1400" b="0">
-                <a:solidFill>
-                  <a:srgbClr val="1C1917"/>
-                </a:solidFill>
-                <a:latin typeface="Calibri"/>
-              </a:rPr>
-              <a:t>Save PlanNumber_BeginningYear-Valuation.pdf, an Outlook draft, and a log row</a:t>
-            </a:r>
-          </a:p>
-        </p:txBody>
-      </p:sp>
-      <p:sp>
-        <p:nvSpPr>
-          <p:cNvPr id="15" name="Decision 14"/>
+          <a:bodyPr rtlCol="0" anchor="ctr"/>
+          <a:lstStyle/>
+          <a:p>
+            <a:pPr algn="ctr"/>
+          </a:p>
+        </p:txBody>
+      </p:sp>
+      <p:sp>
+        <p:nvSpPr>
+          <p:cNvPr id="15" name="TextBox 14"/>
+          <p:cNvSpPr txBox="1"/>
+          <p:nvPr/>
+        </p:nvSpPr>
+        <p:spPr>
+          <a:xfrm>
+            <a:off x="9976103" y="603504"/>
+            <a:ext cx="1965960" cy="274320"/>
+          </a:xfrm>
+          <a:prstGeom prst="rect">
+            <a:avLst/>
+          </a:prstGeom>
+          <a:noFill/>
+        </p:spPr>
+        <p:txBody>
+          <a:bodyPr wrap="square">
+            <a:spAutoFit/>
+          </a:bodyPr>
+          <a:lstStyle/>
+          <a:p>
+            <a:pPr algn="l"/>
+            <a:r>
+              <a:rPr sz="1100" b="0">
+                <a:solidFill>
+                  <a:srgbClr val="3F4A5A"/>
+                </a:solidFill>
+                <a:latin typeface="Calibri"/>
+              </a:rPr>
+              <a:t>Document   File produced</a:t>
+            </a:r>
+          </a:p>
+        </p:txBody>
+      </p:sp>
+      <p:sp>
+        <p:nvSpPr>
+          <p:cNvPr id="16" name="Process 15"/>
           <p:cNvSpPr/>
           <p:nvPr/>
         </p:nvSpPr>
         <p:spPr>
           <a:xfrm>
-            <a:off x="4956048" y="2103120"/>
-            <a:ext cx="2286000" cy="1051560"/>
-          </a:xfrm>
-          <a:prstGeom prst="flowChartDecision">
+            <a:off x="320040" y="1051560"/>
+            <a:ext cx="5669280" cy="1389888"/>
+          </a:xfrm>
+          <a:prstGeom prst="flowChartProcess">
             <a:avLst/>
           </a:prstGeom>
           <a:solidFill>
-            <a:srgbClr val="FFF4D4"/>
+            <a:srgbClr val="E5F6F4"/>
           </a:solidFill>
-          <a:ln w="22225">
+          <a:ln w="15875">
             <a:solidFill>
-              <a:srgbClr val="B45309"/>
+              <a:srgbClr val="0F6E6B"/>
             </a:solidFill>
           </a:ln>
-          <a:effectLst/>
         </p:spPr>
         <p:style>
           <a:lnRef idx="1">
@@ -8365,52 +7676,64 @@
           </a:fontRef>
         </p:style>
         <p:txBody>
-          <a:bodyPr rtlCol="0" anchor="ctr" wrap="square" lIns="73152" rIns="73152" tIns="36576" bIns="36576"/>
+          <a:bodyPr rtlCol="0" anchor="ctr" wrap="square" lIns="54864" rIns="54864" tIns="54864" bIns="54864"/>
           <a:lstStyle/>
           <a:p>
             <a:pPr algn="ctr">
-              <a:spcBef>
-                <a:spcPts val="0"/>
-              </a:spcBef>
               <a:spcAft>
                 <a:spcPts val="0"/>
               </a:spcAft>
             </a:pPr>
             <a:r>
-              <a:rPr sz="1500" b="1">
+              <a:rPr b="1" sz="1300">
+                <a:solidFill>
+                  <a:srgbClr val="0F6E6B"/>
+                </a:solidFill>
+                <a:latin typeface="Calibri"/>
+              </a:rPr>
+              <a:t>Result Summary</a:t>
+            </a:r>
+          </a:p>
+          <a:p>
+            <a:pPr algn="ctr">
+              <a:spcBef>
+                <a:spcPts val="200"/>
+              </a:spcBef>
+            </a:pPr>
+            <a:r>
+              <a:rPr sz="1300">
                 <a:solidFill>
                   <a:srgbClr val="1C1917"/>
                 </a:solidFill>
                 <a:latin typeface="Calibri"/>
               </a:rPr>
-              <a:t>Highlights?</a:t>
-            </a:r>
-          </a:p>
-        </p:txBody>
-      </p:sp>
-      <p:sp>
-        <p:nvSpPr>
-          <p:cNvPr id="16" name="Process 15"/>
+              <a:t>Compare top heavy, including 0.00% and Plan is or is not Top Heavy, and pass or fail for 410(b), 401(a)(4), 414(s), 402(g), 415, ADP, and ACP.</a:t>
+            </a:r>
+          </a:p>
+        </p:txBody>
+      </p:sp>
+      <p:sp>
+        <p:nvSpPr>
+          <p:cNvPr id="17" name="Process 16"/>
           <p:cNvSpPr/>
           <p:nvPr/>
         </p:nvSpPr>
         <p:spPr>
           <a:xfrm>
-            <a:off x="292608" y="3310128"/>
-            <a:ext cx="5669280" cy="713232"/>
+            <a:off x="6263640" y="1051560"/>
+            <a:ext cx="5669280" cy="1389888"/>
           </a:xfrm>
           <a:prstGeom prst="flowChartProcess">
             <a:avLst/>
           </a:prstGeom>
           <a:solidFill>
-            <a:srgbClr val="E7F0FB"/>
+            <a:srgbClr val="E5F6F4"/>
           </a:solidFill>
-          <a:ln w="22225">
+          <a:ln w="15875">
             <a:solidFill>
-              <a:srgbClr val="1D4E89"/>
+              <a:srgbClr val="0F6E6B"/>
             </a:solidFill>
           </a:ln>
-          <a:effectLst/>
         </p:spPr>
         <p:style>
           <a:lnRef idx="1">
@@ -8427,71 +7750,64 @@
           </a:fontRef>
         </p:style>
         <p:txBody>
-          <a:bodyPr rtlCol="0" anchor="ctr" wrap="square" lIns="73152" rIns="73152" tIns="36576" bIns="36576"/>
+          <a:bodyPr rtlCol="0" anchor="ctr" wrap="square" lIns="54864" rIns="54864" tIns="54864" bIns="54864"/>
           <a:lstStyle/>
           <a:p>
             <a:pPr algn="ctr">
-              <a:spcBef>
-                <a:spcPts val="0"/>
-              </a:spcBef>
               <a:spcAft>
                 <a:spcPts val="0"/>
               </a:spcAft>
             </a:pPr>
             <a:r>
-              <a:rPr sz="1200" b="1">
-                <a:solidFill>
-                  <a:srgbClr val="1D4E89"/>
-                </a:solidFill>
-                <a:latin typeface="Calibri"/>
-              </a:rPr>
-              <a:t>You</a:t>
+              <a:rPr b="1" sz="1300">
+                <a:solidFill>
+                  <a:srgbClr val="0F6E6B"/>
+                </a:solidFill>
+                <a:latin typeface="Calibri"/>
+              </a:rPr>
+              <a:t>Compliance reports</a:t>
             </a:r>
           </a:p>
           <a:p>
             <a:pPr algn="ctr">
               <a:spcBef>
-                <a:spcPts val="0"/>
+                <a:spcPts val="200"/>
               </a:spcBef>
-              <a:spcAft>
-                <a:spcPts val="0"/>
-              </a:spcAft>
             </a:pPr>
             <a:r>
-              <a:rPr sz="1300" b="0">
+              <a:rPr sz="1300">
                 <a:solidFill>
                   <a:srgbClr val="1C1917"/>
                 </a:solidFill>
                 <a:latin typeface="Calibri"/>
               </a:rPr>
-              <a:t>Preview shows yellow marks on the words that were rewritten</a:t>
-            </a:r>
-          </a:p>
-        </p:txBody>
-      </p:sp>
-      <p:sp>
-        <p:nvSpPr>
-          <p:cNvPr id="17" name="Process 16"/>
+              <a:t>Expect three Compliance and Administrative Report pages. A different count is flagged. Missing pages are not created.</a:t>
+            </a:r>
+          </a:p>
+        </p:txBody>
+      </p:sp>
+      <p:sp>
+        <p:nvSpPr>
+          <p:cNvPr id="18" name="Process 17"/>
           <p:cNvSpPr/>
           <p:nvPr/>
         </p:nvSpPr>
         <p:spPr>
           <a:xfrm>
-            <a:off x="6236208" y="3310128"/>
-            <a:ext cx="5650992" cy="713232"/>
+            <a:off x="320040" y="2606039"/>
+            <a:ext cx="5669280" cy="1389888"/>
           </a:xfrm>
           <a:prstGeom prst="flowChartProcess">
             <a:avLst/>
           </a:prstGeom>
           <a:solidFill>
-            <a:srgbClr val="E7F0FB"/>
+            <a:srgbClr val="E5F6F4"/>
           </a:solidFill>
-          <a:ln w="22225">
+          <a:ln w="15875">
             <a:solidFill>
-              <a:srgbClr val="1D4E89"/>
+              <a:srgbClr val="0F6E6B"/>
             </a:solidFill>
           </a:ln>
-          <a:effectLst/>
         </p:spPr>
         <p:style>
           <a:lnRef idx="1">
@@ -8508,263 +7824,64 @@
           </a:fontRef>
         </p:style>
         <p:txBody>
-          <a:bodyPr rtlCol="0" anchor="ctr" wrap="square" lIns="73152" rIns="73152" tIns="36576" bIns="36576"/>
+          <a:bodyPr rtlCol="0" anchor="ctr" wrap="square" lIns="54864" rIns="54864" tIns="54864" bIns="54864"/>
           <a:lstStyle/>
           <a:p>
             <a:pPr algn="ctr">
-              <a:spcBef>
-                <a:spcPts val="0"/>
-              </a:spcBef>
               <a:spcAft>
                 <a:spcPts val="0"/>
               </a:spcAft>
             </a:pPr>
             <a:r>
-              <a:rPr sz="1200" b="1">
-                <a:solidFill>
-                  <a:srgbClr val="1D4E89"/>
-                </a:solidFill>
-                <a:latin typeface="Calibri"/>
-              </a:rPr>
-              <a:t>You</a:t>
+              <a:rPr b="1" sz="1300">
+                <a:solidFill>
+                  <a:srgbClr val="0F6E6B"/>
+                </a:solidFill>
+                <a:latin typeface="Calibri"/>
+              </a:rPr>
+              <a:t>Client variance</a:t>
             </a:r>
           </a:p>
           <a:p>
             <a:pPr algn="ctr">
               <a:spcBef>
-                <a:spcPts val="0"/>
+                <a:spcPts val="200"/>
               </a:spcBef>
-              <a:spcAft>
-                <a:spcPts val="0"/>
-              </a:spcAft>
             </a:pPr>
             <a:r>
-              <a:rPr sz="1300" b="0">
+              <a:rPr sz="1300">
                 <a:solidFill>
                   <a:srgbClr val="1C1917"/>
                 </a:solidFill>
                 <a:latin typeface="Calibri"/>
               </a:rPr>
-              <a:t>Preview shows the pages with no marks</a:t>
-            </a:r>
-          </a:p>
-        </p:txBody>
-      </p:sp>
-      <p:cxnSp>
-        <p:nvCxnSpPr>
-          <p:cNvPr id="18" name="Connector 17"/>
-          <p:cNvCxnSpPr/>
-          <p:nvPr/>
-        </p:nvCxnSpPr>
-        <p:spPr>
-          <a:xfrm flipH="1">
-            <a:off x="4374489" y="3154679"/>
-            <a:ext cx="1221639" cy="155449"/>
-          </a:xfrm>
-          <a:prstGeom prst="line">
-            <a:avLst/>
-          </a:prstGeom>
-          <a:ln w="22225">
-            <a:solidFill>
-              <a:srgbClr val="3F4A5A"/>
-            </a:solidFill>
-            <a:tailEnd type="triangle" w="med" len="med"/>
-          </a:ln>
-        </p:spPr>
-        <p:style>
-          <a:lnRef idx="2">
-            <a:schemeClr val="accent1"/>
-          </a:lnRef>
-          <a:fillRef idx="0">
-            <a:schemeClr val="accent1"/>
-          </a:fillRef>
-          <a:effectRef idx="1">
-            <a:schemeClr val="accent1"/>
-          </a:effectRef>
-          <a:fontRef idx="minor">
-            <a:schemeClr val="tx1"/>
-          </a:fontRef>
-        </p:style>
-      </p:cxnSp>
-      <p:cxnSp>
-        <p:nvCxnSpPr>
-          <p:cNvPr id="19" name="Connector 18"/>
-          <p:cNvCxnSpPr/>
-          <p:nvPr/>
-        </p:nvCxnSpPr>
-        <p:spPr>
-          <a:xfrm>
-            <a:off x="6601968" y="3154679"/>
-            <a:ext cx="1216517" cy="155449"/>
-          </a:xfrm>
-          <a:prstGeom prst="line">
-            <a:avLst/>
-          </a:prstGeom>
-          <a:ln w="22225">
-            <a:solidFill>
-              <a:srgbClr val="3F4A5A"/>
-            </a:solidFill>
-            <a:tailEnd type="triangle" w="med" len="med"/>
-          </a:ln>
-        </p:spPr>
-        <p:style>
-          <a:lnRef idx="2">
-            <a:schemeClr val="accent1"/>
-          </a:lnRef>
-          <a:fillRef idx="0">
-            <a:schemeClr val="accent1"/>
-          </a:fillRef>
-          <a:effectRef idx="1">
-            <a:schemeClr val="accent1"/>
-          </a:effectRef>
-          <a:fontRef idx="minor">
-            <a:schemeClr val="tx1"/>
-          </a:fontRef>
-        </p:style>
-      </p:cxnSp>
-      <p:sp>
-        <p:nvSpPr>
-          <p:cNvPr id="20" name="TextBox 19"/>
-          <p:cNvSpPr txBox="1"/>
-          <p:nvPr/>
-        </p:nvSpPr>
-        <p:spPr>
-          <a:xfrm>
-            <a:off x="429768" y="3072384"/>
-            <a:ext cx="457200" cy="219456"/>
-          </a:xfrm>
-          <a:prstGeom prst="rect">
-            <a:avLst/>
-          </a:prstGeom>
-          <a:noFill/>
-        </p:spPr>
-        <p:txBody>
-          <a:bodyPr wrap="none" lIns="18288" tIns="0" bIns="0">
-            <a:spAutoFit/>
-          </a:bodyPr>
-          <a:lstStyle/>
-          <a:p>
-            <a:pPr algn="ctr">
-              <a:spcBef>
-                <a:spcPts val="0"/>
-              </a:spcBef>
-              <a:spcAft>
-                <a:spcPts val="0"/>
-              </a:spcAft>
-            </a:pPr>
-            <a:r>
-              <a:rPr sz="1200" b="1">
-                <a:solidFill>
-                  <a:srgbClr val="145C38"/>
-                </a:solidFill>
-                <a:latin typeface="Calibri"/>
-              </a:rPr>
-              <a:t>Yes</a:t>
-            </a:r>
-          </a:p>
-        </p:txBody>
-      </p:sp>
-      <p:sp>
-        <p:nvSpPr>
-          <p:cNvPr id="21" name="TextBox 20"/>
-          <p:cNvSpPr txBox="1"/>
-          <p:nvPr/>
-        </p:nvSpPr>
-        <p:spPr>
-          <a:xfrm>
-            <a:off x="11338560" y="3072384"/>
-            <a:ext cx="411480" cy="219456"/>
-          </a:xfrm>
-          <a:prstGeom prst="rect">
-            <a:avLst/>
-          </a:prstGeom>
-          <a:noFill/>
-        </p:spPr>
-        <p:txBody>
-          <a:bodyPr wrap="none" lIns="18288" tIns="0" bIns="0">
-            <a:spAutoFit/>
-          </a:bodyPr>
-          <a:lstStyle/>
-          <a:p>
-            <a:pPr algn="ctr">
-              <a:spcBef>
-                <a:spcPts val="0"/>
-              </a:spcBef>
-              <a:spcAft>
-                <a:spcPts val="0"/>
-              </a:spcAft>
-            </a:pPr>
-            <a:r>
-              <a:rPr sz="1200" b="1">
-                <a:solidFill>
-                  <a:srgbClr val="9A3412"/>
-                </a:solidFill>
-                <a:latin typeface="Calibri"/>
-              </a:rPr>
-              <a:t>No</a:t>
-            </a:r>
-          </a:p>
-        </p:txBody>
-      </p:sp>
-      <p:cxnSp>
-        <p:nvCxnSpPr>
-          <p:cNvPr id="22" name="Connector 21"/>
-          <p:cNvCxnSpPr/>
-          <p:nvPr/>
-        </p:nvCxnSpPr>
-        <p:spPr>
-          <a:xfrm>
-            <a:off x="6080759" y="1965959"/>
-            <a:ext cx="18289" cy="128017"/>
-          </a:xfrm>
-          <a:prstGeom prst="line">
-            <a:avLst/>
-          </a:prstGeom>
-          <a:ln w="22225">
-            <a:solidFill>
-              <a:srgbClr val="3F4A5A"/>
-            </a:solidFill>
-            <a:tailEnd type="triangle" w="med" len="med"/>
-          </a:ln>
-        </p:spPr>
-        <p:style>
-          <a:lnRef idx="2">
-            <a:schemeClr val="accent1"/>
-          </a:lnRef>
-          <a:fillRef idx="0">
-            <a:schemeClr val="accent1"/>
-          </a:fillRef>
-          <a:effectRef idx="1">
-            <a:schemeClr val="accent1"/>
-          </a:effectRef>
-          <a:fontRef idx="minor">
-            <a:schemeClr val="tx1"/>
-          </a:fontRef>
-        </p:style>
-      </p:cxnSp>
-      <p:sp>
-        <p:nvSpPr>
-          <p:cNvPr id="23" name="Document 22"/>
+              <a:t>Check plan identity, no Social Security number, zeroes as 0.00, one font size, names as Last, First, and text at the page edge.</a:t>
+            </a:r>
+          </a:p>
+        </p:txBody>
+      </p:sp>
+      <p:sp>
+        <p:nvSpPr>
+          <p:cNvPr id="19" name="Process 18"/>
           <p:cNvSpPr/>
           <p:nvPr/>
         </p:nvSpPr>
         <p:spPr>
           <a:xfrm>
-            <a:off x="2194560" y="4206240"/>
-            <a:ext cx="7772400" cy="621792"/>
-          </a:xfrm>
-          <a:prstGeom prst="flowChartDocument">
+            <a:off x="6263640" y="2606039"/>
+            <a:ext cx="5669280" cy="1389888"/>
+          </a:xfrm>
+          <a:prstGeom prst="flowChartProcess">
             <a:avLst/>
           </a:prstGeom>
           <a:solidFill>
             <a:srgbClr val="E5F6F4"/>
           </a:solidFill>
-          <a:ln w="22225">
+          <a:ln w="15875">
             <a:solidFill>
               <a:srgbClr val="0F6E6B"/>
             </a:solidFill>
           </a:ln>
-          <a:effectLst/>
         </p:spPr>
         <p:style>
           <a:lnRef idx="1">
@@ -8781,143 +7898,64 @@
           </a:fontRef>
         </p:style>
         <p:txBody>
-          <a:bodyPr rtlCol="0" anchor="ctr" wrap="square" lIns="73152" rIns="73152" tIns="36576" bIns="36576"/>
+          <a:bodyPr rtlCol="0" anchor="ctr" wrap="square" lIns="54864" rIns="54864" tIns="54864" bIns="54864"/>
           <a:lstStyle/>
           <a:p>
             <a:pPr algn="ctr">
-              <a:spcBef>
-                <a:spcPts val="0"/>
-              </a:spcBef>
               <a:spcAft>
                 <a:spcPts val="0"/>
               </a:spcAft>
             </a:pPr>
             <a:r>
-              <a:rPr sz="1200" b="1">
+              <a:rPr b="1" sz="1300">
                 <a:solidFill>
                   <a:srgbClr val="0F6E6B"/>
                 </a:solidFill>
                 <a:latin typeface="Calibri"/>
               </a:rPr>
-              <a:t>You</a:t>
+              <a:t>Every report</a:t>
             </a:r>
           </a:p>
           <a:p>
             <a:pPr algn="ctr">
               <a:spcBef>
-                <a:spcPts val="0"/>
+                <a:spcPts val="200"/>
               </a:spcBef>
-              <a:spcAft>
-                <a:spcPts val="0"/>
-              </a:spcAft>
             </a:pPr>
             <a:r>
-              <a:rPr sz="1400" b="0">
+              <a:rPr sz="1300">
                 <a:solidFill>
                   <a:srgbClr val="1C1917"/>
                 </a:solidFill>
                 <a:latin typeface="Calibri"/>
               </a:rPr>
-              <a:t>Download the PDF. The yellow marks are never in that file.</a:t>
-            </a:r>
-          </a:p>
-        </p:txBody>
-      </p:sp>
-      <p:cxnSp>
-        <p:nvCxnSpPr>
-          <p:cNvPr id="24" name="Connector 23"/>
-          <p:cNvCxnSpPr/>
-          <p:nvPr/>
-        </p:nvCxnSpPr>
-        <p:spPr>
-          <a:xfrm>
-            <a:off x="3127248" y="4032504"/>
-            <a:ext cx="0" cy="164592"/>
-          </a:xfrm>
-          <a:prstGeom prst="line">
-            <a:avLst/>
-          </a:prstGeom>
-          <a:ln w="22225">
+              <a:t>Check the plan number and plan name. On the excess notice, also check the plan year end.</a:t>
+            </a:r>
+          </a:p>
+        </p:txBody>
+      </p:sp>
+      <p:sp>
+        <p:nvSpPr>
+          <p:cNvPr id="20" name="Process 19"/>
+          <p:cNvSpPr/>
+          <p:nvPr/>
+        </p:nvSpPr>
+        <p:spPr>
+          <a:xfrm>
+            <a:off x="320040" y="4160520"/>
+            <a:ext cx="5669280" cy="1389888"/>
+          </a:xfrm>
+          <a:prstGeom prst="flowChartProcess">
+            <a:avLst/>
+          </a:prstGeom>
+          <a:solidFill>
+            <a:srgbClr val="E5F6F4"/>
+          </a:solidFill>
+          <a:ln w="15875">
             <a:solidFill>
-              <a:srgbClr val="3F4A5A"/>
-            </a:solidFill>
-            <a:tailEnd type="triangle" w="med" len="med"/>
-          </a:ln>
-        </p:spPr>
-        <p:style>
-          <a:lnRef idx="2">
-            <a:schemeClr val="accent1"/>
-          </a:lnRef>
-          <a:fillRef idx="0">
-            <a:schemeClr val="accent1"/>
-          </a:fillRef>
-          <a:effectRef idx="1">
-            <a:schemeClr val="accent1"/>
-          </a:effectRef>
-          <a:fontRef idx="minor">
-            <a:schemeClr val="tx1"/>
-          </a:fontRef>
-        </p:style>
-      </p:cxnSp>
-      <p:cxnSp>
-        <p:nvCxnSpPr>
-          <p:cNvPr id="25" name="Connector 24"/>
-          <p:cNvCxnSpPr/>
-          <p:nvPr/>
-        </p:nvCxnSpPr>
-        <p:spPr>
-          <a:xfrm>
-            <a:off x="9061704" y="4032504"/>
-            <a:ext cx="0" cy="164592"/>
-          </a:xfrm>
-          <a:prstGeom prst="line">
-            <a:avLst/>
-          </a:prstGeom>
-          <a:ln w="22225">
-            <a:solidFill>
-              <a:srgbClr val="3F4A5A"/>
-            </a:solidFill>
-            <a:tailEnd type="triangle" w="med" len="med"/>
-          </a:ln>
-        </p:spPr>
-        <p:style>
-          <a:lnRef idx="2">
-            <a:schemeClr val="accent1"/>
-          </a:lnRef>
-          <a:fillRef idx="0">
-            <a:schemeClr val="accent1"/>
-          </a:fillRef>
-          <a:effectRef idx="1">
-            <a:schemeClr val="accent1"/>
-          </a:effectRef>
-          <a:fontRef idx="minor">
-            <a:schemeClr val="tx1"/>
-          </a:fontRef>
-        </p:style>
-      </p:cxnSp>
-      <p:sp>
-        <p:nvSpPr>
-          <p:cNvPr id="26" name="Process 25"/>
-          <p:cNvSpPr/>
-          <p:nvPr/>
-        </p:nvSpPr>
-        <p:spPr>
-          <a:xfrm>
-            <a:off x="2194560" y="4983480"/>
-            <a:ext cx="7772400" cy="566928"/>
-          </a:xfrm>
-          <a:prstGeom prst="flowChartProcess">
-            <a:avLst/>
-          </a:prstGeom>
-          <a:solidFill>
-            <a:srgbClr val="F4ECFF"/>
-          </a:solidFill>
-          <a:ln w="22225">
-            <a:solidFill>
-              <a:srgbClr val="6D28D9"/>
+              <a:srgbClr val="0F6E6B"/>
             </a:solidFill>
           </a:ln>
-          <a:effectLst/>
         </p:spPr>
         <p:style>
           <a:lnRef idx="1">
@@ -8934,107 +7972,64 @@
           </a:fontRef>
         </p:style>
         <p:txBody>
-          <a:bodyPr rtlCol="0" anchor="ctr" wrap="square" lIns="73152" rIns="73152" tIns="36576" bIns="36576"/>
+          <a:bodyPr rtlCol="0" anchor="ctr" wrap="square" lIns="54864" rIns="54864" tIns="54864" bIns="54864"/>
           <a:lstStyle/>
           <a:p>
             <a:pPr algn="ctr">
-              <a:spcBef>
-                <a:spcPts val="0"/>
-              </a:spcBef>
               <a:spcAft>
                 <a:spcPts val="0"/>
               </a:spcAft>
             </a:pPr>
             <a:r>
-              <a:rPr sz="1200" b="1">
-                <a:solidFill>
-                  <a:srgbClr val="6D28D9"/>
-                </a:solidFill>
-                <a:latin typeface="Calibri"/>
-              </a:rPr>
-              <a:t>By hand</a:t>
+              <a:rPr b="1" sz="1300">
+                <a:solidFill>
+                  <a:srgbClr val="0F6E6B"/>
+                </a:solidFill>
+                <a:latin typeface="Calibri"/>
+              </a:rPr>
+              <a:t>Cover date</a:t>
             </a:r>
           </a:p>
           <a:p>
             <a:pPr algn="ctr">
               <a:spcBef>
-                <a:spcPts val="0"/>
+                <a:spcPts val="200"/>
               </a:spcBef>
-              <a:spcAft>
-                <a:spcPts val="0"/>
-              </a:spcAft>
             </a:pPr>
             <a:r>
-              <a:rPr sz="1400" b="0">
+              <a:rPr sz="1300">
                 <a:solidFill>
                   <a:srgbClr val="1C1917"/>
                 </a:solidFill>
                 <a:latin typeface="Calibri"/>
               </a:rPr>
-              <a:t>Send the email. The draft is ready. The application does not send it.</a:t>
-            </a:r>
-          </a:p>
-        </p:txBody>
-      </p:sp>
-      <p:cxnSp>
-        <p:nvCxnSpPr>
-          <p:cNvPr id="27" name="Connector 26"/>
-          <p:cNvCxnSpPr/>
-          <p:nvPr/>
-        </p:nvCxnSpPr>
-        <p:spPr>
-          <a:xfrm>
-            <a:off x="6080760" y="4837175"/>
-            <a:ext cx="0" cy="137161"/>
-          </a:xfrm>
-          <a:prstGeom prst="line">
-            <a:avLst/>
-          </a:prstGeom>
-          <a:ln w="22225">
+              <a:t>Flag the cover letter when the date is not today. It changes only if Retype was checked on page 2.</a:t>
+            </a:r>
+          </a:p>
+        </p:txBody>
+      </p:sp>
+      <p:sp>
+        <p:nvSpPr>
+          <p:cNvPr id="21" name="Process 20"/>
+          <p:cNvSpPr/>
+          <p:nvPr/>
+        </p:nvSpPr>
+        <p:spPr>
+          <a:xfrm>
+            <a:off x="6263640" y="4160520"/>
+            <a:ext cx="5669280" cy="1389888"/>
+          </a:xfrm>
+          <a:prstGeom prst="flowChartProcess">
+            <a:avLst/>
+          </a:prstGeom>
+          <a:solidFill>
+            <a:srgbClr val="E5F6F4"/>
+          </a:solidFill>
+          <a:ln w="15875">
             <a:solidFill>
-              <a:srgbClr val="3F4A5A"/>
-            </a:solidFill>
-            <a:tailEnd type="triangle" w="med" len="med"/>
-          </a:ln>
-        </p:spPr>
-        <p:style>
-          <a:lnRef idx="2">
-            <a:schemeClr val="accent1"/>
-          </a:lnRef>
-          <a:fillRef idx="0">
-            <a:schemeClr val="accent1"/>
-          </a:fillRef>
-          <a:effectRef idx="1">
-            <a:schemeClr val="accent1"/>
-          </a:effectRef>
-          <a:fontRef idx="minor">
-            <a:schemeClr val="tx1"/>
-          </a:fontRef>
-        </p:style>
-      </p:cxnSp>
-      <p:sp>
-        <p:nvSpPr>
-          <p:cNvPr id="28" name="Terminator 27"/>
-          <p:cNvSpPr/>
-          <p:nvPr/>
-        </p:nvSpPr>
-        <p:spPr>
-          <a:xfrm>
-            <a:off x="5074920" y="5650992"/>
-            <a:ext cx="2011680" cy="438912"/>
-          </a:xfrm>
-          <a:prstGeom prst="flowChartTerminator">
-            <a:avLst/>
-          </a:prstGeom>
-          <a:solidFill>
-            <a:srgbClr val="1B7A4A"/>
-          </a:solidFill>
-          <a:ln w="22225">
-            <a:solidFill>
-              <a:srgbClr val="145C38"/>
+              <a:srgbClr val="0F6E6B"/>
             </a:solidFill>
           </a:ln>
-          <a:effectLst/>
         </p:spPr>
         <p:style>
           <a:lnRef idx="1">
@@ -9051,88 +8046,115 @@
           </a:fontRef>
         </p:style>
         <p:txBody>
-          <a:bodyPr rtlCol="0" anchor="ctr" wrap="square" lIns="73152" rIns="73152" tIns="36576" bIns="36576"/>
+          <a:bodyPr rtlCol="0" anchor="ctr" wrap="square" lIns="54864" rIns="54864" tIns="54864" bIns="54864"/>
           <a:lstStyle/>
           <a:p>
             <a:pPr algn="ctr">
-              <a:spcBef>
-                <a:spcPts val="0"/>
-              </a:spcBef>
               <a:spcAft>
                 <a:spcPts val="0"/>
               </a:spcAft>
             </a:pPr>
             <a:r>
-              <a:rPr sz="1600" b="1">
-                <a:solidFill>
-                  <a:srgbClr val="FFFFFF"/>
-                </a:solidFill>
-                <a:latin typeface="Calibri"/>
-              </a:rPr>
-              <a:t>End</a:t>
-            </a:r>
-          </a:p>
-        </p:txBody>
-      </p:sp>
-      <p:cxnSp>
-        <p:nvCxnSpPr>
-          <p:cNvPr id="29" name="Connector 28"/>
-          <p:cNvCxnSpPr/>
-          <p:nvPr/>
-        </p:nvCxnSpPr>
-        <p:spPr>
-          <a:xfrm>
-            <a:off x="6080760" y="5559552"/>
-            <a:ext cx="0" cy="82296"/>
-          </a:xfrm>
-          <a:prstGeom prst="line">
-            <a:avLst/>
-          </a:prstGeom>
-          <a:ln w="22225">
-            <a:solidFill>
-              <a:srgbClr val="3F4A5A"/>
-            </a:solidFill>
-            <a:tailEnd type="triangle" w="med" len="med"/>
+              <a:rPr b="1" sz="1300">
+                <a:solidFill>
+                  <a:srgbClr val="0F6E6B"/>
+                </a:solidFill>
+                <a:latin typeface="Calibri"/>
+              </a:rPr>
+              <a:t>Other company names</a:t>
+            </a:r>
+          </a:p>
+          <a:p>
+            <a:pPr algn="ctr">
+              <a:spcBef>
+                <a:spcPts val="200"/>
+              </a:spcBef>
+            </a:pPr>
+            <a:r>
+              <a:rPr sz="1300">
+                <a:solidFill>
+                  <a:srgbClr val="1C1917"/>
+                </a:solidFill>
+                <a:latin typeface="Calibri"/>
+              </a:rPr>
+              <a:t>The Mutual of America stamp is checked. Any other company name on the cover is still a visual check.</a:t>
+            </a:r>
+          </a:p>
+        </p:txBody>
+      </p:sp>
+      <p:sp>
+        <p:nvSpPr>
+          <p:cNvPr id="22" name="TextBox 21"/>
+          <p:cNvSpPr txBox="1"/>
+          <p:nvPr/>
+        </p:nvSpPr>
+        <p:spPr>
+          <a:xfrm>
+            <a:off x="7863840" y="6355080"/>
+            <a:ext cx="3931920" cy="292608"/>
+          </a:xfrm>
+          <a:prstGeom prst="rect">
+            <a:avLst/>
+          </a:prstGeom>
+          <a:noFill/>
+        </p:spPr>
+        <p:txBody>
+          <a:bodyPr wrap="square">
+            <a:spAutoFit/>
+          </a:bodyPr>
+          <a:lstStyle/>
+          <a:p>
+            <a:pPr algn="l"/>
+            <a:r>
+              <a:rPr sz="1400" b="1">
+                <a:solidFill>
+                  <a:srgbClr val="1E3A5F"/>
+                </a:solidFill>
+                <a:latin typeface="Calibri"/>
+              </a:rPr>
+              <a:t>Continued on page 5  →</a:t>
+            </a:r>
+          </a:p>
+        </p:txBody>
+      </p:sp>
+    </p:spTree>
+  </p:cSld>
+  <p:clrMapOvr>
+    <a:masterClrMapping/>
+  </p:clrMapOvr>
+</p:sld>
+</file>
+
+<file path=ppt/slides/slide5.xml><?xml version="1.0" encoding="utf-8"?>
+<p:sld xmlns:a="http://schemas.openxmlformats.org/drawingml/2006/main" xmlns:p="http://schemas.openxmlformats.org/presentationml/2006/main" xmlns:r="http://schemas.openxmlformats.org/officeDocument/2006/relationships">
+  <p:cSld>
+    <p:spTree>
+      <p:nvGrpSpPr>
+        <p:cNvPr id="1" name=""/>
+        <p:cNvGrpSpPr/>
+        <p:nvPr/>
+      </p:nvGrpSpPr>
+      <p:grpSpPr/>
+      <p:sp>
+        <p:nvSpPr>
+          <p:cNvPr id="2" name="Rectangle 1"/>
+          <p:cNvSpPr/>
+          <p:nvPr/>
+        </p:nvSpPr>
+        <p:spPr>
+          <a:xfrm>
+            <a:off x="0" y="0"/>
+            <a:ext cx="12191695" cy="6858000"/>
+          </a:xfrm>
+          <a:prstGeom prst="rect">
+            <a:avLst/>
+          </a:prstGeom>
+          <a:solidFill>
+            <a:srgbClr val="F7F8F6"/>
+          </a:solidFill>
+          <a:ln>
+            <a:noFill/>
           </a:ln>
-        </p:spPr>
-        <p:style>
-          <a:lnRef idx="2">
-            <a:schemeClr val="accent1"/>
-          </a:lnRef>
-          <a:fillRef idx="0">
-            <a:schemeClr val="accent1"/>
-          </a:fillRef>
-          <a:effectRef idx="1">
-            <a:schemeClr val="accent1"/>
-          </a:effectRef>
-          <a:fontRef idx="minor">
-            <a:schemeClr val="tx1"/>
-          </a:fontRef>
-        </p:style>
-      </p:cxnSp>
-      <p:sp>
-        <p:nvSpPr>
-          <p:cNvPr id="30" name="Rounded Rectangle 29"/>
-          <p:cNvSpPr/>
-          <p:nvPr/>
-        </p:nvSpPr>
-        <p:spPr>
-          <a:xfrm>
-            <a:off x="320040" y="6199632"/>
-            <a:ext cx="11521440" cy="502920"/>
-          </a:xfrm>
-          <a:prstGeom prst="roundRect">
-            <a:avLst/>
-          </a:prstGeom>
-          <a:solidFill>
-            <a:srgbClr val="FFFBF0"/>
-          </a:solidFill>
-          <a:ln w="22225">
-            <a:solidFill>
-              <a:srgbClr val="A16207"/>
-            </a:solidFill>
-          </a:ln>
-          <a:effectLst/>
         </p:spPr>
         <p:style>
           <a:lnRef idx="1">
@@ -9149,25 +8171,1402 @@
           </a:fontRef>
         </p:style>
         <p:txBody>
-          <a:bodyPr rtlCol="0" anchor="ctr" wrap="square" lIns="73152" rIns="73152" tIns="36576" bIns="36576"/>
+          <a:bodyPr rtlCol="0" anchor="ctr"/>
+          <a:lstStyle/>
+          <a:p>
+            <a:pPr algn="ctr"/>
+          </a:p>
+        </p:txBody>
+      </p:sp>
+      <p:sp>
+        <p:nvSpPr>
+          <p:cNvPr id="3" name="Rectangle 2"/>
+          <p:cNvSpPr/>
+          <p:nvPr/>
+        </p:nvSpPr>
+        <p:spPr>
+          <a:xfrm>
+            <a:off x="0" y="0"/>
+            <a:ext cx="12191695" cy="73152"/>
+          </a:xfrm>
+          <a:prstGeom prst="rect">
+            <a:avLst/>
+          </a:prstGeom>
+          <a:solidFill>
+            <a:srgbClr val="0F6E6B"/>
+          </a:solidFill>
+          <a:ln>
+            <a:noFill/>
+          </a:ln>
+        </p:spPr>
+        <p:style>
+          <a:lnRef idx="1">
+            <a:schemeClr val="accent1"/>
+          </a:lnRef>
+          <a:fillRef idx="3">
+            <a:schemeClr val="accent1"/>
+          </a:fillRef>
+          <a:effectRef idx="2">
+            <a:schemeClr val="accent1"/>
+          </a:effectRef>
+          <a:fontRef idx="minor">
+            <a:schemeClr val="lt1"/>
+          </a:fontRef>
+        </p:style>
+        <p:txBody>
+          <a:bodyPr rtlCol="0" anchor="ctr"/>
+          <a:lstStyle/>
+          <a:p>
+            <a:pPr algn="ctr"/>
+          </a:p>
+        </p:txBody>
+      </p:sp>
+      <p:sp>
+        <p:nvSpPr>
+          <p:cNvPr id="4" name="TextBox 3"/>
+          <p:cNvSpPr txBox="1"/>
+          <p:nvPr/>
+        </p:nvSpPr>
+        <p:spPr>
+          <a:xfrm>
+            <a:off x="320040" y="146304"/>
+            <a:ext cx="7772400" cy="329184"/>
+          </a:xfrm>
+          <a:prstGeom prst="rect">
+            <a:avLst/>
+          </a:prstGeom>
+          <a:noFill/>
+        </p:spPr>
+        <p:txBody>
+          <a:bodyPr wrap="square">
+            <a:spAutoFit/>
+          </a:bodyPr>
+          <a:lstStyle/>
+          <a:p>
+            <a:pPr algn="l"/>
+            <a:r>
+              <a:rPr sz="2200" b="1">
+                <a:solidFill>
+                  <a:srgbClr val="1E3A5F"/>
+                </a:solidFill>
+                <a:latin typeface="Calibri"/>
+              </a:rPr>
+              <a:t>Save, preview, and finish</a:t>
+            </a:r>
+          </a:p>
+        </p:txBody>
+      </p:sp>
+      <p:sp>
+        <p:nvSpPr>
+          <p:cNvPr id="5" name="TextBox 4"/>
+          <p:cNvSpPr txBox="1"/>
+          <p:nvPr/>
+        </p:nvSpPr>
+        <p:spPr>
+          <a:xfrm>
+            <a:off x="7680960" y="201168"/>
+            <a:ext cx="4206240" cy="274320"/>
+          </a:xfrm>
+          <a:prstGeom prst="rect">
+            <a:avLst/>
+          </a:prstGeom>
+          <a:noFill/>
+        </p:spPr>
+        <p:txBody>
+          <a:bodyPr wrap="square">
+            <a:spAutoFit/>
+          </a:bodyPr>
+          <a:lstStyle/>
+          <a:p>
+            <a:pPr algn="l"/>
+            <a:r>
+              <a:rPr sz="1200" b="0">
+                <a:solidFill>
+                  <a:srgbClr val="3F4A5A"/>
+                </a:solidFill>
+                <a:latin typeface="Calibri"/>
+              </a:rPr>
+              <a:t>Page 5 of 5   ·   Yellow marks stay in the preview only</a:t>
+            </a:r>
+          </a:p>
+        </p:txBody>
+      </p:sp>
+      <p:sp>
+        <p:nvSpPr>
+          <p:cNvPr id="6" name="Terminator 5"/>
+          <p:cNvSpPr/>
+          <p:nvPr/>
+        </p:nvSpPr>
+        <p:spPr>
+          <a:xfrm>
+            <a:off x="320040" y="621792"/>
+            <a:ext cx="292608" cy="237744"/>
+          </a:xfrm>
+          <a:prstGeom prst="flowChartTerminator">
+            <a:avLst/>
+          </a:prstGeom>
+          <a:solidFill>
+            <a:srgbClr val="FFFFFF"/>
+          </a:solidFill>
+          <a:ln>
+            <a:solidFill>
+              <a:srgbClr val="1B7A4A"/>
+            </a:solidFill>
+          </a:ln>
+        </p:spPr>
+        <p:style>
+          <a:lnRef idx="1">
+            <a:schemeClr val="accent1"/>
+          </a:lnRef>
+          <a:fillRef idx="3">
+            <a:schemeClr val="accent1"/>
+          </a:fillRef>
+          <a:effectRef idx="2">
+            <a:schemeClr val="accent1"/>
+          </a:effectRef>
+          <a:fontRef idx="minor">
+            <a:schemeClr val="lt1"/>
+          </a:fontRef>
+        </p:style>
+        <p:txBody>
+          <a:bodyPr rtlCol="0" anchor="ctr"/>
+          <a:lstStyle/>
+          <a:p>
+            <a:pPr algn="ctr"/>
+          </a:p>
+        </p:txBody>
+      </p:sp>
+      <p:sp>
+        <p:nvSpPr>
+          <p:cNvPr id="7" name="TextBox 6"/>
+          <p:cNvSpPr txBox="1"/>
+          <p:nvPr/>
+        </p:nvSpPr>
+        <p:spPr>
+          <a:xfrm>
+            <a:off x="649224" y="603504"/>
+            <a:ext cx="1965960" cy="274320"/>
+          </a:xfrm>
+          <a:prstGeom prst="rect">
+            <a:avLst/>
+          </a:prstGeom>
+          <a:noFill/>
+        </p:spPr>
+        <p:txBody>
+          <a:bodyPr wrap="square">
+            <a:spAutoFit/>
+          </a:bodyPr>
+          <a:lstStyle/>
+          <a:p>
+            <a:pPr algn="l"/>
+            <a:r>
+              <a:rPr sz="1100" b="0">
+                <a:solidFill>
+                  <a:srgbClr val="3F4A5A"/>
+                </a:solidFill>
+                <a:latin typeface="Calibri"/>
+              </a:rPr>
+              <a:t>Oval   Start or end</a:t>
+            </a:r>
+          </a:p>
+        </p:txBody>
+      </p:sp>
+      <p:sp>
+        <p:nvSpPr>
+          <p:cNvPr id="8" name="Process 7"/>
+          <p:cNvSpPr/>
+          <p:nvPr/>
+        </p:nvSpPr>
+        <p:spPr>
+          <a:xfrm>
+            <a:off x="2651760" y="621792"/>
+            <a:ext cx="292608" cy="237744"/>
+          </a:xfrm>
+          <a:prstGeom prst="flowChartProcess">
+            <a:avLst/>
+          </a:prstGeom>
+          <a:solidFill>
+            <a:srgbClr val="FFFFFF"/>
+          </a:solidFill>
+          <a:ln>
+            <a:solidFill>
+              <a:srgbClr val="1D4E89"/>
+            </a:solidFill>
+          </a:ln>
+        </p:spPr>
+        <p:style>
+          <a:lnRef idx="1">
+            <a:schemeClr val="accent1"/>
+          </a:lnRef>
+          <a:fillRef idx="3">
+            <a:schemeClr val="accent1"/>
+          </a:fillRef>
+          <a:effectRef idx="2">
+            <a:schemeClr val="accent1"/>
+          </a:effectRef>
+          <a:fontRef idx="minor">
+            <a:schemeClr val="lt1"/>
+          </a:fontRef>
+        </p:style>
+        <p:txBody>
+          <a:bodyPr rtlCol="0" anchor="ctr"/>
+          <a:lstStyle/>
+          <a:p>
+            <a:pPr algn="ctr"/>
+          </a:p>
+        </p:txBody>
+      </p:sp>
+      <p:sp>
+        <p:nvSpPr>
+          <p:cNvPr id="9" name="TextBox 8"/>
+          <p:cNvSpPr txBox="1"/>
+          <p:nvPr/>
+        </p:nvSpPr>
+        <p:spPr>
+          <a:xfrm>
+            <a:off x="2980944" y="603504"/>
+            <a:ext cx="1965960" cy="274320"/>
+          </a:xfrm>
+          <a:prstGeom prst="rect">
+            <a:avLst/>
+          </a:prstGeom>
+          <a:noFill/>
+        </p:spPr>
+        <p:txBody>
+          <a:bodyPr wrap="square">
+            <a:spAutoFit/>
+          </a:bodyPr>
+          <a:lstStyle/>
+          <a:p>
+            <a:pPr algn="l"/>
+            <a:r>
+              <a:rPr sz="1100" b="0">
+                <a:solidFill>
+                  <a:srgbClr val="3F4A5A"/>
+                </a:solidFill>
+                <a:latin typeface="Calibri"/>
+              </a:rPr>
+              <a:t>Rectangle   A step</a:t>
+            </a:r>
+          </a:p>
+        </p:txBody>
+      </p:sp>
+      <p:sp>
+        <p:nvSpPr>
+          <p:cNvPr id="10" name="Decision 9"/>
+          <p:cNvSpPr/>
+          <p:nvPr/>
+        </p:nvSpPr>
+        <p:spPr>
+          <a:xfrm>
+            <a:off x="4983479" y="621792"/>
+            <a:ext cx="292608" cy="237744"/>
+          </a:xfrm>
+          <a:prstGeom prst="flowChartDecision">
+            <a:avLst/>
+          </a:prstGeom>
+          <a:solidFill>
+            <a:srgbClr val="FFFFFF"/>
+          </a:solidFill>
+          <a:ln>
+            <a:solidFill>
+              <a:srgbClr val="B45309"/>
+            </a:solidFill>
+          </a:ln>
+        </p:spPr>
+        <p:style>
+          <a:lnRef idx="1">
+            <a:schemeClr val="accent1"/>
+          </a:lnRef>
+          <a:fillRef idx="3">
+            <a:schemeClr val="accent1"/>
+          </a:fillRef>
+          <a:effectRef idx="2">
+            <a:schemeClr val="accent1"/>
+          </a:effectRef>
+          <a:fontRef idx="minor">
+            <a:schemeClr val="lt1"/>
+          </a:fontRef>
+        </p:style>
+        <p:txBody>
+          <a:bodyPr rtlCol="0" anchor="ctr"/>
+          <a:lstStyle/>
+          <a:p>
+            <a:pPr algn="ctr"/>
+          </a:p>
+        </p:txBody>
+      </p:sp>
+      <p:sp>
+        <p:nvSpPr>
+          <p:cNvPr id="11" name="TextBox 10"/>
+          <p:cNvSpPr txBox="1"/>
+          <p:nvPr/>
+        </p:nvSpPr>
+        <p:spPr>
+          <a:xfrm>
+            <a:off x="5312664" y="603504"/>
+            <a:ext cx="1965960" cy="274320"/>
+          </a:xfrm>
+          <a:prstGeom prst="rect">
+            <a:avLst/>
+          </a:prstGeom>
+          <a:noFill/>
+        </p:spPr>
+        <p:txBody>
+          <a:bodyPr wrap="square">
+            <a:spAutoFit/>
+          </a:bodyPr>
+          <a:lstStyle/>
+          <a:p>
+            <a:pPr algn="l"/>
+            <a:r>
+              <a:rPr sz="1100" b="0">
+                <a:solidFill>
+                  <a:srgbClr val="3F4A5A"/>
+                </a:solidFill>
+                <a:latin typeface="Calibri"/>
+              </a:rPr>
+              <a:t>Diamond   Yes or no</a:t>
+            </a:r>
+          </a:p>
+        </p:txBody>
+      </p:sp>
+      <p:sp>
+        <p:nvSpPr>
+          <p:cNvPr id="12" name="Data 11"/>
+          <p:cNvSpPr/>
+          <p:nvPr/>
+        </p:nvSpPr>
+        <p:spPr>
+          <a:xfrm>
+            <a:off x="7315199" y="621792"/>
+            <a:ext cx="292608" cy="237744"/>
+          </a:xfrm>
+          <a:prstGeom prst="flowChartInputOutput">
+            <a:avLst/>
+          </a:prstGeom>
+          <a:solidFill>
+            <a:srgbClr val="FFFFFF"/>
+          </a:solidFill>
+          <a:ln>
+            <a:solidFill>
+              <a:srgbClr val="4338CA"/>
+            </a:solidFill>
+          </a:ln>
+        </p:spPr>
+        <p:style>
+          <a:lnRef idx="1">
+            <a:schemeClr val="accent1"/>
+          </a:lnRef>
+          <a:fillRef idx="3">
+            <a:schemeClr val="accent1"/>
+          </a:fillRef>
+          <a:effectRef idx="2">
+            <a:schemeClr val="accent1"/>
+          </a:effectRef>
+          <a:fontRef idx="minor">
+            <a:schemeClr val="lt1"/>
+          </a:fontRef>
+        </p:style>
+        <p:txBody>
+          <a:bodyPr rtlCol="0" anchor="ctr"/>
+          <a:lstStyle/>
+          <a:p>
+            <a:pPr algn="ctr"/>
+          </a:p>
+        </p:txBody>
+      </p:sp>
+      <p:sp>
+        <p:nvSpPr>
+          <p:cNvPr id="13" name="TextBox 12"/>
+          <p:cNvSpPr txBox="1"/>
+          <p:nvPr/>
+        </p:nvSpPr>
+        <p:spPr>
+          <a:xfrm>
+            <a:off x="7644383" y="603504"/>
+            <a:ext cx="1965960" cy="274320"/>
+          </a:xfrm>
+          <a:prstGeom prst="rect">
+            <a:avLst/>
+          </a:prstGeom>
+          <a:noFill/>
+        </p:spPr>
+        <p:txBody>
+          <a:bodyPr wrap="square">
+            <a:spAutoFit/>
+          </a:bodyPr>
+          <a:lstStyle/>
+          <a:p>
+            <a:pPr algn="l"/>
+            <a:r>
+              <a:rPr sz="1100" b="0">
+                <a:solidFill>
+                  <a:srgbClr val="3F4A5A"/>
+                </a:solidFill>
+                <a:latin typeface="Calibri"/>
+              </a:rPr>
+              <a:t>Slanted   Files you add</a:t>
+            </a:r>
+          </a:p>
+        </p:txBody>
+      </p:sp>
+      <p:sp>
+        <p:nvSpPr>
+          <p:cNvPr id="14" name="Document 13"/>
+          <p:cNvSpPr/>
+          <p:nvPr/>
+        </p:nvSpPr>
+        <p:spPr>
+          <a:xfrm>
+            <a:off x="9646919" y="621792"/>
+            <a:ext cx="292608" cy="237744"/>
+          </a:xfrm>
+          <a:prstGeom prst="flowChartDocument">
+            <a:avLst/>
+          </a:prstGeom>
+          <a:solidFill>
+            <a:srgbClr val="FFFFFF"/>
+          </a:solidFill>
+          <a:ln>
+            <a:solidFill>
+              <a:srgbClr val="0F6E6B"/>
+            </a:solidFill>
+          </a:ln>
+        </p:spPr>
+        <p:style>
+          <a:lnRef idx="1">
+            <a:schemeClr val="accent1"/>
+          </a:lnRef>
+          <a:fillRef idx="3">
+            <a:schemeClr val="accent1"/>
+          </a:fillRef>
+          <a:effectRef idx="2">
+            <a:schemeClr val="accent1"/>
+          </a:effectRef>
+          <a:fontRef idx="minor">
+            <a:schemeClr val="lt1"/>
+          </a:fontRef>
+        </p:style>
+        <p:txBody>
+          <a:bodyPr rtlCol="0" anchor="ctr"/>
+          <a:lstStyle/>
+          <a:p>
+            <a:pPr algn="ctr"/>
+          </a:p>
+        </p:txBody>
+      </p:sp>
+      <p:sp>
+        <p:nvSpPr>
+          <p:cNvPr id="15" name="TextBox 14"/>
+          <p:cNvSpPr txBox="1"/>
+          <p:nvPr/>
+        </p:nvSpPr>
+        <p:spPr>
+          <a:xfrm>
+            <a:off x="9976103" y="603504"/>
+            <a:ext cx="1965960" cy="274320"/>
+          </a:xfrm>
+          <a:prstGeom prst="rect">
+            <a:avLst/>
+          </a:prstGeom>
+          <a:noFill/>
+        </p:spPr>
+        <p:txBody>
+          <a:bodyPr wrap="square">
+            <a:spAutoFit/>
+          </a:bodyPr>
+          <a:lstStyle/>
+          <a:p>
+            <a:pPr algn="l"/>
+            <a:r>
+              <a:rPr sz="1100" b="0">
+                <a:solidFill>
+                  <a:srgbClr val="3F4A5A"/>
+                </a:solidFill>
+                <a:latin typeface="Calibri"/>
+              </a:rPr>
+              <a:t>Document   File produced</a:t>
+            </a:r>
+          </a:p>
+        </p:txBody>
+      </p:sp>
+      <p:sp>
+        <p:nvSpPr>
+          <p:cNvPr id="16" name="Document 15"/>
+          <p:cNvSpPr/>
+          <p:nvPr/>
+        </p:nvSpPr>
+        <p:spPr>
+          <a:xfrm>
+            <a:off x="320040" y="1024128"/>
+            <a:ext cx="5669280" cy="1051560"/>
+          </a:xfrm>
+          <a:prstGeom prst="flowChartDocument">
+            <a:avLst/>
+          </a:prstGeom>
+          <a:solidFill>
+            <a:srgbClr val="E5F6F4"/>
+          </a:solidFill>
+          <a:ln w="15875">
+            <a:solidFill>
+              <a:srgbClr val="0F6E6B"/>
+            </a:solidFill>
+          </a:ln>
+        </p:spPr>
+        <p:style>
+          <a:lnRef idx="1">
+            <a:schemeClr val="accent1"/>
+          </a:lnRef>
+          <a:fillRef idx="3">
+            <a:schemeClr val="accent1"/>
+          </a:fillRef>
+          <a:effectRef idx="2">
+            <a:schemeClr val="accent1"/>
+          </a:effectRef>
+          <a:fontRef idx="minor">
+            <a:schemeClr val="lt1"/>
+          </a:fontRef>
+        </p:style>
+        <p:txBody>
+          <a:bodyPr rtlCol="0" anchor="ctr" wrap="square" lIns="54864" rIns="54864" tIns="54864" bIns="54864"/>
           <a:lstStyle/>
           <a:p>
             <a:pPr algn="ctr">
-              <a:spcBef>
-                <a:spcPts val="0"/>
-              </a:spcBef>
               <a:spcAft>
                 <a:spcPts val="0"/>
               </a:spcAft>
             </a:pPr>
             <a:r>
-              <a:rPr sz="1200" b="0">
+              <a:rPr b="1" sz="1300">
+                <a:solidFill>
+                  <a:srgbClr val="0F6E6B"/>
+                </a:solidFill>
+                <a:latin typeface="Calibri"/>
+              </a:rPr>
+              <a:t>Application</a:t>
+            </a:r>
+          </a:p>
+          <a:p>
+            <a:pPr algn="ctr">
+              <a:spcBef>
+                <a:spcPts val="200"/>
+              </a:spcBef>
+            </a:pPr>
+            <a:r>
+              <a:rPr sz="1300">
                 <a:solidFill>
                   <a:srgbClr val="1C1917"/>
                 </a:solidFill>
                 <a:latin typeface="Calibri"/>
               </a:rPr>
-              <a:t>Still by hand: Testing Log, converting a non-PDF, other company names on the cover, and pages inside a 410(b) report.</a:t>
+              <a:t>Save PlanNumber_BeginningYear-Valuation.pdf and an Outlook draft.</a:t>
+            </a:r>
+          </a:p>
+        </p:txBody>
+      </p:sp>
+      <p:sp>
+        <p:nvSpPr>
+          <p:cNvPr id="17" name="Document 16"/>
+          <p:cNvSpPr/>
+          <p:nvPr/>
+        </p:nvSpPr>
+        <p:spPr>
+          <a:xfrm>
+            <a:off x="6217920" y="1024128"/>
+            <a:ext cx="5623560" cy="1051560"/>
+          </a:xfrm>
+          <a:prstGeom prst="flowChartDocument">
+            <a:avLst/>
+          </a:prstGeom>
+          <a:solidFill>
+            <a:srgbClr val="E5F6F4"/>
+          </a:solidFill>
+          <a:ln w="15875">
+            <a:solidFill>
+              <a:srgbClr val="0F6E6B"/>
+            </a:solidFill>
+          </a:ln>
+        </p:spPr>
+        <p:style>
+          <a:lnRef idx="1">
+            <a:schemeClr val="accent1"/>
+          </a:lnRef>
+          <a:fillRef idx="3">
+            <a:schemeClr val="accent1"/>
+          </a:fillRef>
+          <a:effectRef idx="2">
+            <a:schemeClr val="accent1"/>
+          </a:effectRef>
+          <a:fontRef idx="minor">
+            <a:schemeClr val="lt1"/>
+          </a:fontRef>
+        </p:style>
+        <p:txBody>
+          <a:bodyPr rtlCol="0" anchor="ctr" wrap="square" lIns="54864" rIns="54864" tIns="54864" bIns="54864"/>
+          <a:lstStyle/>
+          <a:p>
+            <a:pPr algn="ctr">
+              <a:spcAft>
+                <a:spcPts val="0"/>
+              </a:spcAft>
+            </a:pPr>
+            <a:r>
+              <a:rPr b="1" sz="1300">
+                <a:solidFill>
+                  <a:srgbClr val="0F6E6B"/>
+                </a:solidFill>
+                <a:latin typeface="Calibri"/>
+              </a:rPr>
+              <a:t>Application</a:t>
+            </a:r>
+          </a:p>
+          <a:p>
+            <a:pPr algn="ctr">
+              <a:spcBef>
+                <a:spcPts val="200"/>
+              </a:spcBef>
+            </a:pPr>
+            <a:r>
+              <a:rPr sz="1200">
+                <a:solidFill>
+                  <a:srgbClr val="1C1917"/>
+                </a:solidFill>
+                <a:latin typeface="Calibri"/>
+              </a:rPr>
+              <a:t>Add a log row: plan, HCE, allocation, P / F / N/A, and top heavy. Comp limit is N/A. Tester columns stay blank.</a:t>
+            </a:r>
+          </a:p>
+        </p:txBody>
+      </p:sp>
+      <p:sp>
+        <p:nvSpPr>
+          <p:cNvPr id="18" name="Decision 17"/>
+          <p:cNvSpPr/>
+          <p:nvPr/>
+        </p:nvSpPr>
+        <p:spPr>
+          <a:xfrm>
+            <a:off x="4709160" y="2286000"/>
+            <a:ext cx="2743200" cy="960120"/>
+          </a:xfrm>
+          <a:prstGeom prst="flowChartDecision">
+            <a:avLst/>
+          </a:prstGeom>
+          <a:solidFill>
+            <a:srgbClr val="FFF4D4"/>
+          </a:solidFill>
+          <a:ln w="15875">
+            <a:solidFill>
+              <a:srgbClr val="B45309"/>
+            </a:solidFill>
+          </a:ln>
+        </p:spPr>
+        <p:style>
+          <a:lnRef idx="1">
+            <a:schemeClr val="accent1"/>
+          </a:lnRef>
+          <a:fillRef idx="3">
+            <a:schemeClr val="accent1"/>
+          </a:fillRef>
+          <a:effectRef idx="2">
+            <a:schemeClr val="accent1"/>
+          </a:effectRef>
+          <a:fontRef idx="minor">
+            <a:schemeClr val="lt1"/>
+          </a:fontRef>
+        </p:style>
+        <p:txBody>
+          <a:bodyPr rtlCol="0" anchor="ctr" wrap="square" lIns="54864" rIns="54864" tIns="54864" bIns="54864"/>
+          <a:lstStyle/>
+          <a:p>
+            <a:pPr algn="ctr">
+              <a:spcAft>
+                <a:spcPts val="0"/>
+              </a:spcAft>
+            </a:pPr>
+            <a:r>
+              <a:rPr b="1" sz="1300">
+                <a:solidFill>
+                  <a:srgbClr val="B45309"/>
+                </a:solidFill>
+                <a:latin typeface="Calibri"/>
+              </a:rPr>
+              <a:t>Highlights?</a:t>
+            </a:r>
+          </a:p>
+        </p:txBody>
+      </p:sp>
+      <p:cxnSp>
+        <p:nvCxnSpPr>
+          <p:cNvPr id="19" name="Connector 18"/>
+          <p:cNvCxnSpPr/>
+          <p:nvPr/>
+        </p:nvCxnSpPr>
+        <p:spPr>
+          <a:xfrm>
+            <a:off x="3154680" y="2075688"/>
+            <a:ext cx="2148840" cy="210312"/>
+          </a:xfrm>
+          <a:prstGeom prst="line">
+            <a:avLst/>
+          </a:prstGeom>
+          <a:ln w="22225">
+            <a:solidFill>
+              <a:srgbClr val="0F6E6B"/>
+            </a:solidFill>
+            <a:tailEnd type="triangle" w="med" len="med"/>
+          </a:ln>
+        </p:spPr>
+      </p:cxnSp>
+      <p:cxnSp>
+        <p:nvCxnSpPr>
+          <p:cNvPr id="20" name="Connector 19"/>
+          <p:cNvCxnSpPr/>
+          <p:nvPr/>
+        </p:nvCxnSpPr>
+        <p:spPr>
+          <a:xfrm flipH="1">
+            <a:off x="6858000" y="2075688"/>
+            <a:ext cx="2148840" cy="210312"/>
+          </a:xfrm>
+          <a:prstGeom prst="line">
+            <a:avLst/>
+          </a:prstGeom>
+          <a:ln w="22225">
+            <a:solidFill>
+              <a:srgbClr val="0F6E6B"/>
+            </a:solidFill>
+            <a:tailEnd type="triangle" w="med" len="med"/>
+          </a:ln>
+        </p:spPr>
+      </p:cxnSp>
+      <p:sp>
+        <p:nvSpPr>
+          <p:cNvPr id="21" name="Process 20"/>
+          <p:cNvSpPr/>
+          <p:nvPr/>
+        </p:nvSpPr>
+        <p:spPr>
+          <a:xfrm>
+            <a:off x="320040" y="3474720"/>
+            <a:ext cx="5669280" cy="777240"/>
+          </a:xfrm>
+          <a:prstGeom prst="flowChartProcess">
+            <a:avLst/>
+          </a:prstGeom>
+          <a:solidFill>
+            <a:srgbClr val="E7F0FB"/>
+          </a:solidFill>
+          <a:ln w="15875">
+            <a:solidFill>
+              <a:srgbClr val="1D4E89"/>
+            </a:solidFill>
+          </a:ln>
+        </p:spPr>
+        <p:style>
+          <a:lnRef idx="1">
+            <a:schemeClr val="accent1"/>
+          </a:lnRef>
+          <a:fillRef idx="3">
+            <a:schemeClr val="accent1"/>
+          </a:fillRef>
+          <a:effectRef idx="2">
+            <a:schemeClr val="accent1"/>
+          </a:effectRef>
+          <a:fontRef idx="minor">
+            <a:schemeClr val="lt1"/>
+          </a:fontRef>
+        </p:style>
+        <p:txBody>
+          <a:bodyPr rtlCol="0" anchor="ctr" wrap="square" lIns="54864" rIns="54864" tIns="54864" bIns="54864"/>
+          <a:lstStyle/>
+          <a:p>
+            <a:pPr algn="ctr">
+              <a:spcAft>
+                <a:spcPts val="0"/>
+              </a:spcAft>
+            </a:pPr>
+            <a:r>
+              <a:rPr b="1" sz="1300">
+                <a:solidFill>
+                  <a:srgbClr val="1D4E89"/>
+                </a:solidFill>
+                <a:latin typeface="Calibri"/>
+              </a:rPr>
+              <a:t>You</a:t>
+            </a:r>
+          </a:p>
+          <a:p>
+            <a:pPr algn="ctr">
+              <a:spcBef>
+                <a:spcPts val="200"/>
+              </a:spcBef>
+            </a:pPr>
+            <a:r>
+              <a:rPr sz="1300">
+                <a:solidFill>
+                  <a:srgbClr val="1C1917"/>
+                </a:solidFill>
+                <a:latin typeface="Calibri"/>
+              </a:rPr>
+              <a:t>Preview shows yellow marks on the words that were rewritten</a:t>
+            </a:r>
+          </a:p>
+        </p:txBody>
+      </p:sp>
+      <p:sp>
+        <p:nvSpPr>
+          <p:cNvPr id="22" name="Process 21"/>
+          <p:cNvSpPr/>
+          <p:nvPr/>
+        </p:nvSpPr>
+        <p:spPr>
+          <a:xfrm>
+            <a:off x="6217920" y="3474720"/>
+            <a:ext cx="5623560" cy="777240"/>
+          </a:xfrm>
+          <a:prstGeom prst="flowChartProcess">
+            <a:avLst/>
+          </a:prstGeom>
+          <a:solidFill>
+            <a:srgbClr val="E7F0FB"/>
+          </a:solidFill>
+          <a:ln w="15875">
+            <a:solidFill>
+              <a:srgbClr val="1D4E89"/>
+            </a:solidFill>
+          </a:ln>
+        </p:spPr>
+        <p:style>
+          <a:lnRef idx="1">
+            <a:schemeClr val="accent1"/>
+          </a:lnRef>
+          <a:fillRef idx="3">
+            <a:schemeClr val="accent1"/>
+          </a:fillRef>
+          <a:effectRef idx="2">
+            <a:schemeClr val="accent1"/>
+          </a:effectRef>
+          <a:fontRef idx="minor">
+            <a:schemeClr val="lt1"/>
+          </a:fontRef>
+        </p:style>
+        <p:txBody>
+          <a:bodyPr rtlCol="0" anchor="ctr" wrap="square" lIns="54864" rIns="54864" tIns="54864" bIns="54864"/>
+          <a:lstStyle/>
+          <a:p>
+            <a:pPr algn="ctr">
+              <a:spcAft>
+                <a:spcPts val="0"/>
+              </a:spcAft>
+            </a:pPr>
+            <a:r>
+              <a:rPr b="1" sz="1300">
+                <a:solidFill>
+                  <a:srgbClr val="1D4E89"/>
+                </a:solidFill>
+                <a:latin typeface="Calibri"/>
+              </a:rPr>
+              <a:t>You</a:t>
+            </a:r>
+          </a:p>
+          <a:p>
+            <a:pPr algn="ctr">
+              <a:spcBef>
+                <a:spcPts val="200"/>
+              </a:spcBef>
+            </a:pPr>
+            <a:r>
+              <a:rPr sz="1300">
+                <a:solidFill>
+                  <a:srgbClr val="1C1917"/>
+                </a:solidFill>
+                <a:latin typeface="Calibri"/>
+              </a:rPr>
+              <a:t>Preview shows the pages with no marks</a:t>
+            </a:r>
+          </a:p>
+        </p:txBody>
+      </p:sp>
+      <p:sp>
+        <p:nvSpPr>
+          <p:cNvPr id="23" name="TextBox 22"/>
+          <p:cNvSpPr txBox="1"/>
+          <p:nvPr/>
+        </p:nvSpPr>
+        <p:spPr>
+          <a:xfrm>
+            <a:off x="1371600" y="3200400"/>
+            <a:ext cx="548640" cy="237744"/>
+          </a:xfrm>
+          <a:prstGeom prst="rect">
+            <a:avLst/>
+          </a:prstGeom>
+          <a:noFill/>
+        </p:spPr>
+        <p:txBody>
+          <a:bodyPr wrap="square">
+            <a:spAutoFit/>
+          </a:bodyPr>
+          <a:lstStyle/>
+          <a:p>
+            <a:pPr algn="l"/>
+            <a:r>
+              <a:rPr sz="1300" b="1">
+                <a:solidFill>
+                  <a:srgbClr val="145C38"/>
+                </a:solidFill>
+                <a:latin typeface="Calibri"/>
+              </a:rPr>
+              <a:t>Yes</a:t>
+            </a:r>
+          </a:p>
+        </p:txBody>
+      </p:sp>
+      <p:sp>
+        <p:nvSpPr>
+          <p:cNvPr id="24" name="TextBox 23"/>
+          <p:cNvSpPr txBox="1"/>
+          <p:nvPr/>
+        </p:nvSpPr>
+        <p:spPr>
+          <a:xfrm>
+            <a:off x="10881360" y="3200400"/>
+            <a:ext cx="457200" cy="237744"/>
+          </a:xfrm>
+          <a:prstGeom prst="rect">
+            <a:avLst/>
+          </a:prstGeom>
+          <a:noFill/>
+        </p:spPr>
+        <p:txBody>
+          <a:bodyPr wrap="square">
+            <a:spAutoFit/>
+          </a:bodyPr>
+          <a:lstStyle/>
+          <a:p>
+            <a:pPr algn="l"/>
+            <a:r>
+              <a:rPr sz="1300" b="1">
+                <a:solidFill>
+                  <a:srgbClr val="9A3412"/>
+                </a:solidFill>
+                <a:latin typeface="Calibri"/>
+              </a:rPr>
+              <a:t>No</a:t>
+            </a:r>
+          </a:p>
+        </p:txBody>
+      </p:sp>
+      <p:cxnSp>
+        <p:nvCxnSpPr>
+          <p:cNvPr id="25" name="Connector 24"/>
+          <p:cNvCxnSpPr/>
+          <p:nvPr/>
+        </p:nvCxnSpPr>
+        <p:spPr>
+          <a:xfrm flipH="1">
+            <a:off x="3108960" y="3246120"/>
+            <a:ext cx="2103120" cy="228600"/>
+          </a:xfrm>
+          <a:prstGeom prst="line">
+            <a:avLst/>
+          </a:prstGeom>
+          <a:ln w="22225">
+            <a:solidFill>
+              <a:srgbClr val="0F6E6B"/>
+            </a:solidFill>
+            <a:tailEnd type="triangle" w="med" len="med"/>
+          </a:ln>
+        </p:spPr>
+      </p:cxnSp>
+      <p:cxnSp>
+        <p:nvCxnSpPr>
+          <p:cNvPr id="26" name="Connector 25"/>
+          <p:cNvCxnSpPr/>
+          <p:nvPr/>
+        </p:nvCxnSpPr>
+        <p:spPr>
+          <a:xfrm>
+            <a:off x="6949440" y="3246120"/>
+            <a:ext cx="2011680" cy="228600"/>
+          </a:xfrm>
+          <a:prstGeom prst="line">
+            <a:avLst/>
+          </a:prstGeom>
+          <a:ln w="22225">
+            <a:solidFill>
+              <a:srgbClr val="0F6E6B"/>
+            </a:solidFill>
+            <a:tailEnd type="triangle" w="med" len="med"/>
+          </a:ln>
+        </p:spPr>
+      </p:cxnSp>
+      <p:sp>
+        <p:nvSpPr>
+          <p:cNvPr id="27" name="Document 26"/>
+          <p:cNvSpPr/>
+          <p:nvPr/>
+        </p:nvSpPr>
+        <p:spPr>
+          <a:xfrm>
+            <a:off x="2103120" y="4434840"/>
+            <a:ext cx="7955279" cy="640080"/>
+          </a:xfrm>
+          <a:prstGeom prst="flowChartDocument">
+            <a:avLst/>
+          </a:prstGeom>
+          <a:solidFill>
+            <a:srgbClr val="E5F6F4"/>
+          </a:solidFill>
+          <a:ln w="15875">
+            <a:solidFill>
+              <a:srgbClr val="0F6E6B"/>
+            </a:solidFill>
+          </a:ln>
+        </p:spPr>
+        <p:style>
+          <a:lnRef idx="1">
+            <a:schemeClr val="accent1"/>
+          </a:lnRef>
+          <a:fillRef idx="3">
+            <a:schemeClr val="accent1"/>
+          </a:fillRef>
+          <a:effectRef idx="2">
+            <a:schemeClr val="accent1"/>
+          </a:effectRef>
+          <a:fontRef idx="minor">
+            <a:schemeClr val="lt1"/>
+          </a:fontRef>
+        </p:style>
+        <p:txBody>
+          <a:bodyPr rtlCol="0" anchor="ctr" wrap="square" lIns="54864" rIns="54864" tIns="54864" bIns="54864"/>
+          <a:lstStyle/>
+          <a:p>
+            <a:pPr algn="ctr">
+              <a:spcAft>
+                <a:spcPts val="0"/>
+              </a:spcAft>
+            </a:pPr>
+            <a:r>
+              <a:rPr b="1" sz="1300">
+                <a:solidFill>
+                  <a:srgbClr val="0F6E6B"/>
+                </a:solidFill>
+                <a:latin typeface="Calibri"/>
+              </a:rPr>
+              <a:t>You</a:t>
+            </a:r>
+          </a:p>
+          <a:p>
+            <a:pPr algn="ctr">
+              <a:spcBef>
+                <a:spcPts val="200"/>
+              </a:spcBef>
+            </a:pPr>
+            <a:r>
+              <a:rPr sz="1300">
+                <a:solidFill>
+                  <a:srgbClr val="1C1917"/>
+                </a:solidFill>
+                <a:latin typeface="Calibri"/>
+              </a:rPr>
+              <a:t>Download the PDF. The yellow marks are never in that file.</a:t>
+            </a:r>
+          </a:p>
+        </p:txBody>
+      </p:sp>
+      <p:cxnSp>
+        <p:nvCxnSpPr>
+          <p:cNvPr id="28" name="Connector 27"/>
+          <p:cNvCxnSpPr/>
+          <p:nvPr/>
+        </p:nvCxnSpPr>
+        <p:spPr>
+          <a:xfrm>
+            <a:off x="3154680" y="4251960"/>
+            <a:ext cx="1874520" cy="182880"/>
+          </a:xfrm>
+          <a:prstGeom prst="line">
+            <a:avLst/>
+          </a:prstGeom>
+          <a:ln w="22225">
+            <a:solidFill>
+              <a:srgbClr val="0F6E6B"/>
+            </a:solidFill>
+            <a:tailEnd type="triangle" w="med" len="med"/>
+          </a:ln>
+        </p:spPr>
+      </p:cxnSp>
+      <p:cxnSp>
+        <p:nvCxnSpPr>
+          <p:cNvPr id="29" name="Connector 28"/>
+          <p:cNvCxnSpPr/>
+          <p:nvPr/>
+        </p:nvCxnSpPr>
+        <p:spPr>
+          <a:xfrm flipH="1">
+            <a:off x="7132320" y="4251960"/>
+            <a:ext cx="1874520" cy="182880"/>
+          </a:xfrm>
+          <a:prstGeom prst="line">
+            <a:avLst/>
+          </a:prstGeom>
+          <a:ln w="22225">
+            <a:solidFill>
+              <a:srgbClr val="0F6E6B"/>
+            </a:solidFill>
+            <a:tailEnd type="triangle" w="med" len="med"/>
+          </a:ln>
+        </p:spPr>
+      </p:cxnSp>
+      <p:sp>
+        <p:nvSpPr>
+          <p:cNvPr id="30" name="Process 29"/>
+          <p:cNvSpPr/>
+          <p:nvPr/>
+        </p:nvSpPr>
+        <p:spPr>
+          <a:xfrm>
+            <a:off x="2103120" y="5212080"/>
+            <a:ext cx="5760720" cy="640080"/>
+          </a:xfrm>
+          <a:prstGeom prst="flowChartProcess">
+            <a:avLst/>
+          </a:prstGeom>
+          <a:solidFill>
+            <a:srgbClr val="F4ECFF"/>
+          </a:solidFill>
+          <a:ln w="15875">
+            <a:solidFill>
+              <a:srgbClr val="6D28D9"/>
+            </a:solidFill>
+          </a:ln>
+        </p:spPr>
+        <p:style>
+          <a:lnRef idx="1">
+            <a:schemeClr val="accent1"/>
+          </a:lnRef>
+          <a:fillRef idx="3">
+            <a:schemeClr val="accent1"/>
+          </a:fillRef>
+          <a:effectRef idx="2">
+            <a:schemeClr val="accent1"/>
+          </a:effectRef>
+          <a:fontRef idx="minor">
+            <a:schemeClr val="lt1"/>
+          </a:fontRef>
+        </p:style>
+        <p:txBody>
+          <a:bodyPr rtlCol="0" anchor="ctr" wrap="square" lIns="54864" rIns="54864" tIns="54864" bIns="54864"/>
+          <a:lstStyle/>
+          <a:p>
+            <a:pPr algn="ctr">
+              <a:spcAft>
+                <a:spcPts val="0"/>
+              </a:spcAft>
+            </a:pPr>
+            <a:r>
+              <a:rPr b="1" sz="1300">
+                <a:solidFill>
+                  <a:srgbClr val="6D28D9"/>
+                </a:solidFill>
+                <a:latin typeface="Calibri"/>
+              </a:rPr>
+              <a:t>By hand</a:t>
+            </a:r>
+          </a:p>
+          <a:p>
+            <a:pPr algn="ctr">
+              <a:spcBef>
+                <a:spcPts val="200"/>
+              </a:spcBef>
+            </a:pPr>
+            <a:r>
+              <a:rPr sz="1200">
+                <a:solidFill>
+                  <a:srgbClr val="1C1917"/>
+                </a:solidFill>
+                <a:latin typeface="Calibri"/>
+              </a:rPr>
+              <a:t>Send the email. The draft is ready. The application does not send it.</a:t>
+            </a:r>
+          </a:p>
+        </p:txBody>
+      </p:sp>
+      <p:sp>
+        <p:nvSpPr>
+          <p:cNvPr id="31" name="Terminator 30"/>
+          <p:cNvSpPr/>
+          <p:nvPr/>
+        </p:nvSpPr>
+        <p:spPr>
+          <a:xfrm>
+            <a:off x="8138160" y="5193792"/>
+            <a:ext cx="1645920" cy="658368"/>
+          </a:xfrm>
+          <a:prstGeom prst="flowChartTerminator">
+            <a:avLst/>
+          </a:prstGeom>
+          <a:solidFill>
+            <a:srgbClr val="1B7A4A"/>
+          </a:solidFill>
+          <a:ln w="15875">
+            <a:solidFill>
+              <a:srgbClr val="FFFFFF"/>
+            </a:solidFill>
+          </a:ln>
+        </p:spPr>
+        <p:style>
+          <a:lnRef idx="1">
+            <a:schemeClr val="accent1"/>
+          </a:lnRef>
+          <a:fillRef idx="3">
+            <a:schemeClr val="accent1"/>
+          </a:fillRef>
+          <a:effectRef idx="2">
+            <a:schemeClr val="accent1"/>
+          </a:effectRef>
+          <a:fontRef idx="minor">
+            <a:schemeClr val="lt1"/>
+          </a:fontRef>
+        </p:style>
+        <p:txBody>
+          <a:bodyPr rtlCol="0" anchor="ctr" wrap="square" lIns="54864" rIns="54864" tIns="54864" bIns="54864"/>
+          <a:lstStyle/>
+          <a:p>
+            <a:pPr algn="ctr">
+              <a:spcAft>
+                <a:spcPts val="0"/>
+              </a:spcAft>
+            </a:pPr>
+            <a:r>
+              <a:rPr b="1" sz="1300">
+                <a:solidFill>
+                  <a:srgbClr val="145C38"/>
+                </a:solidFill>
+                <a:latin typeface="Calibri"/>
+              </a:rPr>
+              <a:t>End</a:t>
+            </a:r>
+          </a:p>
+        </p:txBody>
+      </p:sp>
+      <p:cxnSp>
+        <p:nvCxnSpPr>
+          <p:cNvPr id="32" name="Connector 31"/>
+          <p:cNvCxnSpPr/>
+          <p:nvPr/>
+        </p:nvCxnSpPr>
+        <p:spPr>
+          <a:xfrm>
+            <a:off x="6080760" y="5074920"/>
+            <a:ext cx="0" cy="137160"/>
+          </a:xfrm>
+          <a:prstGeom prst="line">
+            <a:avLst/>
+          </a:prstGeom>
+          <a:ln w="22225">
+            <a:solidFill>
+              <a:srgbClr val="0F6E6B"/>
+            </a:solidFill>
+            <a:tailEnd type="triangle" w="med" len="med"/>
+          </a:ln>
+        </p:spPr>
+      </p:cxnSp>
+      <p:cxnSp>
+        <p:nvCxnSpPr>
+          <p:cNvPr id="33" name="Connector 32"/>
+          <p:cNvCxnSpPr/>
+          <p:nvPr/>
+        </p:nvCxnSpPr>
+        <p:spPr>
+          <a:xfrm>
+            <a:off x="7863840" y="5532120"/>
+            <a:ext cx="274320" cy="0"/>
+          </a:xfrm>
+          <a:prstGeom prst="line">
+            <a:avLst/>
+          </a:prstGeom>
+          <a:ln w="22225">
+            <a:solidFill>
+              <a:srgbClr val="0F6E6B"/>
+            </a:solidFill>
+            <a:tailEnd type="triangle" w="med" len="med"/>
+          </a:ln>
+        </p:spPr>
+      </p:cxnSp>
+      <p:sp>
+        <p:nvSpPr>
+          <p:cNvPr id="34" name="Rounded Rectangle 33"/>
+          <p:cNvSpPr/>
+          <p:nvPr/>
+        </p:nvSpPr>
+        <p:spPr>
+          <a:xfrm>
+            <a:off x="320040" y="5989320"/>
+            <a:ext cx="11521440" cy="658368"/>
+          </a:xfrm>
+          <a:prstGeom prst="roundRect">
+            <a:avLst/>
+          </a:prstGeom>
+          <a:solidFill>
+            <a:srgbClr val="FFFBF0"/>
+          </a:solidFill>
+          <a:ln>
+            <a:solidFill>
+              <a:srgbClr val="A16207"/>
+            </a:solidFill>
+          </a:ln>
+        </p:spPr>
+        <p:style>
+          <a:lnRef idx="1">
+            <a:schemeClr val="accent1"/>
+          </a:lnRef>
+          <a:fillRef idx="3">
+            <a:schemeClr val="accent1"/>
+          </a:fillRef>
+          <a:effectRef idx="2">
+            <a:schemeClr val="accent1"/>
+          </a:effectRef>
+          <a:fontRef idx="minor">
+            <a:schemeClr val="lt1"/>
+          </a:fontRef>
+        </p:style>
+        <p:txBody>
+          <a:bodyPr rtlCol="0" anchor="ctr" wrap="square" lIns="54864" rIns="54864" tIns="54864" bIns="54864"/>
+          <a:lstStyle/>
+          <a:p>
+            <a:pPr algn="ctr">
+              <a:spcAft>
+                <a:spcPts val="0"/>
+              </a:spcAft>
+            </a:pPr>
+            <a:r>
+              <a:rPr b="1" sz="1300">
+                <a:solidFill>
+                  <a:srgbClr val="A16207"/>
+                </a:solidFill>
+                <a:latin typeface="Calibri"/>
+              </a:rPr>
+              <a:t>Still by hand</a:t>
+            </a:r>
+          </a:p>
+          <a:p>
+            <a:pPr algn="ctr">
+              <a:spcBef>
+                <a:spcPts val="200"/>
+              </a:spcBef>
+            </a:pPr>
+            <a:r>
+              <a:rPr sz="1200">
+                <a:solidFill>
+                  <a:srgbClr val="1C1917"/>
+                </a:solidFill>
+                <a:latin typeface="Calibri"/>
+              </a:rPr>
+              <a:t>Claim the plan on the Testing Log. Convert a non-PDF. Check other company names. Fill FIS, related plans, MEP, and safe harbor on the log.</a:t>
             </a:r>
           </a:p>
         </p:txBody>
